--- a/Loupe-NDRC-deck.pptx
+++ b/Loupe-NDRC-deck.pptx
@@ -14,6 +14,7 @@
     <p:sldId id="262" r:id="rId14"/>
     <p:sldId id="263" r:id="rId15"/>
     <p:sldId id="264" r:id="rId16"/>
+    <p:sldId id="265" r:id="rId17"/>
   </p:sldIdLst>
   <p:sldSz cx="12191695" cy="6858000" type="screen4x3"/>
   <p:notesSz cx="6858000" cy="9144000"/>
@@ -535,6 +536,196 @@
 </p:notes>
 </file>
 
+<file path=ppt/notesSlides/notesSlide10.xml><?xml version="1.0" encoding="utf-8"?>
+<p:notes xmlns:a="http://schemas.openxmlformats.org/drawingml/2006/main" xmlns:p="http://schemas.openxmlformats.org/presentationml/2006/main" xmlns:r="http://schemas.openxmlformats.org/officeDocument/2006/relationships">
+  <p:cSld>
+    <p:spTree>
+      <p:nvGrpSpPr>
+        <p:cNvPr id="1" name=""/>
+        <p:cNvGrpSpPr/>
+        <p:nvPr/>
+      </p:nvGrpSpPr>
+      <p:grpSpPr>
+        <a:xfrm>
+          <a:off x="0" y="0"/>
+          <a:ext cx="0" cy="0"/>
+          <a:chOff x="0" y="0"/>
+          <a:chExt cx="0" cy="0"/>
+        </a:xfrm>
+      </p:grpSpPr>
+      <p:sp>
+        <p:nvSpPr>
+          <p:cNvPr id="2" name="Slide Image Placeholder 1"/>
+          <p:cNvSpPr>
+            <a:spLocks noGrp="1"/>
+          </p:cNvSpPr>
+          <p:nvPr>
+            <p:ph type="sldImg" idx="2"/>
+          </p:nvPr>
+        </p:nvSpPr>
+        <p:spPr/>
+      </p:sp>
+      <p:sp>
+        <p:nvSpPr>
+          <p:cNvPr id="3" name="Notes Placeholder 2"/>
+          <p:cNvSpPr>
+            <a:spLocks noGrp="1"/>
+          </p:cNvSpPr>
+          <p:nvPr>
+            <p:ph type="body" idx="3" sz="quarter"/>
+          </p:nvPr>
+        </p:nvSpPr>
+        <p:spPr/>
+        <p:txBody>
+          <a:bodyPr/>
+          <a:lstStyle/>
+          <a:p>
+            <a:r>
+              <a:t>DO NOT put an hours figure on this slide, and do not pre-empt an</a:t>
+            </a:r>
+          </a:p>
+          <a:p>
+            <a:r>
+              <a:t>arithmetic problem you don't have. This is a COMMERCIALISATION raise, not a</a:t>
+            </a:r>
+          </a:p>
+          <a:p>
+            <a:r>
+              <a:t>build raise — the easier of the two to underwrite, and it happens to be true.</a:t>
+            </a:r>
+          </a:p>
+          <a:p/>
+          <a:p>
+            <a:r>
+              <a:t>If the roadmap comes up: it is the path from serving one practice to serving</a:t>
+            </a:r>
+          </a:p>
+          <a:p>
+            <a:r>
+              <a:t>many, deliberately ambitious because the category rewards depth. Present it as</a:t>
+            </a:r>
+          </a:p>
+          <a:p>
+            <a:r>
+              <a:t>where the company goes, never as what the product still lacks. If asked what</a:t>
+            </a:r>
+          </a:p>
+          <a:p>
+            <a:r>
+              <a:t>€100k funds against a 265-ticket board: the gate and the pilot, and the rest is</a:t>
+            </a:r>
+          </a:p>
+          <a:p>
+            <a:r>
+              <a:t>sequenced behind revenue from customers you will have by then.</a:t>
+            </a:r>
+          </a:p>
+          <a:p/>
+          <a:p>
+            <a:r>
+              <a:t>THE GROSS-MARGIN QUESTION — be ready for it.</a:t>
+            </a:r>
+          </a:p>
+          <a:p>
+            <a:r>
+              <a:t>Loupe has a real variable cost per case: AI processing, roughly $70 to ingest a</a:t>
+            </a:r>
+          </a:p>
+          <a:p>
+            <a:r>
+              <a:t>1,600-page document. A buyer has already asked whether the licence covers AI</a:t>
+            </a:r>
+          </a:p>
+          <a:p>
+            <a:r>
+              <a:t>processing or tokens are billed separately. It is not yet answered. Do not hide</a:t>
+            </a:r>
+          </a:p>
+          <a:p>
+            <a:r>
+              <a:t>it. Credible position:</a:t>
+            </a:r>
+          </a:p>
+          <a:p/>
+          <a:p>
+            <a:r>
+              <a:t>  Every case carries a measurable AI processing cost. We meter it today.</a:t>
+            </a:r>
+          </a:p>
+          <a:p>
+            <a:r>
+              <a:t>  Whether it sits inside the licence or is passed through is a pricing decision</a:t>
+            </a:r>
+          </a:p>
+          <a:p>
+            <a:r>
+              <a:t>  we are taking from pilot data rather than guessing — and it is one of the</a:t>
+            </a:r>
+          </a:p>
+          <a:p>
+            <a:r>
+              <a:t>  questions this round exists to answer.</a:t>
+            </a:r>
+          </a:p>
+          <a:p/>
+          <a:p>
+            <a:r>
+              <a:t>Two things make this a strength: (1) you MEASURE it, which most applicants</a:t>
+            </a:r>
+          </a:p>
+          <a:p>
+            <a:r>
+              <a:t>cannot; (2) the cost is direct evidence of the product claim — the price is</a:t>
+            </a:r>
+          </a:p>
+          <a:p>
+            <a:r>
+              <a:t>high because the system reads everything, which is precisely what a $20 chat</a:t>
+            </a:r>
+          </a:p>
+          <a:p>
+            <a:r>
+              <a:t>subscription does not do.</a:t>
+            </a:r>
+          </a:p>
+          <a:p/>
+          <a:p>
+            <a:r>
+              <a:t>Have a rough per-case unit economic ready: cost to process a representative</a:t>
+            </a:r>
+          </a:p>
+          <a:p>
+            <a:r>
+              <a:t>matter versus the senior/junior hours it displaces. You don't need a final</a:t>
+            </a:r>
+          </a:p>
+          <a:p>
+            <a:r>
+              <a:t>price. You need to show you know the shape of the P&amp;L.</a:t>
+            </a:r>
+          </a:p>
+        </p:txBody>
+      </p:sp>
+      <p:sp>
+        <p:nvSpPr>
+          <p:cNvPr id="4" name="Slide Number Placeholder 3"/>
+          <p:cNvSpPr>
+            <a:spLocks noGrp="1"/>
+          </p:cNvSpPr>
+          <p:nvPr>
+            <p:ph type="sldNum" idx="5" sz="quarter"/>
+          </p:nvPr>
+        </p:nvSpPr>
+        <p:spPr/>
+      </p:sp>
+    </p:spTree>
+  </p:cSld>
+  <p:clrMapOvr>
+    <a:masterClrMapping/>
+  </p:clrMapOvr>
+</p:notes>
+</file>
+
 <file path=ppt/notesSlides/notesSlide2.xml><?xml version="1.0" encoding="utf-8"?>
 <p:notes xmlns:a="http://schemas.openxmlformats.org/drawingml/2006/main" xmlns:p="http://schemas.openxmlformats.org/presentationml/2006/main" xmlns:r="http://schemas.openxmlformats.org/officeDocument/2006/relationships">
   <p:cSld>
@@ -1625,54 +1816,7 @@
           <a:lstStyle/>
           <a:p>
             <a:r>
-              <a:t>LEAD WITH SIREN. It is the strongest founder-market-fit signal you</a:t>
-            </a:r>
-          </a:p>
-          <a:p>
-            <a:r>
-              <a:t>have. NDRC will know Siren — Irish, Enterprise Ireland-backed, same category. It</a:t>
-            </a:r>
-          </a:p>
-          <a:p>
-            <a:r>
-              <a:t>converts you from "engineer who built a thing" to "category-native founder who</a:t>
-            </a:r>
-          </a:p>
-          <a:p>
-            <a:r>
-              <a:t>has seen this market's buying behaviour for seven years." It pre-answers the</a:t>
-            </a:r>
-          </a:p>
-          <a:p>
-            <a:r>
-              <a:t>sales-cycle and procurement questions before they're asked.</a:t>
-            </a:r>
-          </a:p>
-          <a:p/>
-          <a:p>
-            <a:r>
-              <a:t>"Full-time on close" appears twice on purpose. Say it out loud as well as</a:t>
-            </a:r>
-          </a:p>
-          <a:p>
-            <a:r>
-              <a:t>printing it.</a:t>
-            </a:r>
-          </a:p>
-          <a:p/>
-          <a:p>
-            <a:r>
-              <a:t>DO NOT HIDE Alex being US-based. Address it in one line: the company is Irish,</a:t>
-            </a:r>
-          </a:p>
-          <a:p>
-            <a:r>
-              <a:t>the IP is Irish-owned, engineering is in Dublin, and the market is US-first —</a:t>
-            </a:r>
-          </a:p>
-          <a:p>
-            <a:r>
-              <a:t>which is why the domain founder is where the customers are.</a:t>
+              <a:t>The point is the middle two rows, not the ARR. 104 customers running 833 matters is under two per cent of the US evidence-heavy pool alone, before the UK or Europe contribute anything. Against one to five thousand target practices, none of these stages asks for market dominance — they ask for a channel that works and a price that holds. Each stage is gated on one thing: stage 1 a validated price, stage 2 the bar channel converting, stage 3 the model rebuilt on UK rates, stage 4 partners.</a:t>
             </a:r>
           </a:p>
         </p:txBody>
@@ -1742,132 +1886,54 @@
           <a:lstStyle/>
           <a:p>
             <a:r>
-              <a:t>TWO BEATS, IN THIS ORDER — DO NOT INVERT THEM.</a:t>
+              <a:t>LEAD WITH SIREN. It is the strongest founder-market-fit signal you</a:t>
+            </a:r>
+          </a:p>
+          <a:p>
+            <a:r>
+              <a:t>have. NDRC will know Siren — Irish, Enterprise Ireland-backed, same category. It</a:t>
+            </a:r>
+          </a:p>
+          <a:p>
+            <a:r>
+              <a:t>converts you from "engineer who built a thing" to "category-native founder who</a:t>
+            </a:r>
+          </a:p>
+          <a:p>
+            <a:r>
+              <a:t>has seen this market's buying behaviour for seven years." It pre-answers the</a:t>
+            </a:r>
+          </a:p>
+          <a:p>
+            <a:r>
+              <a:t>sales-cycle and procurement questions before they're asked.</a:t>
             </a:r>
           </a:p>
           <a:p/>
           <a:p>
             <a:r>
-              <a:t>FIRST: IT WORKS. Cases closed, attorneys using it, a practice winning business</a:t>
-            </a:r>
-          </a:p>
-          <a:p>
-            <a:r>
-              <a:t>because of it. That is a further-along position than most of what NDRC will see</a:t>
-            </a:r>
-          </a:p>
-          <a:p>
-            <a:r>
-              <a:t>this year, and it should be the first thing out of your mouth.</a:t>
+              <a:t>"Full-time on close" appears twice on purpose. Say it out loud as well as</a:t>
+            </a:r>
+          </a:p>
+          <a:p>
+            <a:r>
+              <a:t>printing it.</a:t>
             </a:r>
           </a:p>
           <a:p/>
           <a:p>
             <a:r>
-              <a:t>SECOND: THE SECURITY GATE. No external customer's evidence enters until the</a:t>
-            </a:r>
-          </a:p>
-          <a:p>
-            <a:r>
-              <a:t>isolation, backup and legal stages pass. Most pre-seed teams cannot demonstrate</a:t>
-            </a:r>
-          </a:p>
-          <a:p>
-            <a:r>
-              <a:t>release discipline at all. Frame it as WHY the external pilot hasn't started</a:t>
-            </a:r>
-          </a:p>
-          <a:p>
-            <a:r>
-              <a:t>yet — that turns a delay into evidence of seriousness.</a:t>
-            </a:r>
-          </a:p>
-          <a:p/>
-          <a:p>
-            <a:r>
-              <a:t>ON THE ROADMAP: mention it, don't dwell on it. It is a statement of ambition,</a:t>
-            </a:r>
-          </a:p>
-          <a:p>
-            <a:r>
-              <a:t>not a list of things Loupe cannot do. If the deck spends more pixels on the</a:t>
-            </a:r>
-          </a:p>
-          <a:p>
-            <a:r>
-              <a:t>roadmap than on the working product, a reader concludes the product IS the</a:t>
-            </a:r>
-          </a:p>
-          <a:p>
-            <a:r>
-              <a:t>roadmap.</a:t>
-            </a:r>
-          </a:p>
-          <a:p/>
-          <a:p>
-            <a:r>
-              <a:t>CLAIMS SAFETY</a:t>
-            </a:r>
-          </a:p>
-          <a:p>
-            <a:r>
-              <a:t>- DO NOT call the ex-FBI PI firm a signed customer, an LOI, or a pipeline</a:t>
-            </a:r>
-          </a:p>
-          <a:p>
-            <a:r>
-              <a:t>  value. Nothing is signed. True and sufficient: an agreed next case, an</a:t>
-            </a:r>
-          </a:p>
-          <a:p>
-            <a:r>
-              <a:t>  at-cost trial, an MSA to be exchanged. This is the only hard prohibition.</a:t>
-            </a:r>
-          </a:p>
-          <a:p>
-            <a:r>
-              <a:t>- "WCAG 2.1 AA" and "571k-node corpus" — fine if evidenced. Have the audit</a:t>
-            </a:r>
-          </a:p>
-          <a:p>
-            <a:r>
-              <a:t>  result and load-test output to hand.</a:t>
-            </a:r>
-          </a:p>
-          <a:p>
-            <a:r>
-              <a:t>- Scale figures: say whether each came from a real case or a test corpus.</a:t>
-            </a:r>
-          </a:p>
-          <a:p>
-            <a:r>
-              <a:t>- Prefer "verification workflow" over "human-verified facts".</a:t>
-            </a:r>
-          </a:p>
-          <a:p>
-            <a:r>
-              <a:t>- CI: .github/workflows absent from the branch inspected. If CI runs elsewhere,</a:t>
-            </a:r>
-          </a:p>
-          <a:p>
-            <a:r>
-              <a:t>  ignore. Otherwise don't claim hard-gating CI — and consider standing it up.</a:t>
-            </a:r>
-          </a:p>
-          <a:p/>
-          <a:p>
-            <a:r>
-              <a:t>FRAMING RULE FOR THE WHOLE DECK: Loupe is one product, and it works. Never</a:t>
-            </a:r>
-          </a:p>
-          <a:p>
-            <a:r>
-              <a:t>write a sentence that invites a reader to wonder whether the thing that ran</a:t>
-            </a:r>
-          </a:p>
-          <a:p>
-            <a:r>
-              <a:t>federal cases is the same thing you are pitching. It is.</a:t>
+              <a:t>DO NOT HIDE Alex being US-based. Address it in one line: the company is Irish,</a:t>
+            </a:r>
+          </a:p>
+          <a:p>
+            <a:r>
+              <a:t>the IP is Irish-owned, engineering is in Dublin, and the market is US-first —</a:t>
+            </a:r>
+          </a:p>
+          <a:p>
+            <a:r>
+              <a:t>which is why the domain founder is where the customers are.</a:t>
             </a:r>
           </a:p>
         </p:txBody>
@@ -1937,127 +2003,132 @@
           <a:lstStyle/>
           <a:p>
             <a:r>
-              <a:t>DO NOT put an hours figure on this slide, and do not pre-empt an</a:t>
-            </a:r>
-          </a:p>
-          <a:p>
-            <a:r>
-              <a:t>arithmetic problem you don't have. This is a COMMERCIALISATION raise, not a</a:t>
-            </a:r>
-          </a:p>
-          <a:p>
-            <a:r>
-              <a:t>build raise — the easier of the two to underwrite, and it happens to be true.</a:t>
+              <a:t>TWO BEATS, IN THIS ORDER — DO NOT INVERT THEM.</a:t>
             </a:r>
           </a:p>
           <a:p/>
           <a:p>
             <a:r>
-              <a:t>If the roadmap comes up: it is the path from serving one practice to serving</a:t>
-            </a:r>
-          </a:p>
-          <a:p>
-            <a:r>
-              <a:t>many, deliberately ambitious because the category rewards depth. Present it as</a:t>
-            </a:r>
-          </a:p>
-          <a:p>
-            <a:r>
-              <a:t>where the company goes, never as what the product still lacks. If asked what</a:t>
-            </a:r>
-          </a:p>
-          <a:p>
-            <a:r>
-              <a:t>€100k funds against a 265-ticket board: the gate and the pilot, and the rest is</a:t>
-            </a:r>
-          </a:p>
-          <a:p>
-            <a:r>
-              <a:t>sequenced behind revenue from customers you will have by then.</a:t>
+              <a:t>FIRST: IT WORKS. Cases closed, attorneys using it, a practice winning business</a:t>
+            </a:r>
+          </a:p>
+          <a:p>
+            <a:r>
+              <a:t>because of it. That is a further-along position than most of what NDRC will see</a:t>
+            </a:r>
+          </a:p>
+          <a:p>
+            <a:r>
+              <a:t>this year, and it should be the first thing out of your mouth.</a:t>
             </a:r>
           </a:p>
           <a:p/>
           <a:p>
             <a:r>
-              <a:t>THE GROSS-MARGIN QUESTION — be ready for it.</a:t>
-            </a:r>
-          </a:p>
-          <a:p>
-            <a:r>
-              <a:t>Loupe has a real variable cost per case: AI processing, roughly $70 to ingest a</a:t>
-            </a:r>
-          </a:p>
-          <a:p>
-            <a:r>
-              <a:t>1,600-page document. A buyer has already asked whether the licence covers AI</a:t>
-            </a:r>
-          </a:p>
-          <a:p>
-            <a:r>
-              <a:t>processing or tokens are billed separately. It is not yet answered. Do not hide</a:t>
-            </a:r>
-          </a:p>
-          <a:p>
-            <a:r>
-              <a:t>it. Credible position:</a:t>
+              <a:t>SECOND: THE SECURITY GATE. No external customer's evidence enters until the</a:t>
+            </a:r>
+          </a:p>
+          <a:p>
+            <a:r>
+              <a:t>isolation, backup and legal stages pass. Most pre-seed teams cannot demonstrate</a:t>
+            </a:r>
+          </a:p>
+          <a:p>
+            <a:r>
+              <a:t>release discipline at all. Frame it as WHY the external pilot hasn't started</a:t>
+            </a:r>
+          </a:p>
+          <a:p>
+            <a:r>
+              <a:t>yet — that turns a delay into evidence of seriousness.</a:t>
             </a:r>
           </a:p>
           <a:p/>
           <a:p>
             <a:r>
-              <a:t>  Every case carries a measurable AI processing cost. We meter it today.</a:t>
-            </a:r>
-          </a:p>
-          <a:p>
-            <a:r>
-              <a:t>  Whether it sits inside the licence or is passed through is a pricing decision</a:t>
-            </a:r>
-          </a:p>
-          <a:p>
-            <a:r>
-              <a:t>  we are taking from pilot data rather than guessing — and it is one of the</a:t>
-            </a:r>
-          </a:p>
-          <a:p>
-            <a:r>
-              <a:t>  questions this round exists to answer.</a:t>
+              <a:t>ON THE ROADMAP: mention it, don't dwell on it. It is a statement of ambition,</a:t>
+            </a:r>
+          </a:p>
+          <a:p>
+            <a:r>
+              <a:t>not a list of things Loupe cannot do. If the deck spends more pixels on the</a:t>
+            </a:r>
+          </a:p>
+          <a:p>
+            <a:r>
+              <a:t>roadmap than on the working product, a reader concludes the product IS the</a:t>
+            </a:r>
+          </a:p>
+          <a:p>
+            <a:r>
+              <a:t>roadmap.</a:t>
             </a:r>
           </a:p>
           <a:p/>
           <a:p>
             <a:r>
-              <a:t>Two things make this a strength: (1) you MEASURE it, which most applicants</a:t>
-            </a:r>
-          </a:p>
-          <a:p>
-            <a:r>
-              <a:t>cannot; (2) the cost is direct evidence of the product claim — the price is</a:t>
-            </a:r>
-          </a:p>
-          <a:p>
-            <a:r>
-              <a:t>high because the system reads everything, which is precisely what a $20 chat</a:t>
-            </a:r>
-          </a:p>
-          <a:p>
-            <a:r>
-              <a:t>subscription does not do.</a:t>
+              <a:t>CLAIMS SAFETY</a:t>
+            </a:r>
+          </a:p>
+          <a:p>
+            <a:r>
+              <a:t>- DO NOT call the ex-FBI PI firm a signed customer, an LOI, or a pipeline</a:t>
+            </a:r>
+          </a:p>
+          <a:p>
+            <a:r>
+              <a:t>  value. Nothing is signed. True and sufficient: an agreed next case, an</a:t>
+            </a:r>
+          </a:p>
+          <a:p>
+            <a:r>
+              <a:t>  at-cost trial, an MSA to be exchanged. This is the only hard prohibition.</a:t>
+            </a:r>
+          </a:p>
+          <a:p>
+            <a:r>
+              <a:t>- "WCAG 2.1 AA" and "571k-node corpus" — fine if evidenced. Have the audit</a:t>
+            </a:r>
+          </a:p>
+          <a:p>
+            <a:r>
+              <a:t>  result and load-test output to hand.</a:t>
+            </a:r>
+          </a:p>
+          <a:p>
+            <a:r>
+              <a:t>- Scale figures: say whether each came from a real case or a test corpus.</a:t>
+            </a:r>
+          </a:p>
+          <a:p>
+            <a:r>
+              <a:t>- Prefer "verification workflow" over "human-verified facts".</a:t>
+            </a:r>
+          </a:p>
+          <a:p>
+            <a:r>
+              <a:t>- CI: .github/workflows absent from the branch inspected. If CI runs elsewhere,</a:t>
+            </a:r>
+          </a:p>
+          <a:p>
+            <a:r>
+              <a:t>  ignore. Otherwise don't claim hard-gating CI — and consider standing it up.</a:t>
             </a:r>
           </a:p>
           <a:p/>
           <a:p>
             <a:r>
-              <a:t>Have a rough per-case unit economic ready: cost to process a representative</a:t>
-            </a:r>
-          </a:p>
-          <a:p>
-            <a:r>
-              <a:t>matter versus the senior/junior hours it displaces. You don't need a final</a:t>
-            </a:r>
-          </a:p>
-          <a:p>
-            <a:r>
-              <a:t>price. You need to show you know the shape of the P&amp;L.</a:t>
+              <a:t>FRAMING RULE FOR THE WHOLE DECK: Loupe is one product, and it works. Never</a:t>
+            </a:r>
+          </a:p>
+          <a:p>
+            <a:r>
+              <a:t>write a sentence that invites a reader to wonder whether the thing that ran</a:t>
+            </a:r>
+          </a:p>
+          <a:p>
+            <a:r>
+              <a:t>federal cases is the same thing you are pitching. It is.</a:t>
             </a:r>
           </a:p>
         </p:txBody>
@@ -5059,7 +5130,7 @@
     <p:bg>
       <p:bgPr>
         <a:solidFill>
-          <a:srgbClr val="0E141B"/>
+          <a:srgbClr val="07080A"/>
         </a:solidFill>
         <a:effectLst/>
       </p:bgPr>
@@ -5071,15 +5142,39 @@
         <p:nvPr/>
       </p:nvGrpSpPr>
       <p:grpSpPr/>
-      <p:sp>
-        <p:nvSpPr>
-          <p:cNvPr id="2" name="TextBox 1"/>
+      <p:pic>
+        <p:nvPicPr>
+          <p:cNvPr id="2" name="Picture 1" descr="loupe-lockup-knockout.png"/>
+          <p:cNvPicPr>
+            <a:picLocks noChangeAspect="1"/>
+          </p:cNvPicPr>
+          <p:nvPr/>
+        </p:nvPicPr>
+        <p:blipFill>
+          <a:blip r:embed="rId2"/>
+          <a:stretch>
+            <a:fillRect/>
+          </a:stretch>
+        </p:blipFill>
+        <p:spPr>
+          <a:xfrm>
+            <a:off x="777240" y="2148840"/>
+            <a:ext cx="3931920" cy="1425321"/>
+          </a:xfrm>
+          <a:prstGeom prst="rect">
+            <a:avLst/>
+          </a:prstGeom>
+        </p:spPr>
+      </p:pic>
+      <p:sp>
+        <p:nvSpPr>
+          <p:cNvPr id="3" name="TextBox 2"/>
           <p:cNvSpPr txBox="1"/>
           <p:nvPr/>
         </p:nvSpPr>
         <p:spPr>
           <a:xfrm>
-            <a:off x="777240" y="2240280"/>
+            <a:off x="777240" y="3310128"/>
             <a:ext cx="10637215" cy="2377440"/>
           </a:xfrm>
           <a:prstGeom prst="rect">
@@ -5095,23 +5190,23 @@
           <a:p>
             <a:pPr algn="l">
               <a:lnSpc>
-                <a:spcPct val="100000"/>
-              </a:lnSpc>
-              <a:spcBef>
-                <a:spcPts val="0"/>
-              </a:spcBef>
-              <a:spcAft>
-                <a:spcPts val="0"/>
-              </a:spcAft>
-            </a:pPr>
-            <a:r>
-              <a:rPr sz="8800" b="1" i="0">
-                <a:solidFill>
-                  <a:srgbClr val="F4F6F8"/>
-                </a:solidFill>
-                <a:latin typeface="Helvetica Neue"/>
-              </a:rPr>
-              <a:t>Loupe</a:t>
+                <a:spcPct val="128000"/>
+              </a:lnSpc>
+              <a:spcBef>
+                <a:spcPts val="0"/>
+              </a:spcBef>
+              <a:spcAft>
+                <a:spcPts val="0"/>
+              </a:spcAft>
+            </a:pPr>
+            <a:r>
+              <a:rPr sz="2700" b="0" i="0">
+                <a:solidFill>
+                  <a:srgbClr val="E33B4C"/>
+                </a:solidFill>
+                <a:latin typeface="IBM Plex Sans"/>
+              </a:rPr>
+              <a:t>Find the signal in everything.</a:t>
             </a:r>
           </a:p>
           <a:p>
@@ -5120,20 +5215,20 @@
                 <a:spcPct val="128000"/>
               </a:lnSpc>
               <a:spcBef>
-                <a:spcPts val="1600"/>
-              </a:spcBef>
-              <a:spcAft>
-                <a:spcPts val="0"/>
-              </a:spcAft>
-            </a:pPr>
-            <a:r>
-              <a:rPr sz="2700" b="0" i="0">
-                <a:solidFill>
-                  <a:srgbClr val="E8B339"/>
-                </a:solidFill>
-                <a:latin typeface="Helvetica Neue"/>
-              </a:rPr>
-              <a:t>Find the signal in everything.</a:t>
+                <a:spcPts val="2200"/>
+              </a:spcBef>
+              <a:spcAft>
+                <a:spcPts val="0"/>
+              </a:spcAft>
+            </a:pPr>
+            <a:r>
+              <a:rPr sz="1900" b="0" i="0">
+                <a:solidFill>
+                  <a:srgbClr val="9A9DA5"/>
+                </a:solidFill>
+                <a:latin typeface="IBM Plex Sans"/>
+              </a:rPr>
+              <a:t>An investigation platform for fraud and criminal casework.</a:t>
             </a:r>
           </a:p>
           <a:p>
@@ -5142,7 +5237,7 @@
                 <a:spcPct val="128000"/>
               </a:lnSpc>
               <a:spcBef>
-                <a:spcPts val="2200"/>
+                <a:spcPts val="400"/>
               </a:spcBef>
               <a:spcAft>
                 <a:spcPts val="0"/>
@@ -5151,31 +5246,9 @@
             <a:r>
               <a:rPr sz="1900" b="0" i="0">
                 <a:solidFill>
-                  <a:srgbClr val="9AA7B4"/>
-                </a:solidFill>
-                <a:latin typeface="Helvetica Neue"/>
-              </a:rPr>
-              <a:t>An investigation platform for fraud and criminal casework.</a:t>
-            </a:r>
-          </a:p>
-          <a:p>
-            <a:pPr algn="l">
-              <a:lnSpc>
-                <a:spcPct val="128000"/>
-              </a:lnSpc>
-              <a:spcBef>
-                <a:spcPts val="400"/>
-              </a:spcBef>
-              <a:spcAft>
-                <a:spcPts val="0"/>
-              </a:spcAft>
-            </a:pPr>
-            <a:r>
-              <a:rPr sz="1900" b="0" i="0">
-                <a:solidFill>
-                  <a:srgbClr val="9AA7B4"/>
-                </a:solidFill>
-                <a:latin typeface="Helvetica Neue"/>
+                  <a:srgbClr val="9A9DA5"/>
+                </a:solidFill>
+                <a:latin typeface="IBM Plex Sans"/>
               </a:rPr>
               <a:t>Dublin, Ireland.</a:t>
             </a:r>
@@ -5184,7 +5257,7 @@
       </p:sp>
       <p:sp>
         <p:nvSpPr>
-          <p:cNvPr id="3" name="Rectangle 2"/>
+          <p:cNvPr id="4" name="Rectangle 3"/>
           <p:cNvSpPr/>
           <p:nvPr/>
         </p:nvSpPr>
@@ -5197,7 +5270,7 @@
             <a:avLst/>
           </a:prstGeom>
           <a:solidFill>
-            <a:srgbClr val="E8B339"/>
+            <a:srgbClr val="E33B4C"/>
           </a:solidFill>
           <a:ln>
             <a:noFill/>
@@ -5234,13 +5307,13 @@
 </p:sld>
 </file>
 
-<file path=ppt/slides/slide2.xml><?xml version="1.0" encoding="utf-8"?>
+<file path=ppt/slides/slide10.xml><?xml version="1.0" encoding="utf-8"?>
 <p:sld xmlns:a="http://schemas.openxmlformats.org/drawingml/2006/main" xmlns:p="http://schemas.openxmlformats.org/presentationml/2006/main" xmlns:r="http://schemas.openxmlformats.org/officeDocument/2006/relationships">
   <p:cSld>
     <p:bg>
       <p:bgPr>
         <a:solidFill>
-          <a:srgbClr val="0E141B"/>
+          <a:srgbClr val="0B0C0F"/>
         </a:solidFill>
         <a:effectLst/>
       </p:bgPr>
@@ -5285,17 +5358,17 @@
                 <a:spcPts val="0"/>
               </a:spcAft>
               <a:defRPr>
-                <a:latin typeface="Helvetica Neue"/>
+                <a:latin typeface="IBM Plex Mono"/>
               </a:defRPr>
             </a:pPr>
             <a:r>
               <a:rPr sz="1100" b="1" i="0">
                 <a:solidFill>
-                  <a:srgbClr val="E8B339"/>
-                </a:solidFill>
-                <a:latin typeface="Helvetica Neue"/>
-              </a:rPr>
-              <a:t>THE PROBLEM</a:t>
+                  <a:srgbClr val="E33B4C"/>
+                </a:solidFill>
+                <a:latin typeface="IBM Plex Mono"/>
+              </a:rPr>
+              <a:t>THE ASK</a:t>
             </a:r>
           </a:p>
         </p:txBody>
@@ -5334,14 +5407,14 @@
               </a:spcAft>
             </a:pPr>
             <a:r>
-              <a:rPr sz="3400" b="1" i="0">
-                <a:solidFill>
-                  <a:srgbClr val="F4F6F8"/>
-                </a:solidFill>
-                <a:latin typeface="Helvetica Neue"/>
-              </a:rPr>
-              <a:t>Modern casework is a data problem
-wearing a legal costume.</a:t>
+              <a:rPr sz="2900" b="1" i="0">
+                <a:solidFill>
+                  <a:srgbClr val="F7F7F8"/>
+                </a:solidFill>
+                <a:latin typeface="Space Grotesk"/>
+              </a:rPr>
+              <a:t>€100k. What it buys: the first paying customer
+outside the practice that built it.</a:t>
             </a:r>
           </a:p>
         </p:txBody>
@@ -5354,14 +5427,14 @@
         </p:nvSpPr>
         <p:spPr>
           <a:xfrm>
-            <a:off x="777240" y="2084831"/>
+            <a:off x="777240" y="1965960"/>
             <a:ext cx="1005840" cy="31750"/>
           </a:xfrm>
           <a:prstGeom prst="rect">
             <a:avLst/>
           </a:prstGeom>
           <a:solidFill>
-            <a:srgbClr val="E8B339"/>
+            <a:srgbClr val="E33B4C"/>
           </a:solidFill>
           <a:ln>
             <a:noFill/>
@@ -5398,8 +5471,8 @@
         </p:nvSpPr>
         <p:spPr>
           <a:xfrm>
-            <a:off x="777240" y="2377440"/>
-            <a:ext cx="5257800" cy="4023360"/>
+            <a:off x="777240" y="2286000"/>
+            <a:ext cx="5760720" cy="3291840"/>
           </a:xfrm>
           <a:prstGeom prst="rect">
             <a:avLst/>
@@ -5426,175 +5499,82 @@
             <a:r>
               <a:rPr sz="1600" b="0" i="0">
                 <a:solidFill>
-                  <a:srgbClr val="9AA7B4"/>
-                </a:solidFill>
-                <a:latin typeface="Helvetica Neue"/>
-              </a:rPr>
-              <a:t>A single serious-fraud or criminal case now arrives as:</a:t>
-            </a:r>
-          </a:p>
-          <a:p>
-            <a:pPr algn="l" marL="274320" indent="-274320">
+                  <a:srgbClr val="F7F7F8"/>
+                </a:solidFill>
+                <a:latin typeface="IBM Plex Sans"/>
+              </a:rPr>
+              <a:t>The platform works and has closed real federal cases. What stands between it and external revenue is the </a:t>
+            </a:r>
+            <a:r>
+              <a:rPr sz="1600" b="1" i="0">
+                <a:solidFill>
+                  <a:srgbClr val="F7F7F8"/>
+                </a:solidFill>
+                <a:latin typeface="IBM Plex Sans"/>
+              </a:rPr>
+              <a:t>security gate</a:t>
+            </a:r>
+            <a:r>
+              <a:rPr sz="1600" b="0" i="0">
+                <a:solidFill>
+                  <a:srgbClr val="F7F7F8"/>
+                </a:solidFill>
+                <a:latin typeface="IBM Plex Sans"/>
+              </a:rPr>
+              <a:t> — the isolation, backup and legal stages that let another firm's privileged evidence enter the system — and the pilot itself.</a:t>
+            </a:r>
+          </a:p>
+          <a:p>
+            <a:pPr algn="l">
               <a:lnSpc>
                 <a:spcPct val="128000"/>
               </a:lnSpc>
               <a:spcBef>
-                <a:spcPts val="700"/>
-              </a:spcBef>
-              <a:spcAft>
-                <a:spcPts val="0"/>
-              </a:spcAft>
-            </a:pPr>
-            <a:r>
-              <a:rPr sz="1600" b="1">
-                <a:solidFill>
-                  <a:srgbClr val="E8B339"/>
-                </a:solidFill>
-                <a:latin typeface="Helvetica Neue"/>
-              </a:rPr>
-              <a:t>—   </a:t>
-            </a:r>
-            <a:r>
-              <a:rPr sz="1600" b="0" i="0">
-                <a:solidFill>
-                  <a:srgbClr val="F4F6F8"/>
-                </a:solidFill>
-                <a:latin typeface="Helvetica Neue"/>
-              </a:rPr>
-              <a:t>thousands of documents</a:t>
-            </a:r>
-          </a:p>
-          <a:p>
-            <a:pPr algn="l" marL="274320" indent="-274320">
+                <a:spcPts val="1800"/>
+              </a:spcBef>
+              <a:spcAft>
+                <a:spcPts val="0"/>
+              </a:spcAft>
+            </a:pPr>
+            <a:r>
+              <a:rPr sz="1300" b="1" i="0">
+                <a:solidFill>
+                  <a:srgbClr val="E33B4C"/>
+                </a:solidFill>
+                <a:latin typeface="IBM Plex Sans"/>
+              </a:rPr>
+              <a:t>Use of funds</a:t>
+            </a:r>
+          </a:p>
+          <a:p>
+            <a:pPr algn="l">
               <a:lnSpc>
                 <a:spcPct val="128000"/>
               </a:lnSpc>
               <a:spcBef>
-                <a:spcPts val="700"/>
-              </a:spcBef>
-              <a:spcAft>
-                <a:spcPts val="0"/>
-              </a:spcAft>
-            </a:pPr>
-            <a:r>
-              <a:rPr sz="1600" b="1">
-                <a:solidFill>
-                  <a:srgbClr val="E8B339"/>
-                </a:solidFill>
-                <a:latin typeface="Helvetica Neue"/>
-              </a:rPr>
-              <a:t>—   </a:t>
-            </a:r>
-            <a:r>
-              <a:rPr sz="1600" b="0" i="0">
-                <a:solidFill>
-                  <a:srgbClr val="F4F6F8"/>
-                </a:solidFill>
-                <a:latin typeface="Helvetica Neue"/>
-              </a:rPr>
-              <a:t>multi-gigabyte phone extractions, hundreds of thousands of events</a:t>
-            </a:r>
-          </a:p>
-          <a:p>
-            <a:pPr algn="l" marL="274320" indent="-274320">
-              <a:lnSpc>
-                <a:spcPct val="128000"/>
-              </a:lnSpc>
-              <a:spcBef>
-                <a:spcPts val="700"/>
-              </a:spcBef>
-              <a:spcAft>
-                <a:spcPts val="0"/>
-              </a:spcAft>
-            </a:pPr>
-            <a:r>
-              <a:rPr sz="1600" b="1">
-                <a:solidFill>
-                  <a:srgbClr val="E8B339"/>
-                </a:solidFill>
-                <a:latin typeface="Helvetica Neue"/>
-              </a:rPr>
-              <a:t>—   </a:t>
-            </a:r>
-            <a:r>
-              <a:rPr sz="1600" b="0" i="0">
-                <a:solidFill>
-                  <a:srgbClr val="F4F6F8"/>
-                </a:solidFill>
-                <a:latin typeface="Helvetica Neue"/>
-              </a:rPr>
-              <a:t>bank records spanning tens of thousands of transactions</a:t>
-            </a:r>
-          </a:p>
-          <a:p>
-            <a:pPr algn="l" marL="274320" indent="-274320">
-              <a:lnSpc>
-                <a:spcPct val="128000"/>
-              </a:lnSpc>
-              <a:spcBef>
-                <a:spcPts val="700"/>
-              </a:spcBef>
-              <a:spcAft>
-                <a:spcPts val="0"/>
-              </a:spcAft>
-            </a:pPr>
-            <a:r>
-              <a:rPr sz="1600" b="1">
-                <a:solidFill>
-                  <a:srgbClr val="E8B339"/>
-                </a:solidFill>
-                <a:latin typeface="Helvetica Neue"/>
-              </a:rPr>
-              <a:t>—   </a:t>
-            </a:r>
-            <a:r>
-              <a:rPr sz="1600" b="0" i="0">
-                <a:solidFill>
-                  <a:srgbClr val="F4F6F8"/>
-                </a:solidFill>
-                <a:latin typeface="Helvetica Neue"/>
-              </a:rPr>
-              <a:t>hours of recorded audio</a:t>
-            </a:r>
-          </a:p>
-          <a:p>
-            <a:pPr algn="l">
-              <a:lnSpc>
-                <a:spcPct val="128000"/>
-              </a:lnSpc>
-              <a:spcBef>
-                <a:spcPts val="1800"/>
-              </a:spcBef>
-              <a:spcAft>
-                <a:spcPts val="0"/>
-              </a:spcAft>
-            </a:pPr>
-            <a:r>
-              <a:rPr sz="1600" b="0" i="0">
-                <a:solidFill>
-                  <a:srgbClr val="F4F6F8"/>
-                </a:solidFill>
-                <a:latin typeface="Helvetica Neue"/>
-              </a:rPr>
-              <a:t>The tools investigators have are </a:t>
-            </a:r>
-            <a:r>
-              <a:rPr sz="1600" b="1" i="0">
-                <a:solidFill>
-                  <a:srgbClr val="F4F6F8"/>
-                </a:solidFill>
-                <a:latin typeface="Helvetica Neue"/>
-              </a:rPr>
-              <a:t>viewers.</a:t>
-            </a:r>
-            <a:r>
-              <a:rPr sz="1600" b="0" i="0">
-                <a:solidFill>
-                  <a:srgbClr val="F4F6F8"/>
-                </a:solidFill>
-                <a:latin typeface="Helvetica Neue"/>
-              </a:rPr>
-              <a:t> One phone at a time. One PDF at a time. One spreadsheet at a time.</a:t>
+                <a:spcPts val="500"/>
+              </a:spcBef>
+              <a:spcAft>
+                <a:spcPts val="0"/>
+              </a:spcAft>
+            </a:pPr>
+            <a:r>
+              <a:rPr sz="1500" b="0" i="0">
+                <a:solidFill>
+                  <a:srgbClr val="F7F7F8"/>
+                </a:solidFill>
+                <a:latin typeface="IBM Plex Sans"/>
+              </a:rPr>
+              <a:t>Two founders full-time, clearing those gates, and running the agreed pilot to a signed contract. </a:t>
+            </a:r>
+            <a:r>
+              <a:rPr sz="1500" b="1" i="0">
+                <a:solidFill>
+                  <a:srgbClr val="F7F7F8"/>
+                </a:solidFill>
+                <a:latin typeface="IBM Plex Sans"/>
+              </a:rPr>
+              <a:t>The pilot candidate is already secured.</a:t>
             </a:r>
           </a:p>
         </p:txBody>
@@ -5607,8 +5587,8 @@
         </p:nvSpPr>
         <p:spPr>
           <a:xfrm>
-            <a:off x="6583680" y="2377440"/>
-            <a:ext cx="4846320" cy="4023360"/>
+            <a:off x="6995160" y="2286000"/>
+            <a:ext cx="4434840" cy="3291840"/>
           </a:xfrm>
           <a:prstGeom prst="rect">
             <a:avLst/>
@@ -5633,22 +5613,138 @@
               </a:spcAft>
             </a:pPr>
             <a:r>
-              <a:rPr sz="1500" b="0" i="0">
-                <a:solidFill>
-                  <a:srgbClr val="9AA7B4"/>
-                </a:solidFill>
-                <a:latin typeface="Helvetica Neue"/>
-              </a:rPr>
-              <a:t>The connections — the same person in a witness statement, a WhatsApp thread and a beneficiary field; the meeting two streets from the cash withdrawal — live in investigators' heads and on whiteboards.</a:t>
-            </a:r>
-          </a:p>
+              <a:rPr sz="1300" b="1" i="0">
+                <a:solidFill>
+                  <a:srgbClr val="E33B4C"/>
+                </a:solidFill>
+                <a:latin typeface="IBM Plex Sans"/>
+              </a:rPr>
+              <a:t>What we want from NDRC beyond capital</a:t>
+            </a:r>
+          </a:p>
+          <a:p>
+            <a:pPr algn="l" marL="274320" indent="-274320">
+              <a:lnSpc>
+                <a:spcPct val="128000"/>
+              </a:lnSpc>
+              <a:spcBef>
+                <a:spcPts val="800"/>
+              </a:spcBef>
+              <a:spcAft>
+                <a:spcPts val="0"/>
+              </a:spcAft>
+            </a:pPr>
+            <a:r>
+              <a:rPr sz="1400" b="1">
+                <a:solidFill>
+                  <a:srgbClr val="E33B4C"/>
+                </a:solidFill>
+                <a:latin typeface="IBM Plex Sans"/>
+              </a:rPr>
+              <a:t>—   </a:t>
+            </a:r>
+            <a:r>
+              <a:rPr sz="1400" b="0" i="0">
+                <a:solidFill>
+                  <a:srgbClr val="F7F7F8"/>
+                </a:solidFill>
+                <a:latin typeface="IBM Plex Sans"/>
+              </a:rPr>
+              <a:t>Dublin base at Dogpatch Labs</a:t>
+            </a:r>
+          </a:p>
+          <a:p>
+            <a:pPr algn="l" marL="274320" indent="-274320">
+              <a:lnSpc>
+                <a:spcPct val="128000"/>
+              </a:lnSpc>
+              <a:spcBef>
+                <a:spcPts val="800"/>
+              </a:spcBef>
+              <a:spcAft>
+                <a:spcPts val="0"/>
+              </a:spcAft>
+            </a:pPr>
+            <a:r>
+              <a:rPr sz="1400" b="1">
+                <a:solidFill>
+                  <a:srgbClr val="E33B4C"/>
+                </a:solidFill>
+                <a:latin typeface="IBM Plex Sans"/>
+              </a:rPr>
+              <a:t>—   </a:t>
+            </a:r>
+            <a:r>
+              <a:rPr sz="1400" b="0" i="0">
+                <a:solidFill>
+                  <a:srgbClr val="F7F7F8"/>
+                </a:solidFill>
+                <a:latin typeface="IBM Plex Sans"/>
+              </a:rPr>
+              <a:t>EIR time on pricing and enterprise sales motion</a:t>
+            </a:r>
+          </a:p>
+          <a:p>
+            <a:pPr algn="l" marL="274320" indent="-274320">
+              <a:lnSpc>
+                <a:spcPct val="128000"/>
+              </a:lnSpc>
+              <a:spcBef>
+                <a:spcPts val="800"/>
+              </a:spcBef>
+              <a:spcAft>
+                <a:spcPts val="0"/>
+              </a:spcAft>
+            </a:pPr>
+            <a:r>
+              <a:rPr sz="1400" b="1">
+                <a:solidFill>
+                  <a:srgbClr val="E33B4C"/>
+                </a:solidFill>
+                <a:latin typeface="IBM Plex Sans"/>
+              </a:rPr>
+              <a:t>—   </a:t>
+            </a:r>
+            <a:r>
+              <a:rPr sz="1400" b="0" i="0">
+                <a:solidFill>
+                  <a:srgbClr val="F7F7F8"/>
+                </a:solidFill>
+                <a:latin typeface="IBM Plex Sans"/>
+              </a:rPr>
+              <a:t>Introductions into Irish and UK professional-services buyers — ACFE Ireland, Chartered Accountants Ireland forensic group, Law Society criminal law committee</a:t>
+            </a:r>
+          </a:p>
+        </p:txBody>
+      </p:sp>
+      <p:sp>
+        <p:nvSpPr>
+          <p:cNvPr id="7" name="TextBox 6"/>
+          <p:cNvSpPr txBox="1"/>
+          <p:nvPr/>
+        </p:nvSpPr>
+        <p:spPr>
+          <a:xfrm>
+            <a:off x="777240" y="5806440"/>
+            <a:ext cx="10637215" cy="914400"/>
+          </a:xfrm>
+          <a:prstGeom prst="rect">
+            <a:avLst/>
+          </a:prstGeom>
+          <a:noFill/>
+        </p:spPr>
+        <p:txBody>
+          <a:bodyPr wrap="square" lIns="0" rIns="0" tIns="0" bIns="0">
+            <a:spAutoFit/>
+          </a:bodyPr>
+          <a:lstStyle/>
           <a:p>
             <a:pPr algn="l">
               <a:lnSpc>
                 <a:spcPct val="128000"/>
               </a:lnSpc>
               <a:spcBef>
-                <a:spcPts val="1300"/>
+                <a:spcPts val="0"/>
               </a:spcBef>
               <a:spcAft>
                 <a:spcPts val="0"/>
@@ -5657,55 +5753,38 @@
             <a:r>
               <a:rPr sz="1700" b="1" i="0">
                 <a:solidFill>
-                  <a:srgbClr val="E8B339"/>
-                </a:solidFill>
-                <a:latin typeface="Helvetica Neue"/>
-              </a:rPr>
-              <a:t>They don't scale, they don't survive staff turnover, and they can't be handed to a court.</a:t>
-            </a:r>
-          </a:p>
-          <a:p>
-            <a:pPr algn="l">
-              <a:lnSpc>
-                <a:spcPct val="128000"/>
-              </a:lnSpc>
-              <a:spcBef>
-                <a:spcPts val="1400"/>
-              </a:spcBef>
-              <a:spcAft>
-                <a:spcPts val="0"/>
-              </a:spcAft>
-            </a:pPr>
-            <a:r>
-              <a:rPr sz="1500" b="1" i="0">
-                <a:solidFill>
-                  <a:srgbClr val="F4F6F8"/>
-                </a:solidFill>
-                <a:latin typeface="Helvetica Neue"/>
-              </a:rPr>
-              <a:t>We didn't start with a product idea. We started with a case we couldn't work.</a:t>
-            </a:r>
-          </a:p>
-          <a:p>
-            <a:pPr algn="l">
-              <a:lnSpc>
-                <a:spcPct val="128000"/>
-              </a:lnSpc>
-              <a:spcBef>
-                <a:spcPts val="600"/>
-              </a:spcBef>
-              <a:spcAft>
-                <a:spcPts val="0"/>
-              </a:spcAft>
-            </a:pPr>
-            <a:r>
-              <a:rPr sz="1400" b="0" i="1">
-                <a:solidFill>
-                  <a:srgbClr val="9AA7B4"/>
-                </a:solidFill>
-                <a:latin typeface="Helvetica Neue"/>
-              </a:rPr>
-              <a:t>We tried to buy this. Building it was the second choice, not the first.</a:t>
+                  <a:srgbClr val="E33B4C"/>
+                </a:solidFill>
+                <a:latin typeface="IBM Plex Sans"/>
+              </a:rPr>
+              <a:t>We are not asking anyone to fund the invention of a product. We are asking them to fund the distance between </a:t>
+            </a:r>
+            <a:r>
+              <a:rPr sz="1700" b="1" i="0">
+                <a:solidFill>
+                  <a:srgbClr val="E33B4C"/>
+                </a:solidFill>
+                <a:latin typeface="IBM Plex Sans"/>
+              </a:rPr>
+              <a:t>works</a:t>
+            </a:r>
+            <a:r>
+              <a:rPr sz="1700" b="1" i="0">
+                <a:solidFill>
+                  <a:srgbClr val="E33B4C"/>
+                </a:solidFill>
+                <a:latin typeface="IBM Plex Sans"/>
+              </a:rPr>
+              <a:t> and </a:t>
+            </a:r>
+            <a:r>
+              <a:rPr sz="1700" b="1" i="0">
+                <a:solidFill>
+                  <a:srgbClr val="E33B4C"/>
+                </a:solidFill>
+                <a:latin typeface="IBM Plex Sans"/>
+              </a:rPr>
+              <a:t>sold.</a:t>
             </a:r>
           </a:p>
         </p:txBody>
@@ -5718,13 +5797,13 @@
 </p:sld>
 </file>
 
-<file path=ppt/slides/slide3.xml><?xml version="1.0" encoding="utf-8"?>
+<file path=ppt/slides/slide2.xml><?xml version="1.0" encoding="utf-8"?>
 <p:sld xmlns:a="http://schemas.openxmlformats.org/drawingml/2006/main" xmlns:p="http://schemas.openxmlformats.org/presentationml/2006/main" xmlns:r="http://schemas.openxmlformats.org/officeDocument/2006/relationships">
   <p:cSld>
     <p:bg>
       <p:bgPr>
         <a:solidFill>
-          <a:srgbClr val="0E141B"/>
+          <a:srgbClr val="0B0C0F"/>
         </a:solidFill>
         <a:effectLst/>
       </p:bgPr>
@@ -5769,17 +5848,17 @@
                 <a:spcPts val="0"/>
               </a:spcAft>
               <a:defRPr>
-                <a:latin typeface="Helvetica Neue"/>
+                <a:latin typeface="IBM Plex Mono"/>
               </a:defRPr>
             </a:pPr>
             <a:r>
               <a:rPr sz="1100" b="1" i="0">
                 <a:solidFill>
-                  <a:srgbClr val="E8B339"/>
-                </a:solidFill>
-                <a:latin typeface="Helvetica Neue"/>
-              </a:rPr>
-              <a:t>WHY NOW</a:t>
+                  <a:srgbClr val="E33B4C"/>
+                </a:solidFill>
+                <a:latin typeface="IBM Plex Mono"/>
+              </a:rPr>
+              <a:t>THE PROBLEM</a:t>
             </a:r>
           </a:p>
         </p:txBody>
@@ -5820,11 +5899,12 @@
             <a:r>
               <a:rPr sz="3400" b="1" i="0">
                 <a:solidFill>
-                  <a:srgbClr val="F4F6F8"/>
-                </a:solidFill>
-                <a:latin typeface="Helvetica Neue"/>
-              </a:rPr>
-              <a:t>Three curves crossed.</a:t>
+                  <a:srgbClr val="F7F7F8"/>
+                </a:solidFill>
+                <a:latin typeface="Space Grotesk"/>
+              </a:rPr>
+              <a:t>Modern casework is a data problem
+wearing a legal costume.</a:t>
             </a:r>
           </a:p>
         </p:txBody>
@@ -5837,14 +5917,14 @@
         </p:nvSpPr>
         <p:spPr>
           <a:xfrm>
-            <a:off x="777240" y="1691640"/>
+            <a:off x="777240" y="2084831"/>
             <a:ext cx="1005840" cy="31750"/>
           </a:xfrm>
           <a:prstGeom prst="rect">
             <a:avLst/>
           </a:prstGeom>
           <a:solidFill>
-            <a:srgbClr val="E8B339"/>
+            <a:srgbClr val="E33B4C"/>
           </a:solidFill>
           <a:ln>
             <a:noFill/>
@@ -5881,8 +5961,8 @@
         </p:nvSpPr>
         <p:spPr>
           <a:xfrm>
-            <a:off x="777240" y="2148840"/>
-            <a:ext cx="5852160" cy="3291840"/>
+            <a:off x="777240" y="2377440"/>
+            <a:ext cx="5257800" cy="4023360"/>
           </a:xfrm>
           <a:prstGeom prst="rect">
             <a:avLst/>
@@ -5900,20 +5980,144 @@
                 <a:spcPct val="128000"/>
               </a:lnSpc>
               <a:spcBef>
-                <a:spcPts val="1600"/>
-              </a:spcBef>
-              <a:spcAft>
-                <a:spcPts val="0"/>
-              </a:spcAft>
-            </a:pPr>
-            <a:r>
-              <a:rPr sz="1300" b="1" i="0">
-                <a:solidFill>
-                  <a:srgbClr val="E8B339"/>
-                </a:solidFill>
-                <a:latin typeface="Helvetica Neue"/>
-              </a:rPr>
-              <a:t>01</a:t>
+                <a:spcPts val="0"/>
+              </a:spcBef>
+              <a:spcAft>
+                <a:spcPts val="0"/>
+              </a:spcAft>
+            </a:pPr>
+            <a:r>
+              <a:rPr sz="1600" b="0" i="0">
+                <a:solidFill>
+                  <a:srgbClr val="9A9DA5"/>
+                </a:solidFill>
+                <a:latin typeface="IBM Plex Sans"/>
+              </a:rPr>
+              <a:t>A single serious-fraud or criminal case now arrives as:</a:t>
+            </a:r>
+          </a:p>
+          <a:p>
+            <a:pPr algn="l" marL="274320" indent="-274320">
+              <a:lnSpc>
+                <a:spcPct val="128000"/>
+              </a:lnSpc>
+              <a:spcBef>
+                <a:spcPts val="700"/>
+              </a:spcBef>
+              <a:spcAft>
+                <a:spcPts val="0"/>
+              </a:spcAft>
+            </a:pPr>
+            <a:r>
+              <a:rPr sz="1600" b="1">
+                <a:solidFill>
+                  <a:srgbClr val="E33B4C"/>
+                </a:solidFill>
+                <a:latin typeface="IBM Plex Sans"/>
+              </a:rPr>
+              <a:t>—   </a:t>
+            </a:r>
+            <a:r>
+              <a:rPr sz="1600" b="0" i="0">
+                <a:solidFill>
+                  <a:srgbClr val="F7F7F8"/>
+                </a:solidFill>
+                <a:latin typeface="IBM Plex Sans"/>
+              </a:rPr>
+              <a:t>thousands of documents</a:t>
+            </a:r>
+          </a:p>
+          <a:p>
+            <a:pPr algn="l" marL="274320" indent="-274320">
+              <a:lnSpc>
+                <a:spcPct val="128000"/>
+              </a:lnSpc>
+              <a:spcBef>
+                <a:spcPts val="700"/>
+              </a:spcBef>
+              <a:spcAft>
+                <a:spcPts val="0"/>
+              </a:spcAft>
+            </a:pPr>
+            <a:r>
+              <a:rPr sz="1600" b="1">
+                <a:solidFill>
+                  <a:srgbClr val="E33B4C"/>
+                </a:solidFill>
+                <a:latin typeface="IBM Plex Sans"/>
+              </a:rPr>
+              <a:t>—   </a:t>
+            </a:r>
+            <a:r>
+              <a:rPr sz="1600" b="0" i="0">
+                <a:solidFill>
+                  <a:srgbClr val="F7F7F8"/>
+                </a:solidFill>
+                <a:latin typeface="IBM Plex Sans"/>
+              </a:rPr>
+              <a:t>multi-gigabyte phone extractions, hundreds of thousands of events</a:t>
+            </a:r>
+          </a:p>
+          <a:p>
+            <a:pPr algn="l" marL="274320" indent="-274320">
+              <a:lnSpc>
+                <a:spcPct val="128000"/>
+              </a:lnSpc>
+              <a:spcBef>
+                <a:spcPts val="700"/>
+              </a:spcBef>
+              <a:spcAft>
+                <a:spcPts val="0"/>
+              </a:spcAft>
+            </a:pPr>
+            <a:r>
+              <a:rPr sz="1600" b="1">
+                <a:solidFill>
+                  <a:srgbClr val="E33B4C"/>
+                </a:solidFill>
+                <a:latin typeface="IBM Plex Sans"/>
+              </a:rPr>
+              <a:t>—   </a:t>
+            </a:r>
+            <a:r>
+              <a:rPr sz="1600" b="0" i="0">
+                <a:solidFill>
+                  <a:srgbClr val="F7F7F8"/>
+                </a:solidFill>
+                <a:latin typeface="IBM Plex Sans"/>
+              </a:rPr>
+              <a:t>bank records spanning tens of thousands of transactions</a:t>
+            </a:r>
+          </a:p>
+          <a:p>
+            <a:pPr algn="l" marL="274320" indent="-274320">
+              <a:lnSpc>
+                <a:spcPct val="128000"/>
+              </a:lnSpc>
+              <a:spcBef>
+                <a:spcPts val="700"/>
+              </a:spcBef>
+              <a:spcAft>
+                <a:spcPts val="0"/>
+              </a:spcAft>
+            </a:pPr>
+            <a:r>
+              <a:rPr sz="1600" b="1">
+                <a:solidFill>
+                  <a:srgbClr val="E33B4C"/>
+                </a:solidFill>
+                <a:latin typeface="IBM Plex Sans"/>
+              </a:rPr>
+              <a:t>—   </a:t>
+            </a:r>
+            <a:r>
+              <a:rPr sz="1600" b="0" i="0">
+                <a:solidFill>
+                  <a:srgbClr val="F7F7F8"/>
+                </a:solidFill>
+                <a:latin typeface="IBM Plex Sans"/>
+              </a:rPr>
+              <a:t>hours of recorded audio</a:t>
             </a:r>
           </a:p>
           <a:p>
@@ -5922,135 +6126,38 @@
                 <a:spcPct val="128000"/>
               </a:lnSpc>
               <a:spcBef>
-                <a:spcPts val="200"/>
-              </a:spcBef>
-              <a:spcAft>
-                <a:spcPts val="0"/>
-              </a:spcAft>
-            </a:pPr>
-            <a:r>
-              <a:rPr sz="1800" b="1" i="0">
-                <a:solidFill>
-                  <a:srgbClr val="F4F6F8"/>
-                </a:solidFill>
-                <a:latin typeface="Helvetica Neue"/>
-              </a:rPr>
-              <a:t>Digital evidence volume exploded.</a:t>
-            </a:r>
-            <a:r>
-              <a:rPr sz="1800" b="0" i="0">
-                <a:solidFill>
-                  <a:srgbClr val="F4F6F8"/>
-                </a:solidFill>
-                <a:latin typeface="Helvetica Neue"/>
-              </a:rPr>
-              <a:t> A phone extraction now appears in nearly every case.</a:t>
-            </a:r>
-          </a:p>
-          <a:p>
-            <a:pPr algn="l">
-              <a:lnSpc>
-                <a:spcPct val="128000"/>
-              </a:lnSpc>
-              <a:spcBef>
-                <a:spcPts val="1600"/>
-              </a:spcBef>
-              <a:spcAft>
-                <a:spcPts val="0"/>
-              </a:spcAft>
-            </a:pPr>
-            <a:r>
-              <a:rPr sz="1300" b="1" i="0">
-                <a:solidFill>
-                  <a:srgbClr val="E8B339"/>
-                </a:solidFill>
-                <a:latin typeface="Helvetica Neue"/>
-              </a:rPr>
-              <a:t>02</a:t>
-            </a:r>
-          </a:p>
-          <a:p>
-            <a:pPr algn="l">
-              <a:lnSpc>
-                <a:spcPct val="128000"/>
-              </a:lnSpc>
-              <a:spcBef>
-                <a:spcPts val="200"/>
-              </a:spcBef>
-              <a:spcAft>
-                <a:spcPts val="0"/>
-              </a:spcAft>
-            </a:pPr>
-            <a:r>
-              <a:rPr sz="1800" b="1" i="0">
-                <a:solidFill>
-                  <a:srgbClr val="F4F6F8"/>
-                </a:solidFill>
-                <a:latin typeface="Helvetica Neue"/>
-              </a:rPr>
-              <a:t>LLMs became good enough</a:t>
-            </a:r>
-            <a:r>
-              <a:rPr sz="1800" b="0" i="0">
-                <a:solidFill>
-                  <a:srgbClr val="F4F6F8"/>
-                </a:solidFill>
-                <a:latin typeface="Helvetica Neue"/>
-              </a:rPr>
-              <a:t> to read evidence at scale.</a:t>
-            </a:r>
-          </a:p>
-          <a:p>
-            <a:pPr algn="l">
-              <a:lnSpc>
-                <a:spcPct val="128000"/>
-              </a:lnSpc>
-              <a:spcBef>
-                <a:spcPts val="1600"/>
-              </a:spcBef>
-              <a:spcAft>
-                <a:spcPts val="0"/>
-              </a:spcAft>
-            </a:pPr>
-            <a:r>
-              <a:rPr sz="1300" b="1" i="0">
-                <a:solidFill>
-                  <a:srgbClr val="E8B339"/>
-                </a:solidFill>
-                <a:latin typeface="Helvetica Neue"/>
-              </a:rPr>
-              <a:t>03</a:t>
-            </a:r>
-          </a:p>
-          <a:p>
-            <a:pPr algn="l">
-              <a:lnSpc>
-                <a:spcPct val="128000"/>
-              </a:lnSpc>
-              <a:spcBef>
-                <a:spcPts val="200"/>
-              </a:spcBef>
-              <a:spcAft>
-                <a:spcPts val="0"/>
-              </a:spcAft>
-            </a:pPr>
-            <a:r>
-              <a:rPr sz="1800" b="1" i="0">
-                <a:solidFill>
-                  <a:srgbClr val="F4F6F8"/>
-                </a:solidFill>
-                <a:latin typeface="Helvetica Neue"/>
-              </a:rPr>
-              <a:t>Bare LLMs remain unusable in evidence work</a:t>
-            </a:r>
-            <a:r>
-              <a:rPr sz="1800" b="0" i="0">
-                <a:solidFill>
-                  <a:srgbClr val="F4F6F8"/>
-                </a:solidFill>
-                <a:latin typeface="Helvetica Neue"/>
-              </a:rPr>
-              <a:t> — no provenance, no audit, no confidentiality.</a:t>
+                <a:spcPts val="1800"/>
+              </a:spcBef>
+              <a:spcAft>
+                <a:spcPts val="0"/>
+              </a:spcAft>
+            </a:pPr>
+            <a:r>
+              <a:rPr sz="1600" b="0" i="0">
+                <a:solidFill>
+                  <a:srgbClr val="F7F7F8"/>
+                </a:solidFill>
+                <a:latin typeface="IBM Plex Sans"/>
+              </a:rPr>
+              <a:t>The tools investigators have are </a:t>
+            </a:r>
+            <a:r>
+              <a:rPr sz="1600" b="1" i="0">
+                <a:solidFill>
+                  <a:srgbClr val="F7F7F8"/>
+                </a:solidFill>
+                <a:latin typeface="IBM Plex Sans"/>
+              </a:rPr>
+              <a:t>viewers.</a:t>
+            </a:r>
+            <a:r>
+              <a:rPr sz="1600" b="0" i="0">
+                <a:solidFill>
+                  <a:srgbClr val="F7F7F8"/>
+                </a:solidFill>
+                <a:latin typeface="IBM Plex Sans"/>
+              </a:rPr>
+              <a:t> One phone at a time. One PDF at a time. One spreadsheet at a time.</a:t>
             </a:r>
           </a:p>
         </p:txBody>
@@ -6063,8 +6170,8 @@
         </p:nvSpPr>
         <p:spPr>
           <a:xfrm>
-            <a:off x="7086600" y="2148840"/>
-            <a:ext cx="4343400" cy="3474720"/>
+            <a:off x="6583680" y="2377440"/>
+            <a:ext cx="4846320" cy="4023360"/>
           </a:xfrm>
           <a:prstGeom prst="rect">
             <a:avLst/>
@@ -6089,13 +6196,13 @@
               </a:spcAft>
             </a:pPr>
             <a:r>
-              <a:rPr sz="1700" b="0" i="0">
-                <a:solidFill>
-                  <a:srgbClr val="9AA7B4"/>
-                </a:solidFill>
-                <a:latin typeface="Helvetica Neue"/>
-              </a:rPr>
-              <a:t>The gap between (2) and (3) is exactly where Loupe sits:</a:t>
+              <a:rPr sz="1500" b="0" i="0">
+                <a:solidFill>
+                  <a:srgbClr val="9A9DA5"/>
+                </a:solidFill>
+                <a:latin typeface="IBM Plex Sans"/>
+              </a:rPr>
+              <a:t>The connections — the same person in a witness statement, a WhatsApp thread and a beneficiary field; the meeting two streets from the cash withdrawal — live in investigators' heads and on whiteboards.</a:t>
             </a:r>
           </a:p>
           <a:p>
@@ -6104,20 +6211,20 @@
                 <a:spcPct val="128000"/>
               </a:lnSpc>
               <a:spcBef>
-                <a:spcPts val="1000"/>
-              </a:spcBef>
-              <a:spcAft>
-                <a:spcPts val="0"/>
-              </a:spcAft>
-            </a:pPr>
-            <a:r>
-              <a:rPr sz="2300" b="1" i="0">
-                <a:solidFill>
-                  <a:srgbClr val="E8B339"/>
-                </a:solidFill>
-                <a:latin typeface="Helvetica Neue"/>
-              </a:rPr>
-              <a:t>the trust layer that makes AI admissible in investigative work.</a:t>
+                <a:spcPts val="1300"/>
+              </a:spcBef>
+              <a:spcAft>
+                <a:spcPts val="0"/>
+              </a:spcAft>
+            </a:pPr>
+            <a:r>
+              <a:rPr sz="1700" b="1" i="0">
+                <a:solidFill>
+                  <a:srgbClr val="E33B4C"/>
+                </a:solidFill>
+                <a:latin typeface="IBM Plex Sans"/>
+              </a:rPr>
+              <a:t>They don't scale, they don't survive staff turnover, and they can't be handed to a court.</a:t>
             </a:r>
           </a:p>
           <a:p>
@@ -6126,29 +6233,20 @@
                 <a:spcPct val="128000"/>
               </a:lnSpc>
               <a:spcBef>
-                <a:spcPts val="3000"/>
-              </a:spcBef>
-              <a:spcAft>
-                <a:spcPts val="0"/>
-              </a:spcAft>
-            </a:pPr>
-            <a:r>
-              <a:rPr sz="1600" b="0" i="0">
-                <a:solidFill>
-                  <a:srgbClr val="F4F6F8"/>
-                </a:solidFill>
-                <a:latin typeface="Helvetica Neue"/>
-              </a:rPr>
-              <a:t>Only ~25% of anti-fraud programmes use AI/ML today — and only </a:t>
-            </a:r>
-            <a:r>
-              <a:rPr sz="1600" b="1" i="0">
-                <a:solidFill>
-                  <a:srgbClr val="F4F6F8"/>
-                </a:solidFill>
-                <a:latin typeface="Helvetica Neue"/>
-              </a:rPr>
-              <a:t>~6% of fraud examiners are confident explaining how their AI reaches its conclusions.</a:t>
+                <a:spcPts val="1400"/>
+              </a:spcBef>
+              <a:spcAft>
+                <a:spcPts val="0"/>
+              </a:spcAft>
+            </a:pPr>
+            <a:r>
+              <a:rPr sz="1500" b="1" i="0">
+                <a:solidFill>
+                  <a:srgbClr val="F7F7F8"/>
+                </a:solidFill>
+                <a:latin typeface="IBM Plex Sans"/>
+              </a:rPr>
+              <a:t>We didn't start with a product idea. We started with a case we couldn't work.</a:t>
             </a:r>
           </a:p>
           <a:p>
@@ -6157,20 +6255,20 @@
                 <a:spcPct val="128000"/>
               </a:lnSpc>
               <a:spcBef>
-                <a:spcPts val="800"/>
-              </a:spcBef>
-              <a:spcAft>
-                <a:spcPts val="0"/>
-              </a:spcAft>
-            </a:pPr>
-            <a:r>
-              <a:rPr sz="1200" b="0" i="1">
-                <a:solidFill>
-                  <a:srgbClr val="9AA7B4"/>
-                </a:solidFill>
-                <a:latin typeface="Helvetica Neue"/>
-              </a:rPr>
-              <a:t>ACFE 2026 anti-fraud technology benchmarking</a:t>
+                <a:spcPts val="600"/>
+              </a:spcBef>
+              <a:spcAft>
+                <a:spcPts val="0"/>
+              </a:spcAft>
+            </a:pPr>
+            <a:r>
+              <a:rPr sz="1400" b="0" i="1">
+                <a:solidFill>
+                  <a:srgbClr val="9A9DA5"/>
+                </a:solidFill>
+                <a:latin typeface="IBM Plex Sans"/>
+              </a:rPr>
+              <a:t>We tried to buy this. Building it was the second choice, not the first.</a:t>
             </a:r>
           </a:p>
         </p:txBody>
@@ -6183,13 +6281,13 @@
 </p:sld>
 </file>
 
-<file path=ppt/slides/slide4.xml><?xml version="1.0" encoding="utf-8"?>
+<file path=ppt/slides/slide3.xml><?xml version="1.0" encoding="utf-8"?>
 <p:sld xmlns:a="http://schemas.openxmlformats.org/drawingml/2006/main" xmlns:p="http://schemas.openxmlformats.org/presentationml/2006/main" xmlns:r="http://schemas.openxmlformats.org/officeDocument/2006/relationships">
   <p:cSld>
     <p:bg>
       <p:bgPr>
         <a:solidFill>
-          <a:srgbClr val="0E141B"/>
+          <a:srgbClr val="0B0C0F"/>
         </a:solidFill>
         <a:effectLst/>
       </p:bgPr>
@@ -6234,17 +6332,17 @@
                 <a:spcPts val="0"/>
               </a:spcAft>
               <a:defRPr>
-                <a:latin typeface="Helvetica Neue"/>
+                <a:latin typeface="IBM Plex Mono"/>
               </a:defRPr>
             </a:pPr>
             <a:r>
               <a:rPr sz="1100" b="1" i="0">
                 <a:solidFill>
-                  <a:srgbClr val="E8B339"/>
-                </a:solidFill>
-                <a:latin typeface="Helvetica Neue"/>
-              </a:rPr>
-              <a:t>PRODUCT</a:t>
+                  <a:srgbClr val="E33B4C"/>
+                </a:solidFill>
+                <a:latin typeface="IBM Plex Mono"/>
+              </a:rPr>
+              <a:t>WHY NOW</a:t>
             </a:r>
           </a:p>
         </p:txBody>
@@ -6283,13 +6381,13 @@
               </a:spcAft>
             </a:pPr>
             <a:r>
-              <a:rPr sz="3200" b="1" i="0">
-                <a:solidFill>
-                  <a:srgbClr val="F4F6F8"/>
-                </a:solidFill>
-                <a:latin typeface="Helvetica Neue"/>
-              </a:rPr>
-              <a:t>Evidence in. One connected model out.</a:t>
+              <a:rPr sz="3400" b="1" i="0">
+                <a:solidFill>
+                  <a:srgbClr val="F7F7F8"/>
+                </a:solidFill>
+                <a:latin typeface="Space Grotesk"/>
+              </a:rPr>
+              <a:t>Three curves crossed.</a:t>
             </a:r>
           </a:p>
         </p:txBody>
@@ -6309,7 +6407,7 @@
             <a:avLst/>
           </a:prstGeom>
           <a:solidFill>
-            <a:srgbClr val="E8B339"/>
+            <a:srgbClr val="E33B4C"/>
           </a:solidFill>
           <a:ln>
             <a:noFill/>
@@ -6340,6 +6438,471 @@
       </p:sp>
       <p:sp>
         <p:nvSpPr>
+          <p:cNvPr id="5" name="TextBox 4"/>
+          <p:cNvSpPr txBox="1"/>
+          <p:nvPr/>
+        </p:nvSpPr>
+        <p:spPr>
+          <a:xfrm>
+            <a:off x="777240" y="2148840"/>
+            <a:ext cx="5852160" cy="3291840"/>
+          </a:xfrm>
+          <a:prstGeom prst="rect">
+            <a:avLst/>
+          </a:prstGeom>
+          <a:noFill/>
+        </p:spPr>
+        <p:txBody>
+          <a:bodyPr wrap="square" lIns="0" rIns="0" tIns="0" bIns="0">
+            <a:spAutoFit/>
+          </a:bodyPr>
+          <a:lstStyle/>
+          <a:p>
+            <a:pPr algn="l">
+              <a:lnSpc>
+                <a:spcPct val="128000"/>
+              </a:lnSpc>
+              <a:spcBef>
+                <a:spcPts val="1600"/>
+              </a:spcBef>
+              <a:spcAft>
+                <a:spcPts val="0"/>
+              </a:spcAft>
+            </a:pPr>
+            <a:r>
+              <a:rPr sz="1300" b="1" i="0">
+                <a:solidFill>
+                  <a:srgbClr val="E33B4C"/>
+                </a:solidFill>
+                <a:latin typeface="IBM Plex Sans"/>
+              </a:rPr>
+              <a:t>01</a:t>
+            </a:r>
+          </a:p>
+          <a:p>
+            <a:pPr algn="l">
+              <a:lnSpc>
+                <a:spcPct val="128000"/>
+              </a:lnSpc>
+              <a:spcBef>
+                <a:spcPts val="200"/>
+              </a:spcBef>
+              <a:spcAft>
+                <a:spcPts val="0"/>
+              </a:spcAft>
+            </a:pPr>
+            <a:r>
+              <a:rPr sz="1800" b="1" i="0">
+                <a:solidFill>
+                  <a:srgbClr val="F7F7F8"/>
+                </a:solidFill>
+                <a:latin typeface="IBM Plex Sans"/>
+              </a:rPr>
+              <a:t>Digital evidence volume exploded.</a:t>
+            </a:r>
+            <a:r>
+              <a:rPr sz="1800" b="0" i="0">
+                <a:solidFill>
+                  <a:srgbClr val="F7F7F8"/>
+                </a:solidFill>
+                <a:latin typeface="IBM Plex Sans"/>
+              </a:rPr>
+              <a:t> A phone extraction now appears in nearly every case.</a:t>
+            </a:r>
+          </a:p>
+          <a:p>
+            <a:pPr algn="l">
+              <a:lnSpc>
+                <a:spcPct val="128000"/>
+              </a:lnSpc>
+              <a:spcBef>
+                <a:spcPts val="1600"/>
+              </a:spcBef>
+              <a:spcAft>
+                <a:spcPts val="0"/>
+              </a:spcAft>
+            </a:pPr>
+            <a:r>
+              <a:rPr sz="1300" b="1" i="0">
+                <a:solidFill>
+                  <a:srgbClr val="E33B4C"/>
+                </a:solidFill>
+                <a:latin typeface="IBM Plex Sans"/>
+              </a:rPr>
+              <a:t>02</a:t>
+            </a:r>
+          </a:p>
+          <a:p>
+            <a:pPr algn="l">
+              <a:lnSpc>
+                <a:spcPct val="128000"/>
+              </a:lnSpc>
+              <a:spcBef>
+                <a:spcPts val="200"/>
+              </a:spcBef>
+              <a:spcAft>
+                <a:spcPts val="0"/>
+              </a:spcAft>
+            </a:pPr>
+            <a:r>
+              <a:rPr sz="1800" b="1" i="0">
+                <a:solidFill>
+                  <a:srgbClr val="F7F7F8"/>
+                </a:solidFill>
+                <a:latin typeface="IBM Plex Sans"/>
+              </a:rPr>
+              <a:t>LLMs became good enough</a:t>
+            </a:r>
+            <a:r>
+              <a:rPr sz="1800" b="0" i="0">
+                <a:solidFill>
+                  <a:srgbClr val="F7F7F8"/>
+                </a:solidFill>
+                <a:latin typeface="IBM Plex Sans"/>
+              </a:rPr>
+              <a:t> to read evidence at scale.</a:t>
+            </a:r>
+          </a:p>
+          <a:p>
+            <a:pPr algn="l">
+              <a:lnSpc>
+                <a:spcPct val="128000"/>
+              </a:lnSpc>
+              <a:spcBef>
+                <a:spcPts val="1600"/>
+              </a:spcBef>
+              <a:spcAft>
+                <a:spcPts val="0"/>
+              </a:spcAft>
+            </a:pPr>
+            <a:r>
+              <a:rPr sz="1300" b="1" i="0">
+                <a:solidFill>
+                  <a:srgbClr val="E33B4C"/>
+                </a:solidFill>
+                <a:latin typeface="IBM Plex Sans"/>
+              </a:rPr>
+              <a:t>03</a:t>
+            </a:r>
+          </a:p>
+          <a:p>
+            <a:pPr algn="l">
+              <a:lnSpc>
+                <a:spcPct val="128000"/>
+              </a:lnSpc>
+              <a:spcBef>
+                <a:spcPts val="200"/>
+              </a:spcBef>
+              <a:spcAft>
+                <a:spcPts val="0"/>
+              </a:spcAft>
+            </a:pPr>
+            <a:r>
+              <a:rPr sz="1800" b="1" i="0">
+                <a:solidFill>
+                  <a:srgbClr val="F7F7F8"/>
+                </a:solidFill>
+                <a:latin typeface="IBM Plex Sans"/>
+              </a:rPr>
+              <a:t>Bare LLMs remain unusable in evidence work</a:t>
+            </a:r>
+            <a:r>
+              <a:rPr sz="1800" b="0" i="0">
+                <a:solidFill>
+                  <a:srgbClr val="F7F7F8"/>
+                </a:solidFill>
+                <a:latin typeface="IBM Plex Sans"/>
+              </a:rPr>
+              <a:t> — no provenance, no audit, no confidentiality.</a:t>
+            </a:r>
+          </a:p>
+        </p:txBody>
+      </p:sp>
+      <p:sp>
+        <p:nvSpPr>
+          <p:cNvPr id="6" name="TextBox 5"/>
+          <p:cNvSpPr txBox="1"/>
+          <p:nvPr/>
+        </p:nvSpPr>
+        <p:spPr>
+          <a:xfrm>
+            <a:off x="7086600" y="2148840"/>
+            <a:ext cx="4343400" cy="3474720"/>
+          </a:xfrm>
+          <a:prstGeom prst="rect">
+            <a:avLst/>
+          </a:prstGeom>
+          <a:noFill/>
+        </p:spPr>
+        <p:txBody>
+          <a:bodyPr wrap="square" lIns="0" rIns="0" tIns="0" bIns="0">
+            <a:spAutoFit/>
+          </a:bodyPr>
+          <a:lstStyle/>
+          <a:p>
+            <a:pPr algn="l">
+              <a:lnSpc>
+                <a:spcPct val="128000"/>
+              </a:lnSpc>
+              <a:spcBef>
+                <a:spcPts val="0"/>
+              </a:spcBef>
+              <a:spcAft>
+                <a:spcPts val="0"/>
+              </a:spcAft>
+            </a:pPr>
+            <a:r>
+              <a:rPr sz="1700" b="0" i="0">
+                <a:solidFill>
+                  <a:srgbClr val="9A9DA5"/>
+                </a:solidFill>
+                <a:latin typeface="IBM Plex Sans"/>
+              </a:rPr>
+              <a:t>The gap between (2) and (3) is exactly where Loupe sits:</a:t>
+            </a:r>
+          </a:p>
+          <a:p>
+            <a:pPr algn="l">
+              <a:lnSpc>
+                <a:spcPct val="128000"/>
+              </a:lnSpc>
+              <a:spcBef>
+                <a:spcPts val="1000"/>
+              </a:spcBef>
+              <a:spcAft>
+                <a:spcPts val="0"/>
+              </a:spcAft>
+            </a:pPr>
+            <a:r>
+              <a:rPr sz="2300" b="1" i="0">
+                <a:solidFill>
+                  <a:srgbClr val="E33B4C"/>
+                </a:solidFill>
+                <a:latin typeface="IBM Plex Sans"/>
+              </a:rPr>
+              <a:t>the trust layer that makes AI admissible in investigative work.</a:t>
+            </a:r>
+          </a:p>
+          <a:p>
+            <a:pPr algn="l">
+              <a:lnSpc>
+                <a:spcPct val="128000"/>
+              </a:lnSpc>
+              <a:spcBef>
+                <a:spcPts val="3000"/>
+              </a:spcBef>
+              <a:spcAft>
+                <a:spcPts val="0"/>
+              </a:spcAft>
+            </a:pPr>
+            <a:r>
+              <a:rPr sz="1600" b="0" i="0">
+                <a:solidFill>
+                  <a:srgbClr val="F7F7F8"/>
+                </a:solidFill>
+                <a:latin typeface="IBM Plex Sans"/>
+              </a:rPr>
+              <a:t>Only ~25% of anti-fraud programmes use AI/ML today — and only </a:t>
+            </a:r>
+            <a:r>
+              <a:rPr sz="1600" b="1" i="0">
+                <a:solidFill>
+                  <a:srgbClr val="F7F7F8"/>
+                </a:solidFill>
+                <a:latin typeface="IBM Plex Sans"/>
+              </a:rPr>
+              <a:t>~6% of fraud examiners are confident explaining how their AI reaches its conclusions.</a:t>
+            </a:r>
+          </a:p>
+          <a:p>
+            <a:pPr algn="l">
+              <a:lnSpc>
+                <a:spcPct val="128000"/>
+              </a:lnSpc>
+              <a:spcBef>
+                <a:spcPts val="800"/>
+              </a:spcBef>
+              <a:spcAft>
+                <a:spcPts val="0"/>
+              </a:spcAft>
+            </a:pPr>
+            <a:r>
+              <a:rPr sz="1200" b="0" i="1">
+                <a:solidFill>
+                  <a:srgbClr val="9A9DA5"/>
+                </a:solidFill>
+                <a:latin typeface="IBM Plex Sans"/>
+              </a:rPr>
+              <a:t>ACFE 2026 anti-fraud technology benchmarking</a:t>
+            </a:r>
+          </a:p>
+        </p:txBody>
+      </p:sp>
+    </p:spTree>
+  </p:cSld>
+  <p:clrMapOvr>
+    <a:masterClrMapping/>
+  </p:clrMapOvr>
+</p:sld>
+</file>
+
+<file path=ppt/slides/slide4.xml><?xml version="1.0" encoding="utf-8"?>
+<p:sld xmlns:a="http://schemas.openxmlformats.org/drawingml/2006/main" xmlns:p="http://schemas.openxmlformats.org/presentationml/2006/main" xmlns:r="http://schemas.openxmlformats.org/officeDocument/2006/relationships">
+  <p:cSld>
+    <p:bg>
+      <p:bgPr>
+        <a:solidFill>
+          <a:srgbClr val="0B0C0F"/>
+        </a:solidFill>
+        <a:effectLst/>
+      </p:bgPr>
+    </p:bg>
+    <p:spTree>
+      <p:nvGrpSpPr>
+        <p:cNvPr id="1" name=""/>
+        <p:cNvGrpSpPr/>
+        <p:nvPr/>
+      </p:nvGrpSpPr>
+      <p:grpSpPr/>
+      <p:sp>
+        <p:nvSpPr>
+          <p:cNvPr id="2" name="TextBox 1"/>
+          <p:cNvSpPr txBox="1"/>
+          <p:nvPr/>
+        </p:nvSpPr>
+        <p:spPr>
+          <a:xfrm>
+            <a:off x="777240" y="502920"/>
+            <a:ext cx="10637215" cy="274320"/>
+          </a:xfrm>
+          <a:prstGeom prst="rect">
+            <a:avLst/>
+          </a:prstGeom>
+          <a:noFill/>
+        </p:spPr>
+        <p:txBody>
+          <a:bodyPr wrap="square" lIns="0" rIns="0" tIns="0" bIns="0">
+            <a:spAutoFit/>
+          </a:bodyPr>
+          <a:lstStyle/>
+          <a:p>
+            <a:pPr algn="l">
+              <a:lnSpc>
+                <a:spcPct val="128000"/>
+              </a:lnSpc>
+              <a:spcBef>
+                <a:spcPts val="0"/>
+              </a:spcBef>
+              <a:spcAft>
+                <a:spcPts val="0"/>
+              </a:spcAft>
+              <a:defRPr>
+                <a:latin typeface="IBM Plex Mono"/>
+              </a:defRPr>
+            </a:pPr>
+            <a:r>
+              <a:rPr sz="1100" b="1" i="0">
+                <a:solidFill>
+                  <a:srgbClr val="E33B4C"/>
+                </a:solidFill>
+                <a:latin typeface="IBM Plex Mono"/>
+              </a:rPr>
+              <a:t>PRODUCT</a:t>
+            </a:r>
+          </a:p>
+        </p:txBody>
+      </p:sp>
+      <p:sp>
+        <p:nvSpPr>
+          <p:cNvPr id="3" name="TextBox 2"/>
+          <p:cNvSpPr txBox="1"/>
+          <p:nvPr/>
+        </p:nvSpPr>
+        <p:spPr>
+          <a:xfrm>
+            <a:off x="777240" y="868680"/>
+            <a:ext cx="10637215" cy="914400"/>
+          </a:xfrm>
+          <a:prstGeom prst="rect">
+            <a:avLst/>
+          </a:prstGeom>
+          <a:noFill/>
+        </p:spPr>
+        <p:txBody>
+          <a:bodyPr wrap="square" lIns="0" rIns="0" tIns="0" bIns="0">
+            <a:spAutoFit/>
+          </a:bodyPr>
+          <a:lstStyle/>
+          <a:p>
+            <a:pPr algn="l">
+              <a:lnSpc>
+                <a:spcPct val="110000"/>
+              </a:lnSpc>
+              <a:spcBef>
+                <a:spcPts val="0"/>
+              </a:spcBef>
+              <a:spcAft>
+                <a:spcPts val="0"/>
+              </a:spcAft>
+            </a:pPr>
+            <a:r>
+              <a:rPr sz="3200" b="1" i="0">
+                <a:solidFill>
+                  <a:srgbClr val="F7F7F8"/>
+                </a:solidFill>
+                <a:latin typeface="Space Grotesk"/>
+              </a:rPr>
+              <a:t>Evidence in. One connected model out.</a:t>
+            </a:r>
+          </a:p>
+        </p:txBody>
+      </p:sp>
+      <p:sp>
+        <p:nvSpPr>
+          <p:cNvPr id="4" name="Rectangle 3"/>
+          <p:cNvSpPr/>
+          <p:nvPr/>
+        </p:nvSpPr>
+        <p:spPr>
+          <a:xfrm>
+            <a:off x="777240" y="1691640"/>
+            <a:ext cx="1005840" cy="31750"/>
+          </a:xfrm>
+          <a:prstGeom prst="rect">
+            <a:avLst/>
+          </a:prstGeom>
+          <a:solidFill>
+            <a:srgbClr val="E33B4C"/>
+          </a:solidFill>
+          <a:ln>
+            <a:noFill/>
+          </a:ln>
+          <a:effectLst/>
+        </p:spPr>
+        <p:style>
+          <a:lnRef idx="1">
+            <a:schemeClr val="accent1"/>
+          </a:lnRef>
+          <a:fillRef idx="3">
+            <a:schemeClr val="accent1"/>
+          </a:fillRef>
+          <a:effectRef idx="2">
+            <a:schemeClr val="accent1"/>
+          </a:effectRef>
+          <a:fontRef idx="minor">
+            <a:schemeClr val="lt1"/>
+          </a:fontRef>
+        </p:style>
+        <p:txBody>
+          <a:bodyPr rtlCol="0" anchor="ctr"/>
+          <a:lstStyle/>
+          <a:p>
+            <a:pPr algn="ctr"/>
+          </a:p>
+        </p:txBody>
+      </p:sp>
+      <p:sp>
+        <p:nvSpPr>
           <p:cNvPr id="5" name="Rectangle 4"/>
           <p:cNvSpPr/>
           <p:nvPr/>
@@ -6353,11 +6916,11 @@
             <a:avLst/>
           </a:prstGeom>
           <a:solidFill>
-            <a:srgbClr val="18212B"/>
+            <a:srgbClr val="111216"/>
           </a:solidFill>
           <a:ln w="12700">
             <a:solidFill>
-              <a:srgbClr val="6E879B"/>
+              <a:srgbClr val="3B3D44"/>
             </a:solidFill>
           </a:ln>
           <a:effectLst/>
@@ -6394,9 +6957,9 @@
             <a:r>
               <a:rPr sz="1300" b="1" i="0">
                 <a:solidFill>
-                  <a:srgbClr val="E8B339"/>
-                </a:solidFill>
-                <a:latin typeface="Helvetica Neue"/>
+                  <a:srgbClr val="E33B4C"/>
+                </a:solidFill>
+                <a:latin typeface="IBM Plex Sans"/>
               </a:rPr>
               <a:t>SCREENSHOT — A LOUPE</a:t>
             </a:r>
@@ -6416,9 +6979,9 @@
             <a:r>
               <a:rPr sz="1400" b="0" i="0">
                 <a:solidFill>
-                  <a:srgbClr val="9AA7B4"/>
-                </a:solidFill>
-                <a:latin typeface="Helvetica Neue"/>
+                  <a:srgbClr val="9A9DA5"/>
+                </a:solidFill>
+                <a:latin typeface="IBM Plex Sans"/>
               </a:rPr>
               <a:t>Five highlighted passages from three documents,
 bound into one evidenced narrative timeline.</a:t>
@@ -6441,11 +7004,11 @@
             <a:avLst/>
           </a:prstGeom>
           <a:solidFill>
-            <a:srgbClr val="18212B"/>
+            <a:srgbClr val="111216"/>
           </a:solidFill>
           <a:ln w="12700">
             <a:solidFill>
-              <a:srgbClr val="6E879B"/>
+              <a:srgbClr val="3B3D44"/>
             </a:solidFill>
           </a:ln>
           <a:effectLst/>
@@ -6482,9 +7045,9 @@
             <a:r>
               <a:rPr sz="1300" b="1" i="0">
                 <a:solidFill>
-                  <a:srgbClr val="E8B339"/>
-                </a:solidFill>
-                <a:latin typeface="Helvetica Neue"/>
+                  <a:srgbClr val="E33B4C"/>
+                </a:solidFill>
+                <a:latin typeface="IBM Plex Sans"/>
               </a:rPr>
               <a:t>SCREENSHOT — CITED AI ANSWER, MID-CLICK</a:t>
             </a:r>
@@ -6504,9 +7067,9 @@
             <a:r>
               <a:rPr sz="1400" b="0" i="0">
                 <a:solidFill>
-                  <a:srgbClr val="9AA7B4"/>
-                </a:solidFill>
-                <a:latin typeface="Helvetica Neue"/>
+                  <a:srgbClr val="9A9DA5"/>
+                </a:solidFill>
+                <a:latin typeface="IBM Plex Sans"/>
               </a:rPr>
               <a:t>Opening the source document
 at the cited page.</a:t>
@@ -6550,9 +7113,9 @@
             <a:r>
               <a:rPr sz="1800" b="0" i="0">
                 <a:solidFill>
-                  <a:srgbClr val="F4F6F8"/>
-                </a:solidFill>
-                <a:latin typeface="Helvetica Neue"/>
+                  <a:srgbClr val="F7F7F8"/>
+                </a:solidFill>
+                <a:latin typeface="IBM Plex Sans"/>
               </a:rPr>
               <a:t>Every fact carries the verbatim quote, source location and confidence it rests on.</a:t>
             </a:r>
@@ -6572,27 +7135,27 @@
             <a:r>
               <a:rPr sz="1500" b="0" i="0">
                 <a:solidFill>
-                  <a:srgbClr val="9AA7B4"/>
-                </a:solidFill>
-                <a:latin typeface="Helvetica Neue"/>
+                  <a:srgbClr val="9A9DA5"/>
+                </a:solidFill>
+                <a:latin typeface="IBM Plex Sans"/>
               </a:rPr>
               <a:t>Investigators highlight what matters and bind it into </a:t>
             </a:r>
             <a:r>
               <a:rPr sz="1500" b="1" i="0">
                 <a:solidFill>
-                  <a:srgbClr val="9AA7B4"/>
-                </a:solidFill>
-                <a:latin typeface="Helvetica Neue"/>
+                  <a:srgbClr val="9A9DA5"/>
+                </a:solidFill>
+                <a:latin typeface="IBM Plex Sans"/>
               </a:rPr>
               <a:t>Loupes</a:t>
             </a:r>
             <a:r>
               <a:rPr sz="1500" b="0" i="0">
                 <a:solidFill>
-                  <a:srgbClr val="9AA7B4"/>
-                </a:solidFill>
-                <a:latin typeface="Helvetica Neue"/>
+                  <a:srgbClr val="9A9DA5"/>
+                </a:solidFill>
+                <a:latin typeface="IBM Plex Sans"/>
               </a:rPr>
               <a:t> — evidenced collections that carry the narrative, not just the extraction. The product is named after them.</a:t>
             </a:r>
@@ -6612,9 +7175,9 @@
             <a:r>
               <a:rPr sz="1700" b="1" i="0">
                 <a:solidFill>
-                  <a:srgbClr val="E8B339"/>
-                </a:solidFill>
-                <a:latin typeface="Helvetica Neue"/>
+                  <a:srgbClr val="E33B4C"/>
+                </a:solidFill>
+                <a:latin typeface="IBM Plex Sans"/>
               </a:rPr>
               <a:t>Ingest  →  Ground  →  Connect  →  Explore  →  Prove</a:t>
             </a:r>
@@ -6635,7 +7198,7 @@
     <p:bg>
       <p:bgPr>
         <a:solidFill>
-          <a:srgbClr val="0E141B"/>
+          <a:srgbClr val="0B0C0F"/>
         </a:solidFill>
         <a:effectLst/>
       </p:bgPr>
@@ -6680,15 +7243,15 @@
                 <a:spcPts val="0"/>
               </a:spcAft>
               <a:defRPr>
-                <a:latin typeface="Helvetica Neue"/>
+                <a:latin typeface="IBM Plex Mono"/>
               </a:defRPr>
             </a:pPr>
             <a:r>
               <a:rPr sz="1100" b="1" i="0">
                 <a:solidFill>
-                  <a:srgbClr val="E8B339"/>
-                </a:solidFill>
-                <a:latin typeface="Helvetica Neue"/>
+                  <a:srgbClr val="E33B4C"/>
+                </a:solidFill>
+                <a:latin typeface="IBM Plex Mono"/>
               </a:rPr>
               <a:t>DIFFERENTIATION</a:t>
             </a:r>
@@ -6731,9 +7294,9 @@
             <a:r>
               <a:rPr sz="3200" b="1" i="0">
                 <a:solidFill>
-                  <a:srgbClr val="F4F6F8"/>
-                </a:solidFill>
-                <a:latin typeface="Helvetica Neue"/>
+                  <a:srgbClr val="F7F7F8"/>
+                </a:solidFill>
+                <a:latin typeface="Space Grotesk"/>
               </a:rPr>
               <a:t>Why this isn't ChatGPT with files.</a:t>
             </a:r>
@@ -6783,9 +7346,9 @@
                       <a:r>
                         <a:rPr sz="1300" b="1" i="0">
                           <a:solidFill>
-                            <a:srgbClr val="9AA7B4"/>
+                            <a:srgbClr val="9A9DA5"/>
                           </a:solidFill>
-                          <a:latin typeface="Helvetica Neue"/>
+                          <a:latin typeface="IBM Plex Sans"/>
                         </a:rPr>
                         <a:t/>
                       </a:r>
@@ -6793,7 +7356,7 @@
                   </a:txBody>
                   <a:tcPr marL="109728" marT="45720" marB="45720">
                     <a:solidFill>
-                      <a:srgbClr val="0E141B"/>
+                      <a:srgbClr val="0B0C0F"/>
                     </a:solidFill>
                   </a:tcPr>
                 </a:tc>
@@ -6816,9 +7379,9 @@
                       <a:r>
                         <a:rPr sz="1300" b="1" i="0">
                           <a:solidFill>
-                            <a:srgbClr val="9AA7B4"/>
+                            <a:srgbClr val="9A9DA5"/>
                           </a:solidFill>
-                          <a:latin typeface="Helvetica Neue"/>
+                          <a:latin typeface="IBM Plex Sans"/>
                         </a:rPr>
                         <a:t>A straight LLM</a:t>
                       </a:r>
@@ -6826,7 +7389,7 @@
                   </a:txBody>
                   <a:tcPr marL="109728" marT="45720" marB="45720">
                     <a:solidFill>
-                      <a:srgbClr val="0E141B"/>
+                      <a:srgbClr val="0B0C0F"/>
                     </a:solidFill>
                   </a:tcPr>
                 </a:tc>
@@ -6849,9 +7412,9 @@
                       <a:r>
                         <a:rPr sz="1300" b="1" i="0">
                           <a:solidFill>
-                            <a:srgbClr val="E8B339"/>
+                            <a:srgbClr val="E33B4C"/>
                           </a:solidFill>
-                          <a:latin typeface="Helvetica Neue"/>
+                          <a:latin typeface="IBM Plex Sans"/>
                         </a:rPr>
                         <a:t>Loupe</a:t>
                       </a:r>
@@ -6859,7 +7422,7 @@
                   </a:txBody>
                   <a:tcPr marL="109728" marT="45720" marB="45720">
                     <a:solidFill>
-                      <a:srgbClr val="0E141B"/>
+                      <a:srgbClr val="0B0C0F"/>
                     </a:solidFill>
                   </a:tcPr>
                 </a:tc>
@@ -6884,9 +7447,9 @@
                       <a:r>
                         <a:rPr sz="1200" b="1" i="0">
                           <a:solidFill>
-                            <a:srgbClr val="F4F6F8"/>
+                            <a:srgbClr val="F7F7F8"/>
                           </a:solidFill>
-                          <a:latin typeface="Helvetica Neue"/>
+                          <a:latin typeface="IBM Plex Sans"/>
                         </a:rPr>
                         <a:t>Where the case lives</a:t>
                       </a:r>
@@ -6894,7 +7457,7 @@
                   </a:txBody>
                   <a:tcPr marL="109728" marT="41148" marB="41148">
                     <a:solidFill>
-                      <a:srgbClr val="18212B"/>
+                      <a:srgbClr val="111216"/>
                     </a:solidFill>
                   </a:tcPr>
                 </a:tc>
@@ -6917,9 +7480,9 @@
                       <a:r>
                         <a:rPr sz="1200" b="0" i="0">
                           <a:solidFill>
-                            <a:srgbClr val="9AA7B4"/>
+                            <a:srgbClr val="9A9DA5"/>
                           </a:solidFill>
-                          <a:latin typeface="Helvetica Neue"/>
+                          <a:latin typeface="IBM Plex Sans"/>
                         </a:rPr>
                         <a:t>A context window, forgotten after</a:t>
                       </a:r>
@@ -6927,7 +7490,7 @@
                   </a:txBody>
                   <a:tcPr marL="109728" marT="41148" marB="41148">
                     <a:solidFill>
-                      <a:srgbClr val="18212B"/>
+                      <a:srgbClr val="111216"/>
                     </a:solidFill>
                   </a:tcPr>
                 </a:tc>
@@ -6950,9 +7513,9 @@
                       <a:r>
                         <a:rPr sz="1200" b="0" i="0">
                           <a:solidFill>
-                            <a:srgbClr val="F4F6F8"/>
+                            <a:srgbClr val="F7F7F8"/>
                           </a:solidFill>
-                          <a:latin typeface="Helvetica Neue"/>
+                          <a:latin typeface="IBM Plex Sans"/>
                         </a:rPr>
                         <a:t>A persistent case knowledge graph — outlives every conversation</a:t>
                       </a:r>
@@ -6960,7 +7523,7 @@
                   </a:txBody>
                   <a:tcPr marL="109728" marT="41148" marB="41148">
                     <a:solidFill>
-                      <a:srgbClr val="18212B"/>
+                      <a:srgbClr val="111216"/>
                     </a:solidFill>
                   </a:tcPr>
                 </a:tc>
@@ -6985,9 +7548,9 @@
                       <a:r>
                         <a:rPr sz="1200" b="1" i="0">
                           <a:solidFill>
-                            <a:srgbClr val="F4F6F8"/>
+                            <a:srgbClr val="F7F7F8"/>
                           </a:solidFill>
-                          <a:latin typeface="Helvetica Neue"/>
+                          <a:latin typeface="IBM Plex Sans"/>
                         </a:rPr>
                         <a:t>Scale</a:t>
                       </a:r>
@@ -6995,7 +7558,7 @@
                   </a:txBody>
                   <a:tcPr marL="109728" marT="41148" marB="41148">
                     <a:solidFill>
-                      <a:srgbClr val="0E141B"/>
+                      <a:srgbClr val="0B0C0F"/>
                     </a:solidFill>
                   </a:tcPr>
                 </a:tc>
@@ -7018,9 +7581,9 @@
                       <a:r>
                         <a:rPr sz="1200" b="0" i="0">
                           <a:solidFill>
-                            <a:srgbClr val="9AA7B4"/>
+                            <a:srgbClr val="9A9DA5"/>
                           </a:solidFill>
-                          <a:latin typeface="Helvetica Neue"/>
+                          <a:latin typeface="IBM Plex Sans"/>
                         </a:rPr>
                         <a:t>Hundreds of pages at best</a:t>
                       </a:r>
@@ -7028,7 +7591,7 @@
                   </a:txBody>
                   <a:tcPr marL="109728" marT="41148" marB="41148">
                     <a:solidFill>
-                      <a:srgbClr val="0E141B"/>
+                      <a:srgbClr val="0B0C0F"/>
                     </a:solidFill>
                   </a:tcPr>
                 </a:tc>
@@ -7051,9 +7614,9 @@
                       <a:r>
                         <a:rPr sz="1200" b="0" i="0">
                           <a:solidFill>
-                            <a:srgbClr val="F4F6F8"/>
+                            <a:srgbClr val="F7F7F8"/>
                           </a:solidFill>
-                          <a:latin typeface="Helvetica Neue"/>
+                          <a:latin typeface="IBM Plex Sans"/>
                         </a:rPr>
                         <a:t>Entire corpora: thousands of documents, multi-gigabyte phone reports</a:t>
                       </a:r>
@@ -7061,7 +7624,7 @@
                   </a:txBody>
                   <a:tcPr marL="109728" marT="41148" marB="41148">
                     <a:solidFill>
-                      <a:srgbClr val="0E141B"/>
+                      <a:srgbClr val="0B0C0F"/>
                     </a:solidFill>
                   </a:tcPr>
                 </a:tc>
@@ -7086,9 +7649,9 @@
                       <a:r>
                         <a:rPr sz="1200" b="1" i="0">
                           <a:solidFill>
-                            <a:srgbClr val="F4F6F8"/>
+                            <a:srgbClr val="F7F7F8"/>
                           </a:solidFill>
-                          <a:latin typeface="Helvetica Neue"/>
+                          <a:latin typeface="IBM Plex Sans"/>
                         </a:rPr>
                         <a:t>What the AI does</a:t>
                       </a:r>
@@ -7096,7 +7659,7 @@
                   </a:txBody>
                   <a:tcPr marL="109728" marT="41148" marB="41148">
                     <a:solidFill>
-                      <a:srgbClr val="18212B"/>
+                      <a:srgbClr val="111216"/>
                     </a:solidFill>
                   </a:tcPr>
                 </a:tc>
@@ -7119,9 +7682,9 @@
                       <a:r>
                         <a:rPr sz="1200" b="0" i="0">
                           <a:solidFill>
-                            <a:srgbClr val="9AA7B4"/>
+                            <a:srgbClr val="9A9DA5"/>
                           </a:solidFill>
-                          <a:latin typeface="Helvetica Neue"/>
+                          <a:latin typeface="IBM Plex Sans"/>
                         </a:rPr>
                         <a:t>Answers in prose, one conversation at a time</a:t>
                       </a:r>
@@ -7129,7 +7692,7 @@
                   </a:txBody>
                   <a:tcPr marL="109728" marT="41148" marB="41148">
                     <a:solidFill>
-                      <a:srgbClr val="18212B"/>
+                      <a:srgbClr val="111216"/>
                     </a:solidFill>
                   </a:tcPr>
                 </a:tc>
@@ -7152,9 +7715,9 @@
                       <a:r>
                         <a:rPr sz="1200" b="0" i="0">
                           <a:solidFill>
-                            <a:srgbClr val="F4F6F8"/>
+                            <a:srgbClr val="F7F7F8"/>
                           </a:solidFill>
-                          <a:latin typeface="Helvetica Neue"/>
+                          <a:latin typeface="IBM Plex Sans"/>
                         </a:rPr>
                         <a:t>Cites every claim to the page — and runs tools: builds Loupes, groupings and outputs from plain instruction</a:t>
                       </a:r>
@@ -7162,7 +7725,7 @@
                   </a:txBody>
                   <a:tcPr marL="109728" marT="41148" marB="41148">
                     <a:solidFill>
-                      <a:srgbClr val="18212B"/>
+                      <a:srgbClr val="111216"/>
                     </a:solidFill>
                   </a:tcPr>
                 </a:tc>
@@ -7187,9 +7750,9 @@
                       <a:r>
                         <a:rPr sz="1200" b="1" i="0">
                           <a:solidFill>
-                            <a:srgbClr val="F4F6F8"/>
+                            <a:srgbClr val="F7F7F8"/>
                           </a:solidFill>
-                          <a:latin typeface="Helvetica Neue"/>
+                          <a:latin typeface="IBM Plex Sans"/>
                         </a:rPr>
                         <a:t>Confidentiality</a:t>
                       </a:r>
@@ -7197,7 +7760,7 @@
                   </a:txBody>
                   <a:tcPr marL="109728" marT="41148" marB="41148">
                     <a:solidFill>
-                      <a:srgbClr val="0E141B"/>
+                      <a:srgbClr val="0B0C0F"/>
                     </a:solidFill>
                   </a:tcPr>
                 </a:tc>
@@ -7220,9 +7783,9 @@
                       <a:r>
                         <a:rPr sz="1200" b="0" i="0">
                           <a:solidFill>
-                            <a:srgbClr val="9AA7B4"/>
+                            <a:srgbClr val="9A9DA5"/>
                           </a:solidFill>
-                          <a:latin typeface="Helvetica Neue"/>
+                          <a:latin typeface="IBM Plex Sans"/>
                         </a:rPr>
                         <a:t>Multi-tenant cloud</a:t>
                       </a:r>
@@ -7230,7 +7793,7 @@
                   </a:txBody>
                   <a:tcPr marL="109728" marT="41148" marB="41148">
                     <a:solidFill>
-                      <a:srgbClr val="0E141B"/>
+                      <a:srgbClr val="0B0C0F"/>
                     </a:solidFill>
                   </a:tcPr>
                 </a:tc>
@@ -7253,9 +7816,9 @@
                       <a:r>
                         <a:rPr sz="1200" b="0" i="0">
                           <a:solidFill>
-                            <a:srgbClr val="F4F6F8"/>
+                            <a:srgbClr val="F7F7F8"/>
                           </a:solidFill>
-                          <a:latin typeface="Helvetica Neue"/>
+                          <a:latin typeface="IBM Plex Sans"/>
                         </a:rPr>
                         <a:t>Single-tenant: evidence never leaves the customer's instance</a:t>
                       </a:r>
@@ -7263,7 +7826,7 @@
                   </a:txBody>
                   <a:tcPr marL="109728" marT="41148" marB="41148">
                     <a:solidFill>
-                      <a:srgbClr val="0E141B"/>
+                      <a:srgbClr val="0B0C0F"/>
                     </a:solidFill>
                   </a:tcPr>
                 </a:tc>
@@ -7288,9 +7851,9 @@
                       <a:r>
                         <a:rPr sz="1200" b="1" i="0">
                           <a:solidFill>
-                            <a:srgbClr val="F4F6F8"/>
+                            <a:srgbClr val="F7F7F8"/>
                           </a:solidFill>
-                          <a:latin typeface="Helvetica Neue"/>
+                          <a:latin typeface="IBM Plex Sans"/>
                         </a:rPr>
                         <a:t>Human judgment</a:t>
                       </a:r>
@@ -7298,7 +7861,7 @@
                   </a:txBody>
                   <a:tcPr marL="109728" marT="41148" marB="41148">
                     <a:solidFill>
-                      <a:srgbClr val="18212B"/>
+                      <a:srgbClr val="111216"/>
                     </a:solidFill>
                   </a:tcPr>
                 </a:tc>
@@ -7321,9 +7884,9 @@
                       <a:r>
                         <a:rPr sz="1200" b="0" i="0">
                           <a:solidFill>
-                            <a:srgbClr val="9AA7B4"/>
+                            <a:srgbClr val="9A9DA5"/>
                           </a:solidFill>
-                          <a:latin typeface="Helvetica Neue"/>
+                          <a:latin typeface="IBM Plex Sans"/>
                         </a:rPr>
                         <a:t>Lives outside the tool — lost between sessions</a:t>
                       </a:r>
@@ -7331,7 +7894,7 @@
                   </a:txBody>
                   <a:tcPr marL="109728" marT="41148" marB="41148">
                     <a:solidFill>
-                      <a:srgbClr val="18212B"/>
+                      <a:srgbClr val="111216"/>
                     </a:solidFill>
                   </a:tcPr>
                 </a:tc>
@@ -7354,9 +7917,9 @@
                       <a:r>
                         <a:rPr sz="1200" b="0" i="0">
                           <a:solidFill>
-                            <a:srgbClr val="F4F6F8"/>
+                            <a:srgbClr val="F7F7F8"/>
                           </a:solidFill>
-                          <a:latin typeface="Helvetica Neue"/>
+                          <a:latin typeface="IBM Plex Sans"/>
                         </a:rPr>
                         <a:t>Highlights, significance and Loupes — bonded collections of evidence — are durable objects in the case model</a:t>
                       </a:r>
@@ -7364,7 +7927,7 @@
                   </a:txBody>
                   <a:tcPr marL="109728" marT="41148" marB="41148">
                     <a:solidFill>
-                      <a:srgbClr val="18212B"/>
+                      <a:srgbClr val="111216"/>
                     </a:solidFill>
                   </a:tcPr>
                 </a:tc>
@@ -7389,9 +7952,9 @@
                       <a:r>
                         <a:rPr sz="1200" b="1" i="0">
                           <a:solidFill>
-                            <a:srgbClr val="F4F6F8"/>
+                            <a:srgbClr val="F7F7F8"/>
                           </a:solidFill>
-                          <a:latin typeface="Helvetica Neue"/>
+                          <a:latin typeface="IBM Plex Sans"/>
                         </a:rPr>
                         <a:t>Model dependence</a:t>
                       </a:r>
@@ -7399,7 +7962,7 @@
                   </a:txBody>
                   <a:tcPr marL="109728" marT="41148" marB="41148">
                     <a:solidFill>
-                      <a:srgbClr val="0E141B"/>
+                      <a:srgbClr val="0B0C0F"/>
                     </a:solidFill>
                   </a:tcPr>
                 </a:tc>
@@ -7422,9 +7985,9 @@
                       <a:r>
                         <a:rPr sz="1200" b="0" i="0">
                           <a:solidFill>
-                            <a:srgbClr val="9AA7B4"/>
+                            <a:srgbClr val="9A9DA5"/>
                           </a:solidFill>
-                          <a:latin typeface="Helvetica Neue"/>
+                          <a:latin typeface="IBM Plex Sans"/>
                         </a:rPr>
                         <a:t>The model is the product</a:t>
                       </a:r>
@@ -7432,7 +7995,7 @@
                   </a:txBody>
                   <a:tcPr marL="109728" marT="41148" marB="41148">
                     <a:solidFill>
-                      <a:srgbClr val="0E141B"/>
+                      <a:srgbClr val="0B0C0F"/>
                     </a:solidFill>
                   </a:tcPr>
                 </a:tc>
@@ -7455,9 +8018,9 @@
                       <a:r>
                         <a:rPr sz="1200" b="0" i="0">
                           <a:solidFill>
-                            <a:srgbClr val="F4F6F8"/>
+                            <a:srgbClr val="F7F7F8"/>
                           </a:solidFill>
-                          <a:latin typeface="Helvetica Neue"/>
+                          <a:latin typeface="IBM Plex Sans"/>
                         </a:rPr>
                         <a:t>Models are interchangeable components. The moat is the evidence layer.</a:t>
                       </a:r>
@@ -7465,7 +8028,7 @@
                   </a:txBody>
                   <a:tcPr marL="109728" marT="41148" marB="41148">
                     <a:solidFill>
-                      <a:srgbClr val="0E141B"/>
+                      <a:srgbClr val="0B0C0F"/>
                     </a:solidFill>
                   </a:tcPr>
                 </a:tc>
@@ -7510,18 +8073,18 @@
             <a:r>
               <a:rPr sz="1600" b="0" i="0">
                 <a:solidFill>
-                  <a:srgbClr val="F4F6F8"/>
-                </a:solidFill>
-                <a:latin typeface="Helvetica Neue"/>
+                  <a:srgbClr val="F7F7F8"/>
+                </a:solidFill>
+                <a:latin typeface="IBM Plex Sans"/>
               </a:rPr>
               <a:t>A straight LLM gives you a well-written opinion about the fraction of the evidence that fits in its context window. Loupe gives you a complete, permanent, cross-referenced model of all of it — where </a:t>
             </a:r>
             <a:r>
               <a:rPr sz="1600" b="1" i="0">
                 <a:solidFill>
-                  <a:srgbClr val="F4F6F8"/>
-                </a:solidFill>
-                <a:latin typeface="Helvetica Neue"/>
+                  <a:srgbClr val="F7F7F8"/>
+                </a:solidFill>
+                <a:latin typeface="IBM Plex Sans"/>
               </a:rPr>
               <a:t>every claim carries its receipt.</a:t>
             </a:r>
@@ -7542,7 +8105,7 @@
     <p:bg>
       <p:bgPr>
         <a:solidFill>
-          <a:srgbClr val="0E141B"/>
+          <a:srgbClr val="0B0C0F"/>
         </a:solidFill>
         <a:effectLst/>
       </p:bgPr>
@@ -7587,15 +8150,15 @@
                 <a:spcPts val="0"/>
               </a:spcAft>
               <a:defRPr>
-                <a:latin typeface="Helvetica Neue"/>
+                <a:latin typeface="IBM Plex Mono"/>
               </a:defRPr>
             </a:pPr>
             <a:r>
               <a:rPr sz="1100" b="1" i="0">
                 <a:solidFill>
-                  <a:srgbClr val="E8B339"/>
-                </a:solidFill>
-                <a:latin typeface="Helvetica Neue"/>
+                  <a:srgbClr val="E33B4C"/>
+                </a:solidFill>
+                <a:latin typeface="IBM Plex Mono"/>
               </a:rPr>
               <a:t>MARKET AND LEAD CUSTOMER</a:t>
             </a:r>
@@ -7638,9 +8201,9 @@
             <a:r>
               <a:rPr sz="2900" b="1" i="0">
                 <a:solidFill>
-                  <a:srgbClr val="F4F6F8"/>
-                </a:solidFill>
-                <a:latin typeface="Helvetica Neue"/>
+                  <a:srgbClr val="F7F7F8"/>
+                </a:solidFill>
+                <a:latin typeface="Space Grotesk"/>
               </a:rPr>
               <a:t>Every feature was requested by a working
 investigator on a live case.</a:t>
@@ -7663,7 +8226,7 @@
             <a:avLst/>
           </a:prstGeom>
           <a:solidFill>
-            <a:srgbClr val="E8B339"/>
+            <a:srgbClr val="E33B4C"/>
           </a:solidFill>
           <a:ln>
             <a:noFill/>
@@ -7728,18 +8291,18 @@
             <a:r>
               <a:rPr sz="1300" b="0" i="0">
                 <a:solidFill>
-                  <a:srgbClr val="F4F6F8"/>
-                </a:solidFill>
-                <a:latin typeface="Helvetica Neue"/>
+                  <a:srgbClr val="F7F7F8"/>
+                </a:solidFill>
+                <a:latin typeface="IBM Plex Sans"/>
               </a:rPr>
               <a:t>Our CPO is our design partner. Development has been customer-led from the first commit — not a roadmap we invented and then validated, but a backlog generated by real federal casework. Cases have been worked to completion in the platform, and </a:t>
             </a:r>
             <a:r>
               <a:rPr sz="1300" b="1" i="0">
                 <a:solidFill>
-                  <a:srgbClr val="F4F6F8"/>
-                </a:solidFill>
-                <a:latin typeface="Helvetica Neue"/>
+                  <a:srgbClr val="F7F7F8"/>
+                </a:solidFill>
+                <a:latin typeface="IBM Plex Sans"/>
               </a:rPr>
               <a:t>three attorneys on those cases have been given access to it.</a:t>
             </a:r>
@@ -7759,9 +8322,9 @@
             <a:r>
               <a:rPr sz="1500" b="1" i="0">
                 <a:solidFill>
-                  <a:srgbClr val="E8B339"/>
-                </a:solidFill>
-                <a:latin typeface="Helvetica Neue"/>
+                  <a:srgbClr val="E33B4C"/>
+                </a:solidFill>
+                <a:latin typeface="IBM Plex Sans"/>
               </a:rPr>
               <a:t>Why this tier is empty — and stays empty.</a:t>
             </a:r>
@@ -7781,9 +8344,9 @@
             <a:r>
               <a:rPr sz="1200" b="0" i="0">
                 <a:solidFill>
-                  <a:srgbClr val="9AA7B4"/>
-                </a:solidFill>
-                <a:latin typeface="Helvetica Neue"/>
+                  <a:srgbClr val="9A9DA5"/>
+                </a:solidFill>
+                <a:latin typeface="IBM Plex Sans"/>
               </a:rPr>
               <a:t>Enterprise investigative-intelligence platforms are sold with configuration and support attached — the right model for agencies and large institutions, who arrive with budget, procurement and implementation resource.</a:t>
             </a:r>
@@ -7803,18 +8366,18 @@
             <a:r>
               <a:rPr sz="1200" b="0" i="0">
                 <a:solidFill>
-                  <a:srgbClr val="F4F6F8"/>
-                </a:solidFill>
-                <a:latin typeface="Helvetica Neue"/>
+                  <a:srgbClr val="F7F7F8"/>
+                </a:solidFill>
+                <a:latin typeface="IBM Plex Sans"/>
               </a:rPr>
               <a:t>The tier below has the same casework complexity and the same evidence volumes — and none of that budget. </a:t>
             </a:r>
             <a:r>
               <a:rPr sz="1200" b="1" i="0">
                 <a:solidFill>
-                  <a:srgbClr val="F4F6F8"/>
-                </a:solidFill>
-                <a:latin typeface="Helvetica Neue"/>
+                  <a:srgbClr val="F7F7F8"/>
+                </a:solidFill>
+                <a:latin typeface="IBM Plex Sans"/>
               </a:rPr>
               <a:t>Loupe is built for it directly: usable out of the box, by a practice with no implementation resource at all.</a:t>
             </a:r>
@@ -7857,9 +8420,9 @@
             <a:r>
               <a:rPr sz="1200" b="1" i="0">
                 <a:solidFill>
-                  <a:srgbClr val="E8B339"/>
-                </a:solidFill>
-                <a:latin typeface="Helvetica Neue"/>
+                  <a:srgbClr val="E33B4C"/>
+                </a:solidFill>
+                <a:latin typeface="IBM Plex Sans"/>
               </a:rPr>
               <a:t>Beachhead</a:t>
             </a:r>
@@ -7879,9 +8442,9 @@
             <a:r>
               <a:rPr sz="1200" b="0" i="0">
                 <a:solidFill>
-                  <a:srgbClr val="F4F6F8"/>
-                </a:solidFill>
-                <a:latin typeface="Helvetica Neue"/>
+                  <a:srgbClr val="F7F7F8"/>
+                </a:solidFill>
+                <a:latin typeface="IBM Plex Sans"/>
               </a:rPr>
               <a:t>Boutique forensic and criminal-defence practices — 10–50 people, Big-Four-class casework without Big-Four tooling budgets.</a:t>
             </a:r>
@@ -7901,9 +8464,9 @@
             <a:r>
               <a:rPr sz="1200" b="1" i="0">
                 <a:solidFill>
-                  <a:srgbClr val="E8B339"/>
-                </a:solidFill>
-                <a:latin typeface="Helvetica Neue"/>
+                  <a:srgbClr val="E33B4C"/>
+                </a:solidFill>
+                <a:latin typeface="IBM Plex Sans"/>
               </a:rPr>
               <a:t>Expansion</a:t>
             </a:r>
@@ -7923,9 +8486,9 @@
             <a:r>
               <a:rPr sz="1200" b="0" i="0">
                 <a:solidFill>
-                  <a:srgbClr val="9AA7B4"/>
-                </a:solidFill>
-                <a:latin typeface="Helvetica Neue"/>
+                  <a:srgbClr val="9A9DA5"/>
+                </a:solidFill>
+                <a:latin typeface="IBM Plex Sans"/>
               </a:rPr>
               <a:t>Financial-crime &amp; fraud units · law enforcement &amp; prosecutors · law firms &amp; disputes teams · corporate investigations &amp; compliance.</a:t>
             </a:r>
@@ -7945,11 +8508,11 @@
             <a:r>
               <a:rPr sz="1200" b="1" i="0">
                 <a:solidFill>
-                  <a:srgbClr val="E8B339"/>
-                </a:solidFill>
-                <a:latin typeface="Helvetica Neue"/>
-              </a:rPr>
-              <a:t>Reachable</a:t>
+                  <a:srgbClr val="E33B4C"/>
+                </a:solidFill>
+                <a:latin typeface="IBM Plex Sans"/>
+              </a:rPr>
+              <a:t>Channel</a:t>
             </a:r>
           </a:p>
           <a:p>
@@ -7967,11 +8530,11 @@
             <a:r>
               <a:rPr sz="1200" b="0" i="0">
                 <a:solidFill>
-                  <a:srgbClr val="9AA7B4"/>
-                </a:solidFill>
-                <a:latin typeface="Helvetica Neue"/>
-              </a:rPr>
-              <a:t>ACFE has ~95k members and ~60k CFEs worldwide, with chapters, conferences and directories — including an Ireland chapter since 2016.</a:t>
+                  <a:srgbClr val="9A9DA5"/>
+                </a:solidFill>
+                <a:latin typeface="IBM Plex Sans"/>
+              </a:rPr>
+              <a:t>This buyer is organised and reachable. ACFE has ~95k members and ~60k CFEs worldwide, with chapters, conferences and directories — including an Ireland chapter since 2016. The defence bar is the same shape: a competitor reached national presence through a national association and one state bar.</a:t>
             </a:r>
           </a:p>
           <a:p>
@@ -7989,11 +8552,11 @@
             <a:r>
               <a:rPr sz="1200" b="1" i="0">
                 <a:solidFill>
-                  <a:srgbClr val="E8B339"/>
-                </a:solidFill>
-                <a:latin typeface="Helvetica Neue"/>
-              </a:rPr>
-              <a:t>Adjacent validation</a:t>
+                  <a:srgbClr val="E33B4C"/>
+                </a:solidFill>
+                <a:latin typeface="IBM Plex Sans"/>
+              </a:rPr>
+              <a:t>Why we know the gap is real</a:t>
             </a:r>
           </a:p>
           <a:p>
@@ -8009,13 +8572,13 @@
               </a:spcAft>
             </a:pPr>
             <a:r>
-              <a:rPr sz="1200" b="0" i="0">
-                <a:solidFill>
-                  <a:srgbClr val="9AA7B4"/>
-                </a:solidFill>
-                <a:latin typeface="Helvetica Neue"/>
-              </a:rPr>
-              <a:t>Harvey at ~$190M ARR and an $11B valuation proves legal-AI spend is real — and stays BigLaw-focused, leaving the boutique tier open.</a:t>
+              <a:rPr sz="1200" b="1" i="0">
+                <a:solidFill>
+                  <a:srgbClr val="F7F7F8"/>
+                </a:solidFill>
+                <a:latin typeface="IBM Plex Sans"/>
+              </a:rPr>
+              <a:t>We tried a number of platforms on live federal casework before we built anything. None of them could work the case.</a:t>
             </a:r>
           </a:p>
         </p:txBody>
@@ -8056,11 +8619,11 @@
             <a:r>
               <a:rPr sz="1600" b="1" i="0">
                 <a:solidFill>
-                  <a:srgbClr val="E8B339"/>
-                </a:solidFill>
-                <a:latin typeface="Helvetica Neue"/>
-              </a:rPr>
-              <a:t>We evaluated the alternatives on a live case before we built anything. That is why we know the gap is real.</a:t>
+                  <a:srgbClr val="E33B4C"/>
+                </a:solidFill>
+                <a:latin typeface="IBM Plex Sans"/>
+              </a:rPr>
+              <a:t>We did not set out to build a platform. We went looking for one, tried several, and none could work the case.</a:t>
             </a:r>
           </a:p>
         </p:txBody>
@@ -8079,7 +8642,7 @@
     <p:bg>
       <p:bgPr>
         <a:solidFill>
-          <a:srgbClr val="0E141B"/>
+          <a:srgbClr val="0B0C0F"/>
         </a:solidFill>
         <a:effectLst/>
       </p:bgPr>
@@ -8124,17 +8687,17 @@
                 <a:spcPts val="0"/>
               </a:spcAft>
               <a:defRPr>
-                <a:latin typeface="Helvetica Neue"/>
+                <a:latin typeface="IBM Plex Mono"/>
               </a:defRPr>
             </a:pPr>
             <a:r>
               <a:rPr sz="1100" b="1" i="0">
                 <a:solidFill>
-                  <a:srgbClr val="E8B339"/>
-                </a:solidFill>
-                <a:latin typeface="Helvetica Neue"/>
-              </a:rPr>
-              <a:t>TEAM</a:t>
+                  <a:srgbClr val="E33B4C"/>
+                </a:solidFill>
+                <a:latin typeface="IBM Plex Mono"/>
+              </a:rPr>
+              <a:t>GROWTH PATH</a:t>
             </a:r>
           </a:p>
         </p:txBody>
@@ -8173,14 +8736,14 @@
               </a:spcAft>
             </a:pPr>
             <a:r>
-              <a:rPr sz="3000" b="1" i="0">
-                <a:solidFill>
-                  <a:srgbClr val="F4F6F8"/>
-                </a:solidFill>
-                <a:latin typeface="Helvetica Neue"/>
-              </a:rPr>
-              <a:t>We didn't research this market.
-We worked in it — from both sides.</a:t>
+              <a:rPr sz="2900" b="1" i="0">
+                <a:solidFill>
+                  <a:srgbClr val="F7F7F8"/>
+                </a:solidFill>
+                <a:latin typeface="Space Grotesk"/>
+              </a:rPr>
+              <a:t>Ten million in ARR is 104 firms
+and under 2% of one market.</a:t>
             </a:r>
           </a:p>
         </p:txBody>
@@ -8193,14 +8756,14 @@
         </p:nvSpPr>
         <p:spPr>
           <a:xfrm>
-            <a:off x="777240" y="1965960"/>
+            <a:off x="777240" y="1874519"/>
             <a:ext cx="1005840" cy="31750"/>
           </a:xfrm>
           <a:prstGeom prst="rect">
             <a:avLst/>
           </a:prstGeom>
           <a:solidFill>
-            <a:srgbClr val="E8B339"/>
+            <a:srgbClr val="E33B4C"/>
           </a:solidFill>
           <a:ln>
             <a:noFill/>
@@ -8237,8 +8800,8 @@
         </p:nvSpPr>
         <p:spPr>
           <a:xfrm>
-            <a:off x="777240" y="2286000"/>
-            <a:ext cx="3291840" cy="3291840"/>
+            <a:off x="777240" y="2103120"/>
+            <a:ext cx="10637215" cy="640080"/>
           </a:xfrm>
           <a:prstGeom prst="rect">
             <a:avLst/>
@@ -8263,93 +8826,71 @@
               </a:spcAft>
             </a:pPr>
             <a:r>
-              <a:rPr sz="1900" b="1" i="0">
-                <a:solidFill>
-                  <a:srgbClr val="F4F6F8"/>
-                </a:solidFill>
-                <a:latin typeface="Helvetica Neue"/>
-              </a:rPr>
-              <a:t>Neil Byrne</a:t>
-            </a:r>
-          </a:p>
-          <a:p>
-            <a:pPr algn="l">
-              <a:lnSpc>
-                <a:spcPct val="128000"/>
-              </a:lnSpc>
-              <a:spcBef>
-                <a:spcPts val="300"/>
-              </a:spcBef>
-              <a:spcAft>
-                <a:spcPts val="0"/>
-              </a:spcAft>
-            </a:pPr>
-            <a:r>
-              <a:rPr sz="1200" b="1" i="0">
-                <a:solidFill>
-                  <a:srgbClr val="E8B339"/>
-                </a:solidFill>
-                <a:latin typeface="Helvetica Neue"/>
-              </a:rPr>
-              <a:t>CEO</a:t>
-            </a:r>
-          </a:p>
-          <a:p>
-            <a:pPr algn="l">
-              <a:lnSpc>
-                <a:spcPct val="128000"/>
-              </a:lnSpc>
-              <a:spcBef>
-                <a:spcPts val="1000"/>
-              </a:spcBef>
-              <a:spcAft>
-                <a:spcPts val="0"/>
-              </a:spcAft>
-            </a:pPr>
-            <a:r>
               <a:rPr sz="1200" b="0" i="0">
                 <a:solidFill>
-                  <a:srgbClr val="9AA7B4"/>
-                </a:solidFill>
-                <a:latin typeface="Helvetica Neue"/>
-              </a:rPr>
-              <a:t>Seven years at Siren, the Irish investigative-intelligence platform — the same category, selling to law enforcement, intelligence and financial-crime teams. Built bespoke solutions for every Siren customer I worked with; spoke with hundreds of analysts across conference talks and deployments. 10+ years in data engineering, AI systems and full-stack development.</a:t>
-            </a:r>
-          </a:p>
-          <a:p>
-            <a:pPr algn="l">
-              <a:lnSpc>
-                <a:spcPct val="128000"/>
-              </a:lnSpc>
-              <a:spcBef>
-                <a:spcPts val="1000"/>
-              </a:spcBef>
-              <a:spcAft>
-                <a:spcPts val="0"/>
-              </a:spcAft>
-            </a:pPr>
-            <a:r>
-              <a:rPr sz="1200" b="1" i="0">
-                <a:solidFill>
-                  <a:srgbClr val="E8B339"/>
-                </a:solidFill>
-                <a:latin typeface="Helvetica Neue"/>
-              </a:rPr>
-              <a:t>Full-time on close.</a:t>
-            </a:r>
-          </a:p>
-        </p:txBody>
-      </p:sp>
-      <p:sp>
-        <p:nvSpPr>
-          <p:cNvPr id="6" name="TextBox 5"/>
+                  <a:srgbClr val="9A9DA5"/>
+                </a:solidFill>
+                <a:latin typeface="IBM Plex Sans"/>
+              </a:rPr>
+              <a:t>Priced at a blended $12,000 per matter. A boutique running eight evidence-heavy matters a year is worth $96,000 annually; an active practice at twenty is worth $240,000. These figures use the conservative rate throughout.</a:t>
+            </a:r>
+          </a:p>
+        </p:txBody>
+      </p:sp>
+      <p:sp>
+        <p:nvSpPr>
+          <p:cNvPr id="6" name="Rectangle 5"/>
+          <p:cNvSpPr/>
+          <p:nvPr/>
+        </p:nvSpPr>
+        <p:spPr>
+          <a:xfrm>
+            <a:off x="777240" y="2852928"/>
+            <a:ext cx="2697480" cy="3054096"/>
+          </a:xfrm>
+          <a:prstGeom prst="rect">
+            <a:avLst/>
+          </a:prstGeom>
+          <a:solidFill>
+            <a:srgbClr val="111216"/>
+          </a:solidFill>
+          <a:ln w="15875">
+            <a:solidFill>
+              <a:srgbClr val="3B3D44"/>
+            </a:solidFill>
+          </a:ln>
+          <a:effectLst/>
+        </p:spPr>
+        <p:style>
+          <a:lnRef idx="1">
+            <a:schemeClr val="accent1"/>
+          </a:lnRef>
+          <a:fillRef idx="3">
+            <a:schemeClr val="accent1"/>
+          </a:fillRef>
+          <a:effectRef idx="2">
+            <a:schemeClr val="accent1"/>
+          </a:effectRef>
+          <a:fontRef idx="minor">
+            <a:schemeClr val="lt1"/>
+          </a:fontRef>
+        </p:style>
+        <p:txBody>
+          <a:bodyPr rtlCol="0" anchor="ctr"/>
+          <a:lstStyle/>
+          <a:p/>
+        </p:txBody>
+      </p:sp>
+      <p:sp>
+        <p:nvSpPr>
+          <p:cNvPr id="7" name="TextBox 6"/>
           <p:cNvSpPr txBox="1"/>
           <p:nvPr/>
         </p:nvSpPr>
         <p:spPr>
           <a:xfrm>
-            <a:off x="4480560" y="2286000"/>
-            <a:ext cx="3291840" cy="3291840"/>
+            <a:off x="923544" y="2999232"/>
+            <a:ext cx="2404872" cy="2743200"/>
           </a:xfrm>
           <a:prstGeom prst="rect">
             <a:avLst/>
@@ -8374,13 +8915,13 @@
               </a:spcAft>
             </a:pPr>
             <a:r>
-              <a:rPr sz="1900" b="1" i="0">
-                <a:solidFill>
-                  <a:srgbClr val="F4F6F8"/>
-                </a:solidFill>
-                <a:latin typeface="Helvetica Neue"/>
-              </a:rPr>
-              <a:t>Conor Bowles</a:t>
+              <a:rPr sz="900" b="1" i="0">
+                <a:solidFill>
+                  <a:srgbClr val="E33B4C"/>
+                </a:solidFill>
+                <a:latin typeface="IBM Plex Mono"/>
+              </a:rPr>
+              <a:t>STAGE 1 · PROOF</a:t>
             </a:r>
           </a:p>
           <a:p>
@@ -8389,20 +8930,20 @@
                 <a:spcPct val="128000"/>
               </a:lnSpc>
               <a:spcBef>
-                <a:spcPts val="300"/>
-              </a:spcBef>
-              <a:spcAft>
-                <a:spcPts val="0"/>
-              </a:spcAft>
-            </a:pPr>
-            <a:r>
-              <a:rPr sz="1200" b="1" i="0">
-                <a:solidFill>
-                  <a:srgbClr val="E8B339"/>
-                </a:solidFill>
-                <a:latin typeface="Helvetica Neue"/>
-              </a:rPr>
-              <a:t>CTO</a:t>
+                <a:spcPts val="800"/>
+              </a:spcBef>
+              <a:spcAft>
+                <a:spcPts val="0"/>
+              </a:spcAft>
+            </a:pPr>
+            <a:r>
+              <a:rPr sz="1500" b="1" i="0">
+                <a:solidFill>
+                  <a:srgbClr val="F7F7F8"/>
+                </a:solidFill>
+                <a:latin typeface="Space Grotesk"/>
+              </a:rPr>
+              <a:t>Owl &amp; Ireland</a:t>
             </a:r>
           </a:p>
           <a:p>
@@ -8411,6 +8952,51 @@
                 <a:spcPct val="128000"/>
               </a:lnSpc>
               <a:spcBef>
+                <a:spcPts val="800"/>
+              </a:spcBef>
+              <a:spcAft>
+                <a:spcPts val="0"/>
+              </a:spcAft>
+            </a:pPr>
+            <a:r>
+              <a:rPr sz="2500" b="1" i="0">
+                <a:solidFill>
+                  <a:srgbClr val="F7F7F8"/>
+                </a:solidFill>
+                <a:latin typeface="Space Grotesk"/>
+              </a:rPr>
+              <a:t>$0.5M  ARR</a:t>
+            </a:r>
+          </a:p>
+          <a:p>
+            <a:pPr algn="l">
+              <a:lnSpc>
+                <a:spcPct val="128000"/>
+              </a:lnSpc>
+              <a:spcBef>
+                <a:spcPts val="800"/>
+              </a:spcBef>
+              <a:spcAft>
+                <a:spcPts val="0"/>
+              </a:spcAft>
+            </a:pPr>
+            <a:r>
+              <a:rPr sz="1200" b="0" i="0">
+                <a:solidFill>
+                  <a:srgbClr val="E33B4C"/>
+                </a:solidFill>
+                <a:latin typeface="IBM Plex Mono"/>
+              </a:rPr>
+              <a:t>5 customers
+42 matters / yr</a:t>
+            </a:r>
+          </a:p>
+          <a:p>
+            <a:pPr algn="l">
+              <a:lnSpc>
+                <a:spcPct val="128000"/>
+              </a:lnSpc>
+              <a:spcBef>
                 <a:spcPts val="1000"/>
               </a:spcBef>
               <a:spcAft>
@@ -8418,49 +9004,71 @@
               </a:spcAft>
             </a:pPr>
             <a:r>
-              <a:rPr sz="1200" b="0" i="0">
-                <a:solidFill>
-                  <a:srgbClr val="9AA7B4"/>
-                </a:solidFill>
-                <a:latin typeface="Helvetica Neue"/>
-              </a:rPr>
-              <a:t>Data infrastructure, security and scalable systems. Core engineering, database architecture, deployment operations.</a:t>
-            </a:r>
-          </a:p>
-          <a:p>
-            <a:pPr algn="l">
-              <a:lnSpc>
-                <a:spcPct val="128000"/>
-              </a:lnSpc>
-              <a:spcBef>
-                <a:spcPts val="1000"/>
-              </a:spcBef>
-              <a:spcAft>
-                <a:spcPts val="0"/>
-              </a:spcAft>
-            </a:pPr>
-            <a:r>
-              <a:rPr sz="1200" b="1" i="0">
-                <a:solidFill>
-                  <a:srgbClr val="E8B339"/>
-                </a:solidFill>
-                <a:latin typeface="Helvetica Neue"/>
-              </a:rPr>
-              <a:t>Full-time on close.</a:t>
-            </a:r>
-          </a:p>
-        </p:txBody>
-      </p:sp>
-      <p:sp>
-        <p:nvSpPr>
-          <p:cNvPr id="7" name="TextBox 6"/>
+              <a:rPr sz="1100" b="0" i="0">
+                <a:solidFill>
+                  <a:srgbClr val="9A9DA5"/>
+                </a:solidFill>
+                <a:latin typeface="IBM Plex Sans"/>
+              </a:rPr>
+              <a:t>References and a validated price. Not a revenue stage.</a:t>
+            </a:r>
+          </a:p>
+        </p:txBody>
+      </p:sp>
+      <p:sp>
+        <p:nvSpPr>
+          <p:cNvPr id="8" name="Rectangle 7"/>
+          <p:cNvSpPr/>
+          <p:nvPr/>
+        </p:nvSpPr>
+        <p:spPr>
+          <a:xfrm>
+            <a:off x="3648456" y="2852928"/>
+            <a:ext cx="2697480" cy="3054096"/>
+          </a:xfrm>
+          <a:prstGeom prst="rect">
+            <a:avLst/>
+          </a:prstGeom>
+          <a:solidFill>
+            <a:srgbClr val="111216"/>
+          </a:solidFill>
+          <a:ln w="15875">
+            <a:solidFill>
+              <a:srgbClr val="B41624"/>
+            </a:solidFill>
+          </a:ln>
+          <a:effectLst/>
+        </p:spPr>
+        <p:style>
+          <a:lnRef idx="1">
+            <a:schemeClr val="accent1"/>
+          </a:lnRef>
+          <a:fillRef idx="3">
+            <a:schemeClr val="accent1"/>
+          </a:fillRef>
+          <a:effectRef idx="2">
+            <a:schemeClr val="accent1"/>
+          </a:effectRef>
+          <a:fontRef idx="minor">
+            <a:schemeClr val="lt1"/>
+          </a:fontRef>
+        </p:style>
+        <p:txBody>
+          <a:bodyPr rtlCol="0" anchor="ctr"/>
+          <a:lstStyle/>
+          <a:p/>
+        </p:txBody>
+      </p:sp>
+      <p:sp>
+        <p:nvSpPr>
+          <p:cNvPr id="9" name="TextBox 8"/>
           <p:cNvSpPr txBox="1"/>
           <p:nvPr/>
         </p:nvSpPr>
         <p:spPr>
           <a:xfrm>
-            <a:off x="8183880" y="2286000"/>
-            <a:ext cx="3291840" cy="3291840"/>
+            <a:off x="3794760" y="2999232"/>
+            <a:ext cx="2404872" cy="2743200"/>
           </a:xfrm>
           <a:prstGeom prst="rect">
             <a:avLst/>
@@ -8485,13 +9093,13 @@
               </a:spcAft>
             </a:pPr>
             <a:r>
-              <a:rPr sz="1900" b="1" i="0">
-                <a:solidFill>
-                  <a:srgbClr val="F4F6F8"/>
-                </a:solidFill>
-                <a:latin typeface="Helvetica Neue"/>
-              </a:rPr>
-              <a:t>Alexandra Solórzano</a:t>
+              <a:rPr sz="900" b="1" i="0">
+                <a:solidFill>
+                  <a:srgbClr val="E33B4C"/>
+                </a:solidFill>
+                <a:latin typeface="IBM Plex Mono"/>
+              </a:rPr>
+              <a:t>STAGE 2 · THE ENGINE</a:t>
             </a:r>
           </a:p>
           <a:p>
@@ -8500,20 +9108,20 @@
                 <a:spcPct val="128000"/>
               </a:lnSpc>
               <a:spcBef>
-                <a:spcPts val="300"/>
-              </a:spcBef>
-              <a:spcAft>
-                <a:spcPts val="0"/>
-              </a:spcAft>
-            </a:pPr>
-            <a:r>
-              <a:rPr sz="1200" b="1" i="0">
-                <a:solidFill>
-                  <a:srgbClr val="E8B339"/>
-                </a:solidFill>
-                <a:latin typeface="Helvetica Neue"/>
-              </a:rPr>
-              <a:t>CPO</a:t>
+                <a:spcPts val="800"/>
+              </a:spcBef>
+              <a:spcAft>
+                <a:spcPts val="0"/>
+              </a:spcAft>
+            </a:pPr>
+            <a:r>
+              <a:rPr sz="1500" b="1" i="0">
+                <a:solidFill>
+                  <a:srgbClr val="F7F7F8"/>
+                </a:solidFill>
+                <a:latin typeface="Space Grotesk"/>
+              </a:rPr>
+              <a:t>United States</a:t>
             </a:r>
           </a:p>
           <a:p>
@@ -8522,6 +9130,51 @@
                 <a:spcPct val="128000"/>
               </a:lnSpc>
               <a:spcBef>
+                <a:spcPts val="800"/>
+              </a:spcBef>
+              <a:spcAft>
+                <a:spcPts val="0"/>
+              </a:spcAft>
+            </a:pPr>
+            <a:r>
+              <a:rPr sz="2500" b="1" i="0">
+                <a:solidFill>
+                  <a:srgbClr val="F7F7F8"/>
+                </a:solidFill>
+                <a:latin typeface="Space Grotesk"/>
+              </a:rPr>
+              <a:t>$5M  ARR</a:t>
+            </a:r>
+          </a:p>
+          <a:p>
+            <a:pPr algn="l">
+              <a:lnSpc>
+                <a:spcPct val="128000"/>
+              </a:lnSpc>
+              <a:spcBef>
+                <a:spcPts val="800"/>
+              </a:spcBef>
+              <a:spcAft>
+                <a:spcPts val="0"/>
+              </a:spcAft>
+            </a:pPr>
+            <a:r>
+              <a:rPr sz="1200" b="0" i="0">
+                <a:solidFill>
+                  <a:srgbClr val="E33B4C"/>
+                </a:solidFill>
+                <a:latin typeface="IBM Plex Mono"/>
+              </a:rPr>
+              <a:t>52 customers
+417 matters / yr</a:t>
+            </a:r>
+          </a:p>
+          <a:p>
+            <a:pPr algn="l">
+              <a:lnSpc>
+                <a:spcPct val="128000"/>
+              </a:lnSpc>
+              <a:spcBef>
                 <a:spcPts val="1000"/>
               </a:spcBef>
               <a:spcAft>
@@ -8529,49 +9182,71 @@
               </a:spcAft>
             </a:pPr>
             <a:r>
-              <a:rPr sz="1200" b="0" i="0">
-                <a:solidFill>
-                  <a:srgbClr val="9AA7B4"/>
-                </a:solidFill>
-                <a:latin typeface="Helvetica Neue"/>
-              </a:rPr>
-              <a:t>10+ years as a licensed private investigator on federal criminal defence and financial fraud casework. US-based.</a:t>
-            </a:r>
-          </a:p>
-          <a:p>
-            <a:pPr algn="l">
-              <a:lnSpc>
-                <a:spcPct val="128000"/>
-              </a:lnSpc>
-              <a:spcBef>
-                <a:spcPts val="1000"/>
-              </a:spcBef>
-              <a:spcAft>
-                <a:spcPts val="0"/>
-              </a:spcAft>
-            </a:pPr>
-            <a:r>
-              <a:rPr sz="1200" b="1" i="0">
-                <a:solidFill>
-                  <a:srgbClr val="E8B339"/>
-                </a:solidFill>
-                <a:latin typeface="Helvetica Neue"/>
-              </a:rPr>
-              <a:t>The domain authority — and the customer the product was built for.</a:t>
-            </a:r>
-          </a:p>
-        </p:txBody>
-      </p:sp>
-      <p:sp>
-        <p:nvSpPr>
-          <p:cNvPr id="8" name="TextBox 7"/>
+              <a:rPr sz="1100" b="0" i="0">
+                <a:solidFill>
+                  <a:srgbClr val="9A9DA5"/>
+                </a:solidFill>
+                <a:latin typeface="IBM Plex Sans"/>
+              </a:rPr>
+              <a:t>0.3–0.9% of 48,000–125,000 evidence-heavy matters a year.</a:t>
+            </a:r>
+          </a:p>
+        </p:txBody>
+      </p:sp>
+      <p:sp>
+        <p:nvSpPr>
+          <p:cNvPr id="10" name="Rectangle 9"/>
+          <p:cNvSpPr/>
+          <p:nvPr/>
+        </p:nvSpPr>
+        <p:spPr>
+          <a:xfrm>
+            <a:off x="6519672" y="2852928"/>
+            <a:ext cx="2697480" cy="3054096"/>
+          </a:xfrm>
+          <a:prstGeom prst="rect">
+            <a:avLst/>
+          </a:prstGeom>
+          <a:solidFill>
+            <a:srgbClr val="111216"/>
+          </a:solidFill>
+          <a:ln w="15875">
+            <a:solidFill>
+              <a:srgbClr val="B41624"/>
+            </a:solidFill>
+          </a:ln>
+          <a:effectLst/>
+        </p:spPr>
+        <p:style>
+          <a:lnRef idx="1">
+            <a:schemeClr val="accent1"/>
+          </a:lnRef>
+          <a:fillRef idx="3">
+            <a:schemeClr val="accent1"/>
+          </a:fillRef>
+          <a:effectRef idx="2">
+            <a:schemeClr val="accent1"/>
+          </a:effectRef>
+          <a:fontRef idx="minor">
+            <a:schemeClr val="lt1"/>
+          </a:fontRef>
+        </p:style>
+        <p:txBody>
+          <a:bodyPr rtlCol="0" anchor="ctr"/>
+          <a:lstStyle/>
+          <a:p/>
+        </p:txBody>
+      </p:sp>
+      <p:sp>
+        <p:nvSpPr>
+          <p:cNvPr id="11" name="TextBox 10"/>
           <p:cNvSpPr txBox="1"/>
           <p:nvPr/>
         </p:nvSpPr>
         <p:spPr>
           <a:xfrm>
-            <a:off x="777240" y="5943600"/>
-            <a:ext cx="10637215" cy="822960"/>
+            <a:off x="6665976" y="2999232"/>
+            <a:ext cx="2404872" cy="2743200"/>
           </a:xfrm>
           <a:prstGeom prst="rect">
             <a:avLst/>
@@ -8596,22 +9271,280 @@
               </a:spcAft>
             </a:pPr>
             <a:r>
-              <a:rPr sz="1500" b="0" i="0">
-                <a:solidFill>
-                  <a:srgbClr val="F4F6F8"/>
-                </a:solidFill>
-                <a:latin typeface="Helvetica Neue"/>
-              </a:rPr>
-              <a:t>Seven years building investigative intelligence software for enterprise buyers, and a decade running federal casework as the kind of investigator who has to live with the result. </a:t>
-            </a:r>
+              <a:rPr sz="900" b="1" i="0">
+                <a:solidFill>
+                  <a:srgbClr val="E33B4C"/>
+                </a:solidFill>
+                <a:latin typeface="IBM Plex Mono"/>
+              </a:rPr>
+              <a:t>STAGE 3 · SECOND GEOGRAPHY</a:t>
+            </a:r>
+          </a:p>
+          <a:p>
+            <a:pPr algn="l">
+              <a:lnSpc>
+                <a:spcPct val="128000"/>
+              </a:lnSpc>
+              <a:spcBef>
+                <a:spcPts val="800"/>
+              </a:spcBef>
+              <a:spcAft>
+                <a:spcPts val="0"/>
+              </a:spcAft>
+            </a:pPr>
             <a:r>
               <a:rPr sz="1500" b="1" i="0">
                 <a:solidFill>
-                  <a:srgbClr val="F4F6F8"/>
-                </a:solidFill>
-                <a:latin typeface="Helvetica Neue"/>
-              </a:rPr>
-              <a:t>Our CPO has run federal cases to completion inside this platform.</a:t>
+                  <a:srgbClr val="F7F7F8"/>
+                </a:solidFill>
+                <a:latin typeface="Space Grotesk"/>
+              </a:rPr>
+              <a:t>+ United Kingdom</a:t>
+            </a:r>
+          </a:p>
+          <a:p>
+            <a:pPr algn="l">
+              <a:lnSpc>
+                <a:spcPct val="128000"/>
+              </a:lnSpc>
+              <a:spcBef>
+                <a:spcPts val="800"/>
+              </a:spcBef>
+              <a:spcAft>
+                <a:spcPts val="0"/>
+              </a:spcAft>
+            </a:pPr>
+            <a:r>
+              <a:rPr sz="2500" b="1" i="0">
+                <a:solidFill>
+                  <a:srgbClr val="F7F7F8"/>
+                </a:solidFill>
+                <a:latin typeface="Space Grotesk"/>
+              </a:rPr>
+              <a:t>$10M  ARR</a:t>
+            </a:r>
+          </a:p>
+          <a:p>
+            <a:pPr algn="l">
+              <a:lnSpc>
+                <a:spcPct val="128000"/>
+              </a:lnSpc>
+              <a:spcBef>
+                <a:spcPts val="800"/>
+              </a:spcBef>
+              <a:spcAft>
+                <a:spcPts val="0"/>
+              </a:spcAft>
+            </a:pPr>
+            <a:r>
+              <a:rPr sz="1200" b="0" i="0">
+                <a:solidFill>
+                  <a:srgbClr val="E33B4C"/>
+                </a:solidFill>
+                <a:latin typeface="IBM Plex Mono"/>
+              </a:rPr>
+              <a:t>104 customers
+833 matters / yr</a:t>
+            </a:r>
+          </a:p>
+          <a:p>
+            <a:pPr algn="l">
+              <a:lnSpc>
+                <a:spcPct val="128000"/>
+              </a:lnSpc>
+              <a:spcBef>
+                <a:spcPts val="1000"/>
+              </a:spcBef>
+              <a:spcAft>
+                <a:spcPts val="0"/>
+              </a:spcAft>
+            </a:pPr>
+            <a:r>
+              <a:rPr sz="1100" b="0" i="0">
+                <a:solidFill>
+                  <a:srgbClr val="9A9DA5"/>
+                </a:solidFill>
+                <a:latin typeface="IBM Plex Sans"/>
+              </a:rPr>
+              <a:t>80,200 open Crown Court cases, rising. Same buyer, same channel.</a:t>
+            </a:r>
+          </a:p>
+        </p:txBody>
+      </p:sp>
+      <p:sp>
+        <p:nvSpPr>
+          <p:cNvPr id="12" name="Rectangle 11"/>
+          <p:cNvSpPr/>
+          <p:nvPr/>
+        </p:nvSpPr>
+        <p:spPr>
+          <a:xfrm>
+            <a:off x="9390888" y="2852928"/>
+            <a:ext cx="2697480" cy="3054096"/>
+          </a:xfrm>
+          <a:prstGeom prst="rect">
+            <a:avLst/>
+          </a:prstGeom>
+          <a:solidFill>
+            <a:srgbClr val="111216"/>
+          </a:solidFill>
+          <a:ln w="15875">
+            <a:solidFill>
+              <a:srgbClr val="B41624"/>
+            </a:solidFill>
+          </a:ln>
+          <a:effectLst/>
+        </p:spPr>
+        <p:style>
+          <a:lnRef idx="1">
+            <a:schemeClr val="accent1"/>
+          </a:lnRef>
+          <a:fillRef idx="3">
+            <a:schemeClr val="accent1"/>
+          </a:fillRef>
+          <a:effectRef idx="2">
+            <a:schemeClr val="accent1"/>
+          </a:effectRef>
+          <a:fontRef idx="minor">
+            <a:schemeClr val="lt1"/>
+          </a:fontRef>
+        </p:style>
+        <p:txBody>
+          <a:bodyPr rtlCol="0" anchor="ctr"/>
+          <a:lstStyle/>
+          <a:p/>
+        </p:txBody>
+      </p:sp>
+      <p:sp>
+        <p:nvSpPr>
+          <p:cNvPr id="13" name="TextBox 12"/>
+          <p:cNvSpPr txBox="1"/>
+          <p:nvPr/>
+        </p:nvSpPr>
+        <p:spPr>
+          <a:xfrm>
+            <a:off x="9537192" y="2999232"/>
+            <a:ext cx="2404872" cy="2743200"/>
+          </a:xfrm>
+          <a:prstGeom prst="rect">
+            <a:avLst/>
+          </a:prstGeom>
+          <a:noFill/>
+        </p:spPr>
+        <p:txBody>
+          <a:bodyPr wrap="square" lIns="0" rIns="0" tIns="0" bIns="0">
+            <a:spAutoFit/>
+          </a:bodyPr>
+          <a:lstStyle/>
+          <a:p>
+            <a:pPr algn="l">
+              <a:lnSpc>
+                <a:spcPct val="128000"/>
+              </a:lnSpc>
+              <a:spcBef>
+                <a:spcPts val="0"/>
+              </a:spcBef>
+              <a:spcAft>
+                <a:spcPts val="0"/>
+              </a:spcAft>
+            </a:pPr>
+            <a:r>
+              <a:rPr sz="900" b="1" i="0">
+                <a:solidFill>
+                  <a:srgbClr val="E33B4C"/>
+                </a:solidFill>
+                <a:latin typeface="IBM Plex Mono"/>
+              </a:rPr>
+              <a:t>STAGE 4 · EXPANSION</a:t>
+            </a:r>
+          </a:p>
+          <a:p>
+            <a:pPr algn="l">
+              <a:lnSpc>
+                <a:spcPct val="128000"/>
+              </a:lnSpc>
+              <a:spcBef>
+                <a:spcPts val="800"/>
+              </a:spcBef>
+              <a:spcAft>
+                <a:spcPts val="0"/>
+              </a:spcAft>
+            </a:pPr>
+            <a:r>
+              <a:rPr sz="1500" b="1" i="0">
+                <a:solidFill>
+                  <a:srgbClr val="F7F7F8"/>
+                </a:solidFill>
+                <a:latin typeface="Space Grotesk"/>
+              </a:rPr>
+              <a:t>+ Europe</a:t>
+            </a:r>
+          </a:p>
+          <a:p>
+            <a:pPr algn="l">
+              <a:lnSpc>
+                <a:spcPct val="128000"/>
+              </a:lnSpc>
+              <a:spcBef>
+                <a:spcPts val="800"/>
+              </a:spcBef>
+              <a:spcAft>
+                <a:spcPts val="0"/>
+              </a:spcAft>
+            </a:pPr>
+            <a:r>
+              <a:rPr sz="2500" b="1" i="0">
+                <a:solidFill>
+                  <a:srgbClr val="F7F7F8"/>
+                </a:solidFill>
+                <a:latin typeface="Space Grotesk"/>
+              </a:rPr>
+              <a:t>$25M  ARR</a:t>
+            </a:r>
+          </a:p>
+          <a:p>
+            <a:pPr algn="l">
+              <a:lnSpc>
+                <a:spcPct val="128000"/>
+              </a:lnSpc>
+              <a:spcBef>
+                <a:spcPts val="800"/>
+              </a:spcBef>
+              <a:spcAft>
+                <a:spcPts val="0"/>
+              </a:spcAft>
+            </a:pPr>
+            <a:r>
+              <a:rPr sz="1200" b="0" i="0">
+                <a:solidFill>
+                  <a:srgbClr val="E33B4C"/>
+                </a:solidFill>
+                <a:latin typeface="IBM Plex Mono"/>
+              </a:rPr>
+              <a:t>260 customers
+2,083 matters / yr</a:t>
+            </a:r>
+          </a:p>
+          <a:p>
+            <a:pPr algn="l">
+              <a:lnSpc>
+                <a:spcPct val="128000"/>
+              </a:lnSpc>
+              <a:spcBef>
+                <a:spcPts val="1000"/>
+              </a:spcBef>
+              <a:spcAft>
+                <a:spcPts val="0"/>
+              </a:spcAft>
+            </a:pPr>
+            <a:r>
+              <a:rPr sz="1100" b="0" i="0">
+                <a:solidFill>
+                  <a:srgbClr val="9A9DA5"/>
+                </a:solidFill>
+                <a:latin typeface="IBM Plex Sans"/>
+              </a:rPr>
+              <a:t>$2.41B forensics, $6.81B legal tech. Partner-led per jurisdiction.</a:t>
             </a:r>
           </a:p>
         </p:txBody>
@@ -8630,7 +9563,7 @@
     <p:bg>
       <p:bgPr>
         <a:solidFill>
-          <a:srgbClr val="0E141B"/>
+          <a:srgbClr val="0B0C0F"/>
         </a:solidFill>
         <a:effectLst/>
       </p:bgPr>
@@ -8675,17 +9608,17 @@
                 <a:spcPts val="0"/>
               </a:spcAft>
               <a:defRPr>
-                <a:latin typeface="Helvetica Neue"/>
+                <a:latin typeface="IBM Plex Mono"/>
               </a:defRPr>
             </a:pPr>
             <a:r>
               <a:rPr sz="1100" b="1" i="0">
                 <a:solidFill>
-                  <a:srgbClr val="E8B339"/>
-                </a:solidFill>
-                <a:latin typeface="Helvetica Neue"/>
-              </a:rPr>
-              <a:t>STATUS AND TRACTION</a:t>
+                  <a:srgbClr val="E33B4C"/>
+                </a:solidFill>
+                <a:latin typeface="IBM Plex Mono"/>
+              </a:rPr>
+              <a:t>TEAM</a:t>
             </a:r>
           </a:p>
         </p:txBody>
@@ -8726,11 +9659,12 @@
             <a:r>
               <a:rPr sz="3000" b="1" i="0">
                 <a:solidFill>
-                  <a:srgbClr val="F4F6F8"/>
-                </a:solidFill>
-                <a:latin typeface="Helvetica Neue"/>
-              </a:rPr>
-              <a:t>Loupe is in production use on real federal casework.</a:t>
+                  <a:srgbClr val="F7F7F8"/>
+                </a:solidFill>
+                <a:latin typeface="Space Grotesk"/>
+              </a:rPr>
+              <a:t>We didn't research this market.
+We worked in it — from both sides.</a:t>
             </a:r>
           </a:p>
         </p:txBody>
@@ -8743,14 +9677,14 @@
         </p:nvSpPr>
         <p:spPr>
           <a:xfrm>
-            <a:off x="777240" y="1737360"/>
+            <a:off x="777240" y="1965960"/>
             <a:ext cx="1005840" cy="31750"/>
           </a:xfrm>
           <a:prstGeom prst="rect">
             <a:avLst/>
           </a:prstGeom>
           <a:solidFill>
-            <a:srgbClr val="E8B339"/>
+            <a:srgbClr val="E33B4C"/>
           </a:solidFill>
           <a:ln>
             <a:noFill/>
@@ -8787,8 +9721,8 @@
         </p:nvSpPr>
         <p:spPr>
           <a:xfrm>
-            <a:off x="777240" y="2057400"/>
-            <a:ext cx="5623560" cy="4480560"/>
+            <a:off x="777240" y="2286000"/>
+            <a:ext cx="3291840" cy="3291840"/>
           </a:xfrm>
           <a:prstGeom prst="rect">
             <a:avLst/>
@@ -8813,67 +9747,13 @@
               </a:spcAft>
             </a:pPr>
             <a:r>
-              <a:rPr sz="1300" b="0" i="0">
-                <a:solidFill>
-                  <a:srgbClr val="F4F6F8"/>
-                </a:solidFill>
-                <a:latin typeface="Helvetica Neue"/>
-              </a:rPr>
-              <a:t>Built inside </a:t>
-            </a:r>
-            <a:r>
-              <a:rPr sz="1300" b="1" i="0">
-                <a:solidFill>
-                  <a:srgbClr val="F4F6F8"/>
-                </a:solidFill>
-                <a:latin typeface="Helvetica Neue"/>
-              </a:rPr>
-              <a:t>Owl Consultancy</a:t>
-            </a:r>
-            <a:r>
-              <a:rPr sz="1300" b="0" i="0">
-                <a:solidFill>
-                  <a:srgbClr val="F4F6F8"/>
-                </a:solidFill>
-                <a:latin typeface="Helvetica Neue"/>
-              </a:rPr>
-              <a:t>, a working US private-investigations practice, and used there to carry federal cases </a:t>
-            </a:r>
-            <a:r>
-              <a:rPr sz="1300" b="1" i="0">
-                <a:solidFill>
-                  <a:srgbClr val="F4F6F8"/>
-                </a:solidFill>
-                <a:latin typeface="Helvetica Neue"/>
-              </a:rPr>
-              <a:t>to completion</a:t>
-            </a:r>
-            <a:r>
-              <a:rPr sz="1300" b="0" i="0">
-                <a:solidFill>
-                  <a:srgbClr val="F4F6F8"/>
-                </a:solidFill>
-                <a:latin typeface="Helvetica Neue"/>
-              </a:rPr>
-              <a:t> — multi-gigabyte phone extractions, tens of thousands of curated financial transactions, full document corpora. </a:t>
-            </a:r>
-            <a:r>
-              <a:rPr sz="1300" b="1" i="0">
-                <a:solidFill>
-                  <a:srgbClr val="F4F6F8"/>
-                </a:solidFill>
-                <a:latin typeface="Helvetica Neue"/>
-              </a:rPr>
-              <a:t>Three attorneys on those cases have been given access to it.</a:t>
-            </a:r>
-            <a:r>
-              <a:rPr sz="1300" b="0" i="0">
-                <a:solidFill>
-                  <a:srgbClr val="F4F6F8"/>
-                </a:solidFill>
-                <a:latin typeface="Helvetica Neue"/>
-              </a:rPr>
-              <a:t> Attorneys have retained the practice specifically because of the platform — unprompted, before any marketing existed.</a:t>
+              <a:rPr sz="1900" b="1" i="0">
+                <a:solidFill>
+                  <a:srgbClr val="F7F7F8"/>
+                </a:solidFill>
+                <a:latin typeface="Space Grotesk"/>
+              </a:rPr>
+              <a:t>Neil Byrne</a:t>
             </a:r>
           </a:p>
           <a:p>
@@ -8882,20 +9762,20 @@
                 <a:spcPct val="128000"/>
               </a:lnSpc>
               <a:spcBef>
-                <a:spcPts val="1300"/>
-              </a:spcBef>
-              <a:spcAft>
-                <a:spcPts val="0"/>
-              </a:spcAft>
-            </a:pPr>
-            <a:r>
-              <a:rPr sz="1500" b="1" i="0">
-                <a:solidFill>
-                  <a:srgbClr val="E8B339"/>
-                </a:solidFill>
-                <a:latin typeface="Helvetica Neue"/>
-              </a:rPr>
-              <a:t>This is not a prototype seeking a first user. It is an application that works, in the hands of the investigators it was built for, on cases with real stakes.</a:t>
+                <a:spcPts val="300"/>
+              </a:spcBef>
+              <a:spcAft>
+                <a:spcPts val="0"/>
+              </a:spcAft>
+            </a:pPr>
+            <a:r>
+              <a:rPr sz="1200" b="1" i="0">
+                <a:solidFill>
+                  <a:srgbClr val="E33B4C"/>
+                </a:solidFill>
+                <a:latin typeface="IBM Plex Sans"/>
+              </a:rPr>
+              <a:t>CEO</a:t>
             </a:r>
           </a:p>
           <a:p>
@@ -8904,20 +9784,20 @@
                 <a:spcPct val="128000"/>
               </a:lnSpc>
               <a:spcBef>
-                <a:spcPts val="1400"/>
-              </a:spcBef>
-              <a:spcAft>
-                <a:spcPts val="0"/>
-              </a:spcAft>
-            </a:pPr>
-            <a:r>
-              <a:rPr sz="1300" b="1" i="0">
-                <a:solidFill>
-                  <a:srgbClr val="F4F6F8"/>
-                </a:solidFill>
-                <a:latin typeface="Helvetica Neue"/>
-              </a:rPr>
-              <a:t>First external pilot in motion.</a:t>
+                <a:spcPts val="1000"/>
+              </a:spcBef>
+              <a:spcAft>
+                <a:spcPts val="0"/>
+              </a:spcAft>
+            </a:pPr>
+            <a:r>
+              <a:rPr sz="1200" b="0" i="0">
+                <a:solidFill>
+                  <a:srgbClr val="9A9DA5"/>
+                </a:solidFill>
+                <a:latin typeface="IBM Plex Sans"/>
+              </a:rPr>
+              <a:t>Seven years at Siren, the Irish investigative-intelligence platform — the same category, selling to law enforcement, intelligence and financial-crime teams. Built bespoke solutions for every Siren customer I worked with; spoke with hundreds of analysts across conference talks and deployments. 10+ years in data engineering, AI systems and full-stack development.</a:t>
             </a:r>
           </a:p>
           <a:p>
@@ -8926,20 +9806,20 @@
                 <a:spcPct val="128000"/>
               </a:lnSpc>
               <a:spcBef>
-                <a:spcPts val="400"/>
-              </a:spcBef>
-              <a:spcAft>
-                <a:spcPts val="0"/>
-              </a:spcAft>
-            </a:pPr>
-            <a:r>
-              <a:rPr sz="1300" b="0" i="0">
-                <a:solidFill>
-                  <a:srgbClr val="9AA7B4"/>
-                </a:solidFill>
-                <a:latin typeface="Helvetica Neue"/>
-              </a:rPr>
-              <a:t>A US private-investigations firm led by a former FBI undercover agent — clients across Miami, New York, California and the Midwest — has agreed to send its next large-document matter through Loupe as a paid trial at cost, and to put a mutual MSA in front of us. Sourced through casework, not marketing.</a:t>
+                <a:spcPts val="1000"/>
+              </a:spcBef>
+              <a:spcAft>
+                <a:spcPts val="0"/>
+              </a:spcAft>
+            </a:pPr>
+            <a:r>
+              <a:rPr sz="1200" b="1" i="0">
+                <a:solidFill>
+                  <a:srgbClr val="E33B4C"/>
+                </a:solidFill>
+                <a:latin typeface="IBM Plex Sans"/>
+              </a:rPr>
+              <a:t>Full-time on close.</a:t>
             </a:r>
           </a:p>
         </p:txBody>
@@ -8952,8 +9832,8 @@
         </p:nvSpPr>
         <p:spPr>
           <a:xfrm>
-            <a:off x="6903720" y="2057400"/>
-            <a:ext cx="4526280" cy="4480560"/>
+            <a:off x="4480560" y="2286000"/>
+            <a:ext cx="3291840" cy="3291840"/>
           </a:xfrm>
           <a:prstGeom prst="rect">
             <a:avLst/>
@@ -8978,243 +9858,244 @@
               </a:spcAft>
             </a:pPr>
             <a:r>
+              <a:rPr sz="1900" b="1" i="0">
+                <a:solidFill>
+                  <a:srgbClr val="F7F7F8"/>
+                </a:solidFill>
+                <a:latin typeface="Space Grotesk"/>
+              </a:rPr>
+              <a:t>Conor Bowles</a:t>
+            </a:r>
+          </a:p>
+          <a:p>
+            <a:pPr algn="l">
+              <a:lnSpc>
+                <a:spcPct val="128000"/>
+              </a:lnSpc>
+              <a:spcBef>
+                <a:spcPts val="300"/>
+              </a:spcBef>
+              <a:spcAft>
+                <a:spcPts val="0"/>
+              </a:spcAft>
+            </a:pPr>
+            <a:r>
               <a:rPr sz="1200" b="1" i="0">
                 <a:solidFill>
-                  <a:srgbClr val="E8B339"/>
-                </a:solidFill>
-                <a:latin typeface="Helvetica Neue"/>
-              </a:rPr>
-              <a:t>Built so far, verifiable</a:t>
-            </a:r>
-          </a:p>
-          <a:p>
-            <a:pPr algn="l" marL="274320" indent="-274320">
+                  <a:srgbClr val="E33B4C"/>
+                </a:solidFill>
+                <a:latin typeface="IBM Plex Sans"/>
+              </a:rPr>
+              <a:t>CTO</a:t>
+            </a:r>
+          </a:p>
+          <a:p>
+            <a:pPr algn="l">
               <a:lnSpc>
                 <a:spcPct val="128000"/>
               </a:lnSpc>
               <a:spcBef>
-                <a:spcPts val="600"/>
-              </a:spcBef>
-              <a:spcAft>
-                <a:spcPts val="0"/>
-              </a:spcAft>
-            </a:pPr>
-            <a:r>
-              <a:rPr sz="1200" b="1">
-                <a:solidFill>
-                  <a:srgbClr val="E8B339"/>
-                </a:solidFill>
-                <a:latin typeface="Helvetica Neue"/>
-              </a:rPr>
-              <a:t>—   </a:t>
-            </a:r>
+                <a:spcPts val="1000"/>
+              </a:spcBef>
+              <a:spcAft>
+                <a:spcPts val="0"/>
+              </a:spcAft>
+            </a:pPr>
             <a:r>
               <a:rPr sz="1200" b="0" i="0">
                 <a:solidFill>
-                  <a:srgbClr val="9AA7B4"/>
-                </a:solidFill>
-                <a:latin typeface="Helvetica Neue"/>
-              </a:rPr>
-              <a:t>~180,000 lines across a React console, a FastAPI case API and a separate asynchronous evidence engine</a:t>
-            </a:r>
-          </a:p>
-          <a:p>
-            <a:pPr algn="l" marL="274320" indent="-274320">
+                  <a:srgbClr val="9A9DA5"/>
+                </a:solidFill>
+                <a:latin typeface="IBM Plex Sans"/>
+              </a:rPr>
+              <a:t>Data infrastructure, security and scalable systems. Core engineering, database architecture, deployment operations.</a:t>
+            </a:r>
+          </a:p>
+          <a:p>
+            <a:pPr algn="l">
               <a:lnSpc>
                 <a:spcPct val="128000"/>
               </a:lnSpc>
               <a:spcBef>
-                <a:spcPts val="600"/>
-              </a:spcBef>
-              <a:spcAft>
-                <a:spcPts val="0"/>
-              </a:spcAft>
-            </a:pPr>
-            <a:r>
-              <a:rPr sz="1200" b="1">
-                <a:solidFill>
-                  <a:srgbClr val="E8B339"/>
-                </a:solidFill>
-                <a:latin typeface="Helvetica Neue"/>
-              </a:rPr>
-              <a:t>—   </a:t>
-            </a:r>
+                <a:spcPts val="1000"/>
+              </a:spcBef>
+              <a:spcAft>
+                <a:spcPts val="0"/>
+              </a:spcAft>
+            </a:pPr>
+            <a:r>
+              <a:rPr sz="1200" b="1" i="0">
+                <a:solidFill>
+                  <a:srgbClr val="E33B4C"/>
+                </a:solidFill>
+                <a:latin typeface="IBM Plex Sans"/>
+              </a:rPr>
+              <a:t>Full-time on close.</a:t>
+            </a:r>
+          </a:p>
+        </p:txBody>
+      </p:sp>
+      <p:sp>
+        <p:nvSpPr>
+          <p:cNvPr id="7" name="TextBox 6"/>
+          <p:cNvSpPr txBox="1"/>
+          <p:nvPr/>
+        </p:nvSpPr>
+        <p:spPr>
+          <a:xfrm>
+            <a:off x="8183880" y="2286000"/>
+            <a:ext cx="3291840" cy="3291840"/>
+          </a:xfrm>
+          <a:prstGeom prst="rect">
+            <a:avLst/>
+          </a:prstGeom>
+          <a:noFill/>
+        </p:spPr>
+        <p:txBody>
+          <a:bodyPr wrap="square" lIns="0" rIns="0" tIns="0" bIns="0">
+            <a:spAutoFit/>
+          </a:bodyPr>
+          <a:lstStyle/>
+          <a:p>
+            <a:pPr algn="l">
+              <a:lnSpc>
+                <a:spcPct val="128000"/>
+              </a:lnSpc>
+              <a:spcBef>
+                <a:spcPts val="0"/>
+              </a:spcBef>
+              <a:spcAft>
+                <a:spcPts val="0"/>
+              </a:spcAft>
+            </a:pPr>
+            <a:r>
+              <a:rPr sz="1900" b="1" i="0">
+                <a:solidFill>
+                  <a:srgbClr val="F7F7F8"/>
+                </a:solidFill>
+                <a:latin typeface="Space Grotesk"/>
+              </a:rPr>
+              <a:t>Alexandra Solórzano</a:t>
+            </a:r>
+          </a:p>
+          <a:p>
+            <a:pPr algn="l">
+              <a:lnSpc>
+                <a:spcPct val="128000"/>
+              </a:lnSpc>
+              <a:spcBef>
+                <a:spcPts val="300"/>
+              </a:spcBef>
+              <a:spcAft>
+                <a:spcPts val="0"/>
+              </a:spcAft>
+            </a:pPr>
+            <a:r>
+              <a:rPr sz="1200" b="1" i="0">
+                <a:solidFill>
+                  <a:srgbClr val="E33B4C"/>
+                </a:solidFill>
+                <a:latin typeface="IBM Plex Sans"/>
+              </a:rPr>
+              <a:t>CPO</a:t>
+            </a:r>
+          </a:p>
+          <a:p>
+            <a:pPr algn="l">
+              <a:lnSpc>
+                <a:spcPct val="128000"/>
+              </a:lnSpc>
+              <a:spcBef>
+                <a:spcPts val="1000"/>
+              </a:spcBef>
+              <a:spcAft>
+                <a:spcPts val="0"/>
+              </a:spcAft>
+            </a:pPr>
             <a:r>
               <a:rPr sz="1200" b="0" i="0">
                 <a:solidFill>
-                  <a:srgbClr val="9AA7B4"/>
-                </a:solidFill>
-                <a:latin typeface="Helvetica Neue"/>
-              </a:rPr>
-              <a:t>913 commits since December 2025 — two primary engineers</a:t>
-            </a:r>
-          </a:p>
-          <a:p>
-            <a:pPr algn="l" marL="274320" indent="-274320">
+                  <a:srgbClr val="9A9DA5"/>
+                </a:solidFill>
+                <a:latin typeface="IBM Plex Sans"/>
+              </a:rPr>
+              <a:t>10+ years as a licensed private investigator on federal criminal defence and financial fraud casework. US-based.</a:t>
+            </a:r>
+          </a:p>
+          <a:p>
+            <a:pPr algn="l">
               <a:lnSpc>
                 <a:spcPct val="128000"/>
               </a:lnSpc>
               <a:spcBef>
-                <a:spcPts val="600"/>
-              </a:spcBef>
-              <a:spcAft>
-                <a:spcPts val="0"/>
-              </a:spcAft>
-            </a:pPr>
-            <a:r>
-              <a:rPr sz="1200" b="1">
-                <a:solidFill>
-                  <a:srgbClr val="E8B339"/>
-                </a:solidFill>
-                <a:latin typeface="Helvetica Neue"/>
-              </a:rPr>
-              <a:t>—   </a:t>
-            </a:r>
-            <a:r>
-              <a:rPr sz="1200" b="0" i="0">
-                <a:solidFill>
-                  <a:srgbClr val="9AA7B4"/>
-                </a:solidFill>
-                <a:latin typeface="Helvetica Neue"/>
-              </a:rPr>
-              <a:t>Neo4j (case graph) · Postgres (cases, auth, audit) · ChromaDB (retrieval) · Redis (jobs)</a:t>
-            </a:r>
-          </a:p>
-          <a:p>
-            <a:pPr algn="l" marL="274320" indent="-274320">
+                <a:spcPts val="1000"/>
+              </a:spcBef>
+              <a:spcAft>
+                <a:spcPts val="0"/>
+              </a:spcAft>
+            </a:pPr>
+            <a:r>
+              <a:rPr sz="1200" b="1" i="0">
+                <a:solidFill>
+                  <a:srgbClr val="E33B4C"/>
+                </a:solidFill>
+                <a:latin typeface="IBM Plex Sans"/>
+              </a:rPr>
+              <a:t>The domain authority — and the customer the product was built for.</a:t>
+            </a:r>
+          </a:p>
+        </p:txBody>
+      </p:sp>
+      <p:sp>
+        <p:nvSpPr>
+          <p:cNvPr id="8" name="TextBox 7"/>
+          <p:cNvSpPr txBox="1"/>
+          <p:nvPr/>
+        </p:nvSpPr>
+        <p:spPr>
+          <a:xfrm>
+            <a:off x="777240" y="5943600"/>
+            <a:ext cx="10637215" cy="822960"/>
+          </a:xfrm>
+          <a:prstGeom prst="rect">
+            <a:avLst/>
+          </a:prstGeom>
+          <a:noFill/>
+        </p:spPr>
+        <p:txBody>
+          <a:bodyPr wrap="square" lIns="0" rIns="0" tIns="0" bIns="0">
+            <a:spAutoFit/>
+          </a:bodyPr>
+          <a:lstStyle/>
+          <a:p>
+            <a:pPr algn="l">
               <a:lnSpc>
                 <a:spcPct val="128000"/>
               </a:lnSpc>
               <a:spcBef>
-                <a:spcPts val="600"/>
-              </a:spcBef>
-              <a:spcAft>
-                <a:spcPts val="0"/>
-              </a:spcAft>
-            </a:pPr>
-            <a:r>
-              <a:rPr sz="1200" b="1">
-                <a:solidFill>
-                  <a:srgbClr val="E8B339"/>
-                </a:solidFill>
-                <a:latin typeface="Helvetica Neue"/>
-              </a:rPr>
-              <a:t>—   </a:t>
-            </a:r>
-            <a:r>
-              <a:rPr sz="1200" b="0" i="0">
-                <a:solidFill>
-                  <a:srgbClr val="9AA7B4"/>
-                </a:solidFill>
-                <a:latin typeface="Helvetica Neue"/>
-              </a:rPr>
-              <a:t>Three AI providers behind one routing policy — the model is a swappable component</a:t>
-            </a:r>
-          </a:p>
-          <a:p>
-            <a:pPr algn="l" marL="274320" indent="-274320">
-              <a:lnSpc>
-                <a:spcPct val="128000"/>
-              </a:lnSpc>
-              <a:spcBef>
-                <a:spcPts val="600"/>
-              </a:spcBef>
-              <a:spcAft>
-                <a:spcPts val="0"/>
-              </a:spcAft>
-            </a:pPr>
-            <a:r>
-              <a:rPr sz="1200" b="1">
-                <a:solidFill>
-                  <a:srgbClr val="E8B339"/>
-                </a:solidFill>
-                <a:latin typeface="Helvetica Neue"/>
-              </a:rPr>
-              <a:t>—   </a:t>
-            </a:r>
-            <a:r>
-              <a:rPr sz="1200" b="0" i="0">
-                <a:solidFill>
-                  <a:srgbClr val="9AA7B4"/>
-                </a:solidFill>
-                <a:latin typeface="Helvetica Neue"/>
-              </a:rPr>
-              <a:t>Single-tenant deployment: one isolated stack per customer</a:t>
-            </a:r>
-          </a:p>
-          <a:p>
-            <a:pPr algn="l">
-              <a:lnSpc>
-                <a:spcPct val="128000"/>
-              </a:lnSpc>
-              <a:spcBef>
-                <a:spcPts val="1400"/>
-              </a:spcBef>
-              <a:spcAft>
-                <a:spcPts val="0"/>
-              </a:spcAft>
-            </a:pPr>
-            <a:r>
-              <a:rPr sz="1200" b="1" i="0">
-                <a:solidFill>
-                  <a:srgbClr val="E8B339"/>
-                </a:solidFill>
-                <a:latin typeface="Helvetica Neue"/>
-              </a:rPr>
-              <a:t>Release discipline</a:t>
-            </a:r>
-          </a:p>
-          <a:p>
-            <a:pPr algn="l">
-              <a:lnSpc>
-                <a:spcPct val="128000"/>
-              </a:lnSpc>
-              <a:spcBef>
-                <a:spcPts val="400"/>
-              </a:spcBef>
-              <a:spcAft>
-                <a:spcPts val="0"/>
-              </a:spcAft>
-            </a:pPr>
-            <a:r>
-              <a:rPr sz="1200" b="0" i="0">
-                <a:solidFill>
-                  <a:srgbClr val="F4F6F8"/>
-                </a:solidFill>
-                <a:latin typeface="Helvetica Neue"/>
-              </a:rPr>
-              <a:t>Onboarding an external customer's evidence runs behind a </a:t>
-            </a:r>
-            <a:r>
-              <a:rPr sz="1200" b="1" i="0">
-                <a:solidFill>
-                  <a:srgbClr val="F4F6F8"/>
-                </a:solidFill>
-                <a:latin typeface="Helvetica Neue"/>
-              </a:rPr>
-              <a:t>12-stage security-gated release plan. No external case data enters the platform until the security, isolation, backup and legal stages pass.</a:t>
-            </a:r>
-          </a:p>
-          <a:p>
-            <a:pPr algn="l">
-              <a:lnSpc>
-                <a:spcPct val="128000"/>
-              </a:lnSpc>
-              <a:spcBef>
-                <a:spcPts val="1000"/>
-              </a:spcBef>
-              <a:spcAft>
-                <a:spcPts val="0"/>
-              </a:spcAft>
-            </a:pPr>
-            <a:r>
-              <a:rPr sz="1200" b="0" i="0">
-                <a:solidFill>
-                  <a:srgbClr val="9AA7B4"/>
-                </a:solidFill>
-                <a:latin typeface="Helvetica Neue"/>
-              </a:rPr>
-              <a:t>Roadmap: a 13-epic board takes Loupe from a platform that works for the practice it was built in to one that scales across many. Depth, not existence.</a:t>
+                <a:spcPts val="0"/>
+              </a:spcBef>
+              <a:spcAft>
+                <a:spcPts val="0"/>
+              </a:spcAft>
+            </a:pPr>
+            <a:r>
+              <a:rPr sz="1500" b="0" i="0">
+                <a:solidFill>
+                  <a:srgbClr val="F7F7F8"/>
+                </a:solidFill>
+                <a:latin typeface="IBM Plex Sans"/>
+              </a:rPr>
+              <a:t>Seven years building investigative intelligence software for enterprise buyers, and a decade running federal casework as the kind of investigator who has to live with the result. </a:t>
+            </a:r>
+            <a:r>
+              <a:rPr sz="1500" b="1" i="0">
+                <a:solidFill>
+                  <a:srgbClr val="F7F7F8"/>
+                </a:solidFill>
+                <a:latin typeface="IBM Plex Sans"/>
+              </a:rPr>
+              <a:t>Our CPO has run federal cases to completion inside this platform.</a:t>
             </a:r>
           </a:p>
         </p:txBody>
@@ -9233,7 +10114,7 @@
     <p:bg>
       <p:bgPr>
         <a:solidFill>
-          <a:srgbClr val="0E141B"/>
+          <a:srgbClr val="0B0C0F"/>
         </a:solidFill>
         <a:effectLst/>
       </p:bgPr>
@@ -9278,17 +10159,17 @@
                 <a:spcPts val="0"/>
               </a:spcAft>
               <a:defRPr>
-                <a:latin typeface="Helvetica Neue"/>
+                <a:latin typeface="IBM Plex Mono"/>
               </a:defRPr>
             </a:pPr>
             <a:r>
               <a:rPr sz="1100" b="1" i="0">
                 <a:solidFill>
-                  <a:srgbClr val="E8B339"/>
-                </a:solidFill>
-                <a:latin typeface="Helvetica Neue"/>
-              </a:rPr>
-              <a:t>THE ASK</a:t>
+                  <a:srgbClr val="E33B4C"/>
+                </a:solidFill>
+                <a:latin typeface="IBM Plex Mono"/>
+              </a:rPr>
+              <a:t>STATUS AND TRACTION</a:t>
             </a:r>
           </a:p>
         </p:txBody>
@@ -9327,14 +10208,13 @@
               </a:spcAft>
             </a:pPr>
             <a:r>
-              <a:rPr sz="2900" b="1" i="0">
-                <a:solidFill>
-                  <a:srgbClr val="F4F6F8"/>
-                </a:solidFill>
-                <a:latin typeface="Helvetica Neue"/>
-              </a:rPr>
-              <a:t>€100k. What it buys: the first paying customer
-outside the practice that built it.</a:t>
+              <a:rPr sz="3000" b="1" i="0">
+                <a:solidFill>
+                  <a:srgbClr val="F7F7F8"/>
+                </a:solidFill>
+                <a:latin typeface="Space Grotesk"/>
+              </a:rPr>
+              <a:t>Loupe is in production use on real federal casework.</a:t>
             </a:r>
           </a:p>
         </p:txBody>
@@ -9347,14 +10227,14 @@
         </p:nvSpPr>
         <p:spPr>
           <a:xfrm>
-            <a:off x="777240" y="1965960"/>
+            <a:off x="777240" y="1737360"/>
             <a:ext cx="1005840" cy="31750"/>
           </a:xfrm>
           <a:prstGeom prst="rect">
             <a:avLst/>
           </a:prstGeom>
           <a:solidFill>
-            <a:srgbClr val="E8B339"/>
+            <a:srgbClr val="E33B4C"/>
           </a:solidFill>
           <a:ln>
             <a:noFill/>
@@ -9391,8 +10271,8 @@
         </p:nvSpPr>
         <p:spPr>
           <a:xfrm>
-            <a:off x="777240" y="2286000"/>
-            <a:ext cx="5760720" cy="3291840"/>
+            <a:off x="777240" y="2057400"/>
+            <a:ext cx="5623560" cy="4480560"/>
           </a:xfrm>
           <a:prstGeom prst="rect">
             <a:avLst/>
@@ -9417,31 +10297,67 @@
               </a:spcAft>
             </a:pPr>
             <a:r>
-              <a:rPr sz="1600" b="0" i="0">
-                <a:solidFill>
-                  <a:srgbClr val="F4F6F8"/>
-                </a:solidFill>
-                <a:latin typeface="Helvetica Neue"/>
-              </a:rPr>
-              <a:t>The platform works and has closed real federal cases. What stands between it and external revenue is the </a:t>
-            </a:r>
-            <a:r>
-              <a:rPr sz="1600" b="1" i="0">
-                <a:solidFill>
-                  <a:srgbClr val="F4F6F8"/>
-                </a:solidFill>
-                <a:latin typeface="Helvetica Neue"/>
-              </a:rPr>
-              <a:t>security gate</a:t>
-            </a:r>
-            <a:r>
-              <a:rPr sz="1600" b="0" i="0">
-                <a:solidFill>
-                  <a:srgbClr val="F4F6F8"/>
-                </a:solidFill>
-                <a:latin typeface="Helvetica Neue"/>
-              </a:rPr>
-              <a:t> — the isolation, backup and legal stages that let another firm's privileged evidence enter the system — and the pilot itself.</a:t>
+              <a:rPr sz="1300" b="0" i="0">
+                <a:solidFill>
+                  <a:srgbClr val="F7F7F8"/>
+                </a:solidFill>
+                <a:latin typeface="IBM Plex Sans"/>
+              </a:rPr>
+              <a:t>Built inside </a:t>
+            </a:r>
+            <a:r>
+              <a:rPr sz="1300" b="1" i="0">
+                <a:solidFill>
+                  <a:srgbClr val="F7F7F8"/>
+                </a:solidFill>
+                <a:latin typeface="IBM Plex Sans"/>
+              </a:rPr>
+              <a:t>Owl Consultancy</a:t>
+            </a:r>
+            <a:r>
+              <a:rPr sz="1300" b="0" i="0">
+                <a:solidFill>
+                  <a:srgbClr val="F7F7F8"/>
+                </a:solidFill>
+                <a:latin typeface="IBM Plex Sans"/>
+              </a:rPr>
+              <a:t>, a working US private-investigations practice, and used there to carry federal cases </a:t>
+            </a:r>
+            <a:r>
+              <a:rPr sz="1300" b="1" i="0">
+                <a:solidFill>
+                  <a:srgbClr val="F7F7F8"/>
+                </a:solidFill>
+                <a:latin typeface="IBM Plex Sans"/>
+              </a:rPr>
+              <a:t>to completion</a:t>
+            </a:r>
+            <a:r>
+              <a:rPr sz="1300" b="0" i="0">
+                <a:solidFill>
+                  <a:srgbClr val="F7F7F8"/>
+                </a:solidFill>
+                <a:latin typeface="IBM Plex Sans"/>
+              </a:rPr>
+              <a:t> — multi-gigabyte phone extractions, tens of thousands of curated financial transactions, full document corpora. </a:t>
+            </a:r>
+            <a:r>
+              <a:rPr sz="1300" b="1" i="0">
+                <a:solidFill>
+                  <a:srgbClr val="F7F7F8"/>
+                </a:solidFill>
+                <a:latin typeface="IBM Plex Sans"/>
+              </a:rPr>
+              <a:t>Three attorneys on those cases have been given access to it.</a:t>
+            </a:r>
+            <a:r>
+              <a:rPr sz="1300" b="0" i="0">
+                <a:solidFill>
+                  <a:srgbClr val="F7F7F8"/>
+                </a:solidFill>
+                <a:latin typeface="IBM Plex Sans"/>
+              </a:rPr>
+              <a:t> Attorneys have retained the practice specifically because of the platform — unprompted, before any marketing existed.</a:t>
             </a:r>
           </a:p>
           <a:p>
@@ -9450,7 +10366,29 @@
                 <a:spcPct val="128000"/>
               </a:lnSpc>
               <a:spcBef>
-                <a:spcPts val="1800"/>
+                <a:spcPts val="1300"/>
+              </a:spcBef>
+              <a:spcAft>
+                <a:spcPts val="0"/>
+              </a:spcAft>
+            </a:pPr>
+            <a:r>
+              <a:rPr sz="1500" b="1" i="0">
+                <a:solidFill>
+                  <a:srgbClr val="E33B4C"/>
+                </a:solidFill>
+                <a:latin typeface="IBM Plex Sans"/>
+              </a:rPr>
+              <a:t>This is not a prototype seeking a first user. It is an application that works, in the hands of the investigators it was built for, on cases with real stakes.</a:t>
+            </a:r>
+          </a:p>
+          <a:p>
+            <a:pPr algn="l">
+              <a:lnSpc>
+                <a:spcPct val="128000"/>
+              </a:lnSpc>
+              <a:spcBef>
+                <a:spcPts val="1400"/>
               </a:spcBef>
               <a:spcAft>
                 <a:spcPts val="0"/>
@@ -9459,11 +10397,11 @@
             <a:r>
               <a:rPr sz="1300" b="1" i="0">
                 <a:solidFill>
-                  <a:srgbClr val="E8B339"/>
-                </a:solidFill>
-                <a:latin typeface="Helvetica Neue"/>
-              </a:rPr>
-              <a:t>Use of funds</a:t>
+                  <a:srgbClr val="F7F7F8"/>
+                </a:solidFill>
+                <a:latin typeface="IBM Plex Sans"/>
+              </a:rPr>
+              <a:t>First external pilot in motion.</a:t>
             </a:r>
           </a:p>
           <a:p>
@@ -9472,29 +10410,20 @@
                 <a:spcPct val="128000"/>
               </a:lnSpc>
               <a:spcBef>
-                <a:spcPts val="500"/>
-              </a:spcBef>
-              <a:spcAft>
-                <a:spcPts val="0"/>
-              </a:spcAft>
-            </a:pPr>
-            <a:r>
-              <a:rPr sz="1500" b="0" i="0">
-                <a:solidFill>
-                  <a:srgbClr val="F4F6F8"/>
-                </a:solidFill>
-                <a:latin typeface="Helvetica Neue"/>
-              </a:rPr>
-              <a:t>Two founders full-time, clearing those gates, and running the agreed pilot to a signed contract. </a:t>
-            </a:r>
-            <a:r>
-              <a:rPr sz="1500" b="1" i="0">
-                <a:solidFill>
-                  <a:srgbClr val="F4F6F8"/>
-                </a:solidFill>
-                <a:latin typeface="Helvetica Neue"/>
-              </a:rPr>
-              <a:t>The pilot candidate is already secured.</a:t>
+                <a:spcPts val="400"/>
+              </a:spcBef>
+              <a:spcAft>
+                <a:spcPts val="0"/>
+              </a:spcAft>
+            </a:pPr>
+            <a:r>
+              <a:rPr sz="1300" b="0" i="0">
+                <a:solidFill>
+                  <a:srgbClr val="9A9DA5"/>
+                </a:solidFill>
+                <a:latin typeface="IBM Plex Sans"/>
+              </a:rPr>
+              <a:t>A US private-investigations firm led by a former FBI undercover agent — clients across Miami, New York, California and the Midwest — has agreed to send its next large-document matter through Loupe as a paid trial at cost, and to put a mutual MSA in front of us. Sourced through casework, not marketing.</a:t>
             </a:r>
           </a:p>
         </p:txBody>
@@ -9507,8 +10436,8 @@
         </p:nvSpPr>
         <p:spPr>
           <a:xfrm>
-            <a:off x="6995160" y="2286000"/>
-            <a:ext cx="4434840" cy="3291840"/>
+            <a:off x="6903720" y="2057400"/>
+            <a:ext cx="4526280" cy="4480560"/>
           </a:xfrm>
           <a:prstGeom prst="rect">
             <a:avLst/>
@@ -9533,13 +10462,13 @@
               </a:spcAft>
             </a:pPr>
             <a:r>
-              <a:rPr sz="1300" b="1" i="0">
-                <a:solidFill>
-                  <a:srgbClr val="E8B339"/>
-                </a:solidFill>
-                <a:latin typeface="Helvetica Neue"/>
-              </a:rPr>
-              <a:t>What we want from NDRC beyond capital</a:t>
+              <a:rPr sz="1200" b="1" i="0">
+                <a:solidFill>
+                  <a:srgbClr val="E33B4C"/>
+                </a:solidFill>
+                <a:latin typeface="IBM Plex Sans"/>
+              </a:rPr>
+              <a:t>Built so far, verifiable</a:t>
             </a:r>
           </a:p>
           <a:p>
@@ -9548,29 +10477,29 @@
                 <a:spcPct val="128000"/>
               </a:lnSpc>
               <a:spcBef>
-                <a:spcPts val="800"/>
-              </a:spcBef>
-              <a:spcAft>
-                <a:spcPts val="0"/>
-              </a:spcAft>
-            </a:pPr>
-            <a:r>
-              <a:rPr sz="1400" b="1">
-                <a:solidFill>
-                  <a:srgbClr val="E8B339"/>
-                </a:solidFill>
-                <a:latin typeface="Helvetica Neue"/>
+                <a:spcPts val="600"/>
+              </a:spcBef>
+              <a:spcAft>
+                <a:spcPts val="0"/>
+              </a:spcAft>
+            </a:pPr>
+            <a:r>
+              <a:rPr sz="1200" b="1">
+                <a:solidFill>
+                  <a:srgbClr val="E33B4C"/>
+                </a:solidFill>
+                <a:latin typeface="IBM Plex Sans"/>
               </a:rPr>
               <a:t>—   </a:t>
             </a:r>
             <a:r>
-              <a:rPr sz="1400" b="0" i="0">
-                <a:solidFill>
-                  <a:srgbClr val="F4F6F8"/>
-                </a:solidFill>
-                <a:latin typeface="Helvetica Neue"/>
-              </a:rPr>
-              <a:t>Dublin base at Dogpatch Labs</a:t>
+              <a:rPr sz="1200" b="0" i="0">
+                <a:solidFill>
+                  <a:srgbClr val="9A9DA5"/>
+                </a:solidFill>
+                <a:latin typeface="IBM Plex Sans"/>
+              </a:rPr>
+              <a:t>~180,000 lines across a React console, a FastAPI case API and a separate asynchronous evidence engine</a:t>
             </a:r>
           </a:p>
           <a:p>
@@ -9579,29 +10508,29 @@
                 <a:spcPct val="128000"/>
               </a:lnSpc>
               <a:spcBef>
-                <a:spcPts val="800"/>
-              </a:spcBef>
-              <a:spcAft>
-                <a:spcPts val="0"/>
-              </a:spcAft>
-            </a:pPr>
-            <a:r>
-              <a:rPr sz="1400" b="1">
-                <a:solidFill>
-                  <a:srgbClr val="E8B339"/>
-                </a:solidFill>
-                <a:latin typeface="Helvetica Neue"/>
+                <a:spcPts val="600"/>
+              </a:spcBef>
+              <a:spcAft>
+                <a:spcPts val="0"/>
+              </a:spcAft>
+            </a:pPr>
+            <a:r>
+              <a:rPr sz="1200" b="1">
+                <a:solidFill>
+                  <a:srgbClr val="E33B4C"/>
+                </a:solidFill>
+                <a:latin typeface="IBM Plex Sans"/>
               </a:rPr>
               <a:t>—   </a:t>
             </a:r>
             <a:r>
-              <a:rPr sz="1400" b="0" i="0">
-                <a:solidFill>
-                  <a:srgbClr val="F4F6F8"/>
-                </a:solidFill>
-                <a:latin typeface="Helvetica Neue"/>
-              </a:rPr>
-              <a:t>EIR time on pricing and enterprise sales motion</a:t>
+              <a:rPr sz="1200" b="0" i="0">
+                <a:solidFill>
+                  <a:srgbClr val="9A9DA5"/>
+                </a:solidFill>
+                <a:latin typeface="IBM Plex Sans"/>
+              </a:rPr>
+              <a:t>913 commits since December 2025 — two primary engineers</a:t>
             </a:r>
           </a:p>
           <a:p>
@@ -9610,101 +10539,166 @@
                 <a:spcPct val="128000"/>
               </a:lnSpc>
               <a:spcBef>
-                <a:spcPts val="800"/>
-              </a:spcBef>
-              <a:spcAft>
-                <a:spcPts val="0"/>
-              </a:spcAft>
-            </a:pPr>
-            <a:r>
-              <a:rPr sz="1400" b="1">
-                <a:solidFill>
-                  <a:srgbClr val="E8B339"/>
-                </a:solidFill>
-                <a:latin typeface="Helvetica Neue"/>
+                <a:spcPts val="600"/>
+              </a:spcBef>
+              <a:spcAft>
+                <a:spcPts val="0"/>
+              </a:spcAft>
+            </a:pPr>
+            <a:r>
+              <a:rPr sz="1200" b="1">
+                <a:solidFill>
+                  <a:srgbClr val="E33B4C"/>
+                </a:solidFill>
+                <a:latin typeface="IBM Plex Sans"/>
               </a:rPr>
               <a:t>—   </a:t>
             </a:r>
             <a:r>
-              <a:rPr sz="1400" b="0" i="0">
-                <a:solidFill>
-                  <a:srgbClr val="F4F6F8"/>
-                </a:solidFill>
-                <a:latin typeface="Helvetica Neue"/>
-              </a:rPr>
-              <a:t>Introductions into Irish and UK professional-services buyers — ACFE Ireland, Chartered Accountants Ireland forensic group, Law Society criminal law committee</a:t>
-            </a:r>
-          </a:p>
-        </p:txBody>
-      </p:sp>
-      <p:sp>
-        <p:nvSpPr>
-          <p:cNvPr id="7" name="TextBox 6"/>
-          <p:cNvSpPr txBox="1"/>
-          <p:nvPr/>
-        </p:nvSpPr>
-        <p:spPr>
-          <a:xfrm>
-            <a:off x="777240" y="5806440"/>
-            <a:ext cx="10637215" cy="914400"/>
-          </a:xfrm>
-          <a:prstGeom prst="rect">
-            <a:avLst/>
-          </a:prstGeom>
-          <a:noFill/>
-        </p:spPr>
-        <p:txBody>
-          <a:bodyPr wrap="square" lIns="0" rIns="0" tIns="0" bIns="0">
-            <a:spAutoFit/>
-          </a:bodyPr>
-          <a:lstStyle/>
+              <a:rPr sz="1200" b="0" i="0">
+                <a:solidFill>
+                  <a:srgbClr val="9A9DA5"/>
+                </a:solidFill>
+                <a:latin typeface="IBM Plex Sans"/>
+              </a:rPr>
+              <a:t>Neo4j (case graph) · Postgres (cases, auth, audit) · ChromaDB (retrieval) · Redis (jobs)</a:t>
+            </a:r>
+          </a:p>
+          <a:p>
+            <a:pPr algn="l" marL="274320" indent="-274320">
+              <a:lnSpc>
+                <a:spcPct val="128000"/>
+              </a:lnSpc>
+              <a:spcBef>
+                <a:spcPts val="600"/>
+              </a:spcBef>
+              <a:spcAft>
+                <a:spcPts val="0"/>
+              </a:spcAft>
+            </a:pPr>
+            <a:r>
+              <a:rPr sz="1200" b="1">
+                <a:solidFill>
+                  <a:srgbClr val="E33B4C"/>
+                </a:solidFill>
+                <a:latin typeface="IBM Plex Sans"/>
+              </a:rPr>
+              <a:t>—   </a:t>
+            </a:r>
+            <a:r>
+              <a:rPr sz="1200" b="0" i="0">
+                <a:solidFill>
+                  <a:srgbClr val="9A9DA5"/>
+                </a:solidFill>
+                <a:latin typeface="IBM Plex Sans"/>
+              </a:rPr>
+              <a:t>Three AI providers behind one routing policy — the model is a swappable component</a:t>
+            </a:r>
+          </a:p>
+          <a:p>
+            <a:pPr algn="l" marL="274320" indent="-274320">
+              <a:lnSpc>
+                <a:spcPct val="128000"/>
+              </a:lnSpc>
+              <a:spcBef>
+                <a:spcPts val="600"/>
+              </a:spcBef>
+              <a:spcAft>
+                <a:spcPts val="0"/>
+              </a:spcAft>
+            </a:pPr>
+            <a:r>
+              <a:rPr sz="1200" b="1">
+                <a:solidFill>
+                  <a:srgbClr val="E33B4C"/>
+                </a:solidFill>
+                <a:latin typeface="IBM Plex Sans"/>
+              </a:rPr>
+              <a:t>—   </a:t>
+            </a:r>
+            <a:r>
+              <a:rPr sz="1200" b="0" i="0">
+                <a:solidFill>
+                  <a:srgbClr val="9A9DA5"/>
+                </a:solidFill>
+                <a:latin typeface="IBM Plex Sans"/>
+              </a:rPr>
+              <a:t>Single-tenant deployment: one isolated stack per customer</a:t>
+            </a:r>
+          </a:p>
           <a:p>
             <a:pPr algn="l">
               <a:lnSpc>
                 <a:spcPct val="128000"/>
               </a:lnSpc>
               <a:spcBef>
-                <a:spcPts val="0"/>
-              </a:spcBef>
-              <a:spcAft>
-                <a:spcPts val="0"/>
-              </a:spcAft>
-            </a:pPr>
-            <a:r>
-              <a:rPr sz="1700" b="1" i="0">
-                <a:solidFill>
-                  <a:srgbClr val="E8B339"/>
-                </a:solidFill>
-                <a:latin typeface="Helvetica Neue"/>
-              </a:rPr>
-              <a:t>We are not asking anyone to fund the invention of a product. We are asking them to fund the distance between </a:t>
-            </a:r>
-            <a:r>
-              <a:rPr sz="1700" b="1" i="0">
-                <a:solidFill>
-                  <a:srgbClr val="E8B339"/>
-                </a:solidFill>
-                <a:latin typeface="Helvetica Neue"/>
-              </a:rPr>
-              <a:t>works</a:t>
-            </a:r>
-            <a:r>
-              <a:rPr sz="1700" b="1" i="0">
-                <a:solidFill>
-                  <a:srgbClr val="E8B339"/>
-                </a:solidFill>
-                <a:latin typeface="Helvetica Neue"/>
-              </a:rPr>
-              <a:t> and </a:t>
-            </a:r>
-            <a:r>
-              <a:rPr sz="1700" b="1" i="0">
-                <a:solidFill>
-                  <a:srgbClr val="E8B339"/>
-                </a:solidFill>
-                <a:latin typeface="Helvetica Neue"/>
-              </a:rPr>
-              <a:t>sold.</a:t>
+                <a:spcPts val="1400"/>
+              </a:spcBef>
+              <a:spcAft>
+                <a:spcPts val="0"/>
+              </a:spcAft>
+            </a:pPr>
+            <a:r>
+              <a:rPr sz="1200" b="1" i="0">
+                <a:solidFill>
+                  <a:srgbClr val="E33B4C"/>
+                </a:solidFill>
+                <a:latin typeface="IBM Plex Sans"/>
+              </a:rPr>
+              <a:t>Release discipline</a:t>
+            </a:r>
+          </a:p>
+          <a:p>
+            <a:pPr algn="l">
+              <a:lnSpc>
+                <a:spcPct val="128000"/>
+              </a:lnSpc>
+              <a:spcBef>
+                <a:spcPts val="400"/>
+              </a:spcBef>
+              <a:spcAft>
+                <a:spcPts val="0"/>
+              </a:spcAft>
+            </a:pPr>
+            <a:r>
+              <a:rPr sz="1200" b="0" i="0">
+                <a:solidFill>
+                  <a:srgbClr val="F7F7F8"/>
+                </a:solidFill>
+                <a:latin typeface="IBM Plex Sans"/>
+              </a:rPr>
+              <a:t>Onboarding an external customer's evidence runs behind a </a:t>
+            </a:r>
+            <a:r>
+              <a:rPr sz="1200" b="1" i="0">
+                <a:solidFill>
+                  <a:srgbClr val="F7F7F8"/>
+                </a:solidFill>
+                <a:latin typeface="IBM Plex Sans"/>
+              </a:rPr>
+              <a:t>12-stage security-gated release plan. No external case data enters the platform until the security, isolation, backup and legal stages pass.</a:t>
+            </a:r>
+          </a:p>
+          <a:p>
+            <a:pPr algn="l">
+              <a:lnSpc>
+                <a:spcPct val="128000"/>
+              </a:lnSpc>
+              <a:spcBef>
+                <a:spcPts val="1000"/>
+              </a:spcBef>
+              <a:spcAft>
+                <a:spcPts val="0"/>
+              </a:spcAft>
+            </a:pPr>
+            <a:r>
+              <a:rPr sz="1200" b="0" i="0">
+                <a:solidFill>
+                  <a:srgbClr val="9A9DA5"/>
+                </a:solidFill>
+                <a:latin typeface="IBM Plex Sans"/>
+              </a:rPr>
+              <a:t>Roadmap: a 13-epic board takes Loupe from a platform that works for the practice it was built in to one that scales across many. Depth, not existence.</a:t>
             </a:r>
           </a:p>
         </p:txBody>

--- a/Loupe-NDRC-deck.pptx
+++ b/Loupe-NDRC-deck.pptx
@@ -9797,7 +9797,25 @@
                 </a:solidFill>
                 <a:latin typeface="IBM Plex Sans"/>
               </a:rPr>
-              <a:t>Seven years at Siren, the Irish investigative-intelligence platform — the same category, selling to law enforcement, intelligence and financial-crime teams. Built bespoke solutions for every Siren customer I worked with; spoke with hundreds of analysts across conference talks and deployments. 10+ years in data engineering, AI systems and full-stack development.</a:t>
+              <a:t>Seven years at Siren, the Irish investigative-intelligence platform — the same category, selling to law enforcement, intelligence and financial-crime teams. </a:t>
+            </a:r>
+            <a:r>
+              <a:rPr sz="1200" b="1" i="0">
+                <a:solidFill>
+                  <a:srgbClr val="9A9DA5"/>
+                </a:solidFill>
+                <a:latin typeface="IBM Plex Sans"/>
+              </a:rPr>
+              <a:t>Solutions engineer: managed customer accounts and built the customisations each client needed to make the platform fit their process.</a:t>
+            </a:r>
+            <a:r>
+              <a:rPr sz="1200" b="0" i="0">
+                <a:solidFill>
+                  <a:srgbClr val="9A9DA5"/>
+                </a:solidFill>
+                <a:latin typeface="IBM Plex Sans"/>
+              </a:rPr>
+              <a:t> Spoke with hundreds of analysts across conference talks and deployments. 10+ years in data engineering, AI systems and full-stack development.</a:t>
             </a:r>
           </a:p>
           <a:p>

--- a/Loupe-NDRC-deck.pptx
+++ b/Loupe-NDRC-deck.pptx
@@ -5471,8 +5471,8 @@
         </p:nvSpPr>
         <p:spPr>
           <a:xfrm>
-            <a:off x="777240" y="2286000"/>
-            <a:ext cx="5760720" cy="3291840"/>
+            <a:off x="777240" y="2212848"/>
+            <a:ext cx="5806440" cy="1051560"/>
           </a:xfrm>
           <a:prstGeom prst="rect">
             <a:avLst/>
@@ -5497,7 +5497,7 @@
               </a:spcAft>
             </a:pPr>
             <a:r>
-              <a:rPr sz="1600" b="0" i="0">
+              <a:rPr sz="1400" b="0" i="0">
                 <a:solidFill>
                   <a:srgbClr val="F7F7F8"/>
                 </a:solidFill>
@@ -5506,7 +5506,7 @@
               <a:t>The platform works and has closed real federal cases. What stands between it and external revenue is the </a:t>
             </a:r>
             <a:r>
-              <a:rPr sz="1600" b="1" i="0">
+              <a:rPr sz="1400" b="1" i="0">
                 <a:solidFill>
                   <a:srgbClr val="F7F7F8"/>
                 </a:solidFill>
@@ -5515,66 +5515,13 @@
               <a:t>security gate</a:t>
             </a:r>
             <a:r>
-              <a:rPr sz="1600" b="0" i="0">
+              <a:rPr sz="1400" b="0" i="0">
                 <a:solidFill>
                   <a:srgbClr val="F7F7F8"/>
                 </a:solidFill>
                 <a:latin typeface="IBM Plex Sans"/>
               </a:rPr>
               <a:t> — the isolation, backup and legal stages that let another firm's privileged evidence enter the system — and the pilot itself.</a:t>
-            </a:r>
-          </a:p>
-          <a:p>
-            <a:pPr algn="l">
-              <a:lnSpc>
-                <a:spcPct val="128000"/>
-              </a:lnSpc>
-              <a:spcBef>
-                <a:spcPts val="1800"/>
-              </a:spcBef>
-              <a:spcAft>
-                <a:spcPts val="0"/>
-              </a:spcAft>
-            </a:pPr>
-            <a:r>
-              <a:rPr sz="1300" b="1" i="0">
-                <a:solidFill>
-                  <a:srgbClr val="E33B4C"/>
-                </a:solidFill>
-                <a:latin typeface="IBM Plex Sans"/>
-              </a:rPr>
-              <a:t>Use of funds</a:t>
-            </a:r>
-          </a:p>
-          <a:p>
-            <a:pPr algn="l">
-              <a:lnSpc>
-                <a:spcPct val="128000"/>
-              </a:lnSpc>
-              <a:spcBef>
-                <a:spcPts val="500"/>
-              </a:spcBef>
-              <a:spcAft>
-                <a:spcPts val="0"/>
-              </a:spcAft>
-            </a:pPr>
-            <a:r>
-              <a:rPr sz="1500" b="0" i="0">
-                <a:solidFill>
-                  <a:srgbClr val="F7F7F8"/>
-                </a:solidFill>
-                <a:latin typeface="IBM Plex Sans"/>
-              </a:rPr>
-              <a:t>Two founders full-time, clearing those gates, and running the agreed pilot to a signed contract. </a:t>
-            </a:r>
-            <a:r>
-              <a:rPr sz="1500" b="1" i="0">
-                <a:solidFill>
-                  <a:srgbClr val="F7F7F8"/>
-                </a:solidFill>
-                <a:latin typeface="IBM Plex Sans"/>
-              </a:rPr>
-              <a:t>The pilot candidate is already secured.</a:t>
             </a:r>
           </a:p>
         </p:txBody>
@@ -5587,8 +5534,8 @@
         </p:nvSpPr>
         <p:spPr>
           <a:xfrm>
-            <a:off x="6995160" y="2286000"/>
-            <a:ext cx="4434840" cy="3291840"/>
+            <a:off x="777240" y="3310128"/>
+            <a:ext cx="5806440" cy="2743200"/>
           </a:xfrm>
           <a:prstGeom prst="rect">
             <a:avLst/>
@@ -5613,13 +5560,13 @@
               </a:spcAft>
             </a:pPr>
             <a:r>
-              <a:rPr sz="1300" b="1" i="0">
+              <a:rPr sz="1200" b="1" i="0">
                 <a:solidFill>
                   <a:srgbClr val="E33B4C"/>
                 </a:solidFill>
                 <a:latin typeface="IBM Plex Sans"/>
               </a:rPr>
-              <a:t>What we want from NDRC beyond capital</a:t>
+              <a:t>Use of funds</a:t>
             </a:r>
           </a:p>
           <a:p>
@@ -5628,14 +5575,14 @@
                 <a:spcPct val="128000"/>
               </a:lnSpc>
               <a:spcBef>
-                <a:spcPts val="800"/>
-              </a:spcBef>
-              <a:spcAft>
-                <a:spcPts val="0"/>
-              </a:spcAft>
-            </a:pPr>
-            <a:r>
-              <a:rPr sz="1400" b="1">
+                <a:spcPts val="600"/>
+              </a:spcBef>
+              <a:spcAft>
+                <a:spcPts val="0"/>
+              </a:spcAft>
+            </a:pPr>
+            <a:r>
+              <a:rPr sz="1200" b="1">
                 <a:solidFill>
                   <a:srgbClr val="E33B4C"/>
                 </a:solidFill>
@@ -5644,13 +5591,22 @@
               <a:t>—   </a:t>
             </a:r>
             <a:r>
-              <a:rPr sz="1400" b="0" i="0">
+              <a:rPr sz="1200" b="1" i="0">
                 <a:solidFill>
                   <a:srgbClr val="F7F7F8"/>
                 </a:solidFill>
                 <a:latin typeface="IBM Plex Sans"/>
               </a:rPr>
-              <a:t>Dublin base at Dogpatch Labs</a:t>
+              <a:t>Two founders full-time</a:t>
+            </a:r>
+            <a:r>
+              <a:rPr sz="1200" b="0" i="0">
+                <a:solidFill>
+                  <a:srgbClr val="F7F7F8"/>
+                </a:solidFill>
+                <a:latin typeface="IBM Plex Sans"/>
+              </a:rPr>
+              <a:t> — clearing the security gate and running the agreed pilot to a signed contract. The pilot candidate is already secured.</a:t>
             </a:r>
           </a:p>
           <a:p>
@@ -5659,14 +5615,14 @@
                 <a:spcPct val="128000"/>
               </a:lnSpc>
               <a:spcBef>
-                <a:spcPts val="800"/>
-              </a:spcBef>
-              <a:spcAft>
-                <a:spcPts val="0"/>
-              </a:spcAft>
-            </a:pPr>
-            <a:r>
-              <a:rPr sz="1400" b="1">
+                <a:spcPts val="600"/>
+              </a:spcBef>
+              <a:spcAft>
+                <a:spcPts val="0"/>
+              </a:spcAft>
+            </a:pPr>
+            <a:r>
+              <a:rPr sz="1200" b="1">
                 <a:solidFill>
                   <a:srgbClr val="E33B4C"/>
                 </a:solidFill>
@@ -5675,13 +5631,22 @@
               <a:t>—   </a:t>
             </a:r>
             <a:r>
-              <a:rPr sz="1400" b="0" i="0">
+              <a:rPr sz="1200" b="1" i="0">
                 <a:solidFill>
                   <a:srgbClr val="F7F7F8"/>
                 </a:solidFill>
                 <a:latin typeface="IBM Plex Sans"/>
               </a:rPr>
-              <a:t>EIR time on pricing and enterprise sales motion</a:t>
+              <a:t>A security posture we can evidence now</a:t>
+            </a:r>
+            <a:r>
+              <a:rPr sz="1200" b="0" i="0">
+                <a:solidFill>
+                  <a:srgbClr val="F7F7F8"/>
+                </a:solidFill>
+                <a:latin typeface="IBM Plex Sans"/>
+              </a:rPr>
+              <a:t> — Cyber Essentials, an independent penetration test, and a written security package. Full certification is bought when a deal requires it, not held in advance.</a:t>
             </a:r>
           </a:p>
           <a:p>
@@ -5690,14 +5655,14 @@
                 <a:spcPct val="128000"/>
               </a:lnSpc>
               <a:spcBef>
-                <a:spcPts val="800"/>
-              </a:spcBef>
-              <a:spcAft>
-                <a:spcPts val="0"/>
-              </a:spcAft>
-            </a:pPr>
-            <a:r>
-              <a:rPr sz="1400" b="1">
+                <a:spcPts val="600"/>
+              </a:spcBef>
+              <a:spcAft>
+                <a:spcPts val="0"/>
+              </a:spcAft>
+            </a:pPr>
+            <a:r>
+              <a:rPr sz="1200" b="1">
                 <a:solidFill>
                   <a:srgbClr val="E33B4C"/>
                 </a:solidFill>
@@ -5706,13 +5671,62 @@
               <a:t>—   </a:t>
             </a:r>
             <a:r>
-              <a:rPr sz="1400" b="0" i="0">
+              <a:rPr sz="1200" b="1" i="0">
                 <a:solidFill>
                   <a:srgbClr val="F7F7F8"/>
                 </a:solidFill>
                 <a:latin typeface="IBM Plex Sans"/>
               </a:rPr>
-              <a:t>Introductions into Irish and UK professional-services buyers — ACFE Ireland, Chartered Accountants Ireland forensic group, Law Society criminal law committee</a:t>
+              <a:t>Single-tenant infrastructure</a:t>
+            </a:r>
+            <a:r>
+              <a:rPr sz="1200" b="0" i="0">
+                <a:solidFill>
+                  <a:srgbClr val="F7F7F8"/>
+                </a:solidFill>
+                <a:latin typeface="IBM Plex Sans"/>
+              </a:rPr>
+              <a:t> for the first external customers — one instance each, so it scales with customers rather than ahead of them.</a:t>
+            </a:r>
+          </a:p>
+          <a:p>
+            <a:pPr algn="l" marL="274320" indent="-274320">
+              <a:lnSpc>
+                <a:spcPct val="128000"/>
+              </a:lnSpc>
+              <a:spcBef>
+                <a:spcPts val="600"/>
+              </a:spcBef>
+              <a:spcAft>
+                <a:spcPts val="0"/>
+              </a:spcAft>
+            </a:pPr>
+            <a:r>
+              <a:rPr sz="1200" b="1">
+                <a:solidFill>
+                  <a:srgbClr val="E33B4C"/>
+                </a:solidFill>
+                <a:latin typeface="IBM Plex Sans"/>
+              </a:rPr>
+              <a:t>—   </a:t>
+            </a:r>
+            <a:r>
+              <a:rPr sz="1200" b="1" i="0">
+                <a:solidFill>
+                  <a:srgbClr val="F7F7F8"/>
+                </a:solidFill>
+                <a:latin typeface="IBM Plex Sans"/>
+              </a:rPr>
+              <a:t>Processing and inference</a:t>
+            </a:r>
+            <a:r>
+              <a:rPr sz="1200" b="0" i="0">
+                <a:solidFill>
+                  <a:srgbClr val="F7F7F8"/>
+                </a:solidFill>
+                <a:latin typeface="IBM Plex Sans"/>
+              </a:rPr>
+              <a:t> across pilot matters. The per-matter cost model is what the pilot establishes.</a:t>
             </a:r>
           </a:p>
         </p:txBody>
@@ -5725,8 +5739,186 @@
         </p:nvSpPr>
         <p:spPr>
           <a:xfrm>
-            <a:off x="777240" y="5806440"/>
-            <a:ext cx="10637215" cy="914400"/>
+            <a:off x="6995160" y="2212848"/>
+            <a:ext cx="4434840" cy="3840480"/>
+          </a:xfrm>
+          <a:prstGeom prst="rect">
+            <a:avLst/>
+          </a:prstGeom>
+          <a:noFill/>
+        </p:spPr>
+        <p:txBody>
+          <a:bodyPr wrap="square" lIns="0" rIns="0" tIns="0" bIns="0">
+            <a:spAutoFit/>
+          </a:bodyPr>
+          <a:lstStyle/>
+          <a:p>
+            <a:pPr algn="l">
+              <a:lnSpc>
+                <a:spcPct val="128000"/>
+              </a:lnSpc>
+              <a:spcBef>
+                <a:spcPts val="0"/>
+              </a:spcBef>
+              <a:spcAft>
+                <a:spcPts val="0"/>
+              </a:spcAft>
+            </a:pPr>
+            <a:r>
+              <a:rPr sz="1200" b="1" i="0">
+                <a:solidFill>
+                  <a:srgbClr val="E33B4C"/>
+                </a:solidFill>
+                <a:latin typeface="IBM Plex Sans"/>
+              </a:rPr>
+              <a:t>What we want from NDRC beyond capital</a:t>
+            </a:r>
+          </a:p>
+          <a:p>
+            <a:pPr algn="l" marL="274320" indent="-274320">
+              <a:lnSpc>
+                <a:spcPct val="128000"/>
+              </a:lnSpc>
+              <a:spcBef>
+                <a:spcPts val="700"/>
+              </a:spcBef>
+              <a:spcAft>
+                <a:spcPts val="0"/>
+              </a:spcAft>
+            </a:pPr>
+            <a:r>
+              <a:rPr sz="1200" b="1">
+                <a:solidFill>
+                  <a:srgbClr val="E33B4C"/>
+                </a:solidFill>
+                <a:latin typeface="IBM Plex Sans"/>
+              </a:rPr>
+              <a:t>—   </a:t>
+            </a:r>
+            <a:r>
+              <a:rPr sz="1200" b="1" i="0">
+                <a:solidFill>
+                  <a:srgbClr val="F7F7F8"/>
+                </a:solidFill>
+                <a:latin typeface="IBM Plex Sans"/>
+              </a:rPr>
+              <a:t>Go-to-market guidance.</a:t>
+            </a:r>
+            <a:r>
+              <a:rPr sz="1200" b="0" i="0">
+                <a:solidFill>
+                  <a:srgbClr val="F7F7F8"/>
+                </a:solidFill>
+                <a:latin typeface="IBM Plex Sans"/>
+              </a:rPr>
+              <a:t> The channel is identified — bar associations and professional bodies — and pricing is per-matter rather than per-seat. Both need pressure-testing by people who have built a repeatable motion.</a:t>
+            </a:r>
+          </a:p>
+          <a:p>
+            <a:pPr algn="l" marL="274320" indent="-274320">
+              <a:lnSpc>
+                <a:spcPct val="128000"/>
+              </a:lnSpc>
+              <a:spcBef>
+                <a:spcPts val="700"/>
+              </a:spcBef>
+              <a:spcAft>
+                <a:spcPts val="0"/>
+              </a:spcAft>
+            </a:pPr>
+            <a:r>
+              <a:rPr sz="1200" b="1">
+                <a:solidFill>
+                  <a:srgbClr val="E33B4C"/>
+                </a:solidFill>
+                <a:latin typeface="IBM Plex Sans"/>
+              </a:rPr>
+              <a:t>—   </a:t>
+            </a:r>
+            <a:r>
+              <a:rPr sz="1200" b="0" i="0">
+                <a:solidFill>
+                  <a:srgbClr val="F7F7F8"/>
+                </a:solidFill>
+                <a:latin typeface="IBM Plex Sans"/>
+              </a:rPr>
+              <a:t>Dublin base at Dogpatch Labs</a:t>
+            </a:r>
+          </a:p>
+          <a:p>
+            <a:pPr algn="l" marL="274320" indent="-274320">
+              <a:lnSpc>
+                <a:spcPct val="128000"/>
+              </a:lnSpc>
+              <a:spcBef>
+                <a:spcPts val="700"/>
+              </a:spcBef>
+              <a:spcAft>
+                <a:spcPts val="0"/>
+              </a:spcAft>
+            </a:pPr>
+            <a:r>
+              <a:rPr sz="1200" b="1">
+                <a:solidFill>
+                  <a:srgbClr val="E33B4C"/>
+                </a:solidFill>
+                <a:latin typeface="IBM Plex Sans"/>
+              </a:rPr>
+              <a:t>—   </a:t>
+            </a:r>
+            <a:r>
+              <a:rPr sz="1200" b="0" i="0">
+                <a:solidFill>
+                  <a:srgbClr val="F7F7F8"/>
+                </a:solidFill>
+                <a:latin typeface="IBM Plex Sans"/>
+              </a:rPr>
+              <a:t>EIR time on pricing structure and enterprise sales motion</a:t>
+            </a:r>
+          </a:p>
+          <a:p>
+            <a:pPr algn="l" marL="274320" indent="-274320">
+              <a:lnSpc>
+                <a:spcPct val="128000"/>
+              </a:lnSpc>
+              <a:spcBef>
+                <a:spcPts val="700"/>
+              </a:spcBef>
+              <a:spcAft>
+                <a:spcPts val="0"/>
+              </a:spcAft>
+            </a:pPr>
+            <a:r>
+              <a:rPr sz="1200" b="1">
+                <a:solidFill>
+                  <a:srgbClr val="E33B4C"/>
+                </a:solidFill>
+                <a:latin typeface="IBM Plex Sans"/>
+              </a:rPr>
+              <a:t>—   </a:t>
+            </a:r>
+            <a:r>
+              <a:rPr sz="1200" b="0" i="0">
+                <a:solidFill>
+                  <a:srgbClr val="F7F7F8"/>
+                </a:solidFill>
+                <a:latin typeface="IBM Plex Sans"/>
+              </a:rPr>
+              <a:t>Introductions into Irish and UK professional-services buyers — ACFE Ireland, Chartered Accountants Ireland forensic group, Law Society criminal law committee</a:t>
+            </a:r>
+          </a:p>
+        </p:txBody>
+      </p:sp>
+      <p:sp>
+        <p:nvSpPr>
+          <p:cNvPr id="8" name="TextBox 7"/>
+          <p:cNvSpPr txBox="1"/>
+          <p:nvPr/>
+        </p:nvSpPr>
+        <p:spPr>
+          <a:xfrm>
+            <a:off x="777240" y="6199632"/>
+            <a:ext cx="10637215" cy="566928"/>
           </a:xfrm>
           <a:prstGeom prst="rect">
             <a:avLst/>

--- a/Loupe-NDRC-deck.pptx
+++ b/Loupe-NDRC-deck.pptx
@@ -5637,7 +5637,7 @@
                 </a:solidFill>
                 <a:latin typeface="IBM Plex Sans"/>
               </a:rPr>
-              <a:t>A security posture we can evidence now</a:t>
+              <a:t>The security evidence a firm's counsel asks for</a:t>
             </a:r>
             <a:r>
               <a:rPr sz="1200" b="0" i="0">
@@ -5646,7 +5646,7 @@
                 </a:solidFill>
                 <a:latin typeface="IBM Plex Sans"/>
               </a:rPr>
-              <a:t> — Cyber Essentials, an independent penetration test, and a written security package. Full certification is bought when a deal requires it, not held in advance.</a:t>
+              <a:t> — Cyber Essentials, an independent penetration test and a written security package, plus starting the SOC 2 observation window. Cheap and fast; full certification is bought when a deal requires it.</a:t>
             </a:r>
           </a:p>
           <a:p>

--- a/Loupe-NDRC-deck.pptx
+++ b/Loupe-NDRC-deck.pptx
@@ -9913,8 +9913,8 @@
         </p:nvSpPr>
         <p:spPr>
           <a:xfrm>
-            <a:off x="777240" y="2286000"/>
-            <a:ext cx="3291840" cy="3291840"/>
+            <a:off x="777240" y="2212848"/>
+            <a:ext cx="3291840" cy="3931920"/>
           </a:xfrm>
           <a:prstGeom prst="rect">
             <a:avLst/>
@@ -9976,14 +9976,14 @@
                 <a:spcPct val="128000"/>
               </a:lnSpc>
               <a:spcBef>
-                <a:spcPts val="1000"/>
-              </a:spcBef>
-              <a:spcAft>
-                <a:spcPts val="0"/>
-              </a:spcAft>
-            </a:pPr>
-            <a:r>
-              <a:rPr sz="1200" b="0" i="0">
+                <a:spcPts val="900"/>
+              </a:spcBef>
+              <a:spcAft>
+                <a:spcPts val="0"/>
+              </a:spcAft>
+            </a:pPr>
+            <a:r>
+              <a:rPr sz="1100" b="0" i="0">
                 <a:solidFill>
                   <a:srgbClr val="9A9DA5"/>
                 </a:solidFill>
@@ -9992,7 +9992,7 @@
               <a:t>Seven years at Siren, the Irish investigative-intelligence platform — the same category, selling to law enforcement, intelligence and financial-crime teams. </a:t>
             </a:r>
             <a:r>
-              <a:rPr sz="1200" b="1" i="0">
+              <a:rPr sz="1100" b="1" i="0">
                 <a:solidFill>
                   <a:srgbClr val="9A9DA5"/>
                 </a:solidFill>
@@ -10001,13 +10001,13 @@
               <a:t>Solutions engineer: managed customer accounts and built the customisations each client needed to make the platform fit their process.</a:t>
             </a:r>
             <a:r>
-              <a:rPr sz="1200" b="0" i="0">
+              <a:rPr sz="1100" b="0" i="0">
                 <a:solidFill>
                   <a:srgbClr val="9A9DA5"/>
                 </a:solidFill>
                 <a:latin typeface="IBM Plex Sans"/>
               </a:rPr>
-              <a:t> Spoke with hundreds of analysts across conference talks and deployments. 10+ years in data engineering, AI systems and full-stack development.</a:t>
+              <a:t> Spoke with hundreds of analysts across conference talks and deployments. Now a sales solutions engineer at Udemy across large-enterprise and strategic accounts — the same discipline at enterprise scale. 10+ years in data engineering and AI systems.</a:t>
             </a:r>
           </a:p>
           <a:p>
@@ -10016,14 +10016,14 @@
                 <a:spcPct val="128000"/>
               </a:lnSpc>
               <a:spcBef>
-                <a:spcPts val="1000"/>
-              </a:spcBef>
-              <a:spcAft>
-                <a:spcPts val="0"/>
-              </a:spcAft>
-            </a:pPr>
-            <a:r>
-              <a:rPr sz="1200" b="1" i="0">
+                <a:spcPts val="900"/>
+              </a:spcBef>
+              <a:spcAft>
+                <a:spcPts val="0"/>
+              </a:spcAft>
+            </a:pPr>
+            <a:r>
+              <a:rPr sz="1100" b="1" i="0">
                 <a:solidFill>
                   <a:srgbClr val="E33B4C"/>
                 </a:solidFill>
@@ -10042,8 +10042,8 @@
         </p:nvSpPr>
         <p:spPr>
           <a:xfrm>
-            <a:off x="4480560" y="2286000"/>
-            <a:ext cx="3291840" cy="3291840"/>
+            <a:off x="4480560" y="2212848"/>
+            <a:ext cx="3291840" cy="3931920"/>
           </a:xfrm>
           <a:prstGeom prst="rect">
             <a:avLst/>
@@ -10105,20 +10105,29 @@
                 <a:spcPct val="128000"/>
               </a:lnSpc>
               <a:spcBef>
-                <a:spcPts val="1000"/>
-              </a:spcBef>
-              <a:spcAft>
-                <a:spcPts val="0"/>
-              </a:spcAft>
-            </a:pPr>
-            <a:r>
-              <a:rPr sz="1200" b="0" i="0">
+                <a:spcPts val="900"/>
+              </a:spcBef>
+              <a:spcAft>
+                <a:spcPts val="0"/>
+              </a:spcAft>
+            </a:pPr>
+            <a:r>
+              <a:rPr sz="1100" b="1" i="0">
                 <a:solidFill>
                   <a:srgbClr val="9A9DA5"/>
                 </a:solidFill>
                 <a:latin typeface="IBM Plex Sans"/>
               </a:rPr>
-              <a:t>Data infrastructure, security and scalable systems. Core engineering, database architecture, deployment operations.</a:t>
+              <a:t>Architect of the case model.</a:t>
+            </a:r>
+            <a:r>
+              <a:rPr sz="1100" b="0" i="0">
+                <a:solidFill>
+                  <a:srgbClr val="9A9DA5"/>
+                </a:solidFill>
+                <a:latin typeface="IBM Plex Sans"/>
+              </a:rPr>
+              <a:t> The approach the platform rests on is his: extract entities and events from evidence with an LLM at ingestion, resolve them into a graph, and query that concrete structure afterwards — so an answer is a traversal over modelled evidence, not a retrieval over text. He wrote the first commit — LLM client, graph client and ingestion pipeline — and 240+ since: case-level isolation enforced in the database, entity resolution, the split between verified facts and AI inference, and the performance work that keeps very large cases traversable.</a:t>
             </a:r>
           </a:p>
           <a:p>
@@ -10127,14 +10136,14 @@
                 <a:spcPct val="128000"/>
               </a:lnSpc>
               <a:spcBef>
-                <a:spcPts val="1000"/>
-              </a:spcBef>
-              <a:spcAft>
-                <a:spcPts val="0"/>
-              </a:spcAft>
-            </a:pPr>
-            <a:r>
-              <a:rPr sz="1200" b="1" i="0">
+                <a:spcPts val="900"/>
+              </a:spcBef>
+              <a:spcAft>
+                <a:spcPts val="0"/>
+              </a:spcAft>
+            </a:pPr>
+            <a:r>
+              <a:rPr sz="1100" b="1" i="0">
                 <a:solidFill>
                   <a:srgbClr val="E33B4C"/>
                 </a:solidFill>
@@ -10153,8 +10162,8 @@
         </p:nvSpPr>
         <p:spPr>
           <a:xfrm>
-            <a:off x="8183880" y="2286000"/>
-            <a:ext cx="3291840" cy="3291840"/>
+            <a:off x="8183880" y="2212848"/>
+            <a:ext cx="3291840" cy="3931920"/>
           </a:xfrm>
           <a:prstGeom prst="rect">
             <a:avLst/>
@@ -10216,20 +10225,38 @@
                 <a:spcPct val="128000"/>
               </a:lnSpc>
               <a:spcBef>
-                <a:spcPts val="1000"/>
-              </a:spcBef>
-              <a:spcAft>
-                <a:spcPts val="0"/>
-              </a:spcAft>
-            </a:pPr>
-            <a:r>
-              <a:rPr sz="1200" b="0" i="0">
+                <a:spcPts val="900"/>
+              </a:spcBef>
+              <a:spcAft>
+                <a:spcPts val="0"/>
+              </a:spcAft>
+            </a:pPr>
+            <a:r>
+              <a:rPr sz="1100" b="0" i="0">
                 <a:solidFill>
                   <a:srgbClr val="9A9DA5"/>
                 </a:solidFill>
                 <a:latin typeface="IBM Plex Sans"/>
               </a:rPr>
-              <a:t>10+ years as a licensed private investigator on federal criminal defence and financial fraud casework. US-based.</a:t>
+              <a:t>10+ years as a licensed private investigator on federal criminal defence and financial fraud casework — and the product's direction, daily. </a:t>
+            </a:r>
+            <a:r>
+              <a:rPr sz="1100" b="1" i="0">
+                <a:solidFill>
+                  <a:srgbClr val="9A9DA5"/>
+                </a:solidFill>
+                <a:latin typeface="IBM Plex Sans"/>
+              </a:rPr>
+              <a:t>Multiple calls a week; the backlog is generated from live matters as she works them</a:t>
+            </a:r>
+            <a:r>
+              <a:rPr sz="1100" b="0" i="0">
+                <a:solidFill>
+                  <a:srgbClr val="9A9DA5"/>
+                </a:solidFill>
+                <a:latin typeface="IBM Plex Sans"/>
+              </a:rPr>
+              <a:t>, which is why development has never run on a roadmap invented in advance. A grounded visionary: every feature traces to a real case, and she has run federal cases to completion inside the platform. US-based.</a:t>
             </a:r>
           </a:p>
           <a:p>
@@ -10238,14 +10265,14 @@
                 <a:spcPct val="128000"/>
               </a:lnSpc>
               <a:spcBef>
-                <a:spcPts val="1000"/>
-              </a:spcBef>
-              <a:spcAft>
-                <a:spcPts val="0"/>
-              </a:spcAft>
-            </a:pPr>
-            <a:r>
-              <a:rPr sz="1200" b="1" i="0">
+                <a:spcPts val="900"/>
+              </a:spcBef>
+              <a:spcAft>
+                <a:spcPts val="0"/>
+              </a:spcAft>
+            </a:pPr>
+            <a:r>
+              <a:rPr sz="1100" b="1" i="0">
                 <a:solidFill>
                   <a:srgbClr val="E33B4C"/>
                 </a:solidFill>
@@ -10264,8 +10291,8 @@
         </p:nvSpPr>
         <p:spPr>
           <a:xfrm>
-            <a:off x="777240" y="5943600"/>
-            <a:ext cx="10637215" cy="822960"/>
+            <a:off x="777240" y="6144768"/>
+            <a:ext cx="10637215" cy="658368"/>
           </a:xfrm>
           <a:prstGeom prst="rect">
             <a:avLst/>
@@ -10290,7 +10317,7 @@
               </a:spcAft>
             </a:pPr>
             <a:r>
-              <a:rPr sz="1500" b="0" i="0">
+              <a:rPr sz="1350" b="0" i="0">
                 <a:solidFill>
                   <a:srgbClr val="F7F7F8"/>
                 </a:solidFill>
@@ -10299,7 +10326,7 @@
               <a:t>Seven years building investigative intelligence software for enterprise buyers, and a decade running federal casework as the kind of investigator who has to live with the result. </a:t>
             </a:r>
             <a:r>
-              <a:rPr sz="1500" b="1" i="0">
+              <a:rPr sz="1350" b="1" i="0">
                 <a:solidFill>
                   <a:srgbClr val="F7F7F8"/>
                 </a:solidFill>

--- a/Loupe-NDRC-deck.pptx
+++ b/Loupe-NDRC-deck.pptx
@@ -10127,7 +10127,25 @@
                 </a:solidFill>
                 <a:latin typeface="IBM Plex Sans"/>
               </a:rPr>
-              <a:t> The approach the platform rests on is his: extract entities and events from evidence with an LLM at ingestion, resolve them into a graph, and query that concrete structure afterwards — so an answer is a traversal over modelled evidence, not a retrieval over text. He wrote the first commit — LLM client, graph client and ingestion pipeline — and 240+ since: case-level isolation enforced in the database, entity resolution, the split between verified facts and AI inference, and the performance work that keeps very large cases traversable.</a:t>
+              <a:t> The approach the platform rests on is his: extract entities and events from evidence with an LLM at ingestion, resolve them into a graph, and query that concrete structure afterwards — so an answer is a traversal over modelled evidence, not a retrieval over text. He wrote the first commit and has led engineering since. </a:t>
+            </a:r>
+            <a:r>
+              <a:rPr sz="1100" b="1" i="0">
+                <a:solidFill>
+                  <a:srgbClr val="9A9DA5"/>
+                </a:solidFill>
+                <a:latin typeface="IBM Plex Sans"/>
+              </a:rPr>
+              <a:t>Drives the enterprise platform</a:t>
+            </a:r>
+            <a:r>
+              <a:rPr sz="1100" b="0" i="0">
+                <a:solidFill>
+                  <a:srgbClr val="9A9DA5"/>
+                </a:solidFill>
+                <a:latin typeface="IBM Plex Sans"/>
+              </a:rPr>
+              <a:t>, while features are proven on live casework first and promoted once they mature — so nothing reaches the deployable product until it has survived a real matter.</a:t>
             </a:r>
           </a:p>
           <a:p>

--- a/Loupe-NDRC-deck.pptx
+++ b/Loupe-NDRC-deck.pptx
@@ -1036,143 +1036,87 @@
           <a:lstStyle/>
           <a:p>
             <a:r>
-              <a:t>Two screenshots only. Resist the feature list.</a:t>
+              <a:t>The slide has three beats. Say them in order and do not add a fourth.</a:t>
             </a:r>
           </a:p>
           <a:p/>
           <a:p>
             <a:r>
-              <a:t>The right-hand screenshot is the whole pitch. An investor who understands that</a:t>
-            </a:r>
-          </a:p>
-          <a:p>
-            <a:r>
-              <a:t>one click understands the company. Rehearse it as a live demo if you get a</a:t>
-            </a:r>
-          </a:p>
-          <a:p>
-            <a:r>
-              <a:t>meeting. Capture it with the RESULT GRAPH VISIBLE beside the cited text — that</a:t>
-            </a:r>
-          </a:p>
-          <a:p>
-            <a:r>
-              <a:t>shows the answer being grounded and structured in one frame, and it keeps the</a:t>
-            </a:r>
-          </a:p>
-          <a:p>
-            <a:r>
-              <a:t>graph in the deck where it belongs: as a result, not a landing page.</a:t>
+              <a:t>ONE — everything goes in. Phone extractions, call logs, documents, images, audio,</a:t>
+            </a:r>
+          </a:p>
+          <a:p>
+            <a:r>
+              <a:t>financial records. Resolved at ingestion into one model, not stored as files</a:t>
+            </a:r>
+          </a:p>
+          <a:p>
+            <a:r>
+              <a:t>alongside each other.</a:t>
             </a:r>
           </a:p>
           <a:p/>
           <a:p>
             <a:r>
-              <a:t>DO NOT LEAD WITH THE CASE GRAPH. A hairball is the most clichéd image in this</a:t>
-            </a:r>
-          </a:p>
-          <a:p>
-            <a:r>
-              <a:t>category — Palantir, i2, Siren, Linkurious all lead with it. It puts you in the</a:t>
-            </a:r>
-          </a:p>
-          <a:p>
-            <a:r>
-              <a:t>comparison slides 5 and 6 spend their time declining, and nobody parses a dense</a:t>
-            </a:r>
-          </a:p>
-          <a:p>
-            <a:r>
-              <a:t>graph at slide scale anyway. Same reason the product's default view is moving off</a:t>
-            </a:r>
-          </a:p>
-          <a:p>
-            <a:r>
-              <a:t>it: a case that opens on ten thousand nodes is useless to a working investigator.</a:t>
+              <a:t>TWO — one model, read five ways. Financial explorer, multi-phone view, timeline,</a:t>
+            </a:r>
+          </a:p>
+          <a:p>
+            <a:r>
+              <a:t>graph, agent query. These are not five features; they are five perspectives on the</a:t>
+            </a:r>
+          </a:p>
+          <a:p>
+            <a:r>
+              <a:t>same structure, which is why a finding in one is the same object in another.</a:t>
             </a:r>
           </a:p>
           <a:p/>
           <a:p>
             <a:r>
-              <a:t>NAME THE LOUPE. A Loupe is the product's core curation object — a bonded</a:t>
-            </a:r>
-          </a:p>
-          <a:p>
-            <a:r>
-              <a:t>collection of documents, highlighted passages, entities and events, with its own</a:t>
-            </a:r>
-          </a:p>
-          <a:p>
-            <a:r>
-              <a:t>identity and description, bound together to explain an event, a sequence or a</a:t>
-            </a:r>
-          </a:p>
-          <a:p>
-            <a:r>
-              <a:t>thing. It is why the company is called what it is, and it is the thing a</a:t>
-            </a:r>
-          </a:p>
-          <a:p>
-            <a:r>
-              <a:t>competitor cannot copy by improving their extraction. Pre-empts "isn't this just</a:t>
-            </a:r>
-          </a:p>
-          <a:p>
-            <a:r>
-              <a:t>an extraction pipeline?" before slide 5 has to argue it.</a:t>
+              <a:t>THREE — and this is the beat that is usually undersold. The investigator finds</a:t>
+            </a:r>
+          </a:p>
+          <a:p>
+            <a:r>
+              <a:t>what matters and binds it into a Loupe. Loupes move into the case, and the case is</a:t>
+            </a:r>
+          </a:p>
+          <a:p>
+            <a:r>
+              <a:t>BUILT out of them. That is the difference between a tool that answers questions and</a:t>
+            </a:r>
+          </a:p>
+          <a:p>
+            <a:r>
+              <a:t>a tool that produces the work product. Every competitor's collection holds documents</a:t>
+            </a:r>
+          </a:p>
+          <a:p>
+            <a:r>
+              <a:t>and facts derived from documents; a Loupe can hold a call, a transfer and a location</a:t>
+            </a:r>
+          </a:p>
+          <a:p>
+            <a:r>
+              <a:t>as members.</a:t>
             </a:r>
           </a:p>
           <a:p/>
           <a:p>
             <a:r>
-              <a:t>A Loupe is also the better picture: a timeline reads in three seconds, it shows</a:t>
-            </a:r>
-          </a:p>
-          <a:p>
-            <a:r>
-              <a:t>evidence a person bound deliberately rather than connections a machine inferred,</a:t>
-            </a:r>
-          </a:p>
-          <a:p>
-            <a:r>
-              <a:t>and no competitor's deck has this image.</a:t>
+              <a:t>Do not say the product is named after them — it adds nothing and costs a sentence.</a:t>
             </a:r>
           </a:p>
           <a:p/>
           <a:p>
             <a:r>
-              <a:t>Keep the graph for the demo and for the answer when a technical partner asks what</a:t>
-            </a:r>
-          </a:p>
-          <a:p>
-            <a:r>
-              <a:t>is underneath. And if you get to demo anything beyond the citation click, demo the</a:t>
-            </a:r>
-          </a:p>
-          <a:p>
-            <a:r>
-              <a:t>Loupe being built: highlight five sentences across three documents, bind them, and</a:t>
-            </a:r>
-          </a:p>
-          <a:p>
-            <a:r>
-              <a:t>you have a fully evidenced narrative viewable as a timeline or a graph.</a:t>
-            </a:r>
-          </a:p>
-          <a:p/>
-          <a:p>
-            <a:r>
-              <a:t>IN YOUR POCKET: "We moved the default view off the graph because opening a case on</a:t>
-            </a:r>
-          </a:p>
-          <a:p>
-            <a:r>
-              <a:t>ten thousand nodes is what every tool in this category does, and it's useless to a</a:t>
-            </a:r>
-          </a:p>
-          <a:p>
-            <a:r>
-              <a:t>working investigator." Small, concrete evidence for slide 6's customer-led claim.</a:t>
+              <a:t>Screenshots: the right-hand one is the whole pitch. Capture it with the result graph</a:t>
+            </a:r>
+          </a:p>
+          <a:p>
+            <a:r>
+              <a:t>visible beside the cited text. DO NOT LEAD WITH THE CASE GRAPH as a hairball.</a:t>
             </a:r>
           </a:p>
         </p:txBody>
@@ -7038,7 +6982,7 @@
               </a:spcAft>
             </a:pPr>
             <a:r>
-              <a:rPr sz="3200" b="1" i="0">
+              <a:rPr sz="3100" b="1" i="0">
                 <a:solidFill>
                   <a:srgbClr val="F7F7F8"/>
                 </a:solidFill>
@@ -7057,7 +7001,7 @@
         </p:nvSpPr>
         <p:spPr>
           <a:xfrm>
-            <a:off x="777240" y="1691640"/>
+            <a:off x="777240" y="1627632"/>
             <a:ext cx="1005840" cy="31750"/>
           </a:xfrm>
           <a:prstGeom prst="rect">
@@ -7095,14 +7039,447 @@
       </p:sp>
       <p:sp>
         <p:nvSpPr>
-          <p:cNvPr id="5" name="Rectangle 4"/>
+          <p:cNvPr id="5" name="TextBox 4"/>
+          <p:cNvSpPr txBox="1"/>
+          <p:nvPr/>
+        </p:nvSpPr>
+        <p:spPr>
+          <a:xfrm>
+            <a:off x="777240" y="1755648"/>
+            <a:ext cx="10637215" cy="566928"/>
+          </a:xfrm>
+          <a:prstGeom prst="rect">
+            <a:avLst/>
+          </a:prstGeom>
+          <a:noFill/>
+        </p:spPr>
+        <p:txBody>
+          <a:bodyPr wrap="square" lIns="0" rIns="0" tIns="0" bIns="0">
+            <a:spAutoFit/>
+          </a:bodyPr>
+          <a:lstStyle/>
+          <a:p>
+            <a:pPr algn="l">
+              <a:lnSpc>
+                <a:spcPct val="128000"/>
+              </a:lnSpc>
+              <a:spcBef>
+                <a:spcPts val="0"/>
+              </a:spcBef>
+              <a:spcAft>
+                <a:spcPts val="0"/>
+              </a:spcAft>
+            </a:pPr>
+            <a:r>
+              <a:rPr sz="1400" b="0" i="0">
+                <a:solidFill>
+                  <a:srgbClr val="F7F7F8"/>
+                </a:solidFill>
+                <a:latin typeface="IBM Plex Sans"/>
+              </a:rPr>
+              <a:t>Phone extractions and call logs, documents, images, audio, financial records — everything a case arrives with — resolved at ingestion into </a:t>
+            </a:r>
+            <a:r>
+              <a:rPr sz="1400" b="1" i="0">
+                <a:solidFill>
+                  <a:srgbClr val="F7F7F8"/>
+                </a:solidFill>
+                <a:latin typeface="IBM Plex Sans"/>
+              </a:rPr>
+              <a:t>one model</a:t>
+            </a:r>
+            <a:r>
+              <a:rPr sz="1400" b="0" i="0">
+                <a:solidFill>
+                  <a:srgbClr val="F7F7F8"/>
+                </a:solidFill>
+                <a:latin typeface="IBM Plex Sans"/>
+              </a:rPr>
+              <a:t>, where a call, a transfer and a line in a subpoena return are the same kind of citable object.</a:t>
+            </a:r>
+          </a:p>
+        </p:txBody>
+      </p:sp>
+      <p:sp>
+        <p:nvSpPr>
+          <p:cNvPr id="6" name="TextBox 5"/>
+          <p:cNvSpPr txBox="1"/>
+          <p:nvPr/>
+        </p:nvSpPr>
+        <p:spPr>
+          <a:xfrm>
+            <a:off x="777240" y="2414016"/>
+            <a:ext cx="2926080" cy="274320"/>
+          </a:xfrm>
+          <a:prstGeom prst="rect">
+            <a:avLst/>
+          </a:prstGeom>
+          <a:noFill/>
+        </p:spPr>
+        <p:txBody>
+          <a:bodyPr wrap="square" lIns="0" rIns="0" tIns="0" bIns="0">
+            <a:spAutoFit/>
+          </a:bodyPr>
+          <a:lstStyle/>
+          <a:p>
+            <a:pPr algn="l">
+              <a:lnSpc>
+                <a:spcPct val="128000"/>
+              </a:lnSpc>
+              <a:spcBef>
+                <a:spcPts val="0"/>
+              </a:spcBef>
+              <a:spcAft>
+                <a:spcPts val="0"/>
+              </a:spcAft>
+            </a:pPr>
+            <a:r>
+              <a:rPr sz="1000" b="1" i="0">
+                <a:solidFill>
+                  <a:srgbClr val="E33B4C"/>
+                </a:solidFill>
+                <a:latin typeface="IBM Plex Mono"/>
+              </a:rPr>
+              <a:t>ONE MODEL, MANY PERSPECTIVES</a:t>
+            </a:r>
+          </a:p>
+        </p:txBody>
+      </p:sp>
+      <p:sp>
+        <p:nvSpPr>
+          <p:cNvPr id="7" name="Rounded Rectangle 6"/>
           <p:cNvSpPr/>
           <p:nvPr/>
         </p:nvSpPr>
         <p:spPr>
           <a:xfrm>
-            <a:off x="777240" y="2148840"/>
-            <a:ext cx="4937760" cy="2606040"/>
+            <a:off x="777240" y="2724912"/>
+            <a:ext cx="2084831" cy="402336"/>
+          </a:xfrm>
+          <a:prstGeom prst="roundRect">
+            <a:avLst/>
+          </a:prstGeom>
+          <a:solidFill>
+            <a:srgbClr val="111216"/>
+          </a:solidFill>
+          <a:ln w="12700">
+            <a:solidFill>
+              <a:srgbClr val="B41624"/>
+            </a:solidFill>
+          </a:ln>
+          <a:effectLst/>
+        </p:spPr>
+        <p:style>
+          <a:lnRef idx="1">
+            <a:schemeClr val="accent1"/>
+          </a:lnRef>
+          <a:fillRef idx="3">
+            <a:schemeClr val="accent1"/>
+          </a:fillRef>
+          <a:effectRef idx="2">
+            <a:schemeClr val="accent1"/>
+          </a:effectRef>
+          <a:fontRef idx="minor">
+            <a:schemeClr val="lt1"/>
+          </a:fontRef>
+        </p:style>
+        <p:txBody>
+          <a:bodyPr rtlCol="0" anchor="ctr" wrap="square"/>
+          <a:lstStyle/>
+          <a:p>
+            <a:pPr algn="ctr">
+              <a:lnSpc>
+                <a:spcPct val="128000"/>
+              </a:lnSpc>
+              <a:spcBef>
+                <a:spcPts val="0"/>
+              </a:spcBef>
+              <a:spcAft>
+                <a:spcPts val="0"/>
+              </a:spcAft>
+            </a:pPr>
+            <a:r>
+              <a:rPr sz="1200" b="1" i="0">
+                <a:solidFill>
+                  <a:srgbClr val="F7F7F8"/>
+                </a:solidFill>
+                <a:latin typeface="IBM Plex Sans"/>
+              </a:rPr>
+              <a:t>Financial explorer</a:t>
+            </a:r>
+          </a:p>
+        </p:txBody>
+      </p:sp>
+      <p:sp>
+        <p:nvSpPr>
+          <p:cNvPr id="8" name="Rounded Rectangle 7"/>
+          <p:cNvSpPr/>
+          <p:nvPr/>
+        </p:nvSpPr>
+        <p:spPr>
+          <a:xfrm>
+            <a:off x="2990087" y="2724912"/>
+            <a:ext cx="2084831" cy="402336"/>
+          </a:xfrm>
+          <a:prstGeom prst="roundRect">
+            <a:avLst/>
+          </a:prstGeom>
+          <a:solidFill>
+            <a:srgbClr val="111216"/>
+          </a:solidFill>
+          <a:ln w="12700">
+            <a:solidFill>
+              <a:srgbClr val="B41624"/>
+            </a:solidFill>
+          </a:ln>
+          <a:effectLst/>
+        </p:spPr>
+        <p:style>
+          <a:lnRef idx="1">
+            <a:schemeClr val="accent1"/>
+          </a:lnRef>
+          <a:fillRef idx="3">
+            <a:schemeClr val="accent1"/>
+          </a:fillRef>
+          <a:effectRef idx="2">
+            <a:schemeClr val="accent1"/>
+          </a:effectRef>
+          <a:fontRef idx="minor">
+            <a:schemeClr val="lt1"/>
+          </a:fontRef>
+        </p:style>
+        <p:txBody>
+          <a:bodyPr rtlCol="0" anchor="ctr" wrap="square"/>
+          <a:lstStyle/>
+          <a:p>
+            <a:pPr algn="ctr">
+              <a:lnSpc>
+                <a:spcPct val="128000"/>
+              </a:lnSpc>
+              <a:spcBef>
+                <a:spcPts val="0"/>
+              </a:spcBef>
+              <a:spcAft>
+                <a:spcPts val="0"/>
+              </a:spcAft>
+            </a:pPr>
+            <a:r>
+              <a:rPr sz="1200" b="1" i="0">
+                <a:solidFill>
+                  <a:srgbClr val="F7F7F8"/>
+                </a:solidFill>
+                <a:latin typeface="IBM Plex Sans"/>
+              </a:rPr>
+              <a:t>Multi-phone view</a:t>
+            </a:r>
+          </a:p>
+        </p:txBody>
+      </p:sp>
+      <p:sp>
+        <p:nvSpPr>
+          <p:cNvPr id="9" name="Rounded Rectangle 8"/>
+          <p:cNvSpPr/>
+          <p:nvPr/>
+        </p:nvSpPr>
+        <p:spPr>
+          <a:xfrm>
+            <a:off x="5202934" y="2724912"/>
+            <a:ext cx="2084831" cy="402336"/>
+          </a:xfrm>
+          <a:prstGeom prst="roundRect">
+            <a:avLst/>
+          </a:prstGeom>
+          <a:solidFill>
+            <a:srgbClr val="111216"/>
+          </a:solidFill>
+          <a:ln w="12700">
+            <a:solidFill>
+              <a:srgbClr val="B41624"/>
+            </a:solidFill>
+          </a:ln>
+          <a:effectLst/>
+        </p:spPr>
+        <p:style>
+          <a:lnRef idx="1">
+            <a:schemeClr val="accent1"/>
+          </a:lnRef>
+          <a:fillRef idx="3">
+            <a:schemeClr val="accent1"/>
+          </a:fillRef>
+          <a:effectRef idx="2">
+            <a:schemeClr val="accent1"/>
+          </a:effectRef>
+          <a:fontRef idx="minor">
+            <a:schemeClr val="lt1"/>
+          </a:fontRef>
+        </p:style>
+        <p:txBody>
+          <a:bodyPr rtlCol="0" anchor="ctr" wrap="square"/>
+          <a:lstStyle/>
+          <a:p>
+            <a:pPr algn="ctr">
+              <a:lnSpc>
+                <a:spcPct val="128000"/>
+              </a:lnSpc>
+              <a:spcBef>
+                <a:spcPts val="0"/>
+              </a:spcBef>
+              <a:spcAft>
+                <a:spcPts val="0"/>
+              </a:spcAft>
+            </a:pPr>
+            <a:r>
+              <a:rPr sz="1200" b="1" i="0">
+                <a:solidFill>
+                  <a:srgbClr val="F7F7F8"/>
+                </a:solidFill>
+                <a:latin typeface="IBM Plex Sans"/>
+              </a:rPr>
+              <a:t>Timeline</a:t>
+            </a:r>
+          </a:p>
+        </p:txBody>
+      </p:sp>
+      <p:sp>
+        <p:nvSpPr>
+          <p:cNvPr id="10" name="Rounded Rectangle 9"/>
+          <p:cNvSpPr/>
+          <p:nvPr/>
+        </p:nvSpPr>
+        <p:spPr>
+          <a:xfrm>
+            <a:off x="7415781" y="2724912"/>
+            <a:ext cx="2084831" cy="402336"/>
+          </a:xfrm>
+          <a:prstGeom prst="roundRect">
+            <a:avLst/>
+          </a:prstGeom>
+          <a:solidFill>
+            <a:srgbClr val="111216"/>
+          </a:solidFill>
+          <a:ln w="12700">
+            <a:solidFill>
+              <a:srgbClr val="B41624"/>
+            </a:solidFill>
+          </a:ln>
+          <a:effectLst/>
+        </p:spPr>
+        <p:style>
+          <a:lnRef idx="1">
+            <a:schemeClr val="accent1"/>
+          </a:lnRef>
+          <a:fillRef idx="3">
+            <a:schemeClr val="accent1"/>
+          </a:fillRef>
+          <a:effectRef idx="2">
+            <a:schemeClr val="accent1"/>
+          </a:effectRef>
+          <a:fontRef idx="minor">
+            <a:schemeClr val="lt1"/>
+          </a:fontRef>
+        </p:style>
+        <p:txBody>
+          <a:bodyPr rtlCol="0" anchor="ctr" wrap="square"/>
+          <a:lstStyle/>
+          <a:p>
+            <a:pPr algn="ctr">
+              <a:lnSpc>
+                <a:spcPct val="128000"/>
+              </a:lnSpc>
+              <a:spcBef>
+                <a:spcPts val="0"/>
+              </a:spcBef>
+              <a:spcAft>
+                <a:spcPts val="0"/>
+              </a:spcAft>
+            </a:pPr>
+            <a:r>
+              <a:rPr sz="1200" b="1" i="0">
+                <a:solidFill>
+                  <a:srgbClr val="F7F7F8"/>
+                </a:solidFill>
+                <a:latin typeface="IBM Plex Sans"/>
+              </a:rPr>
+              <a:t>Graph</a:t>
+            </a:r>
+          </a:p>
+        </p:txBody>
+      </p:sp>
+      <p:sp>
+        <p:nvSpPr>
+          <p:cNvPr id="11" name="Rounded Rectangle 10"/>
+          <p:cNvSpPr/>
+          <p:nvPr/>
+        </p:nvSpPr>
+        <p:spPr>
+          <a:xfrm>
+            <a:off x="9628628" y="2724912"/>
+            <a:ext cx="2084831" cy="402336"/>
+          </a:xfrm>
+          <a:prstGeom prst="roundRect">
+            <a:avLst/>
+          </a:prstGeom>
+          <a:solidFill>
+            <a:srgbClr val="111216"/>
+          </a:solidFill>
+          <a:ln w="12700">
+            <a:solidFill>
+              <a:srgbClr val="B41624"/>
+            </a:solidFill>
+          </a:ln>
+          <a:effectLst/>
+        </p:spPr>
+        <p:style>
+          <a:lnRef idx="1">
+            <a:schemeClr val="accent1"/>
+          </a:lnRef>
+          <a:fillRef idx="3">
+            <a:schemeClr val="accent1"/>
+          </a:fillRef>
+          <a:effectRef idx="2">
+            <a:schemeClr val="accent1"/>
+          </a:effectRef>
+          <a:fontRef idx="minor">
+            <a:schemeClr val="lt1"/>
+          </a:fontRef>
+        </p:style>
+        <p:txBody>
+          <a:bodyPr rtlCol="0" anchor="ctr" wrap="square"/>
+          <a:lstStyle/>
+          <a:p>
+            <a:pPr algn="ctr">
+              <a:lnSpc>
+                <a:spcPct val="128000"/>
+              </a:lnSpc>
+              <a:spcBef>
+                <a:spcPts val="0"/>
+              </a:spcBef>
+              <a:spcAft>
+                <a:spcPts val="0"/>
+              </a:spcAft>
+            </a:pPr>
+            <a:r>
+              <a:rPr sz="1200" b="1" i="0">
+                <a:solidFill>
+                  <a:srgbClr val="F7F7F8"/>
+                </a:solidFill>
+                <a:latin typeface="IBM Plex Sans"/>
+              </a:rPr>
+              <a:t>Agent query</a:t>
+            </a:r>
+          </a:p>
+        </p:txBody>
+      </p:sp>
+      <p:sp>
+        <p:nvSpPr>
+          <p:cNvPr id="12" name="Rectangle 11"/>
+          <p:cNvSpPr/>
+          <p:nvPr/>
+        </p:nvSpPr>
+        <p:spPr>
+          <a:xfrm>
+            <a:off x="777240" y="3291840"/>
+            <a:ext cx="4937760" cy="1783080"/>
           </a:xfrm>
           <a:prstGeom prst="rect">
             <a:avLst/>
@@ -7147,7 +7524,7 @@
               </a:spcAft>
             </a:pPr>
             <a:r>
-              <a:rPr sz="1300" b="1" i="0">
+              <a:rPr sz="1200" b="1" i="0">
                 <a:solidFill>
                   <a:srgbClr val="E33B4C"/>
                 </a:solidFill>
@@ -7162,35 +7539,35 @@
                 <a:spcPct val="128000"/>
               </a:lnSpc>
               <a:spcBef>
-                <a:spcPts val="1000"/>
-              </a:spcBef>
-              <a:spcAft>
-                <a:spcPts val="0"/>
-              </a:spcAft>
-            </a:pPr>
-            <a:r>
-              <a:rPr sz="1400" b="0" i="0">
+                <a:spcPts val="800"/>
+              </a:spcBef>
+              <a:spcAft>
+                <a:spcPts val="0"/>
+              </a:spcAft>
+            </a:pPr>
+            <a:r>
+              <a:rPr sz="1200" b="0" i="0">
                 <a:solidFill>
                   <a:srgbClr val="9A9DA5"/>
                 </a:solidFill>
                 <a:latin typeface="IBM Plex Sans"/>
               </a:rPr>
-              <a:t>Five highlighted passages from three documents,
-bound into one evidenced narrative timeline.</a:t>
-            </a:r>
-          </a:p>
-        </p:txBody>
-      </p:sp>
-      <p:sp>
-        <p:nvSpPr>
-          <p:cNvPr id="6" name="Rectangle 5"/>
+              <a:t>Passages, entities and events from several sources,
+bound into one evidenced finding.</a:t>
+            </a:r>
+          </a:p>
+        </p:txBody>
+      </p:sp>
+      <p:sp>
+        <p:nvSpPr>
+          <p:cNvPr id="13" name="Rectangle 12"/>
           <p:cNvSpPr/>
           <p:nvPr/>
         </p:nvSpPr>
         <p:spPr>
           <a:xfrm>
-            <a:off x="6263640" y="2148840"/>
-            <a:ext cx="4937760" cy="2606040"/>
+            <a:off x="6263640" y="3291840"/>
+            <a:ext cx="4937760" cy="1783080"/>
           </a:xfrm>
           <a:prstGeom prst="rect">
             <a:avLst/>
@@ -7235,7 +7612,7 @@
               </a:spcAft>
             </a:pPr>
             <a:r>
-              <a:rPr sz="1300" b="1" i="0">
+              <a:rPr sz="1200" b="1" i="0">
                 <a:solidFill>
                   <a:srgbClr val="E33B4C"/>
                 </a:solidFill>
@@ -7250,14 +7627,14 @@
                 <a:spcPct val="128000"/>
               </a:lnSpc>
               <a:spcBef>
-                <a:spcPts val="1000"/>
-              </a:spcBef>
-              <a:spcAft>
-                <a:spcPts val="0"/>
-              </a:spcAft>
-            </a:pPr>
-            <a:r>
-              <a:rPr sz="1400" b="0" i="0">
+                <a:spcPts val="800"/>
+              </a:spcBef>
+              <a:spcAft>
+                <a:spcPts val="0"/>
+              </a:spcAft>
+            </a:pPr>
+            <a:r>
+              <a:rPr sz="1200" b="0" i="0">
                 <a:solidFill>
                   <a:srgbClr val="9A9DA5"/>
                 </a:solidFill>
@@ -7271,13 +7648,13 @@
       </p:sp>
       <p:sp>
         <p:nvSpPr>
-          <p:cNvPr id="7" name="TextBox 6"/>
+          <p:cNvPr id="14" name="TextBox 13"/>
           <p:cNvSpPr txBox="1"/>
           <p:nvPr/>
         </p:nvSpPr>
         <p:spPr>
           <a:xfrm>
-            <a:off x="777240" y="5029200"/>
+            <a:off x="777240" y="5230368"/>
             <a:ext cx="10637215" cy="1371600"/>
           </a:xfrm>
           <a:prstGeom prst="rect">
@@ -7303,13 +7680,22 @@
               </a:spcAft>
             </a:pPr>
             <a:r>
-              <a:rPr sz="1800" b="0" i="0">
+              <a:rPr sz="1350" b="1" i="0">
                 <a:solidFill>
                   <a:srgbClr val="F7F7F8"/>
                 </a:solidFill>
                 <a:latin typeface="IBM Plex Sans"/>
               </a:rPr>
-              <a:t>Every fact carries the verbatim quote, source location and confidence it rests on.</a:t>
+              <a:t>A Loupe is a bonded collection</a:t>
+            </a:r>
+            <a:r>
+              <a:rPr sz="1350" b="0" i="0">
+                <a:solidFill>
+                  <a:srgbClr val="F7F7F8"/>
+                </a:solidFill>
+                <a:latin typeface="IBM Plex Sans"/>
+              </a:rPr>
+              <a:t> — the passages, entities, events and transactions that establish one thing, each carrying the quote, page and file it came from.</a:t>
             </a:r>
           </a:p>
           <a:p>
@@ -7318,60 +7704,38 @@
                 <a:spcPct val="128000"/>
               </a:lnSpc>
               <a:spcBef>
-                <a:spcPts val="1000"/>
-              </a:spcBef>
-              <a:spcAft>
-                <a:spcPts val="0"/>
-              </a:spcAft>
-            </a:pPr>
-            <a:r>
-              <a:rPr sz="1500" b="0" i="0">
+                <a:spcPts val="800"/>
+              </a:spcBef>
+              <a:spcAft>
+                <a:spcPts val="0"/>
+              </a:spcAft>
+            </a:pPr>
+            <a:r>
+              <a:rPr sz="1350" b="0" i="0">
                 <a:solidFill>
                   <a:srgbClr val="9A9DA5"/>
                 </a:solidFill>
                 <a:latin typeface="IBM Plex Sans"/>
               </a:rPr>
-              <a:t>Investigators highlight what matters and bind it into </a:t>
-            </a:r>
-            <a:r>
-              <a:rPr sz="1500" b="1" i="0">
+              <a:t>Investigators work the perspectives, find what matters, and bind it into a Loupe. </a:t>
+            </a:r>
+            <a:r>
+              <a:rPr sz="1350" b="1" i="0">
                 <a:solidFill>
                   <a:srgbClr val="9A9DA5"/>
                 </a:solidFill>
                 <a:latin typeface="IBM Plex Sans"/>
               </a:rPr>
-              <a:t>Loupes</a:t>
-            </a:r>
-            <a:r>
-              <a:rPr sz="1500" b="0" i="0">
+              <a:t>Loupes move into the case, and the case is built out of them</a:t>
+            </a:r>
+            <a:r>
+              <a:rPr sz="1350" b="0" i="0">
                 <a:solidFill>
                   <a:srgbClr val="9A9DA5"/>
                 </a:solidFill>
                 <a:latin typeface="IBM Plex Sans"/>
               </a:rPr>
-              <a:t> — evidenced collections that carry the narrative, not just the extraction. The product is named after them.</a:t>
-            </a:r>
-          </a:p>
-          <a:p>
-            <a:pPr algn="l">
-              <a:lnSpc>
-                <a:spcPct val="128000"/>
-              </a:lnSpc>
-              <a:spcBef>
-                <a:spcPts val="1400"/>
-              </a:spcBef>
-              <a:spcAft>
-                <a:spcPts val="0"/>
-              </a:spcAft>
-            </a:pPr>
-            <a:r>
-              <a:rPr sz="1700" b="1" i="0">
-                <a:solidFill>
-                  <a:srgbClr val="E33B4C"/>
-                </a:solidFill>
-                <a:latin typeface="IBM Plex Sans"/>
-              </a:rPr>
-              <a:t>Ingest  →  Ground  →  Connect  →  Explore  →  Prove</a:t>
+              <a:t> — conclusion, justification and evidence, assembled as the investigation runs rather than written up at the end.</a:t>
             </a:r>
           </a:p>
         </p:txBody>

--- a/Loupe-NDRC-deck.pptx
+++ b/Loupe-NDRC-deck.pptx
@@ -7868,8 +7868,8 @@
           <p:nvPr/>
         </p:nvGraphicFramePr>
         <p:xfrm>
-          <a:off x="777240" y="1691640"/>
-          <a:ext cx="10634472" cy="3703320"/>
+          <a:off x="777240" y="1645920"/>
+          <a:ext cx="10634472" cy="3886200"/>
         </p:xfrm>
         <a:graphic>
           <a:graphicData uri="http://schemas.openxmlformats.org/drawingml/2006/table">
@@ -7882,7 +7882,7 @@
                 <a:gridCol w="3931920"/>
                 <a:gridCol w="4325112"/>
               </a:tblGrid>
-              <a:tr h="529045">
+              <a:tr h="555171">
                 <a:tc>
                   <a:txBody>
                     <a:bodyPr wrap="square"/>
@@ -7983,7 +7983,7 @@
                   </a:tcPr>
                 </a:tc>
               </a:tr>
-              <a:tr h="529045">
+              <a:tr h="555171">
                 <a:tc>
                   <a:txBody>
                     <a:bodyPr wrap="square"/>
@@ -8084,7 +8084,7 @@
                   </a:tcPr>
                 </a:tc>
               </a:tr>
-              <a:tr h="529045">
+              <a:tr h="555171">
                 <a:tc>
                   <a:txBody>
                     <a:bodyPr wrap="square"/>
@@ -8174,7 +8174,7 @@
                           </a:solidFill>
                           <a:latin typeface="IBM Plex Sans"/>
                         </a:rPr>
-                        <a:t>Entire corpora: thousands of documents, multi-gigabyte phone reports</a:t>
+                        <a:t>A real case: ten phones, 200,000 documents, 500 hours of audio — 435GB, all of it modelled</a:t>
                       </a:r>
                     </a:p>
                   </a:txBody>
@@ -8185,7 +8185,7 @@
                   </a:tcPr>
                 </a:tc>
               </a:tr>
-              <a:tr h="529045">
+              <a:tr h="555171">
                 <a:tc>
                   <a:txBody>
                     <a:bodyPr wrap="square"/>
@@ -8242,7 +8242,7 @@
                           </a:solidFill>
                           <a:latin typeface="IBM Plex Sans"/>
                         </a:rPr>
-                        <a:t>Answers in prose, one conversation at a time</a:t>
+                        <a:t>Retrieves a sample of what fits and reasons over it in prose. You cannot know what it missed</a:t>
                       </a:r>
                     </a:p>
                   </a:txBody>
@@ -8275,7 +8275,7 @@
                           </a:solidFill>
                           <a:latin typeface="IBM Plex Sans"/>
                         </a:rPr>
-                        <a:t>Cites every claim to the page — and runs tools: builds Loupes, groupings and outputs from plain instruction</a:t>
+                        <a:t>Traverses the model and returns the actual matching set, every claim carrying its page — then runs tools: Loupes, groupings, timelines, outputs</a:t>
                       </a:r>
                     </a:p>
                   </a:txBody>
@@ -8286,7 +8286,7 @@
                   </a:tcPr>
                 </a:tc>
               </a:tr>
-              <a:tr h="529045">
+              <a:tr h="555171">
                 <a:tc>
                   <a:txBody>
                     <a:bodyPr wrap="square"/>
@@ -8387,7 +8387,7 @@
                   </a:tcPr>
                 </a:tc>
               </a:tr>
-              <a:tr h="529045">
+              <a:tr h="555171">
                 <a:tc>
                   <a:txBody>
                     <a:bodyPr wrap="square"/>
@@ -8488,7 +8488,7 @@
                   </a:tcPr>
                 </a:tc>
               </a:tr>
-              <a:tr h="529050">
+              <a:tr h="555174">
                 <a:tc>
                   <a:txBody>
                     <a:bodyPr wrap="square"/>
@@ -8601,8 +8601,8 @@
         </p:nvSpPr>
         <p:spPr>
           <a:xfrm>
-            <a:off x="777240" y="5623560"/>
-            <a:ext cx="10637215" cy="914400"/>
+            <a:off x="777240" y="5779008"/>
+            <a:ext cx="10637215" cy="1005840"/>
           </a:xfrm>
           <a:prstGeom prst="rect">
             <a:avLst/>
@@ -8627,7 +8627,38 @@
               </a:spcAft>
             </a:pPr>
             <a:r>
-              <a:rPr sz="1600" b="0" i="0">
+              <a:rPr sz="1200" b="1" i="0">
+                <a:solidFill>
+                  <a:srgbClr val="9A9DA5"/>
+                </a:solidFill>
+                <a:latin typeface="IBM Plex Sans"/>
+              </a:rPr>
+              <a:t>And not only ChatGPT — the specialists publish their own ceilings.</a:t>
+            </a:r>
+            <a:r>
+              <a:rPr sz="1200" b="0" i="0">
+                <a:solidFill>
+                  <a:srgbClr val="9A9DA5"/>
+                </a:solidFill>
+                <a:latin typeface="IBM Plex Sans"/>
+              </a:rPr>
+              <a:t> Relativity caps at 300,000 documents per index and 5,000 per extraction job; CoCounsel manages ~200 per run; Reveal states its search is “designed for precision, not recall”.</a:t>
+            </a:r>
+          </a:p>
+          <a:p>
+            <a:pPr algn="l">
+              <a:lnSpc>
+                <a:spcPct val="128000"/>
+              </a:lnSpc>
+              <a:spcBef>
+                <a:spcPts val="800"/>
+              </a:spcBef>
+              <a:spcAft>
+                <a:spcPts val="0"/>
+              </a:spcAft>
+            </a:pPr>
+            <a:r>
+              <a:rPr sz="1400" b="0" i="0">
                 <a:solidFill>
                   <a:srgbClr val="F7F7F8"/>
                 </a:solidFill>
@@ -8636,7 +8667,7 @@
               <a:t>A straight LLM gives you a well-written opinion about the fraction of the evidence that fits in its context window. Loupe gives you a complete, permanent, cross-referenced model of all of it — where </a:t>
             </a:r>
             <a:r>
-              <a:rPr sz="1600" b="1" i="0">
+              <a:rPr sz="1400" b="1" i="0">
                 <a:solidFill>
                   <a:srgbClr val="F7F7F8"/>
                 </a:solidFill>

--- a/Loupe-NDRC-deck.pptx
+++ b/Loupe-NDRC-deck.pptx
@@ -15,6 +15,7 @@
     <p:sldId id="263" r:id="rId15"/>
     <p:sldId id="264" r:id="rId16"/>
     <p:sldId id="265" r:id="rId17"/>
+    <p:sldId id="266" r:id="rId18"/>
   </p:sldIdLst>
   <p:sldSz cx="12191695" cy="6858000" type="screen4x3"/>
   <p:notesSz cx="6858000" cy="9144000"/>
@@ -581,6 +582,201 @@
           <a:lstStyle/>
           <a:p>
             <a:r>
+              <a:t>TWO BEATS, IN THIS ORDER — DO NOT INVERT THEM.</a:t>
+            </a:r>
+          </a:p>
+          <a:p/>
+          <a:p>
+            <a:r>
+              <a:t>FIRST: IT WORKS. Cases closed, attorneys using it, a practice winning business</a:t>
+            </a:r>
+          </a:p>
+          <a:p>
+            <a:r>
+              <a:t>because of it. That is a further-along position than most of what NDRC will see</a:t>
+            </a:r>
+          </a:p>
+          <a:p>
+            <a:r>
+              <a:t>this year, and it should be the first thing out of your mouth.</a:t>
+            </a:r>
+          </a:p>
+          <a:p/>
+          <a:p>
+            <a:r>
+              <a:t>SECOND: THE SECURITY GATE. No external customer's evidence enters until the</a:t>
+            </a:r>
+          </a:p>
+          <a:p>
+            <a:r>
+              <a:t>isolation, backup and legal stages pass. Most pre-seed teams cannot demonstrate</a:t>
+            </a:r>
+          </a:p>
+          <a:p>
+            <a:r>
+              <a:t>release discipline at all. Frame it as WHY the external pilot hasn't started</a:t>
+            </a:r>
+          </a:p>
+          <a:p>
+            <a:r>
+              <a:t>yet — that turns a delay into evidence of seriousness.</a:t>
+            </a:r>
+          </a:p>
+          <a:p/>
+          <a:p>
+            <a:r>
+              <a:t>ON THE ROADMAP: mention it, don't dwell on it. It is a statement of ambition,</a:t>
+            </a:r>
+          </a:p>
+          <a:p>
+            <a:r>
+              <a:t>not a list of things Loupe cannot do. If the deck spends more pixels on the</a:t>
+            </a:r>
+          </a:p>
+          <a:p>
+            <a:r>
+              <a:t>roadmap than on the working product, a reader concludes the product IS the</a:t>
+            </a:r>
+          </a:p>
+          <a:p>
+            <a:r>
+              <a:t>roadmap.</a:t>
+            </a:r>
+          </a:p>
+          <a:p/>
+          <a:p>
+            <a:r>
+              <a:t>CLAIMS SAFETY</a:t>
+            </a:r>
+          </a:p>
+          <a:p>
+            <a:r>
+              <a:t>- DO NOT call the ex-FBI PI firm a signed customer, an LOI, or a pipeline</a:t>
+            </a:r>
+          </a:p>
+          <a:p>
+            <a:r>
+              <a:t>  value. Nothing is signed. True and sufficient: an agreed next case, an</a:t>
+            </a:r>
+          </a:p>
+          <a:p>
+            <a:r>
+              <a:t>  at-cost trial, an MSA to be exchanged. This is the only hard prohibition.</a:t>
+            </a:r>
+          </a:p>
+          <a:p>
+            <a:r>
+              <a:t>- "WCAG 2.1 AA" and "571k-node corpus" — fine if evidenced. Have the audit</a:t>
+            </a:r>
+          </a:p>
+          <a:p>
+            <a:r>
+              <a:t>  result and load-test output to hand.</a:t>
+            </a:r>
+          </a:p>
+          <a:p>
+            <a:r>
+              <a:t>- Scale figures: say whether each came from a real case or a test corpus.</a:t>
+            </a:r>
+          </a:p>
+          <a:p>
+            <a:r>
+              <a:t>- Prefer "verification workflow" over "human-verified facts".</a:t>
+            </a:r>
+          </a:p>
+          <a:p>
+            <a:r>
+              <a:t>- CI: .github/workflows absent from the branch inspected. If CI runs elsewhere,</a:t>
+            </a:r>
+          </a:p>
+          <a:p>
+            <a:r>
+              <a:t>  ignore. Otherwise don't claim hard-gating CI — and consider standing it up.</a:t>
+            </a:r>
+          </a:p>
+          <a:p/>
+          <a:p>
+            <a:r>
+              <a:t>FRAMING RULE FOR THE WHOLE DECK: Loupe is one product, and it works. Never</a:t>
+            </a:r>
+          </a:p>
+          <a:p>
+            <a:r>
+              <a:t>write a sentence that invites a reader to wonder whether the thing that ran</a:t>
+            </a:r>
+          </a:p>
+          <a:p>
+            <a:r>
+              <a:t>federal cases is the same thing you are pitching. It is.</a:t>
+            </a:r>
+          </a:p>
+        </p:txBody>
+      </p:sp>
+      <p:sp>
+        <p:nvSpPr>
+          <p:cNvPr id="4" name="Slide Number Placeholder 3"/>
+          <p:cNvSpPr>
+            <a:spLocks noGrp="1"/>
+          </p:cNvSpPr>
+          <p:nvPr>
+            <p:ph type="sldNum" idx="5" sz="quarter"/>
+          </p:nvPr>
+        </p:nvSpPr>
+        <p:spPr/>
+      </p:sp>
+    </p:spTree>
+  </p:cSld>
+  <p:clrMapOvr>
+    <a:masterClrMapping/>
+  </p:clrMapOvr>
+</p:notes>
+</file>
+
+<file path=ppt/notesSlides/notesSlide11.xml><?xml version="1.0" encoding="utf-8"?>
+<p:notes xmlns:a="http://schemas.openxmlformats.org/drawingml/2006/main" xmlns:p="http://schemas.openxmlformats.org/presentationml/2006/main" xmlns:r="http://schemas.openxmlformats.org/officeDocument/2006/relationships">
+  <p:cSld>
+    <p:spTree>
+      <p:nvGrpSpPr>
+        <p:cNvPr id="1" name=""/>
+        <p:cNvGrpSpPr/>
+        <p:nvPr/>
+      </p:nvGrpSpPr>
+      <p:grpSpPr>
+        <a:xfrm>
+          <a:off x="0" y="0"/>
+          <a:ext cx="0" cy="0"/>
+          <a:chOff x="0" y="0"/>
+          <a:chExt cx="0" cy="0"/>
+        </a:xfrm>
+      </p:grpSpPr>
+      <p:sp>
+        <p:nvSpPr>
+          <p:cNvPr id="2" name="Slide Image Placeholder 1"/>
+          <p:cNvSpPr>
+            <a:spLocks noGrp="1"/>
+          </p:cNvSpPr>
+          <p:nvPr>
+            <p:ph type="sldImg" idx="2"/>
+          </p:nvPr>
+        </p:nvSpPr>
+        <p:spPr/>
+      </p:sp>
+      <p:sp>
+        <p:nvSpPr>
+          <p:cNvPr id="3" name="Notes Placeholder 2"/>
+          <p:cNvSpPr>
+            <a:spLocks noGrp="1"/>
+          </p:cNvSpPr>
+          <p:nvPr>
+            <p:ph type="body" idx="3" sz="quarter"/>
+          </p:nvPr>
+        </p:nvSpPr>
+        <p:spPr/>
+        <p:txBody>
+          <a:bodyPr/>
+          <a:lstStyle/>
+          <a:p>
+            <a:r>
               <a:t>DO NOT put an hours figure on this slide, and do not pre-empt an</a:t>
             </a:r>
           </a:p>
@@ -1760,7 +1956,91 @@
           <a:lstStyle/>
           <a:p>
             <a:r>
-              <a:t>The point is the middle two rows, not the ARR. 104 customers running 833 matters is under two per cent of the US evidence-heavy pool alone, before the UK or Europe contribute anything. Against one to five thousand target practices, none of these stages asks for market dominance — they ask for a channel that works and a price that holds. Each stage is gated on one thing: stage 1 a validated price, stage 2 the bar channel converting, stage 3 the model rebuilt on UK rates, stage 4 partners.</a:t>
+              <a:t>Four numbers. Say them slowly and do not add a fifth.</a:t>
+            </a:r>
+          </a:p>
+          <a:p/>
+          <a:p>
+            <a:r>
+              <a:t>The buyer is not choosing between us and a competitor. They are choosing between us</a:t>
+            </a:r>
+          </a:p>
+          <a:p>
+            <a:r>
+              <a:t>and what they do today: pay a forensic vendor to extract each device, pay per gigabyte</a:t>
+            </a:r>
+          </a:p>
+          <a:p>
+            <a:r>
+              <a:t>per MONTH to host the result somewhere it cannot be properly analysed, pay an examiner</a:t>
+            </a:r>
+          </a:p>
+          <a:p>
+            <a:r>
+              <a:t>by the hour to look at parts of it, then pay their own people to stitch it together.</a:t>
+            </a:r>
+          </a:p>
+          <a:p/>
+          <a:p>
+            <a:r>
+              <a:t>Hosting is the line that breaks, and it is the sharpest number in the study. Charged</a:t>
+            </a:r>
+          </a:p>
+          <a:p>
+            <a:r>
+              <a:t>per gigabyte per month for the life of the matter, it scales with exactly the evidence</a:t>
+            </a:r>
+          </a:p>
+          <a:p>
+            <a:r>
+              <a:t>we model. A 435GB federal case is $4,350 a month. The outcome that money buys is a</a:t>
+            </a:r>
+          </a:p>
+          <a:p>
+            <a:r>
+              <a:t>spreadsheet.</a:t>
+            </a:r>
+          </a:p>
+          <a:p/>
+          <a:p>
+            <a:r>
+              <a:t>If asked where the numbers come from: published 2026 rates. eDiscovery processing</a:t>
+            </a:r>
+          </a:p>
+          <a:p>
+            <a:r>
+              <a:t>$3-10/GB and hosting $5-15/GB/month from the Winter 2026 pricing survey; forensic</a:t>
+            </a:r>
+          </a:p>
+          <a:p>
+            <a:r>
+              <a:t>vendor rate cards at $3,650 for a one-or-two-device case; examiner analysis $300-500/h;</a:t>
+            </a:r>
+          </a:p>
+          <a:p>
+            <a:r>
+              <a:t>case hours from RAND's National Public Defense Workload Study; investigator time</a:t>
+            </a:r>
+          </a:p>
+          <a:p>
+            <a:r>
+              <a:t>$85-225/h. The one modelled assumption is the share of case hours that is evidence</a:t>
+            </a:r>
+          </a:p>
+          <a:p>
+            <a:r>
+              <a:t>handling — say so if pressed, do not pretend it is measured.</a:t>
+            </a:r>
+          </a:p>
+          <a:p/>
+          <a:p>
+            <a:r>
+              <a:t>Do not claim we remove the extraction bill. We do not, and conceding it is what makes</a:t>
+            </a:r>
+          </a:p>
+          <a:p>
+            <a:r>
+              <a:t>the rest credible.</a:t>
             </a:r>
           </a:p>
         </p:txBody>
@@ -1830,54 +2110,7 @@
           <a:lstStyle/>
           <a:p>
             <a:r>
-              <a:t>LEAD WITH SIREN. It is the strongest founder-market-fit signal you</a:t>
-            </a:r>
-          </a:p>
-          <a:p>
-            <a:r>
-              <a:t>have. NDRC will know Siren — Irish, Enterprise Ireland-backed, same category. It</a:t>
-            </a:r>
-          </a:p>
-          <a:p>
-            <a:r>
-              <a:t>converts you from "engineer who built a thing" to "category-native founder who</a:t>
-            </a:r>
-          </a:p>
-          <a:p>
-            <a:r>
-              <a:t>has seen this market's buying behaviour for seven years." It pre-answers the</a:t>
-            </a:r>
-          </a:p>
-          <a:p>
-            <a:r>
-              <a:t>sales-cycle and procurement questions before they're asked.</a:t>
-            </a:r>
-          </a:p>
-          <a:p/>
-          <a:p>
-            <a:r>
-              <a:t>"Full-time on close" appears twice on purpose. Say it out loud as well as</a:t>
-            </a:r>
-          </a:p>
-          <a:p>
-            <a:r>
-              <a:t>printing it.</a:t>
-            </a:r>
-          </a:p>
-          <a:p/>
-          <a:p>
-            <a:r>
-              <a:t>DO NOT HIDE Alex being US-based. Address it in one line: the company is Irish,</a:t>
-            </a:r>
-          </a:p>
-          <a:p>
-            <a:r>
-              <a:t>the IP is Irish-owned, engineering is in Dublin, and the market is US-first —</a:t>
-            </a:r>
-          </a:p>
-          <a:p>
-            <a:r>
-              <a:t>which is why the domain founder is where the customers are.</a:t>
+              <a:t>The point is the middle two rows, not the ARR. 104 customers running 833 matters is under two per cent of the US evidence-heavy pool alone, before the UK or Europe contribute anything. Against one to five thousand target practices, none of these stages asks for market dominance — they ask for a channel that works and a price that holds. Each stage is gated on one thing: stage 1 a validated price, stage 2 the bar channel converting, stage 3 the model rebuilt on UK rates, stage 4 partners.</a:t>
             </a:r>
           </a:p>
         </p:txBody>
@@ -1947,132 +2180,54 @@
           <a:lstStyle/>
           <a:p>
             <a:r>
-              <a:t>TWO BEATS, IN THIS ORDER — DO NOT INVERT THEM.</a:t>
+              <a:t>LEAD WITH SIREN. It is the strongest founder-market-fit signal you</a:t>
+            </a:r>
+          </a:p>
+          <a:p>
+            <a:r>
+              <a:t>have. NDRC will know Siren — Irish, Enterprise Ireland-backed, same category. It</a:t>
+            </a:r>
+          </a:p>
+          <a:p>
+            <a:r>
+              <a:t>converts you from "engineer who built a thing" to "category-native founder who</a:t>
+            </a:r>
+          </a:p>
+          <a:p>
+            <a:r>
+              <a:t>has seen this market's buying behaviour for seven years." It pre-answers the</a:t>
+            </a:r>
+          </a:p>
+          <a:p>
+            <a:r>
+              <a:t>sales-cycle and procurement questions before they're asked.</a:t>
             </a:r>
           </a:p>
           <a:p/>
           <a:p>
             <a:r>
-              <a:t>FIRST: IT WORKS. Cases closed, attorneys using it, a practice winning business</a:t>
-            </a:r>
-          </a:p>
-          <a:p>
-            <a:r>
-              <a:t>because of it. That is a further-along position than most of what NDRC will see</a:t>
-            </a:r>
-          </a:p>
-          <a:p>
-            <a:r>
-              <a:t>this year, and it should be the first thing out of your mouth.</a:t>
+              <a:t>"Full-time on close" appears twice on purpose. Say it out loud as well as</a:t>
+            </a:r>
+          </a:p>
+          <a:p>
+            <a:r>
+              <a:t>printing it.</a:t>
             </a:r>
           </a:p>
           <a:p/>
           <a:p>
             <a:r>
-              <a:t>SECOND: THE SECURITY GATE. No external customer's evidence enters until the</a:t>
-            </a:r>
-          </a:p>
-          <a:p>
-            <a:r>
-              <a:t>isolation, backup and legal stages pass. Most pre-seed teams cannot demonstrate</a:t>
-            </a:r>
-          </a:p>
-          <a:p>
-            <a:r>
-              <a:t>release discipline at all. Frame it as WHY the external pilot hasn't started</a:t>
-            </a:r>
-          </a:p>
-          <a:p>
-            <a:r>
-              <a:t>yet — that turns a delay into evidence of seriousness.</a:t>
-            </a:r>
-          </a:p>
-          <a:p/>
-          <a:p>
-            <a:r>
-              <a:t>ON THE ROADMAP: mention it, don't dwell on it. It is a statement of ambition,</a:t>
-            </a:r>
-          </a:p>
-          <a:p>
-            <a:r>
-              <a:t>not a list of things Loupe cannot do. If the deck spends more pixels on the</a:t>
-            </a:r>
-          </a:p>
-          <a:p>
-            <a:r>
-              <a:t>roadmap than on the working product, a reader concludes the product IS the</a:t>
-            </a:r>
-          </a:p>
-          <a:p>
-            <a:r>
-              <a:t>roadmap.</a:t>
-            </a:r>
-          </a:p>
-          <a:p/>
-          <a:p>
-            <a:r>
-              <a:t>CLAIMS SAFETY</a:t>
-            </a:r>
-          </a:p>
-          <a:p>
-            <a:r>
-              <a:t>- DO NOT call the ex-FBI PI firm a signed customer, an LOI, or a pipeline</a:t>
-            </a:r>
-          </a:p>
-          <a:p>
-            <a:r>
-              <a:t>  value. Nothing is signed. True and sufficient: an agreed next case, an</a:t>
-            </a:r>
-          </a:p>
-          <a:p>
-            <a:r>
-              <a:t>  at-cost trial, an MSA to be exchanged. This is the only hard prohibition.</a:t>
-            </a:r>
-          </a:p>
-          <a:p>
-            <a:r>
-              <a:t>- "WCAG 2.1 AA" and "571k-node corpus" — fine if evidenced. Have the audit</a:t>
-            </a:r>
-          </a:p>
-          <a:p>
-            <a:r>
-              <a:t>  result and load-test output to hand.</a:t>
-            </a:r>
-          </a:p>
-          <a:p>
-            <a:r>
-              <a:t>- Scale figures: say whether each came from a real case or a test corpus.</a:t>
-            </a:r>
-          </a:p>
-          <a:p>
-            <a:r>
-              <a:t>- Prefer "verification workflow" over "human-verified facts".</a:t>
-            </a:r>
-          </a:p>
-          <a:p>
-            <a:r>
-              <a:t>- CI: .github/workflows absent from the branch inspected. If CI runs elsewhere,</a:t>
-            </a:r>
-          </a:p>
-          <a:p>
-            <a:r>
-              <a:t>  ignore. Otherwise don't claim hard-gating CI — and consider standing it up.</a:t>
-            </a:r>
-          </a:p>
-          <a:p/>
-          <a:p>
-            <a:r>
-              <a:t>FRAMING RULE FOR THE WHOLE DECK: Loupe is one product, and it works. Never</a:t>
-            </a:r>
-          </a:p>
-          <a:p>
-            <a:r>
-              <a:t>write a sentence that invites a reader to wonder whether the thing that ran</a:t>
-            </a:r>
-          </a:p>
-          <a:p>
-            <a:r>
-              <a:t>federal cases is the same thing you are pitching. It is.</a:t>
+              <a:t>DO NOT HIDE Alex being US-based. Address it in one line: the company is Irish,</a:t>
+            </a:r>
+          </a:p>
+          <a:p>
+            <a:r>
+              <a:t>the IP is Irish-owned, engineering is in Dublin, and the market is US-first —</a:t>
+            </a:r>
+          </a:p>
+          <a:p>
+            <a:r>
+              <a:t>which is why the domain founder is where the customers are.</a:t>
             </a:r>
           </a:p>
         </p:txBody>
@@ -5252,6 +5407,609 @@
 </file>
 
 <file path=ppt/slides/slide10.xml><?xml version="1.0" encoding="utf-8"?>
+<p:sld xmlns:a="http://schemas.openxmlformats.org/drawingml/2006/main" xmlns:p="http://schemas.openxmlformats.org/presentationml/2006/main" xmlns:r="http://schemas.openxmlformats.org/officeDocument/2006/relationships">
+  <p:cSld>
+    <p:bg>
+      <p:bgPr>
+        <a:solidFill>
+          <a:srgbClr val="0B0C0F"/>
+        </a:solidFill>
+        <a:effectLst/>
+      </p:bgPr>
+    </p:bg>
+    <p:spTree>
+      <p:nvGrpSpPr>
+        <p:cNvPr id="1" name=""/>
+        <p:cNvGrpSpPr/>
+        <p:nvPr/>
+      </p:nvGrpSpPr>
+      <p:grpSpPr/>
+      <p:sp>
+        <p:nvSpPr>
+          <p:cNvPr id="2" name="TextBox 1"/>
+          <p:cNvSpPr txBox="1"/>
+          <p:nvPr/>
+        </p:nvSpPr>
+        <p:spPr>
+          <a:xfrm>
+            <a:off x="777240" y="502920"/>
+            <a:ext cx="10637215" cy="274320"/>
+          </a:xfrm>
+          <a:prstGeom prst="rect">
+            <a:avLst/>
+          </a:prstGeom>
+          <a:noFill/>
+        </p:spPr>
+        <p:txBody>
+          <a:bodyPr wrap="square" lIns="0" rIns="0" tIns="0" bIns="0">
+            <a:spAutoFit/>
+          </a:bodyPr>
+          <a:lstStyle/>
+          <a:p>
+            <a:pPr algn="l">
+              <a:lnSpc>
+                <a:spcPct val="128000"/>
+              </a:lnSpc>
+              <a:spcBef>
+                <a:spcPts val="0"/>
+              </a:spcBef>
+              <a:spcAft>
+                <a:spcPts val="0"/>
+              </a:spcAft>
+              <a:defRPr>
+                <a:latin typeface="IBM Plex Mono"/>
+              </a:defRPr>
+            </a:pPr>
+            <a:r>
+              <a:rPr sz="1100" b="1" i="0">
+                <a:solidFill>
+                  <a:srgbClr val="E33B4C"/>
+                </a:solidFill>
+                <a:latin typeface="IBM Plex Mono"/>
+              </a:rPr>
+              <a:t>STATUS AND TRACTION</a:t>
+            </a:r>
+          </a:p>
+        </p:txBody>
+      </p:sp>
+      <p:sp>
+        <p:nvSpPr>
+          <p:cNvPr id="3" name="TextBox 2"/>
+          <p:cNvSpPr txBox="1"/>
+          <p:nvPr/>
+        </p:nvSpPr>
+        <p:spPr>
+          <a:xfrm>
+            <a:off x="777240" y="868680"/>
+            <a:ext cx="10637215" cy="914400"/>
+          </a:xfrm>
+          <a:prstGeom prst="rect">
+            <a:avLst/>
+          </a:prstGeom>
+          <a:noFill/>
+        </p:spPr>
+        <p:txBody>
+          <a:bodyPr wrap="square" lIns="0" rIns="0" tIns="0" bIns="0">
+            <a:spAutoFit/>
+          </a:bodyPr>
+          <a:lstStyle/>
+          <a:p>
+            <a:pPr algn="l">
+              <a:lnSpc>
+                <a:spcPct val="110000"/>
+              </a:lnSpc>
+              <a:spcBef>
+                <a:spcPts val="0"/>
+              </a:spcBef>
+              <a:spcAft>
+                <a:spcPts val="0"/>
+              </a:spcAft>
+            </a:pPr>
+            <a:r>
+              <a:rPr sz="3000" b="1" i="0">
+                <a:solidFill>
+                  <a:srgbClr val="F7F7F8"/>
+                </a:solidFill>
+                <a:latin typeface="Space Grotesk"/>
+              </a:rPr>
+              <a:t>Loupe is in production use on real federal casework.</a:t>
+            </a:r>
+          </a:p>
+        </p:txBody>
+      </p:sp>
+      <p:sp>
+        <p:nvSpPr>
+          <p:cNvPr id="4" name="Rectangle 3"/>
+          <p:cNvSpPr/>
+          <p:nvPr/>
+        </p:nvSpPr>
+        <p:spPr>
+          <a:xfrm>
+            <a:off x="777240" y="1737360"/>
+            <a:ext cx="1005840" cy="31750"/>
+          </a:xfrm>
+          <a:prstGeom prst="rect">
+            <a:avLst/>
+          </a:prstGeom>
+          <a:solidFill>
+            <a:srgbClr val="E33B4C"/>
+          </a:solidFill>
+          <a:ln>
+            <a:noFill/>
+          </a:ln>
+          <a:effectLst/>
+        </p:spPr>
+        <p:style>
+          <a:lnRef idx="1">
+            <a:schemeClr val="accent1"/>
+          </a:lnRef>
+          <a:fillRef idx="3">
+            <a:schemeClr val="accent1"/>
+          </a:fillRef>
+          <a:effectRef idx="2">
+            <a:schemeClr val="accent1"/>
+          </a:effectRef>
+          <a:fontRef idx="minor">
+            <a:schemeClr val="lt1"/>
+          </a:fontRef>
+        </p:style>
+        <p:txBody>
+          <a:bodyPr rtlCol="0" anchor="ctr"/>
+          <a:lstStyle/>
+          <a:p>
+            <a:pPr algn="ctr"/>
+          </a:p>
+        </p:txBody>
+      </p:sp>
+      <p:sp>
+        <p:nvSpPr>
+          <p:cNvPr id="5" name="TextBox 4"/>
+          <p:cNvSpPr txBox="1"/>
+          <p:nvPr/>
+        </p:nvSpPr>
+        <p:spPr>
+          <a:xfrm>
+            <a:off x="777240" y="2057400"/>
+            <a:ext cx="5623560" cy="4480560"/>
+          </a:xfrm>
+          <a:prstGeom prst="rect">
+            <a:avLst/>
+          </a:prstGeom>
+          <a:noFill/>
+        </p:spPr>
+        <p:txBody>
+          <a:bodyPr wrap="square" lIns="0" rIns="0" tIns="0" bIns="0">
+            <a:spAutoFit/>
+          </a:bodyPr>
+          <a:lstStyle/>
+          <a:p>
+            <a:pPr algn="l">
+              <a:lnSpc>
+                <a:spcPct val="128000"/>
+              </a:lnSpc>
+              <a:spcBef>
+                <a:spcPts val="0"/>
+              </a:spcBef>
+              <a:spcAft>
+                <a:spcPts val="0"/>
+              </a:spcAft>
+            </a:pPr>
+            <a:r>
+              <a:rPr sz="1300" b="0" i="0">
+                <a:solidFill>
+                  <a:srgbClr val="F7F7F8"/>
+                </a:solidFill>
+                <a:latin typeface="IBM Plex Sans"/>
+              </a:rPr>
+              <a:t>Built inside </a:t>
+            </a:r>
+            <a:r>
+              <a:rPr sz="1300" b="1" i="0">
+                <a:solidFill>
+                  <a:srgbClr val="F7F7F8"/>
+                </a:solidFill>
+                <a:latin typeface="IBM Plex Sans"/>
+              </a:rPr>
+              <a:t>Owl Consultancy</a:t>
+            </a:r>
+            <a:r>
+              <a:rPr sz="1300" b="0" i="0">
+                <a:solidFill>
+                  <a:srgbClr val="F7F7F8"/>
+                </a:solidFill>
+                <a:latin typeface="IBM Plex Sans"/>
+              </a:rPr>
+              <a:t>, a working US private-investigations practice, and used there to carry federal cases </a:t>
+            </a:r>
+            <a:r>
+              <a:rPr sz="1300" b="1" i="0">
+                <a:solidFill>
+                  <a:srgbClr val="F7F7F8"/>
+                </a:solidFill>
+                <a:latin typeface="IBM Plex Sans"/>
+              </a:rPr>
+              <a:t>to completion</a:t>
+            </a:r>
+            <a:r>
+              <a:rPr sz="1300" b="0" i="0">
+                <a:solidFill>
+                  <a:srgbClr val="F7F7F8"/>
+                </a:solidFill>
+                <a:latin typeface="IBM Plex Sans"/>
+              </a:rPr>
+              <a:t> — multi-gigabyte phone extractions, tens of thousands of curated financial transactions, full document corpora. </a:t>
+            </a:r>
+            <a:r>
+              <a:rPr sz="1300" b="1" i="0">
+                <a:solidFill>
+                  <a:srgbClr val="F7F7F8"/>
+                </a:solidFill>
+                <a:latin typeface="IBM Plex Sans"/>
+              </a:rPr>
+              <a:t>Three attorneys on those cases have been given access to it.</a:t>
+            </a:r>
+            <a:r>
+              <a:rPr sz="1300" b="0" i="0">
+                <a:solidFill>
+                  <a:srgbClr val="F7F7F8"/>
+                </a:solidFill>
+                <a:latin typeface="IBM Plex Sans"/>
+              </a:rPr>
+              <a:t> Attorneys have retained the practice specifically because of the platform — unprompted, before any marketing existed.</a:t>
+            </a:r>
+          </a:p>
+          <a:p>
+            <a:pPr algn="l">
+              <a:lnSpc>
+                <a:spcPct val="128000"/>
+              </a:lnSpc>
+              <a:spcBef>
+                <a:spcPts val="1300"/>
+              </a:spcBef>
+              <a:spcAft>
+                <a:spcPts val="0"/>
+              </a:spcAft>
+            </a:pPr>
+            <a:r>
+              <a:rPr sz="1500" b="1" i="0">
+                <a:solidFill>
+                  <a:srgbClr val="E33B4C"/>
+                </a:solidFill>
+                <a:latin typeface="IBM Plex Sans"/>
+              </a:rPr>
+              <a:t>This is not a prototype seeking a first user. It is an application that works, in the hands of the investigators it was built for, on cases with real stakes.</a:t>
+            </a:r>
+          </a:p>
+          <a:p>
+            <a:pPr algn="l">
+              <a:lnSpc>
+                <a:spcPct val="128000"/>
+              </a:lnSpc>
+              <a:spcBef>
+                <a:spcPts val="1400"/>
+              </a:spcBef>
+              <a:spcAft>
+                <a:spcPts val="0"/>
+              </a:spcAft>
+            </a:pPr>
+            <a:r>
+              <a:rPr sz="1300" b="1" i="0">
+                <a:solidFill>
+                  <a:srgbClr val="F7F7F8"/>
+                </a:solidFill>
+                <a:latin typeface="IBM Plex Sans"/>
+              </a:rPr>
+              <a:t>First external pilot in motion.</a:t>
+            </a:r>
+          </a:p>
+          <a:p>
+            <a:pPr algn="l">
+              <a:lnSpc>
+                <a:spcPct val="128000"/>
+              </a:lnSpc>
+              <a:spcBef>
+                <a:spcPts val="400"/>
+              </a:spcBef>
+              <a:spcAft>
+                <a:spcPts val="0"/>
+              </a:spcAft>
+            </a:pPr>
+            <a:r>
+              <a:rPr sz="1300" b="0" i="0">
+                <a:solidFill>
+                  <a:srgbClr val="9A9DA5"/>
+                </a:solidFill>
+                <a:latin typeface="IBM Plex Sans"/>
+              </a:rPr>
+              <a:t>A US private-investigations firm led by a former FBI undercover agent — clients across Miami, New York, California and the Midwest — has agreed to send its next large-document matter through Loupe as a paid trial at cost, and to put a mutual MSA in front of us. Sourced through casework, not marketing.</a:t>
+            </a:r>
+          </a:p>
+        </p:txBody>
+      </p:sp>
+      <p:sp>
+        <p:nvSpPr>
+          <p:cNvPr id="6" name="TextBox 5"/>
+          <p:cNvSpPr txBox="1"/>
+          <p:nvPr/>
+        </p:nvSpPr>
+        <p:spPr>
+          <a:xfrm>
+            <a:off x="6903720" y="2057400"/>
+            <a:ext cx="4526280" cy="4480560"/>
+          </a:xfrm>
+          <a:prstGeom prst="rect">
+            <a:avLst/>
+          </a:prstGeom>
+          <a:noFill/>
+        </p:spPr>
+        <p:txBody>
+          <a:bodyPr wrap="square" lIns="0" rIns="0" tIns="0" bIns="0">
+            <a:spAutoFit/>
+          </a:bodyPr>
+          <a:lstStyle/>
+          <a:p>
+            <a:pPr algn="l">
+              <a:lnSpc>
+                <a:spcPct val="128000"/>
+              </a:lnSpc>
+              <a:spcBef>
+                <a:spcPts val="0"/>
+              </a:spcBef>
+              <a:spcAft>
+                <a:spcPts val="0"/>
+              </a:spcAft>
+            </a:pPr>
+            <a:r>
+              <a:rPr sz="1200" b="1" i="0">
+                <a:solidFill>
+                  <a:srgbClr val="E33B4C"/>
+                </a:solidFill>
+                <a:latin typeface="IBM Plex Sans"/>
+              </a:rPr>
+              <a:t>Built so far, verifiable</a:t>
+            </a:r>
+          </a:p>
+          <a:p>
+            <a:pPr algn="l" marL="274320" indent="-274320">
+              <a:lnSpc>
+                <a:spcPct val="128000"/>
+              </a:lnSpc>
+              <a:spcBef>
+                <a:spcPts val="600"/>
+              </a:spcBef>
+              <a:spcAft>
+                <a:spcPts val="0"/>
+              </a:spcAft>
+            </a:pPr>
+            <a:r>
+              <a:rPr sz="1200" b="1">
+                <a:solidFill>
+                  <a:srgbClr val="E33B4C"/>
+                </a:solidFill>
+                <a:latin typeface="IBM Plex Sans"/>
+              </a:rPr>
+              <a:t>—   </a:t>
+            </a:r>
+            <a:r>
+              <a:rPr sz="1200" b="0" i="0">
+                <a:solidFill>
+                  <a:srgbClr val="9A9DA5"/>
+                </a:solidFill>
+                <a:latin typeface="IBM Plex Sans"/>
+              </a:rPr>
+              <a:t>~180,000 lines across a React console, a FastAPI case API and a separate asynchronous evidence engine</a:t>
+            </a:r>
+          </a:p>
+          <a:p>
+            <a:pPr algn="l" marL="274320" indent="-274320">
+              <a:lnSpc>
+                <a:spcPct val="128000"/>
+              </a:lnSpc>
+              <a:spcBef>
+                <a:spcPts val="600"/>
+              </a:spcBef>
+              <a:spcAft>
+                <a:spcPts val="0"/>
+              </a:spcAft>
+            </a:pPr>
+            <a:r>
+              <a:rPr sz="1200" b="1">
+                <a:solidFill>
+                  <a:srgbClr val="E33B4C"/>
+                </a:solidFill>
+                <a:latin typeface="IBM Plex Sans"/>
+              </a:rPr>
+              <a:t>—   </a:t>
+            </a:r>
+            <a:r>
+              <a:rPr sz="1200" b="0" i="0">
+                <a:solidFill>
+                  <a:srgbClr val="9A9DA5"/>
+                </a:solidFill>
+                <a:latin typeface="IBM Plex Sans"/>
+              </a:rPr>
+              <a:t>913 commits since December 2025 — two primary engineers</a:t>
+            </a:r>
+          </a:p>
+          <a:p>
+            <a:pPr algn="l" marL="274320" indent="-274320">
+              <a:lnSpc>
+                <a:spcPct val="128000"/>
+              </a:lnSpc>
+              <a:spcBef>
+                <a:spcPts val="600"/>
+              </a:spcBef>
+              <a:spcAft>
+                <a:spcPts val="0"/>
+              </a:spcAft>
+            </a:pPr>
+            <a:r>
+              <a:rPr sz="1200" b="1">
+                <a:solidFill>
+                  <a:srgbClr val="E33B4C"/>
+                </a:solidFill>
+                <a:latin typeface="IBM Plex Sans"/>
+              </a:rPr>
+              <a:t>—   </a:t>
+            </a:r>
+            <a:r>
+              <a:rPr sz="1200" b="0" i="0">
+                <a:solidFill>
+                  <a:srgbClr val="9A9DA5"/>
+                </a:solidFill>
+                <a:latin typeface="IBM Plex Sans"/>
+              </a:rPr>
+              <a:t>Neo4j (case graph) · Postgres (cases, auth, audit) · ChromaDB (retrieval) · Redis (jobs)</a:t>
+            </a:r>
+          </a:p>
+          <a:p>
+            <a:pPr algn="l" marL="274320" indent="-274320">
+              <a:lnSpc>
+                <a:spcPct val="128000"/>
+              </a:lnSpc>
+              <a:spcBef>
+                <a:spcPts val="600"/>
+              </a:spcBef>
+              <a:spcAft>
+                <a:spcPts val="0"/>
+              </a:spcAft>
+            </a:pPr>
+            <a:r>
+              <a:rPr sz="1200" b="1">
+                <a:solidFill>
+                  <a:srgbClr val="E33B4C"/>
+                </a:solidFill>
+                <a:latin typeface="IBM Plex Sans"/>
+              </a:rPr>
+              <a:t>—   </a:t>
+            </a:r>
+            <a:r>
+              <a:rPr sz="1200" b="0" i="0">
+                <a:solidFill>
+                  <a:srgbClr val="9A9DA5"/>
+                </a:solidFill>
+                <a:latin typeface="IBM Plex Sans"/>
+              </a:rPr>
+              <a:t>Three AI providers behind one routing policy — the model is a swappable component</a:t>
+            </a:r>
+          </a:p>
+          <a:p>
+            <a:pPr algn="l" marL="274320" indent="-274320">
+              <a:lnSpc>
+                <a:spcPct val="128000"/>
+              </a:lnSpc>
+              <a:spcBef>
+                <a:spcPts val="600"/>
+              </a:spcBef>
+              <a:spcAft>
+                <a:spcPts val="0"/>
+              </a:spcAft>
+            </a:pPr>
+            <a:r>
+              <a:rPr sz="1200" b="1">
+                <a:solidFill>
+                  <a:srgbClr val="E33B4C"/>
+                </a:solidFill>
+                <a:latin typeface="IBM Plex Sans"/>
+              </a:rPr>
+              <a:t>—   </a:t>
+            </a:r>
+            <a:r>
+              <a:rPr sz="1200" b="0" i="0">
+                <a:solidFill>
+                  <a:srgbClr val="9A9DA5"/>
+                </a:solidFill>
+                <a:latin typeface="IBM Plex Sans"/>
+              </a:rPr>
+              <a:t>Single-tenant deployment: one isolated stack per customer</a:t>
+            </a:r>
+          </a:p>
+          <a:p>
+            <a:pPr algn="l">
+              <a:lnSpc>
+                <a:spcPct val="128000"/>
+              </a:lnSpc>
+              <a:spcBef>
+                <a:spcPts val="1400"/>
+              </a:spcBef>
+              <a:spcAft>
+                <a:spcPts val="0"/>
+              </a:spcAft>
+            </a:pPr>
+            <a:r>
+              <a:rPr sz="1200" b="1" i="0">
+                <a:solidFill>
+                  <a:srgbClr val="E33B4C"/>
+                </a:solidFill>
+                <a:latin typeface="IBM Plex Sans"/>
+              </a:rPr>
+              <a:t>Release discipline</a:t>
+            </a:r>
+          </a:p>
+          <a:p>
+            <a:pPr algn="l">
+              <a:lnSpc>
+                <a:spcPct val="128000"/>
+              </a:lnSpc>
+              <a:spcBef>
+                <a:spcPts val="400"/>
+              </a:spcBef>
+              <a:spcAft>
+                <a:spcPts val="0"/>
+              </a:spcAft>
+            </a:pPr>
+            <a:r>
+              <a:rPr sz="1200" b="0" i="0">
+                <a:solidFill>
+                  <a:srgbClr val="F7F7F8"/>
+                </a:solidFill>
+                <a:latin typeface="IBM Plex Sans"/>
+              </a:rPr>
+              <a:t>Onboarding an external customer's evidence runs behind a </a:t>
+            </a:r>
+            <a:r>
+              <a:rPr sz="1200" b="1" i="0">
+                <a:solidFill>
+                  <a:srgbClr val="F7F7F8"/>
+                </a:solidFill>
+                <a:latin typeface="IBM Plex Sans"/>
+              </a:rPr>
+              <a:t>12-stage security-gated release plan. No external case data enters the platform until the security, isolation, backup and legal stages pass.</a:t>
+            </a:r>
+          </a:p>
+          <a:p>
+            <a:pPr algn="l">
+              <a:lnSpc>
+                <a:spcPct val="128000"/>
+              </a:lnSpc>
+              <a:spcBef>
+                <a:spcPts val="1000"/>
+              </a:spcBef>
+              <a:spcAft>
+                <a:spcPts val="0"/>
+              </a:spcAft>
+            </a:pPr>
+            <a:r>
+              <a:rPr sz="1200" b="0" i="0">
+                <a:solidFill>
+                  <a:srgbClr val="9A9DA5"/>
+                </a:solidFill>
+                <a:latin typeface="IBM Plex Sans"/>
+              </a:rPr>
+              <a:t>Roadmap: a 13-epic board takes Loupe from a platform that works for the practice it was built in to one that scales across many. Depth, not existence.</a:t>
+            </a:r>
+          </a:p>
+        </p:txBody>
+      </p:sp>
+    </p:spTree>
+  </p:cSld>
+  <p:clrMapOvr>
+    <a:masterClrMapping/>
+  </p:clrMapOvr>
+</p:sld>
+</file>
+
+<file path=ppt/slides/slide11.xml><?xml version="1.0" encoding="utf-8"?>
 <p:sld xmlns:a="http://schemas.openxmlformats.org/drawingml/2006/main" xmlns:p="http://schemas.openxmlformats.org/presentationml/2006/main" xmlns:r="http://schemas.openxmlformats.org/officeDocument/2006/relationships">
   <p:cSld>
     <p:bg>
@@ -9284,6 +10042,770 @@
                 </a:solidFill>
                 <a:latin typeface="IBM Plex Mono"/>
               </a:rPr>
+              <a:t>CUSTOMER VALUE</a:t>
+            </a:r>
+          </a:p>
+        </p:txBody>
+      </p:sp>
+      <p:sp>
+        <p:nvSpPr>
+          <p:cNvPr id="3" name="TextBox 2"/>
+          <p:cNvSpPr txBox="1"/>
+          <p:nvPr/>
+        </p:nvSpPr>
+        <p:spPr>
+          <a:xfrm>
+            <a:off x="777240" y="868680"/>
+            <a:ext cx="10637215" cy="914400"/>
+          </a:xfrm>
+          <a:prstGeom prst="rect">
+            <a:avLst/>
+          </a:prstGeom>
+          <a:noFill/>
+        </p:spPr>
+        <p:txBody>
+          <a:bodyPr wrap="square" lIns="0" rIns="0" tIns="0" bIns="0">
+            <a:spAutoFit/>
+          </a:bodyPr>
+          <a:lstStyle/>
+          <a:p>
+            <a:pPr algn="l">
+              <a:lnSpc>
+                <a:spcPct val="110000"/>
+              </a:lnSpc>
+              <a:spcBef>
+                <a:spcPts val="0"/>
+              </a:spcBef>
+              <a:spcAft>
+                <a:spcPts val="0"/>
+              </a:spcAft>
+            </a:pPr>
+            <a:r>
+              <a:rPr sz="3000" b="1" i="0">
+                <a:solidFill>
+                  <a:srgbClr val="F7F7F8"/>
+                </a:solidFill>
+                <a:latin typeface="Space Grotesk"/>
+              </a:rPr>
+              <a:t>We don't ask for new budget.
+We displace one that already exists.</a:t>
+            </a:r>
+          </a:p>
+        </p:txBody>
+      </p:sp>
+      <p:sp>
+        <p:nvSpPr>
+          <p:cNvPr id="4" name="Rectangle 3"/>
+          <p:cNvSpPr/>
+          <p:nvPr/>
+        </p:nvSpPr>
+        <p:spPr>
+          <a:xfrm>
+            <a:off x="777240" y="2148840"/>
+            <a:ext cx="1005840" cy="31750"/>
+          </a:xfrm>
+          <a:prstGeom prst="rect">
+            <a:avLst/>
+          </a:prstGeom>
+          <a:solidFill>
+            <a:srgbClr val="E33B4C"/>
+          </a:solidFill>
+          <a:ln>
+            <a:noFill/>
+          </a:ln>
+          <a:effectLst/>
+        </p:spPr>
+        <p:style>
+          <a:lnRef idx="1">
+            <a:schemeClr val="accent1"/>
+          </a:lnRef>
+          <a:fillRef idx="3">
+            <a:schemeClr val="accent1"/>
+          </a:fillRef>
+          <a:effectRef idx="2">
+            <a:schemeClr val="accent1"/>
+          </a:effectRef>
+          <a:fontRef idx="minor">
+            <a:schemeClr val="lt1"/>
+          </a:fontRef>
+        </p:style>
+        <p:txBody>
+          <a:bodyPr rtlCol="0" anchor="ctr"/>
+          <a:lstStyle/>
+          <a:p>
+            <a:pPr algn="ctr"/>
+          </a:p>
+        </p:txBody>
+      </p:sp>
+      <p:sp>
+        <p:nvSpPr>
+          <p:cNvPr id="5" name="TextBox 4"/>
+          <p:cNvSpPr txBox="1"/>
+          <p:nvPr/>
+        </p:nvSpPr>
+        <p:spPr>
+          <a:xfrm>
+            <a:off x="777240" y="2331720"/>
+            <a:ext cx="10637215" cy="566928"/>
+          </a:xfrm>
+          <a:prstGeom prst="rect">
+            <a:avLst/>
+          </a:prstGeom>
+          <a:noFill/>
+        </p:spPr>
+        <p:txBody>
+          <a:bodyPr wrap="square" lIns="0" rIns="0" tIns="0" bIns="0">
+            <a:spAutoFit/>
+          </a:bodyPr>
+          <a:lstStyle/>
+          <a:p>
+            <a:pPr algn="l">
+              <a:lnSpc>
+                <a:spcPct val="128000"/>
+              </a:lnSpc>
+              <a:spcBef>
+                <a:spcPts val="0"/>
+              </a:spcBef>
+              <a:spcAft>
+                <a:spcPts val="0"/>
+              </a:spcAft>
+            </a:pPr>
+            <a:r>
+              <a:rPr sz="1400" b="0" i="0">
+                <a:solidFill>
+                  <a:srgbClr val="F7F7F8"/>
+                </a:solidFill>
+                <a:latin typeface="IBM Plex Sans"/>
+              </a:rPr>
+              <a:t>Before anyone has answered a question about the evidence, a serious matter has already paid a forensic vendor, a processing bill, and hosting charged </a:t>
+            </a:r>
+            <a:r>
+              <a:rPr sz="1400" b="1" i="0">
+                <a:solidFill>
+                  <a:srgbClr val="F7F7F8"/>
+                </a:solidFill>
+                <a:latin typeface="IBM Plex Sans"/>
+              </a:rPr>
+              <a:t>per gigabyte per month for the life of the case</a:t>
+            </a:r>
+            <a:r>
+              <a:rPr sz="1400" b="0" i="0">
+                <a:solidFill>
+                  <a:srgbClr val="F7F7F8"/>
+                </a:solidFill>
+                <a:latin typeface="IBM Plex Sans"/>
+              </a:rPr>
+              <a:t> — to have phone data come out as spreadsheets.</a:t>
+            </a:r>
+          </a:p>
+        </p:txBody>
+      </p:sp>
+      <p:sp>
+        <p:nvSpPr>
+          <p:cNvPr id="6" name="Rectangle 5"/>
+          <p:cNvSpPr/>
+          <p:nvPr/>
+        </p:nvSpPr>
+        <p:spPr>
+          <a:xfrm>
+            <a:off x="777240" y="3127248"/>
+            <a:ext cx="2624328" cy="1572768"/>
+          </a:xfrm>
+          <a:prstGeom prst="rect">
+            <a:avLst/>
+          </a:prstGeom>
+          <a:solidFill>
+            <a:srgbClr val="111216"/>
+          </a:solidFill>
+          <a:ln w="15875">
+            <a:solidFill>
+              <a:srgbClr val="B41624"/>
+            </a:solidFill>
+          </a:ln>
+          <a:effectLst/>
+        </p:spPr>
+        <p:style>
+          <a:lnRef idx="1">
+            <a:schemeClr val="accent1"/>
+          </a:lnRef>
+          <a:fillRef idx="3">
+            <a:schemeClr val="accent1"/>
+          </a:fillRef>
+          <a:effectRef idx="2">
+            <a:schemeClr val="accent1"/>
+          </a:effectRef>
+          <a:fontRef idx="minor">
+            <a:schemeClr val="lt1"/>
+          </a:fontRef>
+        </p:style>
+        <p:txBody>
+          <a:bodyPr rtlCol="0" anchor="ctr"/>
+          <a:lstStyle/>
+          <a:p>
+            <a:pPr algn="ctr"/>
+          </a:p>
+        </p:txBody>
+      </p:sp>
+      <p:sp>
+        <p:nvSpPr>
+          <p:cNvPr id="7" name="TextBox 6"/>
+          <p:cNvSpPr txBox="1"/>
+          <p:nvPr/>
+        </p:nvSpPr>
+        <p:spPr>
+          <a:xfrm>
+            <a:off x="932688" y="3273552"/>
+            <a:ext cx="2313432" cy="1325880"/>
+          </a:xfrm>
+          <a:prstGeom prst="rect">
+            <a:avLst/>
+          </a:prstGeom>
+          <a:noFill/>
+        </p:spPr>
+        <p:txBody>
+          <a:bodyPr wrap="square" lIns="0" rIns="0" tIns="0" bIns="0">
+            <a:spAutoFit/>
+          </a:bodyPr>
+          <a:lstStyle/>
+          <a:p>
+            <a:pPr algn="l">
+              <a:lnSpc>
+                <a:spcPct val="128000"/>
+              </a:lnSpc>
+              <a:spcBef>
+                <a:spcPts val="0"/>
+              </a:spcBef>
+              <a:spcAft>
+                <a:spcPts val="0"/>
+              </a:spcAft>
+            </a:pPr>
+            <a:r>
+              <a:rPr sz="2700" b="1" i="0">
+                <a:solidFill>
+                  <a:srgbClr val="F7F7F8"/>
+                </a:solidFill>
+                <a:latin typeface="Space Grotesk"/>
+              </a:rPr>
+              <a:t>$34–131k</a:t>
+            </a:r>
+          </a:p>
+          <a:p>
+            <a:pPr algn="l">
+              <a:lnSpc>
+                <a:spcPct val="128000"/>
+              </a:lnSpc>
+              <a:spcBef>
+                <a:spcPts val="800"/>
+              </a:spcBef>
+              <a:spcAft>
+                <a:spcPts val="0"/>
+              </a:spcAft>
+            </a:pPr>
+            <a:r>
+              <a:rPr sz="1150" b="0" i="0">
+                <a:solidFill>
+                  <a:srgbClr val="9A9DA5"/>
+                </a:solidFill>
+                <a:latin typeface="IBM Plex Sans"/>
+              </a:rPr>
+              <a:t>of spend displaced per serious case — processing, hosting and examiner analysis</a:t>
+            </a:r>
+          </a:p>
+        </p:txBody>
+      </p:sp>
+      <p:sp>
+        <p:nvSpPr>
+          <p:cNvPr id="8" name="Rectangle 7"/>
+          <p:cNvSpPr/>
+          <p:nvPr/>
+        </p:nvSpPr>
+        <p:spPr>
+          <a:xfrm>
+            <a:off x="3557016" y="3127248"/>
+            <a:ext cx="2624328" cy="1572768"/>
+          </a:xfrm>
+          <a:prstGeom prst="rect">
+            <a:avLst/>
+          </a:prstGeom>
+          <a:solidFill>
+            <a:srgbClr val="111216"/>
+          </a:solidFill>
+          <a:ln w="15875">
+            <a:solidFill>
+              <a:srgbClr val="B41624"/>
+            </a:solidFill>
+          </a:ln>
+          <a:effectLst/>
+        </p:spPr>
+        <p:style>
+          <a:lnRef idx="1">
+            <a:schemeClr val="accent1"/>
+          </a:lnRef>
+          <a:fillRef idx="3">
+            <a:schemeClr val="accent1"/>
+          </a:fillRef>
+          <a:effectRef idx="2">
+            <a:schemeClr val="accent1"/>
+          </a:effectRef>
+          <a:fontRef idx="minor">
+            <a:schemeClr val="lt1"/>
+          </a:fontRef>
+        </p:style>
+        <p:txBody>
+          <a:bodyPr rtlCol="0" anchor="ctr"/>
+          <a:lstStyle/>
+          <a:p>
+            <a:pPr algn="ctr"/>
+          </a:p>
+        </p:txBody>
+      </p:sp>
+      <p:sp>
+        <p:nvSpPr>
+          <p:cNvPr id="9" name="TextBox 8"/>
+          <p:cNvSpPr txBox="1"/>
+          <p:nvPr/>
+        </p:nvSpPr>
+        <p:spPr>
+          <a:xfrm>
+            <a:off x="3712464" y="3273552"/>
+            <a:ext cx="2313432" cy="1325880"/>
+          </a:xfrm>
+          <a:prstGeom prst="rect">
+            <a:avLst/>
+          </a:prstGeom>
+          <a:noFill/>
+        </p:spPr>
+        <p:txBody>
+          <a:bodyPr wrap="square" lIns="0" rIns="0" tIns="0" bIns="0">
+            <a:spAutoFit/>
+          </a:bodyPr>
+          <a:lstStyle/>
+          <a:p>
+            <a:pPr algn="l">
+              <a:lnSpc>
+                <a:spcPct val="128000"/>
+              </a:lnSpc>
+              <a:spcBef>
+                <a:spcPts val="0"/>
+              </a:spcBef>
+              <a:spcAft>
+                <a:spcPts val="0"/>
+              </a:spcAft>
+            </a:pPr>
+            <a:r>
+              <a:rPr sz="2700" b="1" i="0">
+                <a:solidFill>
+                  <a:srgbClr val="F7F7F8"/>
+                </a:solidFill>
+                <a:latin typeface="Space Grotesk"/>
+              </a:rPr>
+              <a:t>58–100 hrs</a:t>
+            </a:r>
+          </a:p>
+          <a:p>
+            <a:pPr algn="l">
+              <a:lnSpc>
+                <a:spcPct val="128000"/>
+              </a:lnSpc>
+              <a:spcBef>
+                <a:spcPts val="800"/>
+              </a:spcBef>
+              <a:spcAft>
+                <a:spcPts val="0"/>
+              </a:spcAft>
+            </a:pPr>
+            <a:r>
+              <a:rPr sz="1150" b="0" i="0">
+                <a:solidFill>
+                  <a:srgbClr val="9A9DA5"/>
+                </a:solidFill>
+                <a:latin typeface="IBM Plex Sans"/>
+              </a:rPr>
+              <a:t>of investigator and paralegal time returned on the same case</a:t>
+            </a:r>
+          </a:p>
+        </p:txBody>
+      </p:sp>
+      <p:sp>
+        <p:nvSpPr>
+          <p:cNvPr id="10" name="Rectangle 9"/>
+          <p:cNvSpPr/>
+          <p:nvPr/>
+        </p:nvSpPr>
+        <p:spPr>
+          <a:xfrm>
+            <a:off x="6336792" y="3127248"/>
+            <a:ext cx="2624328" cy="1572768"/>
+          </a:xfrm>
+          <a:prstGeom prst="rect">
+            <a:avLst/>
+          </a:prstGeom>
+          <a:solidFill>
+            <a:srgbClr val="111216"/>
+          </a:solidFill>
+          <a:ln w="15875">
+            <a:solidFill>
+              <a:srgbClr val="B41624"/>
+            </a:solidFill>
+          </a:ln>
+          <a:effectLst/>
+        </p:spPr>
+        <p:style>
+          <a:lnRef idx="1">
+            <a:schemeClr val="accent1"/>
+          </a:lnRef>
+          <a:fillRef idx="3">
+            <a:schemeClr val="accent1"/>
+          </a:fillRef>
+          <a:effectRef idx="2">
+            <a:schemeClr val="accent1"/>
+          </a:effectRef>
+          <a:fontRef idx="minor">
+            <a:schemeClr val="lt1"/>
+          </a:fontRef>
+        </p:style>
+        <p:txBody>
+          <a:bodyPr rtlCol="0" anchor="ctr"/>
+          <a:lstStyle/>
+          <a:p>
+            <a:pPr algn="ctr"/>
+          </a:p>
+        </p:txBody>
+      </p:sp>
+      <p:sp>
+        <p:nvSpPr>
+          <p:cNvPr id="11" name="TextBox 10"/>
+          <p:cNvSpPr txBox="1"/>
+          <p:nvPr/>
+        </p:nvSpPr>
+        <p:spPr>
+          <a:xfrm>
+            <a:off x="6492240" y="3273552"/>
+            <a:ext cx="2313432" cy="1325880"/>
+          </a:xfrm>
+          <a:prstGeom prst="rect">
+            <a:avLst/>
+          </a:prstGeom>
+          <a:noFill/>
+        </p:spPr>
+        <p:txBody>
+          <a:bodyPr wrap="square" lIns="0" rIns="0" tIns="0" bIns="0">
+            <a:spAutoFit/>
+          </a:bodyPr>
+          <a:lstStyle/>
+          <a:p>
+            <a:pPr algn="l">
+              <a:lnSpc>
+                <a:spcPct val="128000"/>
+              </a:lnSpc>
+              <a:spcBef>
+                <a:spcPts val="0"/>
+              </a:spcBef>
+              <a:spcAft>
+                <a:spcPts val="0"/>
+              </a:spcAft>
+            </a:pPr>
+            <a:r>
+              <a:rPr sz="2700" b="1" i="0">
+                <a:solidFill>
+                  <a:srgbClr val="F7F7F8"/>
+                </a:solidFill>
+                <a:latin typeface="Space Grotesk"/>
+              </a:rPr>
+              <a:t>$0.9–1.9M</a:t>
+            </a:r>
+          </a:p>
+          <a:p>
+            <a:pPr algn="l">
+              <a:lnSpc>
+                <a:spcPct val="128000"/>
+              </a:lnSpc>
+              <a:spcBef>
+                <a:spcPts val="800"/>
+              </a:spcBef>
+              <a:spcAft>
+                <a:spcPts val="0"/>
+              </a:spcAft>
+            </a:pPr>
+            <a:r>
+              <a:rPr sz="1150" b="0" i="0">
+                <a:solidFill>
+                  <a:srgbClr val="9A9DA5"/>
+                </a:solidFill>
+                <a:latin typeface="IBM Plex Sans"/>
+              </a:rPr>
+              <a:t>of displaceable value carried by one practice every year</a:t>
+            </a:r>
+          </a:p>
+        </p:txBody>
+      </p:sp>
+      <p:sp>
+        <p:nvSpPr>
+          <p:cNvPr id="12" name="Rectangle 11"/>
+          <p:cNvSpPr/>
+          <p:nvPr/>
+        </p:nvSpPr>
+        <p:spPr>
+          <a:xfrm>
+            <a:off x="9116568" y="3127248"/>
+            <a:ext cx="2624328" cy="1572768"/>
+          </a:xfrm>
+          <a:prstGeom prst="rect">
+            <a:avLst/>
+          </a:prstGeom>
+          <a:solidFill>
+            <a:srgbClr val="111216"/>
+          </a:solidFill>
+          <a:ln w="15875">
+            <a:solidFill>
+              <a:srgbClr val="3B3D44"/>
+            </a:solidFill>
+          </a:ln>
+          <a:effectLst/>
+        </p:spPr>
+        <p:style>
+          <a:lnRef idx="1">
+            <a:schemeClr val="accent1"/>
+          </a:lnRef>
+          <a:fillRef idx="3">
+            <a:schemeClr val="accent1"/>
+          </a:fillRef>
+          <a:effectRef idx="2">
+            <a:schemeClr val="accent1"/>
+          </a:effectRef>
+          <a:fontRef idx="minor">
+            <a:schemeClr val="lt1"/>
+          </a:fontRef>
+        </p:style>
+        <p:txBody>
+          <a:bodyPr rtlCol="0" anchor="ctr"/>
+          <a:lstStyle/>
+          <a:p>
+            <a:pPr algn="ctr"/>
+          </a:p>
+        </p:txBody>
+      </p:sp>
+      <p:sp>
+        <p:nvSpPr>
+          <p:cNvPr id="13" name="TextBox 12"/>
+          <p:cNvSpPr txBox="1"/>
+          <p:nvPr/>
+        </p:nvSpPr>
+        <p:spPr>
+          <a:xfrm>
+            <a:off x="9272016" y="3273552"/>
+            <a:ext cx="2313432" cy="1325880"/>
+          </a:xfrm>
+          <a:prstGeom prst="rect">
+            <a:avLst/>
+          </a:prstGeom>
+          <a:noFill/>
+        </p:spPr>
+        <p:txBody>
+          <a:bodyPr wrap="square" lIns="0" rIns="0" tIns="0" bIns="0">
+            <a:spAutoFit/>
+          </a:bodyPr>
+          <a:lstStyle/>
+          <a:p>
+            <a:pPr algn="l">
+              <a:lnSpc>
+                <a:spcPct val="128000"/>
+              </a:lnSpc>
+              <a:spcBef>
+                <a:spcPts val="0"/>
+              </a:spcBef>
+              <a:spcAft>
+                <a:spcPts val="0"/>
+              </a:spcAft>
+            </a:pPr>
+            <a:r>
+              <a:rPr sz="2700" b="1" i="0">
+                <a:solidFill>
+                  <a:srgbClr val="F7F7F8"/>
+                </a:solidFill>
+                <a:latin typeface="Space Grotesk"/>
+              </a:rPr>
+              <a:t>$4,350 / mo</a:t>
+            </a:r>
+          </a:p>
+          <a:p>
+            <a:pPr algn="l">
+              <a:lnSpc>
+                <a:spcPct val="128000"/>
+              </a:lnSpc>
+              <a:spcBef>
+                <a:spcPts val="800"/>
+              </a:spcBef>
+              <a:spcAft>
+                <a:spcPts val="0"/>
+              </a:spcAft>
+            </a:pPr>
+            <a:r>
+              <a:rPr sz="1150" b="0" i="0">
+                <a:solidFill>
+                  <a:srgbClr val="9A9DA5"/>
+                </a:solidFill>
+                <a:latin typeface="IBM Plex Sans"/>
+              </a:rPr>
+              <a:t>what hosting a single 435GB federal case costs today, for as long as it runs</a:t>
+            </a:r>
+          </a:p>
+        </p:txBody>
+      </p:sp>
+      <p:sp>
+        <p:nvSpPr>
+          <p:cNvPr id="14" name="TextBox 13"/>
+          <p:cNvSpPr txBox="1"/>
+          <p:nvPr/>
+        </p:nvSpPr>
+        <p:spPr>
+          <a:xfrm>
+            <a:off x="777240" y="4956048"/>
+            <a:ext cx="10637215" cy="1280160"/>
+          </a:xfrm>
+          <a:prstGeom prst="rect">
+            <a:avLst/>
+          </a:prstGeom>
+          <a:noFill/>
+        </p:spPr>
+        <p:txBody>
+          <a:bodyPr wrap="square" lIns="0" rIns="0" tIns="0" bIns="0">
+            <a:spAutoFit/>
+          </a:bodyPr>
+          <a:lstStyle/>
+          <a:p>
+            <a:pPr algn="l">
+              <a:lnSpc>
+                <a:spcPct val="128000"/>
+              </a:lnSpc>
+              <a:spcBef>
+                <a:spcPts val="0"/>
+              </a:spcBef>
+              <a:spcAft>
+                <a:spcPts val="0"/>
+              </a:spcAft>
+            </a:pPr>
+            <a:r>
+              <a:rPr sz="1500" b="1" i="0">
+                <a:solidFill>
+                  <a:srgbClr val="F7F7F8"/>
+                </a:solidFill>
+                <a:latin typeface="IBM Plex Sans"/>
+              </a:rPr>
+              <a:t>Priced at $12,000 a matter</a:t>
+            </a:r>
+            <a:r>
+              <a:rPr sz="1500" b="0" i="0">
+                <a:solidFill>
+                  <a:srgbClr val="F7F7F8"/>
+                </a:solidFill>
+                <a:latin typeface="IBM Plex Sans"/>
+              </a:rPr>
+              <a:t>, against $34,000–$131,000 it removes and the hours it hands back. The extraction bill stays — devices still go to a vendor. Everything downstream of it does not.</a:t>
+            </a:r>
+          </a:p>
+          <a:p>
+            <a:pPr algn="l">
+              <a:lnSpc>
+                <a:spcPct val="128000"/>
+              </a:lnSpc>
+              <a:spcBef>
+                <a:spcPts val="900"/>
+              </a:spcBef>
+              <a:spcAft>
+                <a:spcPts val="0"/>
+              </a:spcAft>
+            </a:pPr>
+            <a:r>
+              <a:rPr sz="1300" b="0" i="0">
+                <a:solidFill>
+                  <a:srgbClr val="9A9DA5"/>
+                </a:solidFill>
+                <a:latin typeface="IBM Plex Sans"/>
+              </a:rPr>
+              <a:t>Displaceable value moves twenty-four times between the smallest and largest matters, so price scales with device count, data volume and duration — the same drivers as the bill it replaces. </a:t>
+            </a:r>
+            <a:r>
+              <a:rPr sz="1300" b="1" i="0">
+                <a:solidFill>
+                  <a:srgbClr val="9A9DA5"/>
+                </a:solidFill>
+                <a:latin typeface="IBM Plex Sans"/>
+              </a:rPr>
+              <a:t>Setting that scaling is what the pilot is for.</a:t>
+            </a:r>
+          </a:p>
+        </p:txBody>
+      </p:sp>
+    </p:spTree>
+  </p:cSld>
+  <p:clrMapOvr>
+    <a:masterClrMapping/>
+  </p:clrMapOvr>
+</p:sld>
+</file>
+
+<file path=ppt/slides/slide8.xml><?xml version="1.0" encoding="utf-8"?>
+<p:sld xmlns:a="http://schemas.openxmlformats.org/drawingml/2006/main" xmlns:p="http://schemas.openxmlformats.org/presentationml/2006/main" xmlns:r="http://schemas.openxmlformats.org/officeDocument/2006/relationships">
+  <p:cSld>
+    <p:bg>
+      <p:bgPr>
+        <a:solidFill>
+          <a:srgbClr val="0B0C0F"/>
+        </a:solidFill>
+        <a:effectLst/>
+      </p:bgPr>
+    </p:bg>
+    <p:spTree>
+      <p:nvGrpSpPr>
+        <p:cNvPr id="1" name=""/>
+        <p:cNvGrpSpPr/>
+        <p:nvPr/>
+      </p:nvGrpSpPr>
+      <p:grpSpPr/>
+      <p:sp>
+        <p:nvSpPr>
+          <p:cNvPr id="2" name="TextBox 1"/>
+          <p:cNvSpPr txBox="1"/>
+          <p:nvPr/>
+        </p:nvSpPr>
+        <p:spPr>
+          <a:xfrm>
+            <a:off x="777240" y="502920"/>
+            <a:ext cx="10637215" cy="274320"/>
+          </a:xfrm>
+          <a:prstGeom prst="rect">
+            <a:avLst/>
+          </a:prstGeom>
+          <a:noFill/>
+        </p:spPr>
+        <p:txBody>
+          <a:bodyPr wrap="square" lIns="0" rIns="0" tIns="0" bIns="0">
+            <a:spAutoFit/>
+          </a:bodyPr>
+          <a:lstStyle/>
+          <a:p>
+            <a:pPr algn="l">
+              <a:lnSpc>
+                <a:spcPct val="128000"/>
+              </a:lnSpc>
+              <a:spcBef>
+                <a:spcPts val="0"/>
+              </a:spcBef>
+              <a:spcAft>
+                <a:spcPts val="0"/>
+              </a:spcAft>
+              <a:defRPr>
+                <a:latin typeface="IBM Plex Mono"/>
+              </a:defRPr>
+            </a:pPr>
+            <a:r>
+              <a:rPr sz="1100" b="1" i="0">
+                <a:solidFill>
+                  <a:srgbClr val="E33B4C"/>
+                </a:solidFill>
+                <a:latin typeface="IBM Plex Mono"/>
+              </a:rPr>
               <a:t>GROWTH PATH</a:t>
             </a:r>
           </a:p>
@@ -10144,7 +11666,7 @@
 </p:sld>
 </file>
 
-<file path=ppt/slides/slide8.xml><?xml version="1.0" encoding="utf-8"?>
+<file path=ppt/slides/slide9.xml><?xml version="1.0" encoding="utf-8"?>
 <p:sld xmlns:a="http://schemas.openxmlformats.org/drawingml/2006/main" xmlns:p="http://schemas.openxmlformats.org/presentationml/2006/main" xmlns:r="http://schemas.openxmlformats.org/officeDocument/2006/relationships">
   <p:cSld>
     <p:bg>
@@ -10746,609 +12268,6 @@
                 <a:latin typeface="IBM Plex Sans"/>
               </a:rPr>
               <a:t>Our CPO has run federal cases to completion inside this platform.</a:t>
-            </a:r>
-          </a:p>
-        </p:txBody>
-      </p:sp>
-    </p:spTree>
-  </p:cSld>
-  <p:clrMapOvr>
-    <a:masterClrMapping/>
-  </p:clrMapOvr>
-</p:sld>
-</file>
-
-<file path=ppt/slides/slide9.xml><?xml version="1.0" encoding="utf-8"?>
-<p:sld xmlns:a="http://schemas.openxmlformats.org/drawingml/2006/main" xmlns:p="http://schemas.openxmlformats.org/presentationml/2006/main" xmlns:r="http://schemas.openxmlformats.org/officeDocument/2006/relationships">
-  <p:cSld>
-    <p:bg>
-      <p:bgPr>
-        <a:solidFill>
-          <a:srgbClr val="0B0C0F"/>
-        </a:solidFill>
-        <a:effectLst/>
-      </p:bgPr>
-    </p:bg>
-    <p:spTree>
-      <p:nvGrpSpPr>
-        <p:cNvPr id="1" name=""/>
-        <p:cNvGrpSpPr/>
-        <p:nvPr/>
-      </p:nvGrpSpPr>
-      <p:grpSpPr/>
-      <p:sp>
-        <p:nvSpPr>
-          <p:cNvPr id="2" name="TextBox 1"/>
-          <p:cNvSpPr txBox="1"/>
-          <p:nvPr/>
-        </p:nvSpPr>
-        <p:spPr>
-          <a:xfrm>
-            <a:off x="777240" y="502920"/>
-            <a:ext cx="10637215" cy="274320"/>
-          </a:xfrm>
-          <a:prstGeom prst="rect">
-            <a:avLst/>
-          </a:prstGeom>
-          <a:noFill/>
-        </p:spPr>
-        <p:txBody>
-          <a:bodyPr wrap="square" lIns="0" rIns="0" tIns="0" bIns="0">
-            <a:spAutoFit/>
-          </a:bodyPr>
-          <a:lstStyle/>
-          <a:p>
-            <a:pPr algn="l">
-              <a:lnSpc>
-                <a:spcPct val="128000"/>
-              </a:lnSpc>
-              <a:spcBef>
-                <a:spcPts val="0"/>
-              </a:spcBef>
-              <a:spcAft>
-                <a:spcPts val="0"/>
-              </a:spcAft>
-              <a:defRPr>
-                <a:latin typeface="IBM Plex Mono"/>
-              </a:defRPr>
-            </a:pPr>
-            <a:r>
-              <a:rPr sz="1100" b="1" i="0">
-                <a:solidFill>
-                  <a:srgbClr val="E33B4C"/>
-                </a:solidFill>
-                <a:latin typeface="IBM Plex Mono"/>
-              </a:rPr>
-              <a:t>STATUS AND TRACTION</a:t>
-            </a:r>
-          </a:p>
-        </p:txBody>
-      </p:sp>
-      <p:sp>
-        <p:nvSpPr>
-          <p:cNvPr id="3" name="TextBox 2"/>
-          <p:cNvSpPr txBox="1"/>
-          <p:nvPr/>
-        </p:nvSpPr>
-        <p:spPr>
-          <a:xfrm>
-            <a:off x="777240" y="868680"/>
-            <a:ext cx="10637215" cy="914400"/>
-          </a:xfrm>
-          <a:prstGeom prst="rect">
-            <a:avLst/>
-          </a:prstGeom>
-          <a:noFill/>
-        </p:spPr>
-        <p:txBody>
-          <a:bodyPr wrap="square" lIns="0" rIns="0" tIns="0" bIns="0">
-            <a:spAutoFit/>
-          </a:bodyPr>
-          <a:lstStyle/>
-          <a:p>
-            <a:pPr algn="l">
-              <a:lnSpc>
-                <a:spcPct val="110000"/>
-              </a:lnSpc>
-              <a:spcBef>
-                <a:spcPts val="0"/>
-              </a:spcBef>
-              <a:spcAft>
-                <a:spcPts val="0"/>
-              </a:spcAft>
-            </a:pPr>
-            <a:r>
-              <a:rPr sz="3000" b="1" i="0">
-                <a:solidFill>
-                  <a:srgbClr val="F7F7F8"/>
-                </a:solidFill>
-                <a:latin typeface="Space Grotesk"/>
-              </a:rPr>
-              <a:t>Loupe is in production use on real federal casework.</a:t>
-            </a:r>
-          </a:p>
-        </p:txBody>
-      </p:sp>
-      <p:sp>
-        <p:nvSpPr>
-          <p:cNvPr id="4" name="Rectangle 3"/>
-          <p:cNvSpPr/>
-          <p:nvPr/>
-        </p:nvSpPr>
-        <p:spPr>
-          <a:xfrm>
-            <a:off x="777240" y="1737360"/>
-            <a:ext cx="1005840" cy="31750"/>
-          </a:xfrm>
-          <a:prstGeom prst="rect">
-            <a:avLst/>
-          </a:prstGeom>
-          <a:solidFill>
-            <a:srgbClr val="E33B4C"/>
-          </a:solidFill>
-          <a:ln>
-            <a:noFill/>
-          </a:ln>
-          <a:effectLst/>
-        </p:spPr>
-        <p:style>
-          <a:lnRef idx="1">
-            <a:schemeClr val="accent1"/>
-          </a:lnRef>
-          <a:fillRef idx="3">
-            <a:schemeClr val="accent1"/>
-          </a:fillRef>
-          <a:effectRef idx="2">
-            <a:schemeClr val="accent1"/>
-          </a:effectRef>
-          <a:fontRef idx="minor">
-            <a:schemeClr val="lt1"/>
-          </a:fontRef>
-        </p:style>
-        <p:txBody>
-          <a:bodyPr rtlCol="0" anchor="ctr"/>
-          <a:lstStyle/>
-          <a:p>
-            <a:pPr algn="ctr"/>
-          </a:p>
-        </p:txBody>
-      </p:sp>
-      <p:sp>
-        <p:nvSpPr>
-          <p:cNvPr id="5" name="TextBox 4"/>
-          <p:cNvSpPr txBox="1"/>
-          <p:nvPr/>
-        </p:nvSpPr>
-        <p:spPr>
-          <a:xfrm>
-            <a:off x="777240" y="2057400"/>
-            <a:ext cx="5623560" cy="4480560"/>
-          </a:xfrm>
-          <a:prstGeom prst="rect">
-            <a:avLst/>
-          </a:prstGeom>
-          <a:noFill/>
-        </p:spPr>
-        <p:txBody>
-          <a:bodyPr wrap="square" lIns="0" rIns="0" tIns="0" bIns="0">
-            <a:spAutoFit/>
-          </a:bodyPr>
-          <a:lstStyle/>
-          <a:p>
-            <a:pPr algn="l">
-              <a:lnSpc>
-                <a:spcPct val="128000"/>
-              </a:lnSpc>
-              <a:spcBef>
-                <a:spcPts val="0"/>
-              </a:spcBef>
-              <a:spcAft>
-                <a:spcPts val="0"/>
-              </a:spcAft>
-            </a:pPr>
-            <a:r>
-              <a:rPr sz="1300" b="0" i="0">
-                <a:solidFill>
-                  <a:srgbClr val="F7F7F8"/>
-                </a:solidFill>
-                <a:latin typeface="IBM Plex Sans"/>
-              </a:rPr>
-              <a:t>Built inside </a:t>
-            </a:r>
-            <a:r>
-              <a:rPr sz="1300" b="1" i="0">
-                <a:solidFill>
-                  <a:srgbClr val="F7F7F8"/>
-                </a:solidFill>
-                <a:latin typeface="IBM Plex Sans"/>
-              </a:rPr>
-              <a:t>Owl Consultancy</a:t>
-            </a:r>
-            <a:r>
-              <a:rPr sz="1300" b="0" i="0">
-                <a:solidFill>
-                  <a:srgbClr val="F7F7F8"/>
-                </a:solidFill>
-                <a:latin typeface="IBM Plex Sans"/>
-              </a:rPr>
-              <a:t>, a working US private-investigations practice, and used there to carry federal cases </a:t>
-            </a:r>
-            <a:r>
-              <a:rPr sz="1300" b="1" i="0">
-                <a:solidFill>
-                  <a:srgbClr val="F7F7F8"/>
-                </a:solidFill>
-                <a:latin typeface="IBM Plex Sans"/>
-              </a:rPr>
-              <a:t>to completion</a:t>
-            </a:r>
-            <a:r>
-              <a:rPr sz="1300" b="0" i="0">
-                <a:solidFill>
-                  <a:srgbClr val="F7F7F8"/>
-                </a:solidFill>
-                <a:latin typeface="IBM Plex Sans"/>
-              </a:rPr>
-              <a:t> — multi-gigabyte phone extractions, tens of thousands of curated financial transactions, full document corpora. </a:t>
-            </a:r>
-            <a:r>
-              <a:rPr sz="1300" b="1" i="0">
-                <a:solidFill>
-                  <a:srgbClr val="F7F7F8"/>
-                </a:solidFill>
-                <a:latin typeface="IBM Plex Sans"/>
-              </a:rPr>
-              <a:t>Three attorneys on those cases have been given access to it.</a:t>
-            </a:r>
-            <a:r>
-              <a:rPr sz="1300" b="0" i="0">
-                <a:solidFill>
-                  <a:srgbClr val="F7F7F8"/>
-                </a:solidFill>
-                <a:latin typeface="IBM Plex Sans"/>
-              </a:rPr>
-              <a:t> Attorneys have retained the practice specifically because of the platform — unprompted, before any marketing existed.</a:t>
-            </a:r>
-          </a:p>
-          <a:p>
-            <a:pPr algn="l">
-              <a:lnSpc>
-                <a:spcPct val="128000"/>
-              </a:lnSpc>
-              <a:spcBef>
-                <a:spcPts val="1300"/>
-              </a:spcBef>
-              <a:spcAft>
-                <a:spcPts val="0"/>
-              </a:spcAft>
-            </a:pPr>
-            <a:r>
-              <a:rPr sz="1500" b="1" i="0">
-                <a:solidFill>
-                  <a:srgbClr val="E33B4C"/>
-                </a:solidFill>
-                <a:latin typeface="IBM Plex Sans"/>
-              </a:rPr>
-              <a:t>This is not a prototype seeking a first user. It is an application that works, in the hands of the investigators it was built for, on cases with real stakes.</a:t>
-            </a:r>
-          </a:p>
-          <a:p>
-            <a:pPr algn="l">
-              <a:lnSpc>
-                <a:spcPct val="128000"/>
-              </a:lnSpc>
-              <a:spcBef>
-                <a:spcPts val="1400"/>
-              </a:spcBef>
-              <a:spcAft>
-                <a:spcPts val="0"/>
-              </a:spcAft>
-            </a:pPr>
-            <a:r>
-              <a:rPr sz="1300" b="1" i="0">
-                <a:solidFill>
-                  <a:srgbClr val="F7F7F8"/>
-                </a:solidFill>
-                <a:latin typeface="IBM Plex Sans"/>
-              </a:rPr>
-              <a:t>First external pilot in motion.</a:t>
-            </a:r>
-          </a:p>
-          <a:p>
-            <a:pPr algn="l">
-              <a:lnSpc>
-                <a:spcPct val="128000"/>
-              </a:lnSpc>
-              <a:spcBef>
-                <a:spcPts val="400"/>
-              </a:spcBef>
-              <a:spcAft>
-                <a:spcPts val="0"/>
-              </a:spcAft>
-            </a:pPr>
-            <a:r>
-              <a:rPr sz="1300" b="0" i="0">
-                <a:solidFill>
-                  <a:srgbClr val="9A9DA5"/>
-                </a:solidFill>
-                <a:latin typeface="IBM Plex Sans"/>
-              </a:rPr>
-              <a:t>A US private-investigations firm led by a former FBI undercover agent — clients across Miami, New York, California and the Midwest — has agreed to send its next large-document matter through Loupe as a paid trial at cost, and to put a mutual MSA in front of us. Sourced through casework, not marketing.</a:t>
-            </a:r>
-          </a:p>
-        </p:txBody>
-      </p:sp>
-      <p:sp>
-        <p:nvSpPr>
-          <p:cNvPr id="6" name="TextBox 5"/>
-          <p:cNvSpPr txBox="1"/>
-          <p:nvPr/>
-        </p:nvSpPr>
-        <p:spPr>
-          <a:xfrm>
-            <a:off x="6903720" y="2057400"/>
-            <a:ext cx="4526280" cy="4480560"/>
-          </a:xfrm>
-          <a:prstGeom prst="rect">
-            <a:avLst/>
-          </a:prstGeom>
-          <a:noFill/>
-        </p:spPr>
-        <p:txBody>
-          <a:bodyPr wrap="square" lIns="0" rIns="0" tIns="0" bIns="0">
-            <a:spAutoFit/>
-          </a:bodyPr>
-          <a:lstStyle/>
-          <a:p>
-            <a:pPr algn="l">
-              <a:lnSpc>
-                <a:spcPct val="128000"/>
-              </a:lnSpc>
-              <a:spcBef>
-                <a:spcPts val="0"/>
-              </a:spcBef>
-              <a:spcAft>
-                <a:spcPts val="0"/>
-              </a:spcAft>
-            </a:pPr>
-            <a:r>
-              <a:rPr sz="1200" b="1" i="0">
-                <a:solidFill>
-                  <a:srgbClr val="E33B4C"/>
-                </a:solidFill>
-                <a:latin typeface="IBM Plex Sans"/>
-              </a:rPr>
-              <a:t>Built so far, verifiable</a:t>
-            </a:r>
-          </a:p>
-          <a:p>
-            <a:pPr algn="l" marL="274320" indent="-274320">
-              <a:lnSpc>
-                <a:spcPct val="128000"/>
-              </a:lnSpc>
-              <a:spcBef>
-                <a:spcPts val="600"/>
-              </a:spcBef>
-              <a:spcAft>
-                <a:spcPts val="0"/>
-              </a:spcAft>
-            </a:pPr>
-            <a:r>
-              <a:rPr sz="1200" b="1">
-                <a:solidFill>
-                  <a:srgbClr val="E33B4C"/>
-                </a:solidFill>
-                <a:latin typeface="IBM Plex Sans"/>
-              </a:rPr>
-              <a:t>—   </a:t>
-            </a:r>
-            <a:r>
-              <a:rPr sz="1200" b="0" i="0">
-                <a:solidFill>
-                  <a:srgbClr val="9A9DA5"/>
-                </a:solidFill>
-                <a:latin typeface="IBM Plex Sans"/>
-              </a:rPr>
-              <a:t>~180,000 lines across a React console, a FastAPI case API and a separate asynchronous evidence engine</a:t>
-            </a:r>
-          </a:p>
-          <a:p>
-            <a:pPr algn="l" marL="274320" indent="-274320">
-              <a:lnSpc>
-                <a:spcPct val="128000"/>
-              </a:lnSpc>
-              <a:spcBef>
-                <a:spcPts val="600"/>
-              </a:spcBef>
-              <a:spcAft>
-                <a:spcPts val="0"/>
-              </a:spcAft>
-            </a:pPr>
-            <a:r>
-              <a:rPr sz="1200" b="1">
-                <a:solidFill>
-                  <a:srgbClr val="E33B4C"/>
-                </a:solidFill>
-                <a:latin typeface="IBM Plex Sans"/>
-              </a:rPr>
-              <a:t>—   </a:t>
-            </a:r>
-            <a:r>
-              <a:rPr sz="1200" b="0" i="0">
-                <a:solidFill>
-                  <a:srgbClr val="9A9DA5"/>
-                </a:solidFill>
-                <a:latin typeface="IBM Plex Sans"/>
-              </a:rPr>
-              <a:t>913 commits since December 2025 — two primary engineers</a:t>
-            </a:r>
-          </a:p>
-          <a:p>
-            <a:pPr algn="l" marL="274320" indent="-274320">
-              <a:lnSpc>
-                <a:spcPct val="128000"/>
-              </a:lnSpc>
-              <a:spcBef>
-                <a:spcPts val="600"/>
-              </a:spcBef>
-              <a:spcAft>
-                <a:spcPts val="0"/>
-              </a:spcAft>
-            </a:pPr>
-            <a:r>
-              <a:rPr sz="1200" b="1">
-                <a:solidFill>
-                  <a:srgbClr val="E33B4C"/>
-                </a:solidFill>
-                <a:latin typeface="IBM Plex Sans"/>
-              </a:rPr>
-              <a:t>—   </a:t>
-            </a:r>
-            <a:r>
-              <a:rPr sz="1200" b="0" i="0">
-                <a:solidFill>
-                  <a:srgbClr val="9A9DA5"/>
-                </a:solidFill>
-                <a:latin typeface="IBM Plex Sans"/>
-              </a:rPr>
-              <a:t>Neo4j (case graph) · Postgres (cases, auth, audit) · ChromaDB (retrieval) · Redis (jobs)</a:t>
-            </a:r>
-          </a:p>
-          <a:p>
-            <a:pPr algn="l" marL="274320" indent="-274320">
-              <a:lnSpc>
-                <a:spcPct val="128000"/>
-              </a:lnSpc>
-              <a:spcBef>
-                <a:spcPts val="600"/>
-              </a:spcBef>
-              <a:spcAft>
-                <a:spcPts val="0"/>
-              </a:spcAft>
-            </a:pPr>
-            <a:r>
-              <a:rPr sz="1200" b="1">
-                <a:solidFill>
-                  <a:srgbClr val="E33B4C"/>
-                </a:solidFill>
-                <a:latin typeface="IBM Plex Sans"/>
-              </a:rPr>
-              <a:t>—   </a:t>
-            </a:r>
-            <a:r>
-              <a:rPr sz="1200" b="0" i="0">
-                <a:solidFill>
-                  <a:srgbClr val="9A9DA5"/>
-                </a:solidFill>
-                <a:latin typeface="IBM Plex Sans"/>
-              </a:rPr>
-              <a:t>Three AI providers behind one routing policy — the model is a swappable component</a:t>
-            </a:r>
-          </a:p>
-          <a:p>
-            <a:pPr algn="l" marL="274320" indent="-274320">
-              <a:lnSpc>
-                <a:spcPct val="128000"/>
-              </a:lnSpc>
-              <a:spcBef>
-                <a:spcPts val="600"/>
-              </a:spcBef>
-              <a:spcAft>
-                <a:spcPts val="0"/>
-              </a:spcAft>
-            </a:pPr>
-            <a:r>
-              <a:rPr sz="1200" b="1">
-                <a:solidFill>
-                  <a:srgbClr val="E33B4C"/>
-                </a:solidFill>
-                <a:latin typeface="IBM Plex Sans"/>
-              </a:rPr>
-              <a:t>—   </a:t>
-            </a:r>
-            <a:r>
-              <a:rPr sz="1200" b="0" i="0">
-                <a:solidFill>
-                  <a:srgbClr val="9A9DA5"/>
-                </a:solidFill>
-                <a:latin typeface="IBM Plex Sans"/>
-              </a:rPr>
-              <a:t>Single-tenant deployment: one isolated stack per customer</a:t>
-            </a:r>
-          </a:p>
-          <a:p>
-            <a:pPr algn="l">
-              <a:lnSpc>
-                <a:spcPct val="128000"/>
-              </a:lnSpc>
-              <a:spcBef>
-                <a:spcPts val="1400"/>
-              </a:spcBef>
-              <a:spcAft>
-                <a:spcPts val="0"/>
-              </a:spcAft>
-            </a:pPr>
-            <a:r>
-              <a:rPr sz="1200" b="1" i="0">
-                <a:solidFill>
-                  <a:srgbClr val="E33B4C"/>
-                </a:solidFill>
-                <a:latin typeface="IBM Plex Sans"/>
-              </a:rPr>
-              <a:t>Release discipline</a:t>
-            </a:r>
-          </a:p>
-          <a:p>
-            <a:pPr algn="l">
-              <a:lnSpc>
-                <a:spcPct val="128000"/>
-              </a:lnSpc>
-              <a:spcBef>
-                <a:spcPts val="400"/>
-              </a:spcBef>
-              <a:spcAft>
-                <a:spcPts val="0"/>
-              </a:spcAft>
-            </a:pPr>
-            <a:r>
-              <a:rPr sz="1200" b="0" i="0">
-                <a:solidFill>
-                  <a:srgbClr val="F7F7F8"/>
-                </a:solidFill>
-                <a:latin typeface="IBM Plex Sans"/>
-              </a:rPr>
-              <a:t>Onboarding an external customer's evidence runs behind a </a:t>
-            </a:r>
-            <a:r>
-              <a:rPr sz="1200" b="1" i="0">
-                <a:solidFill>
-                  <a:srgbClr val="F7F7F8"/>
-                </a:solidFill>
-                <a:latin typeface="IBM Plex Sans"/>
-              </a:rPr>
-              <a:t>12-stage security-gated release plan. No external case data enters the platform until the security, isolation, backup and legal stages pass.</a:t>
-            </a:r>
-          </a:p>
-          <a:p>
-            <a:pPr algn="l">
-              <a:lnSpc>
-                <a:spcPct val="128000"/>
-              </a:lnSpc>
-              <a:spcBef>
-                <a:spcPts val="1000"/>
-              </a:spcBef>
-              <a:spcAft>
-                <a:spcPts val="0"/>
-              </a:spcAft>
-            </a:pPr>
-            <a:r>
-              <a:rPr sz="1200" b="0" i="0">
-                <a:solidFill>
-                  <a:srgbClr val="9A9DA5"/>
-                </a:solidFill>
-                <a:latin typeface="IBM Plex Sans"/>
-              </a:rPr>
-              <a:t>Roadmap: a 13-epic board takes Loupe from a platform that works for the practice it was built in to one that scales across many. Depth, not existence.</a:t>
             </a:r>
           </a:p>
         </p:txBody>

--- a/Loupe-NDRC-deck.pptx
+++ b/Loupe-NDRC-deck.pptx
@@ -1956,7 +1956,12 @@
           <a:lstStyle/>
           <a:p>
             <a:r>
-              <a:t>Four numbers. Say them slowly and do not add a fifth.</a:t>
+              <a:t>Both columns are the same case. That is the whole point of the slide —</a:t>
+            </a:r>
+          </a:p>
+          <a:p>
+            <a:r>
+              <a:t>it is not a claim about savings in the abstract, it is one matter costed twice.</a:t>
             </a:r>
           </a:p>
           <a:p/>
@@ -1967,80 +1972,70 @@
           </a:p>
           <a:p>
             <a:r>
-              <a:t>and what they do today: pay a forensic vendor to extract each device, pay per gigabyte</a:t>
-            </a:r>
-          </a:p>
-          <a:p>
-            <a:r>
-              <a:t>per MONTH to host the result somewhere it cannot be properly analysed, pay an examiner</a:t>
-            </a:r>
-          </a:p>
-          <a:p>
-            <a:r>
-              <a:t>by the hour to look at parts of it, then pay their own people to stitch it together.</a:t>
+              <a:t>and what they do today: a forensic vendor per device, processing and hosting charged</a:t>
+            </a:r>
+          </a:p>
+          <a:p>
+            <a:r>
+              <a:t>per gigabyte per MONTH for the life of the matter, an examiner by the hour, and their</a:t>
+            </a:r>
+          </a:p>
+          <a:p>
+            <a:r>
+              <a:t>own people stitching it together.</a:t>
             </a:r>
           </a:p>
           <a:p/>
           <a:p>
             <a:r>
-              <a:t>Hosting is the line that breaks, and it is the sharpest number in the study. Charged</a:t>
-            </a:r>
-          </a:p>
-          <a:p>
-            <a:r>
-              <a:t>per gigabyte per month for the life of the matter, it scales with exactly the evidence</a:t>
-            </a:r>
-          </a:p>
-          <a:p>
-            <a:r>
-              <a:t>we model. A 435GB federal case is $4,350 a month. The outcome that money buys is a</a:t>
-            </a:r>
-          </a:p>
-          <a:p>
-            <a:r>
-              <a:t>spreadsheet.</a:t>
+              <a:t>Hosting is the line that breaks. A 435GB federal case is $4,350 a month, every month,</a:t>
+            </a:r>
+          </a:p>
+          <a:p>
+            <a:r>
+              <a:t>and the outcome that money buys is a spreadsheet. If one number lands, make it that.</a:t>
             </a:r>
           </a:p>
           <a:p/>
           <a:p>
             <a:r>
-              <a:t>If asked where the numbers come from: published 2026 rates. eDiscovery processing</a:t>
-            </a:r>
-          </a:p>
-          <a:p>
-            <a:r>
-              <a:t>$3-10/GB and hosting $5-15/GB/month from the Winter 2026 pricing survey; forensic</a:t>
-            </a:r>
-          </a:p>
-          <a:p>
-            <a:r>
-              <a:t>vendor rate cards at $3,650 for a one-or-two-device case; examiner analysis $300-500/h;</a:t>
-            </a:r>
-          </a:p>
-          <a:p>
-            <a:r>
-              <a:t>case hours from RAND's National Public Defense Workload Study; investigator time</a:t>
-            </a:r>
-          </a:p>
-          <a:p>
-            <a:r>
-              <a:t>$85-225/h. The one modelled assumption is the share of case hours that is evidence</a:t>
-            </a:r>
-          </a:p>
-          <a:p>
-            <a:r>
-              <a:t>handling — say so if pressed, do not pretend it is measured.</a:t>
+              <a:t>CONCEDE THE EXTRACTION BILL OUT LOUD. Devices still go to a vendor and we do not</a:t>
+            </a:r>
+          </a:p>
+          <a:p>
+            <a:r>
+              <a:t>displace that. Saying so is what makes the other numbers credible.</a:t>
             </a:r>
           </a:p>
           <a:p/>
           <a:p>
             <a:r>
-              <a:t>Do not claim we remove the extraction bill. We do not, and conceding it is what makes</a:t>
-            </a:r>
-          </a:p>
-          <a:p>
-            <a:r>
-              <a:t>the rest credible.</a:t>
+              <a:t>Provenance if pressed: published 2026 rates — eDiscovery processing $3-10/GB and</a:t>
+            </a:r>
+          </a:p>
+          <a:p>
+            <a:r>
+              <a:t>hosting $5-15/GB/month from the Winter 2026 pricing survey; forensic vendor rate</a:t>
+            </a:r>
+          </a:p>
+          <a:p>
+            <a:r>
+              <a:t>cards; examiner analysis $300-500/h; case hours from RAND's National Public Defense</a:t>
+            </a:r>
+          </a:p>
+          <a:p>
+            <a:r>
+              <a:t>Workload Study; investigator $85-225/h, paralegal $100-200/h. The single modelled</a:t>
+            </a:r>
+          </a:p>
+          <a:p>
+            <a:r>
+              <a:t>assumption is the share of case hours that is evidence handling, and that half of it</a:t>
+            </a:r>
+          </a:p>
+          <a:p>
+            <a:r>
+              <a:t>goes. Say so plainly — do not present it as measured.</a:t>
             </a:r>
           </a:p>
         </p:txBody>
@@ -10087,8 +10082,8 @@
                 </a:solidFill>
                 <a:latin typeface="Space Grotesk"/>
               </a:rPr>
-              <a:t>We don't ask for new budget.
-We displace one that already exists.</a:t>
+              <a:t>Today a serious case costs $38–139k.
+With Loupe, $16–20k.</a:t>
             </a:r>
           </a:p>
         </p:txBody>
@@ -10145,8 +10140,8 @@
         </p:nvSpPr>
         <p:spPr>
           <a:xfrm>
-            <a:off x="777240" y="2331720"/>
-            <a:ext cx="10637215" cy="566928"/>
+            <a:off x="777240" y="2304288"/>
+            <a:ext cx="10637215" cy="457200"/>
           </a:xfrm>
           <a:prstGeom prst="rect">
             <a:avLst/>
@@ -10171,81 +10166,650 @@
               </a:spcAft>
             </a:pPr>
             <a:r>
-              <a:rPr sz="1400" b="0" i="0">
-                <a:solidFill>
-                  <a:srgbClr val="F7F7F8"/>
-                </a:solidFill>
-                <a:latin typeface="IBM Plex Sans"/>
-              </a:rPr>
-              <a:t>Before anyone has answered a question about the evidence, a serious matter has already paid a forensic vendor, a processing bill, and hosting charged </a:t>
-            </a:r>
-            <a:r>
-              <a:rPr sz="1400" b="1" i="0">
-                <a:solidFill>
-                  <a:srgbClr val="F7F7F8"/>
-                </a:solidFill>
-                <a:latin typeface="IBM Plex Sans"/>
-              </a:rPr>
-              <a:t>per gigabyte per month for the life of the case</a:t>
-            </a:r>
-            <a:r>
-              <a:rPr sz="1400" b="0" i="0">
-                <a:solidFill>
-                  <a:srgbClr val="F7F7F8"/>
-                </a:solidFill>
-                <a:latin typeface="IBM Plex Sans"/>
-              </a:rPr>
-              <a:t> — to have phone data come out as spreadsheets.</a:t>
-            </a:r>
-          </a:p>
-        </p:txBody>
-      </p:sp>
-      <p:sp>
-        <p:nvSpPr>
-          <p:cNvPr id="6" name="Rectangle 5"/>
-          <p:cNvSpPr/>
+              <a:rPr sz="1300" b="0" i="0">
+                <a:solidFill>
+                  <a:srgbClr val="9A9DA5"/>
+                </a:solidFill>
+                <a:latin typeface="IBM Plex Sans"/>
+              </a:rPr>
+              <a:t>Same case, same evidence, both columns. Ranges run from a two-phone fraud matter to a ten-phone federal case.</a:t>
+            </a:r>
+          </a:p>
+        </p:txBody>
+      </p:sp>
+      <p:graphicFrame>
+        <p:nvGraphicFramePr>
+          <p:cNvPr id="6" name="Table 5"/>
+          <p:cNvGraphicFramePr>
+            <a:graphicFrameLocks noGrp="1"/>
+          </p:cNvGraphicFramePr>
           <p:nvPr/>
-        </p:nvSpPr>
-        <p:spPr>
-          <a:xfrm>
-            <a:off x="777240" y="3127248"/>
-            <a:ext cx="2624328" cy="1572768"/>
-          </a:xfrm>
-          <a:prstGeom prst="rect">
-            <a:avLst/>
-          </a:prstGeom>
-          <a:solidFill>
-            <a:srgbClr val="111216"/>
-          </a:solidFill>
-          <a:ln w="15875">
-            <a:solidFill>
-              <a:srgbClr val="B41624"/>
-            </a:solidFill>
-          </a:ln>
-          <a:effectLst/>
-        </p:spPr>
-        <p:style>
-          <a:lnRef idx="1">
-            <a:schemeClr val="accent1"/>
-          </a:lnRef>
-          <a:fillRef idx="3">
-            <a:schemeClr val="accent1"/>
-          </a:fillRef>
-          <a:effectRef idx="2">
-            <a:schemeClr val="accent1"/>
-          </a:effectRef>
-          <a:fontRef idx="minor">
-            <a:schemeClr val="lt1"/>
-          </a:fontRef>
-        </p:style>
-        <p:txBody>
-          <a:bodyPr rtlCol="0" anchor="ctr"/>
-          <a:lstStyle/>
-          <a:p>
-            <a:pPr algn="ctr"/>
-          </a:p>
-        </p:txBody>
-      </p:sp>
+        </p:nvGraphicFramePr>
+        <p:xfrm>
+          <a:off x="777240" y="2834640"/>
+          <a:ext cx="10634472" cy="2286000"/>
+        </p:xfrm>
+        <a:graphic>
+          <a:graphicData uri="http://schemas.openxmlformats.org/drawingml/2006/table">
+            <a:tbl>
+              <a:tblPr firstRow="1" bandRow="1">
+                <a:tableStyleId>{5C22544A-7EE6-4342-B048-85BDC9FD1C3A}</a:tableStyleId>
+              </a:tblPr>
+              <a:tblGrid>
+                <a:gridCol w="5760720"/>
+                <a:gridCol w="2423160"/>
+                <a:gridCol w="2450592"/>
+              </a:tblGrid>
+              <a:tr h="381000">
+                <a:tc>
+                  <a:txBody>
+                    <a:bodyPr/>
+                    <a:lstStyle/>
+                    <a:p>
+                      <a:pPr algn="l">
+                        <a:lnSpc>
+                          <a:spcPct val="128000"/>
+                        </a:lnSpc>
+                        <a:spcBef>
+                          <a:spcPts val="0"/>
+                        </a:spcBef>
+                        <a:spcAft>
+                          <a:spcPts val="0"/>
+                        </a:spcAft>
+                      </a:pPr>
+                      <a:r>
+                        <a:rPr sz="1200" b="1" i="0">
+                          <a:solidFill>
+                            <a:srgbClr val="9A9DA5"/>
+                          </a:solidFill>
+                          <a:latin typeface="IBM Plex Sans"/>
+                        </a:rPr>
+                        <a:t>Per serious case</a:t>
+                      </a:r>
+                    </a:p>
+                  </a:txBody>
+                  <a:tcPr marL="109728" marT="36576" marB="36576">
+                    <a:solidFill>
+                      <a:srgbClr val="0B0C0F"/>
+                    </a:solidFill>
+                  </a:tcPr>
+                </a:tc>
+                <a:tc>
+                  <a:txBody>
+                    <a:bodyPr/>
+                    <a:lstStyle/>
+                    <a:p>
+                      <a:pPr algn="l">
+                        <a:lnSpc>
+                          <a:spcPct val="128000"/>
+                        </a:lnSpc>
+                        <a:spcBef>
+                          <a:spcPts val="0"/>
+                        </a:spcBef>
+                        <a:spcAft>
+                          <a:spcPts val="0"/>
+                        </a:spcAft>
+                      </a:pPr>
+                      <a:r>
+                        <a:rPr sz="1200" b="1" i="0">
+                          <a:solidFill>
+                            <a:srgbClr val="9A9DA5"/>
+                          </a:solidFill>
+                          <a:latin typeface="IBM Plex Sans"/>
+                        </a:rPr>
+                        <a:t>Today</a:t>
+                      </a:r>
+                    </a:p>
+                  </a:txBody>
+                  <a:tcPr marL="109728" marT="36576" marB="36576">
+                    <a:solidFill>
+                      <a:srgbClr val="0B0C0F"/>
+                    </a:solidFill>
+                  </a:tcPr>
+                </a:tc>
+                <a:tc>
+                  <a:txBody>
+                    <a:bodyPr/>
+                    <a:lstStyle/>
+                    <a:p>
+                      <a:pPr algn="l">
+                        <a:lnSpc>
+                          <a:spcPct val="128000"/>
+                        </a:lnSpc>
+                        <a:spcBef>
+                          <a:spcPts val="0"/>
+                        </a:spcBef>
+                        <a:spcAft>
+                          <a:spcPts val="0"/>
+                        </a:spcAft>
+                      </a:pPr>
+                      <a:r>
+                        <a:rPr sz="1200" b="1" i="0">
+                          <a:solidFill>
+                            <a:srgbClr val="E33B4C"/>
+                          </a:solidFill>
+                          <a:latin typeface="IBM Plex Sans"/>
+                        </a:rPr>
+                        <a:t>With Loupe</a:t>
+                      </a:r>
+                    </a:p>
+                  </a:txBody>
+                  <a:tcPr marL="109728" marT="36576" marB="36576">
+                    <a:solidFill>
+                      <a:srgbClr val="0B0C0F"/>
+                    </a:solidFill>
+                  </a:tcPr>
+                </a:tc>
+              </a:tr>
+              <a:tr h="381000">
+                <a:tc>
+                  <a:txBody>
+                    <a:bodyPr wrap="square"/>
+                    <a:lstStyle/>
+                    <a:p>
+                      <a:pPr algn="l">
+                        <a:lnSpc>
+                          <a:spcPct val="128000"/>
+                        </a:lnSpc>
+                        <a:spcBef>
+                          <a:spcPts val="0"/>
+                        </a:spcBef>
+                        <a:spcAft>
+                          <a:spcPts val="0"/>
+                        </a:spcAft>
+                      </a:pPr>
+                      <a:r>
+                        <a:rPr sz="1300" b="0" i="0">
+                          <a:solidFill>
+                            <a:srgbClr val="F7F7F8"/>
+                          </a:solidFill>
+                          <a:latin typeface="IBM Plex Sans"/>
+                        </a:rPr>
+                        <a:t>Forensic extraction — devices still go to a vendor</a:t>
+                      </a:r>
+                    </a:p>
+                  </a:txBody>
+                  <a:tcPr marL="109728" marT="45720" marB="45720">
+                    <a:solidFill>
+                      <a:srgbClr val="0B0C0F"/>
+                    </a:solidFill>
+                  </a:tcPr>
+                </a:tc>
+                <a:tc>
+                  <a:txBody>
+                    <a:bodyPr wrap="square"/>
+                    <a:lstStyle/>
+                    <a:p>
+                      <a:pPr algn="l">
+                        <a:lnSpc>
+                          <a:spcPct val="128000"/>
+                        </a:lnSpc>
+                        <a:spcBef>
+                          <a:spcPts val="0"/>
+                        </a:spcBef>
+                        <a:spcAft>
+                          <a:spcPts val="0"/>
+                        </a:spcAft>
+                      </a:pPr>
+                      <a:r>
+                        <a:rPr sz="1300" b="0" i="0">
+                          <a:solidFill>
+                            <a:srgbClr val="9A9DA5"/>
+                          </a:solidFill>
+                          <a:latin typeface="IBM Plex Sans"/>
+                        </a:rPr>
+                        <a:t>$3,650 – 8,450</a:t>
+                      </a:r>
+                    </a:p>
+                  </a:txBody>
+                  <a:tcPr marL="109728" marT="45720" marB="45720">
+                    <a:solidFill>
+                      <a:srgbClr val="0B0C0F"/>
+                    </a:solidFill>
+                  </a:tcPr>
+                </a:tc>
+                <a:tc>
+                  <a:txBody>
+                    <a:bodyPr wrap="square"/>
+                    <a:lstStyle/>
+                    <a:p>
+                      <a:pPr algn="l">
+                        <a:lnSpc>
+                          <a:spcPct val="128000"/>
+                        </a:lnSpc>
+                        <a:spcBef>
+                          <a:spcPts val="0"/>
+                        </a:spcBef>
+                        <a:spcAft>
+                          <a:spcPts val="0"/>
+                        </a:spcAft>
+                      </a:pPr>
+                      <a:r>
+                        <a:rPr sz="1300" b="0" i="0">
+                          <a:solidFill>
+                            <a:srgbClr val="E33B4C"/>
+                          </a:solidFill>
+                          <a:latin typeface="IBM Plex Sans"/>
+                        </a:rPr>
+                        <a:t>$3,650 – 8,450</a:t>
+                      </a:r>
+                    </a:p>
+                  </a:txBody>
+                  <a:tcPr marL="109728" marT="45720" marB="45720">
+                    <a:solidFill>
+                      <a:srgbClr val="0B0C0F"/>
+                    </a:solidFill>
+                  </a:tcPr>
+                </a:tc>
+              </a:tr>
+              <a:tr h="381000">
+                <a:tc>
+                  <a:txBody>
+                    <a:bodyPr wrap="square"/>
+                    <a:lstStyle/>
+                    <a:p>
+                      <a:pPr algn="l">
+                        <a:lnSpc>
+                          <a:spcPct val="128000"/>
+                        </a:lnSpc>
+                        <a:spcBef>
+                          <a:spcPts val="0"/>
+                        </a:spcBef>
+                        <a:spcAft>
+                          <a:spcPts val="0"/>
+                        </a:spcAft>
+                      </a:pPr>
+                      <a:r>
+                        <a:rPr sz="1300" b="0" i="0">
+                          <a:solidFill>
+                            <a:srgbClr val="F7F7F8"/>
+                          </a:solidFill>
+                          <a:latin typeface="IBM Plex Sans"/>
+                        </a:rPr>
+                        <a:t>Processing, hosting and examiner analysis</a:t>
+                      </a:r>
+                    </a:p>
+                  </a:txBody>
+                  <a:tcPr marL="109728" marT="45720" marB="45720">
+                    <a:solidFill>
+                      <a:srgbClr val="0B0C0F"/>
+                    </a:solidFill>
+                  </a:tcPr>
+                </a:tc>
+                <a:tc>
+                  <a:txBody>
+                    <a:bodyPr wrap="square"/>
+                    <a:lstStyle/>
+                    <a:p>
+                      <a:pPr algn="l">
+                        <a:lnSpc>
+                          <a:spcPct val="128000"/>
+                        </a:lnSpc>
+                        <a:spcBef>
+                          <a:spcPts val="0"/>
+                        </a:spcBef>
+                        <a:spcAft>
+                          <a:spcPts val="0"/>
+                        </a:spcAft>
+                      </a:pPr>
+                      <a:r>
+                        <a:rPr sz="1300" b="0" i="0">
+                          <a:solidFill>
+                            <a:srgbClr val="9A9DA5"/>
+                          </a:solidFill>
+                          <a:latin typeface="IBM Plex Sans"/>
+                        </a:rPr>
+                        <a:t>$34,200 – 130,575</a:t>
+                      </a:r>
+                    </a:p>
+                  </a:txBody>
+                  <a:tcPr marL="109728" marT="45720" marB="45720">
+                    <a:solidFill>
+                      <a:srgbClr val="0B0C0F"/>
+                    </a:solidFill>
+                  </a:tcPr>
+                </a:tc>
+                <a:tc>
+                  <a:txBody>
+                    <a:bodyPr wrap="square"/>
+                    <a:lstStyle/>
+                    <a:p>
+                      <a:pPr algn="l">
+                        <a:lnSpc>
+                          <a:spcPct val="128000"/>
+                        </a:lnSpc>
+                        <a:spcBef>
+                          <a:spcPts val="0"/>
+                        </a:spcBef>
+                        <a:spcAft>
+                          <a:spcPts val="0"/>
+                        </a:spcAft>
+                      </a:pPr>
+                      <a:r>
+                        <a:rPr sz="1300" b="0" i="0">
+                          <a:solidFill>
+                            <a:srgbClr val="E33B4C"/>
+                          </a:solidFill>
+                          <a:latin typeface="IBM Plex Sans"/>
+                        </a:rPr>
+                        <a:t>—</a:t>
+                      </a:r>
+                    </a:p>
+                  </a:txBody>
+                  <a:tcPr marL="109728" marT="45720" marB="45720">
+                    <a:solidFill>
+                      <a:srgbClr val="0B0C0F"/>
+                    </a:solidFill>
+                  </a:tcPr>
+                </a:tc>
+              </a:tr>
+              <a:tr h="381000">
+                <a:tc>
+                  <a:txBody>
+                    <a:bodyPr wrap="square"/>
+                    <a:lstStyle/>
+                    <a:p>
+                      <a:pPr algn="l">
+                        <a:lnSpc>
+                          <a:spcPct val="128000"/>
+                        </a:lnSpc>
+                        <a:spcBef>
+                          <a:spcPts val="0"/>
+                        </a:spcBef>
+                        <a:spcAft>
+                          <a:spcPts val="0"/>
+                        </a:spcAft>
+                      </a:pPr>
+                      <a:r>
+                        <a:rPr sz="1300" b="0" i="0">
+                          <a:solidFill>
+                            <a:srgbClr val="F7F7F8"/>
+                          </a:solidFill>
+                          <a:latin typeface="IBM Plex Sans"/>
+                        </a:rPr>
+                        <a:t>Loupe, per matter</a:t>
+                      </a:r>
+                    </a:p>
+                  </a:txBody>
+                  <a:tcPr marL="109728" marT="45720" marB="45720">
+                    <a:solidFill>
+                      <a:srgbClr val="0B0C0F"/>
+                    </a:solidFill>
+                  </a:tcPr>
+                </a:tc>
+                <a:tc>
+                  <a:txBody>
+                    <a:bodyPr wrap="square"/>
+                    <a:lstStyle/>
+                    <a:p>
+                      <a:pPr algn="l">
+                        <a:lnSpc>
+                          <a:spcPct val="128000"/>
+                        </a:lnSpc>
+                        <a:spcBef>
+                          <a:spcPts val="0"/>
+                        </a:spcBef>
+                        <a:spcAft>
+                          <a:spcPts val="0"/>
+                        </a:spcAft>
+                      </a:pPr>
+                      <a:r>
+                        <a:rPr sz="1300" b="0" i="0">
+                          <a:solidFill>
+                            <a:srgbClr val="9A9DA5"/>
+                          </a:solidFill>
+                          <a:latin typeface="IBM Plex Sans"/>
+                        </a:rPr>
+                        <a:t>—</a:t>
+                      </a:r>
+                    </a:p>
+                  </a:txBody>
+                  <a:tcPr marL="109728" marT="45720" marB="45720">
+                    <a:solidFill>
+                      <a:srgbClr val="0B0C0F"/>
+                    </a:solidFill>
+                  </a:tcPr>
+                </a:tc>
+                <a:tc>
+                  <a:txBody>
+                    <a:bodyPr wrap="square"/>
+                    <a:lstStyle/>
+                    <a:p>
+                      <a:pPr algn="l">
+                        <a:lnSpc>
+                          <a:spcPct val="128000"/>
+                        </a:lnSpc>
+                        <a:spcBef>
+                          <a:spcPts val="0"/>
+                        </a:spcBef>
+                        <a:spcAft>
+                          <a:spcPts val="0"/>
+                        </a:spcAft>
+                      </a:pPr>
+                      <a:r>
+                        <a:rPr sz="1300" b="0" i="0">
+                          <a:solidFill>
+                            <a:srgbClr val="E33B4C"/>
+                          </a:solidFill>
+                          <a:latin typeface="IBM Plex Sans"/>
+                        </a:rPr>
+                        <a:t>$12,000</a:t>
+                      </a:r>
+                    </a:p>
+                  </a:txBody>
+                  <a:tcPr marL="109728" marT="45720" marB="45720">
+                    <a:solidFill>
+                      <a:srgbClr val="0B0C0F"/>
+                    </a:solidFill>
+                  </a:tcPr>
+                </a:tc>
+              </a:tr>
+              <a:tr h="381000">
+                <a:tc>
+                  <a:txBody>
+                    <a:bodyPr wrap="square"/>
+                    <a:lstStyle/>
+                    <a:p>
+                      <a:pPr algn="l">
+                        <a:lnSpc>
+                          <a:spcPct val="128000"/>
+                        </a:lnSpc>
+                        <a:spcBef>
+                          <a:spcPts val="0"/>
+                        </a:spcBef>
+                        <a:spcAft>
+                          <a:spcPts val="0"/>
+                        </a:spcAft>
+                      </a:pPr>
+                      <a:r>
+                        <a:rPr sz="1300" b="1" i="0">
+                          <a:solidFill>
+                            <a:srgbClr val="F7F7F8"/>
+                          </a:solidFill>
+                          <a:latin typeface="IBM Plex Sans"/>
+                        </a:rPr>
+                        <a:t>Cash per case</a:t>
+                      </a:r>
+                    </a:p>
+                  </a:txBody>
+                  <a:tcPr marL="109728" marT="45720" marB="45720">
+                    <a:solidFill>
+                      <a:srgbClr val="111216"/>
+                    </a:solidFill>
+                  </a:tcPr>
+                </a:tc>
+                <a:tc>
+                  <a:txBody>
+                    <a:bodyPr wrap="square"/>
+                    <a:lstStyle/>
+                    <a:p>
+                      <a:pPr algn="l">
+                        <a:lnSpc>
+                          <a:spcPct val="128000"/>
+                        </a:lnSpc>
+                        <a:spcBef>
+                          <a:spcPts val="0"/>
+                        </a:spcBef>
+                        <a:spcAft>
+                          <a:spcPts val="0"/>
+                        </a:spcAft>
+                      </a:pPr>
+                      <a:r>
+                        <a:rPr sz="1300" b="1" i="0">
+                          <a:solidFill>
+                            <a:srgbClr val="F7F7F8"/>
+                          </a:solidFill>
+                          <a:latin typeface="IBM Plex Sans"/>
+                        </a:rPr>
+                        <a:t>$37,850 – 139,025</a:t>
+                      </a:r>
+                    </a:p>
+                  </a:txBody>
+                  <a:tcPr marL="109728" marT="45720" marB="45720">
+                    <a:solidFill>
+                      <a:srgbClr val="111216"/>
+                    </a:solidFill>
+                  </a:tcPr>
+                </a:tc>
+                <a:tc>
+                  <a:txBody>
+                    <a:bodyPr wrap="square"/>
+                    <a:lstStyle/>
+                    <a:p>
+                      <a:pPr algn="l">
+                        <a:lnSpc>
+                          <a:spcPct val="128000"/>
+                        </a:lnSpc>
+                        <a:spcBef>
+                          <a:spcPts val="0"/>
+                        </a:spcBef>
+                        <a:spcAft>
+                          <a:spcPts val="0"/>
+                        </a:spcAft>
+                      </a:pPr>
+                      <a:r>
+                        <a:rPr sz="1300" b="1" i="0">
+                          <a:solidFill>
+                            <a:srgbClr val="F7F7F8"/>
+                          </a:solidFill>
+                          <a:latin typeface="IBM Plex Sans"/>
+                        </a:rPr>
+                        <a:t>$15,650 – 20,450</a:t>
+                      </a:r>
+                    </a:p>
+                  </a:txBody>
+                  <a:tcPr marL="109728" marT="45720" marB="45720">
+                    <a:solidFill>
+                      <a:srgbClr val="111216"/>
+                    </a:solidFill>
+                  </a:tcPr>
+                </a:tc>
+              </a:tr>
+              <a:tr h="381000">
+                <a:tc>
+                  <a:txBody>
+                    <a:bodyPr wrap="square"/>
+                    <a:lstStyle/>
+                    <a:p>
+                      <a:pPr algn="l">
+                        <a:lnSpc>
+                          <a:spcPct val="128000"/>
+                        </a:lnSpc>
+                        <a:spcBef>
+                          <a:spcPts val="0"/>
+                        </a:spcBef>
+                        <a:spcAft>
+                          <a:spcPts val="0"/>
+                        </a:spcAft>
+                      </a:pPr>
+                      <a:r>
+                        <a:rPr sz="1300" b="0" i="0">
+                          <a:solidFill>
+                            <a:srgbClr val="F7F7F8"/>
+                          </a:solidFill>
+                          <a:latin typeface="IBM Plex Sans"/>
+                        </a:rPr>
+                        <a:t>Investigator and paralegal hours on evidence handling</a:t>
+                      </a:r>
+                    </a:p>
+                  </a:txBody>
+                  <a:tcPr marL="109728" marT="45720" marB="45720">
+                    <a:solidFill>
+                      <a:srgbClr val="0B0C0F"/>
+                    </a:solidFill>
+                  </a:tcPr>
+                </a:tc>
+                <a:tc>
+                  <a:txBody>
+                    <a:bodyPr wrap="square"/>
+                    <a:lstStyle/>
+                    <a:p>
+                      <a:pPr algn="l">
+                        <a:lnSpc>
+                          <a:spcPct val="128000"/>
+                        </a:lnSpc>
+                        <a:spcBef>
+                          <a:spcPts val="0"/>
+                        </a:spcBef>
+                        <a:spcAft>
+                          <a:spcPts val="0"/>
+                        </a:spcAft>
+                      </a:pPr>
+                      <a:r>
+                        <a:rPr sz="1300" b="0" i="0">
+                          <a:solidFill>
+                            <a:srgbClr val="9A9DA5"/>
+                          </a:solidFill>
+                          <a:latin typeface="IBM Plex Sans"/>
+                        </a:rPr>
+                        <a:t>58 – 100 hrs</a:t>
+                      </a:r>
+                    </a:p>
+                  </a:txBody>
+                  <a:tcPr marL="109728" marT="45720" marB="45720">
+                    <a:solidFill>
+                      <a:srgbClr val="0B0C0F"/>
+                    </a:solidFill>
+                  </a:tcPr>
+                </a:tc>
+                <a:tc>
+                  <a:txBody>
+                    <a:bodyPr wrap="square"/>
+                    <a:lstStyle/>
+                    <a:p>
+                      <a:pPr algn="l">
+                        <a:lnSpc>
+                          <a:spcPct val="128000"/>
+                        </a:lnSpc>
+                        <a:spcBef>
+                          <a:spcPts val="0"/>
+                        </a:spcBef>
+                        <a:spcAft>
+                          <a:spcPts val="0"/>
+                        </a:spcAft>
+                      </a:pPr>
+                      <a:r>
+                        <a:rPr sz="1300" b="0" i="0">
+                          <a:solidFill>
+                            <a:srgbClr val="E33B4C"/>
+                          </a:solidFill>
+                          <a:latin typeface="IBM Plex Sans"/>
+                        </a:rPr>
+                        <a:t>29 – 50 hrs</a:t>
+                      </a:r>
+                    </a:p>
+                  </a:txBody>
+                  <a:tcPr marL="109728" marT="45720" marB="45720">
+                    <a:solidFill>
+                      <a:srgbClr val="0B0C0F"/>
+                    </a:solidFill>
+                  </a:tcPr>
+                </a:tc>
+              </a:tr>
+            </a:tbl>
+          </a:graphicData>
+        </a:graphic>
+      </p:graphicFrame>
       <p:sp>
         <p:nvSpPr>
           <p:cNvPr id="7" name="TextBox 6"/>
@@ -10254,8 +10818,8 @@
         </p:nvSpPr>
         <p:spPr>
           <a:xfrm>
-            <a:off x="932688" y="3273552"/>
-            <a:ext cx="2313432" cy="1325880"/>
+            <a:off x="777240" y="5285232"/>
+            <a:ext cx="10637215" cy="1188720"/>
           </a:xfrm>
           <a:prstGeom prst="rect">
             <a:avLst/>
@@ -10280,13 +10844,31 @@
               </a:spcAft>
             </a:pPr>
             <a:r>
-              <a:rPr sz="2700" b="1" i="0">
+              <a:rPr sz="1600" b="1" i="0">
                 <a:solidFill>
                   <a:srgbClr val="F7F7F8"/>
                 </a:solidFill>
-                <a:latin typeface="Space Grotesk"/>
-              </a:rPr>
-              <a:t>$34–131k</a:t>
+                <a:latin typeface="IBM Plex Sans"/>
+              </a:rPr>
+              <a:t>Saved: $22,000–119,000 and 29–50 hours per case.</a:t>
+            </a:r>
+            <a:r>
+              <a:rPr sz="1600" b="0" i="0">
+                <a:solidFill>
+                  <a:srgbClr val="F7F7F8"/>
+                </a:solidFill>
+                <a:latin typeface="IBM Plex Sans"/>
+              </a:rPr>
+              <a:t> Across a practice running fifteen to thirty serious matters a year, that is </a:t>
+            </a:r>
+            <a:r>
+              <a:rPr sz="1600" b="1" i="0">
+                <a:solidFill>
+                  <a:srgbClr val="F7F7F8"/>
+                </a:solidFill>
+                <a:latin typeface="IBM Plex Sans"/>
+              </a:rPr>
+              <a:t>$0.6–1.4M and 550–1,150 hours returned.</a:t>
             </a:r>
           </a:p>
           <a:p>
@@ -10295,444 +10877,20 @@
                 <a:spcPct val="128000"/>
               </a:lnSpc>
               <a:spcBef>
-                <a:spcPts val="800"/>
-              </a:spcBef>
-              <a:spcAft>
-                <a:spcPts val="0"/>
-              </a:spcAft>
-            </a:pPr>
-            <a:r>
-              <a:rPr sz="1150" b="0" i="0">
+                <a:spcPts val="900"/>
+              </a:spcBef>
+              <a:spcAft>
+                <a:spcPts val="0"/>
+              </a:spcAft>
+            </a:pPr>
+            <a:r>
+              <a:rPr sz="1300" b="0" i="0">
                 <a:solidFill>
                   <a:srgbClr val="9A9DA5"/>
                 </a:solidFill>
                 <a:latin typeface="IBM Plex Sans"/>
               </a:rPr>
-              <a:t>of spend displaced per serious case — processing, hosting and examiner analysis</a:t>
-            </a:r>
-          </a:p>
-        </p:txBody>
-      </p:sp>
-      <p:sp>
-        <p:nvSpPr>
-          <p:cNvPr id="8" name="Rectangle 7"/>
-          <p:cNvSpPr/>
-          <p:nvPr/>
-        </p:nvSpPr>
-        <p:spPr>
-          <a:xfrm>
-            <a:off x="3557016" y="3127248"/>
-            <a:ext cx="2624328" cy="1572768"/>
-          </a:xfrm>
-          <a:prstGeom prst="rect">
-            <a:avLst/>
-          </a:prstGeom>
-          <a:solidFill>
-            <a:srgbClr val="111216"/>
-          </a:solidFill>
-          <a:ln w="15875">
-            <a:solidFill>
-              <a:srgbClr val="B41624"/>
-            </a:solidFill>
-          </a:ln>
-          <a:effectLst/>
-        </p:spPr>
-        <p:style>
-          <a:lnRef idx="1">
-            <a:schemeClr val="accent1"/>
-          </a:lnRef>
-          <a:fillRef idx="3">
-            <a:schemeClr val="accent1"/>
-          </a:fillRef>
-          <a:effectRef idx="2">
-            <a:schemeClr val="accent1"/>
-          </a:effectRef>
-          <a:fontRef idx="minor">
-            <a:schemeClr val="lt1"/>
-          </a:fontRef>
-        </p:style>
-        <p:txBody>
-          <a:bodyPr rtlCol="0" anchor="ctr"/>
-          <a:lstStyle/>
-          <a:p>
-            <a:pPr algn="ctr"/>
-          </a:p>
-        </p:txBody>
-      </p:sp>
-      <p:sp>
-        <p:nvSpPr>
-          <p:cNvPr id="9" name="TextBox 8"/>
-          <p:cNvSpPr txBox="1"/>
-          <p:nvPr/>
-        </p:nvSpPr>
-        <p:spPr>
-          <a:xfrm>
-            <a:off x="3712464" y="3273552"/>
-            <a:ext cx="2313432" cy="1325880"/>
-          </a:xfrm>
-          <a:prstGeom prst="rect">
-            <a:avLst/>
-          </a:prstGeom>
-          <a:noFill/>
-        </p:spPr>
-        <p:txBody>
-          <a:bodyPr wrap="square" lIns="0" rIns="0" tIns="0" bIns="0">
-            <a:spAutoFit/>
-          </a:bodyPr>
-          <a:lstStyle/>
-          <a:p>
-            <a:pPr algn="l">
-              <a:lnSpc>
-                <a:spcPct val="128000"/>
-              </a:lnSpc>
-              <a:spcBef>
-                <a:spcPts val="0"/>
-              </a:spcBef>
-              <a:spcAft>
-                <a:spcPts val="0"/>
-              </a:spcAft>
-            </a:pPr>
-            <a:r>
-              <a:rPr sz="2700" b="1" i="0">
-                <a:solidFill>
-                  <a:srgbClr val="F7F7F8"/>
-                </a:solidFill>
-                <a:latin typeface="Space Grotesk"/>
-              </a:rPr>
-              <a:t>58–100 hrs</a:t>
-            </a:r>
-          </a:p>
-          <a:p>
-            <a:pPr algn="l">
-              <a:lnSpc>
-                <a:spcPct val="128000"/>
-              </a:lnSpc>
-              <a:spcBef>
-                <a:spcPts val="800"/>
-              </a:spcBef>
-              <a:spcAft>
-                <a:spcPts val="0"/>
-              </a:spcAft>
-            </a:pPr>
-            <a:r>
-              <a:rPr sz="1150" b="0" i="0">
-                <a:solidFill>
-                  <a:srgbClr val="9A9DA5"/>
-                </a:solidFill>
-                <a:latin typeface="IBM Plex Sans"/>
-              </a:rPr>
-              <a:t>of investigator and paralegal time returned on the same case</a:t>
-            </a:r>
-          </a:p>
-        </p:txBody>
-      </p:sp>
-      <p:sp>
-        <p:nvSpPr>
-          <p:cNvPr id="10" name="Rectangle 9"/>
-          <p:cNvSpPr/>
-          <p:nvPr/>
-        </p:nvSpPr>
-        <p:spPr>
-          <a:xfrm>
-            <a:off x="6336792" y="3127248"/>
-            <a:ext cx="2624328" cy="1572768"/>
-          </a:xfrm>
-          <a:prstGeom prst="rect">
-            <a:avLst/>
-          </a:prstGeom>
-          <a:solidFill>
-            <a:srgbClr val="111216"/>
-          </a:solidFill>
-          <a:ln w="15875">
-            <a:solidFill>
-              <a:srgbClr val="B41624"/>
-            </a:solidFill>
-          </a:ln>
-          <a:effectLst/>
-        </p:spPr>
-        <p:style>
-          <a:lnRef idx="1">
-            <a:schemeClr val="accent1"/>
-          </a:lnRef>
-          <a:fillRef idx="3">
-            <a:schemeClr val="accent1"/>
-          </a:fillRef>
-          <a:effectRef idx="2">
-            <a:schemeClr val="accent1"/>
-          </a:effectRef>
-          <a:fontRef idx="minor">
-            <a:schemeClr val="lt1"/>
-          </a:fontRef>
-        </p:style>
-        <p:txBody>
-          <a:bodyPr rtlCol="0" anchor="ctr"/>
-          <a:lstStyle/>
-          <a:p>
-            <a:pPr algn="ctr"/>
-          </a:p>
-        </p:txBody>
-      </p:sp>
-      <p:sp>
-        <p:nvSpPr>
-          <p:cNvPr id="11" name="TextBox 10"/>
-          <p:cNvSpPr txBox="1"/>
-          <p:nvPr/>
-        </p:nvSpPr>
-        <p:spPr>
-          <a:xfrm>
-            <a:off x="6492240" y="3273552"/>
-            <a:ext cx="2313432" cy="1325880"/>
-          </a:xfrm>
-          <a:prstGeom prst="rect">
-            <a:avLst/>
-          </a:prstGeom>
-          <a:noFill/>
-        </p:spPr>
-        <p:txBody>
-          <a:bodyPr wrap="square" lIns="0" rIns="0" tIns="0" bIns="0">
-            <a:spAutoFit/>
-          </a:bodyPr>
-          <a:lstStyle/>
-          <a:p>
-            <a:pPr algn="l">
-              <a:lnSpc>
-                <a:spcPct val="128000"/>
-              </a:lnSpc>
-              <a:spcBef>
-                <a:spcPts val="0"/>
-              </a:spcBef>
-              <a:spcAft>
-                <a:spcPts val="0"/>
-              </a:spcAft>
-            </a:pPr>
-            <a:r>
-              <a:rPr sz="2700" b="1" i="0">
-                <a:solidFill>
-                  <a:srgbClr val="F7F7F8"/>
-                </a:solidFill>
-                <a:latin typeface="Space Grotesk"/>
-              </a:rPr>
-              <a:t>$0.9–1.9M</a:t>
-            </a:r>
-          </a:p>
-          <a:p>
-            <a:pPr algn="l">
-              <a:lnSpc>
-                <a:spcPct val="128000"/>
-              </a:lnSpc>
-              <a:spcBef>
-                <a:spcPts val="800"/>
-              </a:spcBef>
-              <a:spcAft>
-                <a:spcPts val="0"/>
-              </a:spcAft>
-            </a:pPr>
-            <a:r>
-              <a:rPr sz="1150" b="0" i="0">
-                <a:solidFill>
-                  <a:srgbClr val="9A9DA5"/>
-                </a:solidFill>
-                <a:latin typeface="IBM Plex Sans"/>
-              </a:rPr>
-              <a:t>of displaceable value carried by one practice every year</a:t>
-            </a:r>
-          </a:p>
-        </p:txBody>
-      </p:sp>
-      <p:sp>
-        <p:nvSpPr>
-          <p:cNvPr id="12" name="Rectangle 11"/>
-          <p:cNvSpPr/>
-          <p:nvPr/>
-        </p:nvSpPr>
-        <p:spPr>
-          <a:xfrm>
-            <a:off x="9116568" y="3127248"/>
-            <a:ext cx="2624328" cy="1572768"/>
-          </a:xfrm>
-          <a:prstGeom prst="rect">
-            <a:avLst/>
-          </a:prstGeom>
-          <a:solidFill>
-            <a:srgbClr val="111216"/>
-          </a:solidFill>
-          <a:ln w="15875">
-            <a:solidFill>
-              <a:srgbClr val="3B3D44"/>
-            </a:solidFill>
-          </a:ln>
-          <a:effectLst/>
-        </p:spPr>
-        <p:style>
-          <a:lnRef idx="1">
-            <a:schemeClr val="accent1"/>
-          </a:lnRef>
-          <a:fillRef idx="3">
-            <a:schemeClr val="accent1"/>
-          </a:fillRef>
-          <a:effectRef idx="2">
-            <a:schemeClr val="accent1"/>
-          </a:effectRef>
-          <a:fontRef idx="minor">
-            <a:schemeClr val="lt1"/>
-          </a:fontRef>
-        </p:style>
-        <p:txBody>
-          <a:bodyPr rtlCol="0" anchor="ctr"/>
-          <a:lstStyle/>
-          <a:p>
-            <a:pPr algn="ctr"/>
-          </a:p>
-        </p:txBody>
-      </p:sp>
-      <p:sp>
-        <p:nvSpPr>
-          <p:cNvPr id="13" name="TextBox 12"/>
-          <p:cNvSpPr txBox="1"/>
-          <p:nvPr/>
-        </p:nvSpPr>
-        <p:spPr>
-          <a:xfrm>
-            <a:off x="9272016" y="3273552"/>
-            <a:ext cx="2313432" cy="1325880"/>
-          </a:xfrm>
-          <a:prstGeom prst="rect">
-            <a:avLst/>
-          </a:prstGeom>
-          <a:noFill/>
-        </p:spPr>
-        <p:txBody>
-          <a:bodyPr wrap="square" lIns="0" rIns="0" tIns="0" bIns="0">
-            <a:spAutoFit/>
-          </a:bodyPr>
-          <a:lstStyle/>
-          <a:p>
-            <a:pPr algn="l">
-              <a:lnSpc>
-                <a:spcPct val="128000"/>
-              </a:lnSpc>
-              <a:spcBef>
-                <a:spcPts val="0"/>
-              </a:spcBef>
-              <a:spcAft>
-                <a:spcPts val="0"/>
-              </a:spcAft>
-            </a:pPr>
-            <a:r>
-              <a:rPr sz="2700" b="1" i="0">
-                <a:solidFill>
-                  <a:srgbClr val="F7F7F8"/>
-                </a:solidFill>
-                <a:latin typeface="Space Grotesk"/>
-              </a:rPr>
-              <a:t>$4,350 / mo</a:t>
-            </a:r>
-          </a:p>
-          <a:p>
-            <a:pPr algn="l">
-              <a:lnSpc>
-                <a:spcPct val="128000"/>
-              </a:lnSpc>
-              <a:spcBef>
-                <a:spcPts val="800"/>
-              </a:spcBef>
-              <a:spcAft>
-                <a:spcPts val="0"/>
-              </a:spcAft>
-            </a:pPr>
-            <a:r>
-              <a:rPr sz="1150" b="0" i="0">
-                <a:solidFill>
-                  <a:srgbClr val="9A9DA5"/>
-                </a:solidFill>
-                <a:latin typeface="IBM Plex Sans"/>
-              </a:rPr>
-              <a:t>what hosting a single 435GB federal case costs today, for as long as it runs</a:t>
-            </a:r>
-          </a:p>
-        </p:txBody>
-      </p:sp>
-      <p:sp>
-        <p:nvSpPr>
-          <p:cNvPr id="14" name="TextBox 13"/>
-          <p:cNvSpPr txBox="1"/>
-          <p:nvPr/>
-        </p:nvSpPr>
-        <p:spPr>
-          <a:xfrm>
-            <a:off x="777240" y="4956048"/>
-            <a:ext cx="10637215" cy="1280160"/>
-          </a:xfrm>
-          <a:prstGeom prst="rect">
-            <a:avLst/>
-          </a:prstGeom>
-          <a:noFill/>
-        </p:spPr>
-        <p:txBody>
-          <a:bodyPr wrap="square" lIns="0" rIns="0" tIns="0" bIns="0">
-            <a:spAutoFit/>
-          </a:bodyPr>
-          <a:lstStyle/>
-          <a:p>
-            <a:pPr algn="l">
-              <a:lnSpc>
-                <a:spcPct val="128000"/>
-              </a:lnSpc>
-              <a:spcBef>
-                <a:spcPts val="0"/>
-              </a:spcBef>
-              <a:spcAft>
-                <a:spcPts val="0"/>
-              </a:spcAft>
-            </a:pPr>
-            <a:r>
-              <a:rPr sz="1500" b="1" i="0">
-                <a:solidFill>
-                  <a:srgbClr val="F7F7F8"/>
-                </a:solidFill>
-                <a:latin typeface="IBM Plex Sans"/>
-              </a:rPr>
-              <a:t>Priced at $12,000 a matter</a:t>
-            </a:r>
-            <a:r>
-              <a:rPr sz="1500" b="0" i="0">
-                <a:solidFill>
-                  <a:srgbClr val="F7F7F8"/>
-                </a:solidFill>
-                <a:latin typeface="IBM Plex Sans"/>
-              </a:rPr>
-              <a:t>, against $34,000–$131,000 it removes and the hours it hands back. The extraction bill stays — devices still go to a vendor. Everything downstream of it does not.</a:t>
-            </a:r>
-          </a:p>
-          <a:p>
-            <a:pPr algn="l">
-              <a:lnSpc>
-                <a:spcPct val="128000"/>
-              </a:lnSpc>
-              <a:spcBef>
-                <a:spcPts val="900"/>
-              </a:spcBef>
-              <a:spcAft>
-                <a:spcPts val="0"/>
-              </a:spcAft>
-            </a:pPr>
-            <a:r>
-              <a:rPr sz="1300" b="0" i="0">
-                <a:solidFill>
-                  <a:srgbClr val="9A9DA5"/>
-                </a:solidFill>
-                <a:latin typeface="IBM Plex Sans"/>
-              </a:rPr>
-              <a:t>Displaceable value moves twenty-four times between the smallest and largest matters, so price scales with device count, data volume and duration — the same drivers as the bill it replaces. </a:t>
-            </a:r>
-            <a:r>
-              <a:rPr sz="1300" b="1" i="0">
-                <a:solidFill>
-                  <a:srgbClr val="9A9DA5"/>
-                </a:solidFill>
-                <a:latin typeface="IBM Plex Sans"/>
-              </a:rPr>
-              <a:t>Setting that scaling is what the pilot is for.</a:t>
+              <a:t>The extraction bill is unchanged — we analyse what was produced, we do not acquire it. Everything downstream of it is what we replace.</a:t>
             </a:r>
           </a:p>
         </p:txBody>

--- a/Loupe-NDRC-deck.pptx
+++ b/Loupe-NDRC-deck.pptx
@@ -7162,6 +7162,60 @@
           </a:p>
         </p:txBody>
       </p:sp>
+      <p:sp>
+        <p:nvSpPr>
+          <p:cNvPr id="7" name="TextBox 6"/>
+          <p:cNvSpPr txBox="1"/>
+          <p:nvPr/>
+        </p:nvSpPr>
+        <p:spPr>
+          <a:xfrm>
+            <a:off x="777240" y="5852160"/>
+            <a:ext cx="10637215" cy="914400"/>
+          </a:xfrm>
+          <a:prstGeom prst="rect">
+            <a:avLst/>
+          </a:prstGeom>
+          <a:noFill/>
+        </p:spPr>
+        <p:txBody>
+          <a:bodyPr wrap="square" lIns="0" rIns="0" tIns="0" bIns="0">
+            <a:spAutoFit/>
+          </a:bodyPr>
+          <a:lstStyle/>
+          <a:p>
+            <a:pPr algn="l">
+              <a:lnSpc>
+                <a:spcPct val="128000"/>
+              </a:lnSpc>
+              <a:spcBef>
+                <a:spcPts val="0"/>
+              </a:spcBef>
+              <a:spcAft>
+                <a:spcPts val="0"/>
+              </a:spcAft>
+            </a:pPr>
+            <a:r>
+              <a:rPr sz="1300" b="1" i="0">
+                <a:solidFill>
+                  <a:srgbClr val="9A9DA5"/>
+                </a:solidFill>
+                <a:latin typeface="IBM Plex Sans"/>
+              </a:rPr>
+              <a:t>And the tools that could hold it throw it away.</a:t>
+            </a:r>
+            <a:r>
+              <a:rPr sz="1300" b="0" i="0">
+                <a:solidFill>
+                  <a:srgbClr val="9A9DA5"/>
+                </a:solidFill>
+                <a:latin typeface="IBM Plex Sans"/>
+              </a:rPr>
+              <a:t> Relativity's own processing documentation says call logs emerge “only as call log data in Excel format, not as individual records,” and that multi-device extractions are unsupported. Everlaw splits conversations every thousand messages; Reveal slices them into 24-hour blocks.</a:t>
+            </a:r>
+          </a:p>
+        </p:txBody>
+      </p:sp>
     </p:spTree>
   </p:cSld>
   <p:clrMapOvr>
@@ -7381,7 +7435,7 @@
               </a:spcAft>
             </a:pPr>
             <a:r>
-              <a:rPr sz="1800" b="1" i="0">
+              <a:rPr sz="1500" b="1" i="0">
                 <a:solidFill>
                   <a:srgbClr val="F7F7F8"/>
                 </a:solidFill>
@@ -7390,7 +7444,7 @@
               <a:t>Digital evidence volume exploded.</a:t>
             </a:r>
             <a:r>
-              <a:rPr sz="1800" b="0" i="0">
+              <a:rPr sz="1500" b="0" i="0">
                 <a:solidFill>
                   <a:srgbClr val="F7F7F8"/>
                 </a:solidFill>
@@ -7434,7 +7488,7 @@
               </a:spcAft>
             </a:pPr>
             <a:r>
-              <a:rPr sz="1800" b="1" i="0">
+              <a:rPr sz="1500" b="1" i="0">
                 <a:solidFill>
                   <a:srgbClr val="F7F7F8"/>
                 </a:solidFill>
@@ -7443,7 +7497,7 @@
               <a:t>LLMs became good enough</a:t>
             </a:r>
             <a:r>
-              <a:rPr sz="1800" b="0" i="0">
+              <a:rPr sz="1500" b="0" i="0">
                 <a:solidFill>
                   <a:srgbClr val="F7F7F8"/>
                 </a:solidFill>
@@ -7487,22 +7541,22 @@
               </a:spcAft>
             </a:pPr>
             <a:r>
-              <a:rPr sz="1800" b="1" i="0">
+              <a:rPr sz="1500" b="1" i="0">
                 <a:solidFill>
                   <a:srgbClr val="F7F7F8"/>
                 </a:solidFill>
                 <a:latin typeface="IBM Plex Sans"/>
               </a:rPr>
-              <a:t>Bare LLMs remain unusable in evidence work</a:t>
-            </a:r>
-            <a:r>
-              <a:rPr sz="1800" b="0" i="0">
+              <a:t>The category converged on cited answers — and stopped there.</a:t>
+            </a:r>
+            <a:r>
+              <a:rPr sz="1500" b="0" i="0">
                 <a:solidFill>
                   <a:srgbClr val="F7F7F8"/>
                 </a:solidFill>
                 <a:latin typeface="IBM Plex Sans"/>
               </a:rPr>
-              <a:t> — no provenance, no audit, no confidentiality.</a:t>
+              <a:t> Relativity folded aiR into its base rate in November 2025; Everlaw bundled three AI features into core pricing the same month; DISCO announced agentic AI at no extra cost in February 2026. Everyone can cite a document. Nobody modelled the case.</a:t>
             </a:r>
           </a:p>
         </p:txBody>
@@ -7547,7 +7601,7 @@
                 </a:solidFill>
                 <a:latin typeface="IBM Plex Sans"/>
               </a:rPr>
-              <a:t>The gap between (2) and (3) is exactly where Loupe sits:</a:t>
+              <a:t>That is the gap Loupe was built into:</a:t>
             </a:r>
           </a:p>
           <a:p>
@@ -7569,7 +7623,7 @@
                 </a:solidFill>
                 <a:latin typeface="IBM Plex Sans"/>
               </a:rPr>
-              <a:t>the trust layer that makes AI admissible in investigative work.</a:t>
+              <a:t>the layer underneath the answer — a model of the whole case, so a question can be put to all of it at once.</a:t>
             </a:r>
           </a:p>
           <a:p>

--- a/Loupe-NDRC-deck.pptx
+++ b/Loupe-NDRC-deck.pptx
@@ -16,6 +16,7 @@
     <p:sldId id="264" r:id="rId16"/>
     <p:sldId id="265" r:id="rId17"/>
     <p:sldId id="266" r:id="rId18"/>
+    <p:sldId id="267" r:id="rId19"/>
   </p:sldIdLst>
   <p:sldSz cx="12191695" cy="6858000" type="screen4x3"/>
   <p:notesSz cx="6858000" cy="9144000"/>
@@ -582,132 +583,54 @@
           <a:lstStyle/>
           <a:p>
             <a:r>
-              <a:t>TWO BEATS, IN THIS ORDER — DO NOT INVERT THEM.</a:t>
+              <a:t>LEAD WITH SIREN. It is the strongest founder-market-fit signal you</a:t>
+            </a:r>
+          </a:p>
+          <a:p>
+            <a:r>
+              <a:t>have. NDRC will know Siren — Irish, Enterprise Ireland-backed, same category. It</a:t>
+            </a:r>
+          </a:p>
+          <a:p>
+            <a:r>
+              <a:t>converts you from "engineer who built a thing" to "category-native founder who</a:t>
+            </a:r>
+          </a:p>
+          <a:p>
+            <a:r>
+              <a:t>has seen this market's buying behaviour for seven years." It pre-answers the</a:t>
+            </a:r>
+          </a:p>
+          <a:p>
+            <a:r>
+              <a:t>sales-cycle and procurement questions before they're asked.</a:t>
             </a:r>
           </a:p>
           <a:p/>
           <a:p>
             <a:r>
-              <a:t>FIRST: IT WORKS. Cases closed, attorneys using it, a practice winning business</a:t>
-            </a:r>
-          </a:p>
-          <a:p>
-            <a:r>
-              <a:t>because of it. That is a further-along position than most of what NDRC will see</a:t>
-            </a:r>
-          </a:p>
-          <a:p>
-            <a:r>
-              <a:t>this year, and it should be the first thing out of your mouth.</a:t>
+              <a:t>"Full-time on close" appears twice on purpose. Say it out loud as well as</a:t>
+            </a:r>
+          </a:p>
+          <a:p>
+            <a:r>
+              <a:t>printing it.</a:t>
             </a:r>
           </a:p>
           <a:p/>
           <a:p>
             <a:r>
-              <a:t>SECOND: THE SECURITY GATE. No external customer's evidence enters until the</a:t>
-            </a:r>
-          </a:p>
-          <a:p>
-            <a:r>
-              <a:t>isolation, backup and legal stages pass. Most pre-seed teams cannot demonstrate</a:t>
-            </a:r>
-          </a:p>
-          <a:p>
-            <a:r>
-              <a:t>release discipline at all. Frame it as WHY the external pilot hasn't started</a:t>
-            </a:r>
-          </a:p>
-          <a:p>
-            <a:r>
-              <a:t>yet — that turns a delay into evidence of seriousness.</a:t>
-            </a:r>
-          </a:p>
-          <a:p/>
-          <a:p>
-            <a:r>
-              <a:t>ON THE ROADMAP: mention it, don't dwell on it. It is a statement of ambition,</a:t>
-            </a:r>
-          </a:p>
-          <a:p>
-            <a:r>
-              <a:t>not a list of things Loupe cannot do. If the deck spends more pixels on the</a:t>
-            </a:r>
-          </a:p>
-          <a:p>
-            <a:r>
-              <a:t>roadmap than on the working product, a reader concludes the product IS the</a:t>
-            </a:r>
-          </a:p>
-          <a:p>
-            <a:r>
-              <a:t>roadmap.</a:t>
-            </a:r>
-          </a:p>
-          <a:p/>
-          <a:p>
-            <a:r>
-              <a:t>CLAIMS SAFETY</a:t>
-            </a:r>
-          </a:p>
-          <a:p>
-            <a:r>
-              <a:t>- DO NOT call the ex-FBI PI firm a signed customer, an LOI, or a pipeline</a:t>
-            </a:r>
-          </a:p>
-          <a:p>
-            <a:r>
-              <a:t>  value. Nothing is signed. True and sufficient: an agreed next case, an</a:t>
-            </a:r>
-          </a:p>
-          <a:p>
-            <a:r>
-              <a:t>  at-cost trial, an MSA to be exchanged. This is the only hard prohibition.</a:t>
-            </a:r>
-          </a:p>
-          <a:p>
-            <a:r>
-              <a:t>- "WCAG 2.1 AA" and "571k-node corpus" — fine if evidenced. Have the audit</a:t>
-            </a:r>
-          </a:p>
-          <a:p>
-            <a:r>
-              <a:t>  result and load-test output to hand.</a:t>
-            </a:r>
-          </a:p>
-          <a:p>
-            <a:r>
-              <a:t>- Scale figures: say whether each came from a real case or a test corpus.</a:t>
-            </a:r>
-          </a:p>
-          <a:p>
-            <a:r>
-              <a:t>- Prefer "verification workflow" over "human-verified facts".</a:t>
-            </a:r>
-          </a:p>
-          <a:p>
-            <a:r>
-              <a:t>- CI: .github/workflows absent from the branch inspected. If CI runs elsewhere,</a:t>
-            </a:r>
-          </a:p>
-          <a:p>
-            <a:r>
-              <a:t>  ignore. Otherwise don't claim hard-gating CI — and consider standing it up.</a:t>
-            </a:r>
-          </a:p>
-          <a:p/>
-          <a:p>
-            <a:r>
-              <a:t>FRAMING RULE FOR THE WHOLE DECK: Loupe is one product, and it works. Never</a:t>
-            </a:r>
-          </a:p>
-          <a:p>
-            <a:r>
-              <a:t>write a sentence that invites a reader to wonder whether the thing that ran</a:t>
-            </a:r>
-          </a:p>
-          <a:p>
-            <a:r>
-              <a:t>federal cases is the same thing you are pitching. It is.</a:t>
+              <a:t>DO NOT HIDE Alex being US-based. Address it in one line: the company is Irish,</a:t>
+            </a:r>
+          </a:p>
+          <a:p>
+            <a:r>
+              <a:t>the IP is Irish-owned, engineering is in Dublin, and the market is US-first —</a:t>
+            </a:r>
+          </a:p>
+          <a:p>
+            <a:r>
+              <a:t>which is why the domain founder is where the customers are.</a:t>
             </a:r>
           </a:p>
         </p:txBody>
@@ -777,6 +700,201 @@
           <a:lstStyle/>
           <a:p>
             <a:r>
+              <a:t>TWO BEATS, IN THIS ORDER — DO NOT INVERT THEM.</a:t>
+            </a:r>
+          </a:p>
+          <a:p/>
+          <a:p>
+            <a:r>
+              <a:t>FIRST: IT WORKS. Cases closed, attorneys using it, a practice winning business</a:t>
+            </a:r>
+          </a:p>
+          <a:p>
+            <a:r>
+              <a:t>because of it. That is a further-along position than most of what NDRC will see</a:t>
+            </a:r>
+          </a:p>
+          <a:p>
+            <a:r>
+              <a:t>this year, and it should be the first thing out of your mouth.</a:t>
+            </a:r>
+          </a:p>
+          <a:p/>
+          <a:p>
+            <a:r>
+              <a:t>SECOND: THE SECURITY GATE. No external customer's evidence enters until the</a:t>
+            </a:r>
+          </a:p>
+          <a:p>
+            <a:r>
+              <a:t>isolation, backup and legal stages pass. Most pre-seed teams cannot demonstrate</a:t>
+            </a:r>
+          </a:p>
+          <a:p>
+            <a:r>
+              <a:t>release discipline at all. Frame it as WHY the external pilot hasn't started</a:t>
+            </a:r>
+          </a:p>
+          <a:p>
+            <a:r>
+              <a:t>yet — that turns a delay into evidence of seriousness.</a:t>
+            </a:r>
+          </a:p>
+          <a:p/>
+          <a:p>
+            <a:r>
+              <a:t>ON THE ROADMAP: mention it, don't dwell on it. It is a statement of ambition,</a:t>
+            </a:r>
+          </a:p>
+          <a:p>
+            <a:r>
+              <a:t>not a list of things Loupe cannot do. If the deck spends more pixels on the</a:t>
+            </a:r>
+          </a:p>
+          <a:p>
+            <a:r>
+              <a:t>roadmap than on the working product, a reader concludes the product IS the</a:t>
+            </a:r>
+          </a:p>
+          <a:p>
+            <a:r>
+              <a:t>roadmap.</a:t>
+            </a:r>
+          </a:p>
+          <a:p/>
+          <a:p>
+            <a:r>
+              <a:t>CLAIMS SAFETY</a:t>
+            </a:r>
+          </a:p>
+          <a:p>
+            <a:r>
+              <a:t>- DO NOT call the ex-FBI PI firm a signed customer, an LOI, or a pipeline</a:t>
+            </a:r>
+          </a:p>
+          <a:p>
+            <a:r>
+              <a:t>  value. Nothing is signed. True and sufficient: an agreed next case, an</a:t>
+            </a:r>
+          </a:p>
+          <a:p>
+            <a:r>
+              <a:t>  at-cost trial, an MSA to be exchanged. This is the only hard prohibition.</a:t>
+            </a:r>
+          </a:p>
+          <a:p>
+            <a:r>
+              <a:t>- "WCAG 2.1 AA" and "571k-node corpus" — fine if evidenced. Have the audit</a:t>
+            </a:r>
+          </a:p>
+          <a:p>
+            <a:r>
+              <a:t>  result and load-test output to hand.</a:t>
+            </a:r>
+          </a:p>
+          <a:p>
+            <a:r>
+              <a:t>- Scale figures: say whether each came from a real case or a test corpus.</a:t>
+            </a:r>
+          </a:p>
+          <a:p>
+            <a:r>
+              <a:t>- Prefer "verification workflow" over "human-verified facts".</a:t>
+            </a:r>
+          </a:p>
+          <a:p>
+            <a:r>
+              <a:t>- CI: .github/workflows absent from the branch inspected. If CI runs elsewhere,</a:t>
+            </a:r>
+          </a:p>
+          <a:p>
+            <a:r>
+              <a:t>  ignore. Otherwise don't claim hard-gating CI — and consider standing it up.</a:t>
+            </a:r>
+          </a:p>
+          <a:p/>
+          <a:p>
+            <a:r>
+              <a:t>FRAMING RULE FOR THE WHOLE DECK: Loupe is one product, and it works. Never</a:t>
+            </a:r>
+          </a:p>
+          <a:p>
+            <a:r>
+              <a:t>write a sentence that invites a reader to wonder whether the thing that ran</a:t>
+            </a:r>
+          </a:p>
+          <a:p>
+            <a:r>
+              <a:t>federal cases is the same thing you are pitching. It is.</a:t>
+            </a:r>
+          </a:p>
+        </p:txBody>
+      </p:sp>
+      <p:sp>
+        <p:nvSpPr>
+          <p:cNvPr id="4" name="Slide Number Placeholder 3"/>
+          <p:cNvSpPr>
+            <a:spLocks noGrp="1"/>
+          </p:cNvSpPr>
+          <p:nvPr>
+            <p:ph type="sldNum" idx="5" sz="quarter"/>
+          </p:nvPr>
+        </p:nvSpPr>
+        <p:spPr/>
+      </p:sp>
+    </p:spTree>
+  </p:cSld>
+  <p:clrMapOvr>
+    <a:masterClrMapping/>
+  </p:clrMapOvr>
+</p:notes>
+</file>
+
+<file path=ppt/notesSlides/notesSlide12.xml><?xml version="1.0" encoding="utf-8"?>
+<p:notes xmlns:a="http://schemas.openxmlformats.org/drawingml/2006/main" xmlns:p="http://schemas.openxmlformats.org/presentationml/2006/main" xmlns:r="http://schemas.openxmlformats.org/officeDocument/2006/relationships">
+  <p:cSld>
+    <p:spTree>
+      <p:nvGrpSpPr>
+        <p:cNvPr id="1" name=""/>
+        <p:cNvGrpSpPr/>
+        <p:nvPr/>
+      </p:nvGrpSpPr>
+      <p:grpSpPr>
+        <a:xfrm>
+          <a:off x="0" y="0"/>
+          <a:ext cx="0" cy="0"/>
+          <a:chOff x="0" y="0"/>
+          <a:chExt cx="0" cy="0"/>
+        </a:xfrm>
+      </p:grpSpPr>
+      <p:sp>
+        <p:nvSpPr>
+          <p:cNvPr id="2" name="Slide Image Placeholder 1"/>
+          <p:cNvSpPr>
+            <a:spLocks noGrp="1"/>
+          </p:cNvSpPr>
+          <p:nvPr>
+            <p:ph type="sldImg" idx="2"/>
+          </p:nvPr>
+        </p:nvSpPr>
+        <p:spPr/>
+      </p:sp>
+      <p:sp>
+        <p:nvSpPr>
+          <p:cNvPr id="3" name="Notes Placeholder 2"/>
+          <p:cNvSpPr>
+            <a:spLocks noGrp="1"/>
+          </p:cNvSpPr>
+          <p:nvPr>
+            <p:ph type="body" idx="3" sz="quarter"/>
+          </p:nvPr>
+        </p:nvSpPr>
+        <p:spPr/>
+        <p:txBody>
+          <a:bodyPr/>
+          <a:lstStyle/>
+          <a:p>
+            <a:r>
               <a:t>DO NOT put an hours figure on this slide, and do not pre-empt an</a:t>
             </a:r>
           </a:p>
@@ -1776,117 +1894,76 @@
           <a:lstStyle/>
           <a:p>
             <a:r>
-              <a:t>Market sizing is desk research, not primary — label it as such.</a:t>
-            </a:r>
-          </a:p>
-          <a:p>
-            <a:r>
-              <a:t>Global forensic accounting ~$18–20B, US ~$10.5B, highly fragmented.</a:t>
+              <a:t>This is the slide that earns the right to slide 4. Do not skip it.</a:t>
             </a:r>
           </a:p>
           <a:p/>
           <a:p>
             <a:r>
-              <a:t>A SECOND USE CASE surfaced in discovery and may be the better wedge:</a:t>
-            </a:r>
-          </a:p>
-          <a:p>
-            <a:r>
-              <a:t>PRE-ENGAGEMENT TRIAGE. A PI-firm CEO (ex-FBI, Tampa Bay) described her sharpest</a:t>
-            </a:r>
-          </a:p>
-          <a:p>
-            <a:r>
-              <a:t>pain as upstream of casework — free 15-minute consultations, large document sets</a:t>
-            </a:r>
-          </a:p>
-          <a:p>
-            <a:r>
-              <a:t>from prospects, deciding whether to take the matter without burning senior</a:t>
-            </a:r>
-          </a:p>
-          <a:p>
-            <a:r>
-              <a:t>hours. Also: 15 audio recordings needing a summary.</a:t>
+              <a:t>The two-halves finding is the whole competitive argument and it is structural, not a</a:t>
+            </a:r>
+          </a:p>
+          <a:p>
+            <a:r>
+              <a:t>scoring artifact. Say the last line slowly — it converts the analysis from research</a:t>
+            </a:r>
+          </a:p>
+          <a:p>
+            <a:r>
+              <a:t>into experience, and it is the one claim a panel cannot discount.</a:t>
             </a:r>
           </a:p>
           <a:p/>
           <a:p>
             <a:r>
-              <a:t>Why it matters: it sits on prospect intake material, NOT privileged evidence —</a:t>
-            </a:r>
-          </a:p>
-          <a:p>
-            <a:r>
-              <a:t>so it can be sold BEFORE the security gate closes. Obvious ROI denominator</a:t>
-            </a:r>
-          </a:p>
-          <a:p>
-            <a:r>
-              <a:t>(senior hours replaced). Natural front door into the same firm's casework.</a:t>
+              <a:t>If asked "who is the closest competitor?" the answer is Matey: same buyer, sells</a:t>
+            </a:r>
+          </a:p>
+          <a:p>
+            <a:r>
+              <a:t>through NACDL and a state defence bar, holds SOC 2 Type II and ISO 27001 today. Say</a:t>
+            </a:r>
+          </a:p>
+          <a:p>
+            <a:r>
+              <a:t>that before they find it. Then: none of the four has a graph, and that is eighteen</a:t>
+            </a:r>
+          </a:p>
+          <a:p>
+            <a:r>
+              <a:t>months of work they can afford — which is exactly why the pilot and the certification</a:t>
+            </a:r>
+          </a:p>
+          <a:p>
+            <a:r>
+              <a:t>work in the ask are urgent rather than nice to have.</a:t>
             </a:r>
           </a:p>
           <a:p/>
           <a:p>
             <a:r>
-              <a:t>It also reframes the buyer. She was not buying a tool for herself — she was</a:t>
-            </a:r>
-          </a:p>
-          <a:p>
-            <a:r>
-              <a:t>asking whether it makes her JUNIOR investigators effective, benchmarked against</a:t>
-            </a:r>
-          </a:p>
-          <a:p>
-            <a:r>
-              <a:t>the cost of a junior investigator or overseas staff. That is a</a:t>
-            </a:r>
-          </a:p>
-          <a:p>
-            <a:r>
-              <a:t>labour-substitution sale, not a software-features sale.</a:t>
+              <a:t>If asked about Harvey: over $1B raised, priced for the AmLaw 100 at ~$360k seat</a:t>
+            </a:r>
+          </a:p>
+          <a:p>
+            <a:r>
+              <a:t>minimums, no evidence model. Not our fight and not our buyer.</a:t>
             </a:r>
           </a:p>
           <a:p/>
           <a:p>
             <a:r>
-              <a:t>WHAT REMAINS OPEN: what does a 10–50 person practice actually pay, and through</a:t>
-            </a:r>
-          </a:p>
-          <a:p>
-            <a:r>
-              <a:t>what mechanism — per-matter passed through to the client, or per-seat licence?</a:t>
-            </a:r>
-          </a:p>
-          <a:p>
-            <a:r>
-              <a:t>The ex-FBI prospect declined to name a price before using the product ("I would</a:t>
-            </a:r>
-          </a:p>
-          <a:p>
-            <a:r>
-              <a:t>have to use it before I could answer that appropriately"). She is aware of the</a:t>
-            </a:r>
-          </a:p>
-          <a:p>
-            <a:r>
-              <a:t>~$25k/licence reference point and open to a mutual MSA at low cost, low risk.</a:t>
-            </a:r>
-          </a:p>
-          <a:p>
-            <a:r>
-              <a:t>Other anchors: Valid8 ~$42k/yr, CaseWare IDEA.</a:t>
-            </a:r>
-          </a:p>
-          <a:p/>
-          <a:p>
-            <a:r>
-              <a:t>The pricing question is closed by running a paid pilot, not by booking more</a:t>
-            </a:r>
-          </a:p>
-          <a:p>
-            <a:r>
-              <a:t>calls — which is exactly what slide 9 asks NDRC to fund.</a:t>
+              <a:t>Do not name Siren here. If it comes up, it is a compliment: built for enterprise LE</a:t>
+            </a:r>
+          </a:p>
+          <a:p>
+            <a:r>
+              <a:t>and intelligence buyers who come with solutions engineering attached, and good at</a:t>
+            </a:r>
+          </a:p>
+          <a:p>
+            <a:r>
+              <a:t>that. A fifteen-person practice cannot buy the engineer — that tier is what we serve.</a:t>
             </a:r>
           </a:p>
         </p:txBody>
@@ -1956,86 +2033,117 @@
           <a:lstStyle/>
           <a:p>
             <a:r>
-              <a:t>Both columns are the same case. That is the whole point of the slide —</a:t>
-            </a:r>
-          </a:p>
-          <a:p>
-            <a:r>
-              <a:t>it is not a claim about savings in the abstract, it is one matter costed twice.</a:t>
+              <a:t>Market sizing is desk research, not primary — label it as such.</a:t>
+            </a:r>
+          </a:p>
+          <a:p>
+            <a:r>
+              <a:t>Global forensic accounting ~$18–20B, US ~$10.5B, highly fragmented.</a:t>
             </a:r>
           </a:p>
           <a:p/>
           <a:p>
             <a:r>
-              <a:t>The buyer is not choosing between us and a competitor. They are choosing between us</a:t>
-            </a:r>
-          </a:p>
-          <a:p>
-            <a:r>
-              <a:t>and what they do today: a forensic vendor per device, processing and hosting charged</a:t>
-            </a:r>
-          </a:p>
-          <a:p>
-            <a:r>
-              <a:t>per gigabyte per MONTH for the life of the matter, an examiner by the hour, and their</a:t>
-            </a:r>
-          </a:p>
-          <a:p>
-            <a:r>
-              <a:t>own people stitching it together.</a:t>
+              <a:t>A SECOND USE CASE surfaced in discovery and may be the better wedge:</a:t>
+            </a:r>
+          </a:p>
+          <a:p>
+            <a:r>
+              <a:t>PRE-ENGAGEMENT TRIAGE. A PI-firm CEO (ex-FBI, Tampa Bay) described her sharpest</a:t>
+            </a:r>
+          </a:p>
+          <a:p>
+            <a:r>
+              <a:t>pain as upstream of casework — free 15-minute consultations, large document sets</a:t>
+            </a:r>
+          </a:p>
+          <a:p>
+            <a:r>
+              <a:t>from prospects, deciding whether to take the matter without burning senior</a:t>
+            </a:r>
+          </a:p>
+          <a:p>
+            <a:r>
+              <a:t>hours. Also: 15 audio recordings needing a summary.</a:t>
             </a:r>
           </a:p>
           <a:p/>
           <a:p>
             <a:r>
-              <a:t>Hosting is the line that breaks. A 435GB federal case is $4,350 a month, every month,</a:t>
-            </a:r>
-          </a:p>
-          <a:p>
-            <a:r>
-              <a:t>and the outcome that money buys is a spreadsheet. If one number lands, make it that.</a:t>
+              <a:t>Why it matters: it sits on prospect intake material, NOT privileged evidence —</a:t>
+            </a:r>
+          </a:p>
+          <a:p>
+            <a:r>
+              <a:t>so it can be sold BEFORE the security gate closes. Obvious ROI denominator</a:t>
+            </a:r>
+          </a:p>
+          <a:p>
+            <a:r>
+              <a:t>(senior hours replaced). Natural front door into the same firm's casework.</a:t>
             </a:r>
           </a:p>
           <a:p/>
           <a:p>
             <a:r>
-              <a:t>CONCEDE THE EXTRACTION BILL OUT LOUD. Devices still go to a vendor and we do not</a:t>
-            </a:r>
-          </a:p>
-          <a:p>
-            <a:r>
-              <a:t>displace that. Saying so is what makes the other numbers credible.</a:t>
+              <a:t>It also reframes the buyer. She was not buying a tool for herself — she was</a:t>
+            </a:r>
+          </a:p>
+          <a:p>
+            <a:r>
+              <a:t>asking whether it makes her JUNIOR investigators effective, benchmarked against</a:t>
+            </a:r>
+          </a:p>
+          <a:p>
+            <a:r>
+              <a:t>the cost of a junior investigator or overseas staff. That is a</a:t>
+            </a:r>
+          </a:p>
+          <a:p>
+            <a:r>
+              <a:t>labour-substitution sale, not a software-features sale.</a:t>
             </a:r>
           </a:p>
           <a:p/>
           <a:p>
             <a:r>
-              <a:t>Provenance if pressed: published 2026 rates — eDiscovery processing $3-10/GB and</a:t>
-            </a:r>
-          </a:p>
-          <a:p>
-            <a:r>
-              <a:t>hosting $5-15/GB/month from the Winter 2026 pricing survey; forensic vendor rate</a:t>
-            </a:r>
-          </a:p>
-          <a:p>
-            <a:r>
-              <a:t>cards; examiner analysis $300-500/h; case hours from RAND's National Public Defense</a:t>
-            </a:r>
-          </a:p>
-          <a:p>
-            <a:r>
-              <a:t>Workload Study; investigator $85-225/h, paralegal $100-200/h. The single modelled</a:t>
-            </a:r>
-          </a:p>
-          <a:p>
-            <a:r>
-              <a:t>assumption is the share of case hours that is evidence handling, and that half of it</a:t>
-            </a:r>
-          </a:p>
-          <a:p>
-            <a:r>
-              <a:t>goes. Say so plainly — do not present it as measured.</a:t>
+              <a:t>WHAT REMAINS OPEN: what does a 10–50 person practice actually pay, and through</a:t>
+            </a:r>
+          </a:p>
+          <a:p>
+            <a:r>
+              <a:t>what mechanism — per-matter passed through to the client, or per-seat licence?</a:t>
+            </a:r>
+          </a:p>
+          <a:p>
+            <a:r>
+              <a:t>The ex-FBI prospect declined to name a price before using the product ("I would</a:t>
+            </a:r>
+          </a:p>
+          <a:p>
+            <a:r>
+              <a:t>have to use it before I could answer that appropriately"). She is aware of the</a:t>
+            </a:r>
+          </a:p>
+          <a:p>
+            <a:r>
+              <a:t>~$25k/licence reference point and open to a mutual MSA at low cost, low risk.</a:t>
+            </a:r>
+          </a:p>
+          <a:p>
+            <a:r>
+              <a:t>Other anchors: Valid8 ~$42k/yr, CaseWare IDEA.</a:t>
+            </a:r>
+          </a:p>
+          <a:p/>
+          <a:p>
+            <a:r>
+              <a:t>The pricing question is closed by running a paid pilot, not by booking more</a:t>
+            </a:r>
+          </a:p>
+          <a:p>
+            <a:r>
+              <a:t>calls — which is exactly what slide 9 asks NDRC to fund.</a:t>
             </a:r>
           </a:p>
         </p:txBody>
@@ -2105,7 +2213,86 @@
           <a:lstStyle/>
           <a:p>
             <a:r>
-              <a:t>The point is the middle two rows, not the ARR. 104 customers running 833 matters is under two per cent of the US evidence-heavy pool alone, before the UK or Europe contribute anything. Against one to five thousand target practices, none of these stages asks for market dominance — they ask for a channel that works and a price that holds. Each stage is gated on one thing: stage 1 a validated price, stage 2 the bar channel converting, stage 3 the model rebuilt on UK rates, stage 4 partners.</a:t>
+              <a:t>Both columns are the same case. That is the whole point of the slide —</a:t>
+            </a:r>
+          </a:p>
+          <a:p>
+            <a:r>
+              <a:t>it is not a claim about savings in the abstract, it is one matter costed twice.</a:t>
+            </a:r>
+          </a:p>
+          <a:p/>
+          <a:p>
+            <a:r>
+              <a:t>The buyer is not choosing between us and a competitor. They are choosing between us</a:t>
+            </a:r>
+          </a:p>
+          <a:p>
+            <a:r>
+              <a:t>and what they do today: a forensic vendor per device, processing and hosting charged</a:t>
+            </a:r>
+          </a:p>
+          <a:p>
+            <a:r>
+              <a:t>per gigabyte per MONTH for the life of the matter, an examiner by the hour, and their</a:t>
+            </a:r>
+          </a:p>
+          <a:p>
+            <a:r>
+              <a:t>own people stitching it together.</a:t>
+            </a:r>
+          </a:p>
+          <a:p/>
+          <a:p>
+            <a:r>
+              <a:t>Hosting is the line that breaks. A 435GB federal case is $4,350 a month, every month,</a:t>
+            </a:r>
+          </a:p>
+          <a:p>
+            <a:r>
+              <a:t>and the outcome that money buys is a spreadsheet. If one number lands, make it that.</a:t>
+            </a:r>
+          </a:p>
+          <a:p/>
+          <a:p>
+            <a:r>
+              <a:t>CONCEDE THE EXTRACTION BILL OUT LOUD. Devices still go to a vendor and we do not</a:t>
+            </a:r>
+          </a:p>
+          <a:p>
+            <a:r>
+              <a:t>displace that. Saying so is what makes the other numbers credible.</a:t>
+            </a:r>
+          </a:p>
+          <a:p/>
+          <a:p>
+            <a:r>
+              <a:t>Provenance if pressed: published 2026 rates — eDiscovery processing $3-10/GB and</a:t>
+            </a:r>
+          </a:p>
+          <a:p>
+            <a:r>
+              <a:t>hosting $5-15/GB/month from the Winter 2026 pricing survey; forensic vendor rate</a:t>
+            </a:r>
+          </a:p>
+          <a:p>
+            <a:r>
+              <a:t>cards; examiner analysis $300-500/h; case hours from RAND's National Public Defense</a:t>
+            </a:r>
+          </a:p>
+          <a:p>
+            <a:r>
+              <a:t>Workload Study; investigator $85-225/h, paralegal $100-200/h. The single modelled</a:t>
+            </a:r>
+          </a:p>
+          <a:p>
+            <a:r>
+              <a:t>assumption is the share of case hours that is evidence handling, and that half of it</a:t>
+            </a:r>
+          </a:p>
+          <a:p>
+            <a:r>
+              <a:t>goes. Say so plainly — do not present it as measured.</a:t>
             </a:r>
           </a:p>
         </p:txBody>
@@ -2175,54 +2362,7 @@
           <a:lstStyle/>
           <a:p>
             <a:r>
-              <a:t>LEAD WITH SIREN. It is the strongest founder-market-fit signal you</a:t>
-            </a:r>
-          </a:p>
-          <a:p>
-            <a:r>
-              <a:t>have. NDRC will know Siren — Irish, Enterprise Ireland-backed, same category. It</a:t>
-            </a:r>
-          </a:p>
-          <a:p>
-            <a:r>
-              <a:t>converts you from "engineer who built a thing" to "category-native founder who</a:t>
-            </a:r>
-          </a:p>
-          <a:p>
-            <a:r>
-              <a:t>has seen this market's buying behaviour for seven years." It pre-answers the</a:t>
-            </a:r>
-          </a:p>
-          <a:p>
-            <a:r>
-              <a:t>sales-cycle and procurement questions before they're asked.</a:t>
-            </a:r>
-          </a:p>
-          <a:p/>
-          <a:p>
-            <a:r>
-              <a:t>"Full-time on close" appears twice on purpose. Say it out loud as well as</a:t>
-            </a:r>
-          </a:p>
-          <a:p>
-            <a:r>
-              <a:t>printing it.</a:t>
-            </a:r>
-          </a:p>
-          <a:p/>
-          <a:p>
-            <a:r>
-              <a:t>DO NOT HIDE Alex being US-based. Address it in one line: the company is Irish,</a:t>
-            </a:r>
-          </a:p>
-          <a:p>
-            <a:r>
-              <a:t>the IP is Irish-owned, engineering is in Dublin, and the market is US-first —</a:t>
-            </a:r>
-          </a:p>
-          <a:p>
-            <a:r>
-              <a:t>which is why the domain founder is where the customers are.</a:t>
+              <a:t>The point is the middle two rows, not the ARR. 104 customers running 833 matters is under two per cent of the US evidence-heavy pool alone, before the UK or Europe contribute anything. Against one to five thousand target practices, none of these stages asks for market dominance — they ask for a channel that works and a price that holds. Each stage is gated on one thing: stage 1 a validated price, stage 2 the bar channel converting, stage 3 the model rebuilt on UK rates, stage 4 partners.</a:t>
             </a:r>
           </a:p>
         </p:txBody>
@@ -5462,6 +5602,620 @@
                 </a:solidFill>
                 <a:latin typeface="IBM Plex Mono"/>
               </a:rPr>
+              <a:t>TEAM</a:t>
+            </a:r>
+          </a:p>
+        </p:txBody>
+      </p:sp>
+      <p:sp>
+        <p:nvSpPr>
+          <p:cNvPr id="3" name="TextBox 2"/>
+          <p:cNvSpPr txBox="1"/>
+          <p:nvPr/>
+        </p:nvSpPr>
+        <p:spPr>
+          <a:xfrm>
+            <a:off x="777240" y="868680"/>
+            <a:ext cx="10637215" cy="914400"/>
+          </a:xfrm>
+          <a:prstGeom prst="rect">
+            <a:avLst/>
+          </a:prstGeom>
+          <a:noFill/>
+        </p:spPr>
+        <p:txBody>
+          <a:bodyPr wrap="square" lIns="0" rIns="0" tIns="0" bIns="0">
+            <a:spAutoFit/>
+          </a:bodyPr>
+          <a:lstStyle/>
+          <a:p>
+            <a:pPr algn="l">
+              <a:lnSpc>
+                <a:spcPct val="110000"/>
+              </a:lnSpc>
+              <a:spcBef>
+                <a:spcPts val="0"/>
+              </a:spcBef>
+              <a:spcAft>
+                <a:spcPts val="0"/>
+              </a:spcAft>
+            </a:pPr>
+            <a:r>
+              <a:rPr sz="3000" b="1" i="0">
+                <a:solidFill>
+                  <a:srgbClr val="F7F7F8"/>
+                </a:solidFill>
+                <a:latin typeface="Space Grotesk"/>
+              </a:rPr>
+              <a:t>We didn't research this market.
+We worked in it — from both sides.</a:t>
+            </a:r>
+          </a:p>
+        </p:txBody>
+      </p:sp>
+      <p:sp>
+        <p:nvSpPr>
+          <p:cNvPr id="4" name="Rectangle 3"/>
+          <p:cNvSpPr/>
+          <p:nvPr/>
+        </p:nvSpPr>
+        <p:spPr>
+          <a:xfrm>
+            <a:off x="777240" y="1965960"/>
+            <a:ext cx="1005840" cy="31750"/>
+          </a:xfrm>
+          <a:prstGeom prst="rect">
+            <a:avLst/>
+          </a:prstGeom>
+          <a:solidFill>
+            <a:srgbClr val="E33B4C"/>
+          </a:solidFill>
+          <a:ln>
+            <a:noFill/>
+          </a:ln>
+          <a:effectLst/>
+        </p:spPr>
+        <p:style>
+          <a:lnRef idx="1">
+            <a:schemeClr val="accent1"/>
+          </a:lnRef>
+          <a:fillRef idx="3">
+            <a:schemeClr val="accent1"/>
+          </a:fillRef>
+          <a:effectRef idx="2">
+            <a:schemeClr val="accent1"/>
+          </a:effectRef>
+          <a:fontRef idx="minor">
+            <a:schemeClr val="lt1"/>
+          </a:fontRef>
+        </p:style>
+        <p:txBody>
+          <a:bodyPr rtlCol="0" anchor="ctr"/>
+          <a:lstStyle/>
+          <a:p>
+            <a:pPr algn="ctr"/>
+          </a:p>
+        </p:txBody>
+      </p:sp>
+      <p:sp>
+        <p:nvSpPr>
+          <p:cNvPr id="5" name="TextBox 4"/>
+          <p:cNvSpPr txBox="1"/>
+          <p:nvPr/>
+        </p:nvSpPr>
+        <p:spPr>
+          <a:xfrm>
+            <a:off x="777240" y="2212848"/>
+            <a:ext cx="3291840" cy="3931920"/>
+          </a:xfrm>
+          <a:prstGeom prst="rect">
+            <a:avLst/>
+          </a:prstGeom>
+          <a:noFill/>
+        </p:spPr>
+        <p:txBody>
+          <a:bodyPr wrap="square" lIns="0" rIns="0" tIns="0" bIns="0">
+            <a:spAutoFit/>
+          </a:bodyPr>
+          <a:lstStyle/>
+          <a:p>
+            <a:pPr algn="l">
+              <a:lnSpc>
+                <a:spcPct val="128000"/>
+              </a:lnSpc>
+              <a:spcBef>
+                <a:spcPts val="0"/>
+              </a:spcBef>
+              <a:spcAft>
+                <a:spcPts val="0"/>
+              </a:spcAft>
+            </a:pPr>
+            <a:r>
+              <a:rPr sz="1900" b="1" i="0">
+                <a:solidFill>
+                  <a:srgbClr val="F7F7F8"/>
+                </a:solidFill>
+                <a:latin typeface="Space Grotesk"/>
+              </a:rPr>
+              <a:t>Neil Byrne</a:t>
+            </a:r>
+          </a:p>
+          <a:p>
+            <a:pPr algn="l">
+              <a:lnSpc>
+                <a:spcPct val="128000"/>
+              </a:lnSpc>
+              <a:spcBef>
+                <a:spcPts val="300"/>
+              </a:spcBef>
+              <a:spcAft>
+                <a:spcPts val="0"/>
+              </a:spcAft>
+            </a:pPr>
+            <a:r>
+              <a:rPr sz="1200" b="1" i="0">
+                <a:solidFill>
+                  <a:srgbClr val="E33B4C"/>
+                </a:solidFill>
+                <a:latin typeface="IBM Plex Sans"/>
+              </a:rPr>
+              <a:t>CEO</a:t>
+            </a:r>
+          </a:p>
+          <a:p>
+            <a:pPr algn="l">
+              <a:lnSpc>
+                <a:spcPct val="128000"/>
+              </a:lnSpc>
+              <a:spcBef>
+                <a:spcPts val="900"/>
+              </a:spcBef>
+              <a:spcAft>
+                <a:spcPts val="0"/>
+              </a:spcAft>
+            </a:pPr>
+            <a:r>
+              <a:rPr sz="1100" b="0" i="0">
+                <a:solidFill>
+                  <a:srgbClr val="9A9DA5"/>
+                </a:solidFill>
+                <a:latin typeface="IBM Plex Sans"/>
+              </a:rPr>
+              <a:t>Seven years at Siren, the Irish investigative-intelligence platform — the same category, selling to law enforcement, intelligence and financial-crime teams. </a:t>
+            </a:r>
+            <a:r>
+              <a:rPr sz="1100" b="1" i="0">
+                <a:solidFill>
+                  <a:srgbClr val="9A9DA5"/>
+                </a:solidFill>
+                <a:latin typeface="IBM Plex Sans"/>
+              </a:rPr>
+              <a:t>Solutions engineer: managed customer accounts and built the customisations each client needed to make the platform fit their process.</a:t>
+            </a:r>
+            <a:r>
+              <a:rPr sz="1100" b="0" i="0">
+                <a:solidFill>
+                  <a:srgbClr val="9A9DA5"/>
+                </a:solidFill>
+                <a:latin typeface="IBM Plex Sans"/>
+              </a:rPr>
+              <a:t> Spoke with hundreds of analysts across conference talks and deployments. Now a sales solutions engineer at Udemy across large-enterprise and strategic accounts — the same discipline at enterprise scale. 10+ years in data engineering and AI systems.</a:t>
+            </a:r>
+          </a:p>
+          <a:p>
+            <a:pPr algn="l">
+              <a:lnSpc>
+                <a:spcPct val="128000"/>
+              </a:lnSpc>
+              <a:spcBef>
+                <a:spcPts val="900"/>
+              </a:spcBef>
+              <a:spcAft>
+                <a:spcPts val="0"/>
+              </a:spcAft>
+            </a:pPr>
+            <a:r>
+              <a:rPr sz="1100" b="1" i="0">
+                <a:solidFill>
+                  <a:srgbClr val="E33B4C"/>
+                </a:solidFill>
+                <a:latin typeface="IBM Plex Sans"/>
+              </a:rPr>
+              <a:t>Full-time on close.</a:t>
+            </a:r>
+          </a:p>
+        </p:txBody>
+      </p:sp>
+      <p:sp>
+        <p:nvSpPr>
+          <p:cNvPr id="6" name="TextBox 5"/>
+          <p:cNvSpPr txBox="1"/>
+          <p:nvPr/>
+        </p:nvSpPr>
+        <p:spPr>
+          <a:xfrm>
+            <a:off x="4480560" y="2212848"/>
+            <a:ext cx="3291840" cy="3931920"/>
+          </a:xfrm>
+          <a:prstGeom prst="rect">
+            <a:avLst/>
+          </a:prstGeom>
+          <a:noFill/>
+        </p:spPr>
+        <p:txBody>
+          <a:bodyPr wrap="square" lIns="0" rIns="0" tIns="0" bIns="0">
+            <a:spAutoFit/>
+          </a:bodyPr>
+          <a:lstStyle/>
+          <a:p>
+            <a:pPr algn="l">
+              <a:lnSpc>
+                <a:spcPct val="128000"/>
+              </a:lnSpc>
+              <a:spcBef>
+                <a:spcPts val="0"/>
+              </a:spcBef>
+              <a:spcAft>
+                <a:spcPts val="0"/>
+              </a:spcAft>
+            </a:pPr>
+            <a:r>
+              <a:rPr sz="1900" b="1" i="0">
+                <a:solidFill>
+                  <a:srgbClr val="F7F7F8"/>
+                </a:solidFill>
+                <a:latin typeface="Space Grotesk"/>
+              </a:rPr>
+              <a:t>Conor Bowles</a:t>
+            </a:r>
+          </a:p>
+          <a:p>
+            <a:pPr algn="l">
+              <a:lnSpc>
+                <a:spcPct val="128000"/>
+              </a:lnSpc>
+              <a:spcBef>
+                <a:spcPts val="300"/>
+              </a:spcBef>
+              <a:spcAft>
+                <a:spcPts val="0"/>
+              </a:spcAft>
+            </a:pPr>
+            <a:r>
+              <a:rPr sz="1200" b="1" i="0">
+                <a:solidFill>
+                  <a:srgbClr val="E33B4C"/>
+                </a:solidFill>
+                <a:latin typeface="IBM Plex Sans"/>
+              </a:rPr>
+              <a:t>CTO</a:t>
+            </a:r>
+          </a:p>
+          <a:p>
+            <a:pPr algn="l">
+              <a:lnSpc>
+                <a:spcPct val="128000"/>
+              </a:lnSpc>
+              <a:spcBef>
+                <a:spcPts val="900"/>
+              </a:spcBef>
+              <a:spcAft>
+                <a:spcPts val="0"/>
+              </a:spcAft>
+            </a:pPr>
+            <a:r>
+              <a:rPr sz="1100" b="1" i="0">
+                <a:solidFill>
+                  <a:srgbClr val="9A9DA5"/>
+                </a:solidFill>
+                <a:latin typeface="IBM Plex Sans"/>
+              </a:rPr>
+              <a:t>Architect of the case model.</a:t>
+            </a:r>
+            <a:r>
+              <a:rPr sz="1100" b="0" i="0">
+                <a:solidFill>
+                  <a:srgbClr val="9A9DA5"/>
+                </a:solidFill>
+                <a:latin typeface="IBM Plex Sans"/>
+              </a:rPr>
+              <a:t> The approach the platform rests on is his: extract entities and events from evidence with an LLM at ingestion, resolve them into a graph, and query that concrete structure afterwards — so an answer is a traversal over modelled evidence, not a retrieval over text. He wrote the first commit and has led engineering since. </a:t>
+            </a:r>
+            <a:r>
+              <a:rPr sz="1100" b="1" i="0">
+                <a:solidFill>
+                  <a:srgbClr val="9A9DA5"/>
+                </a:solidFill>
+                <a:latin typeface="IBM Plex Sans"/>
+              </a:rPr>
+              <a:t>Drives the enterprise platform</a:t>
+            </a:r>
+            <a:r>
+              <a:rPr sz="1100" b="0" i="0">
+                <a:solidFill>
+                  <a:srgbClr val="9A9DA5"/>
+                </a:solidFill>
+                <a:latin typeface="IBM Plex Sans"/>
+              </a:rPr>
+              <a:t>, while features are proven on live casework first and promoted once they mature — so nothing reaches the deployable product until it has survived a real matter.</a:t>
+            </a:r>
+          </a:p>
+          <a:p>
+            <a:pPr algn="l">
+              <a:lnSpc>
+                <a:spcPct val="128000"/>
+              </a:lnSpc>
+              <a:spcBef>
+                <a:spcPts val="900"/>
+              </a:spcBef>
+              <a:spcAft>
+                <a:spcPts val="0"/>
+              </a:spcAft>
+            </a:pPr>
+            <a:r>
+              <a:rPr sz="1100" b="1" i="0">
+                <a:solidFill>
+                  <a:srgbClr val="E33B4C"/>
+                </a:solidFill>
+                <a:latin typeface="IBM Plex Sans"/>
+              </a:rPr>
+              <a:t>Full-time on close.</a:t>
+            </a:r>
+          </a:p>
+        </p:txBody>
+      </p:sp>
+      <p:sp>
+        <p:nvSpPr>
+          <p:cNvPr id="7" name="TextBox 6"/>
+          <p:cNvSpPr txBox="1"/>
+          <p:nvPr/>
+        </p:nvSpPr>
+        <p:spPr>
+          <a:xfrm>
+            <a:off x="8183880" y="2212848"/>
+            <a:ext cx="3291840" cy="3931920"/>
+          </a:xfrm>
+          <a:prstGeom prst="rect">
+            <a:avLst/>
+          </a:prstGeom>
+          <a:noFill/>
+        </p:spPr>
+        <p:txBody>
+          <a:bodyPr wrap="square" lIns="0" rIns="0" tIns="0" bIns="0">
+            <a:spAutoFit/>
+          </a:bodyPr>
+          <a:lstStyle/>
+          <a:p>
+            <a:pPr algn="l">
+              <a:lnSpc>
+                <a:spcPct val="128000"/>
+              </a:lnSpc>
+              <a:spcBef>
+                <a:spcPts val="0"/>
+              </a:spcBef>
+              <a:spcAft>
+                <a:spcPts val="0"/>
+              </a:spcAft>
+            </a:pPr>
+            <a:r>
+              <a:rPr sz="1900" b="1" i="0">
+                <a:solidFill>
+                  <a:srgbClr val="F7F7F8"/>
+                </a:solidFill>
+                <a:latin typeface="Space Grotesk"/>
+              </a:rPr>
+              <a:t>Alexandra Solórzano</a:t>
+            </a:r>
+          </a:p>
+          <a:p>
+            <a:pPr algn="l">
+              <a:lnSpc>
+                <a:spcPct val="128000"/>
+              </a:lnSpc>
+              <a:spcBef>
+                <a:spcPts val="300"/>
+              </a:spcBef>
+              <a:spcAft>
+                <a:spcPts val="0"/>
+              </a:spcAft>
+            </a:pPr>
+            <a:r>
+              <a:rPr sz="1200" b="1" i="0">
+                <a:solidFill>
+                  <a:srgbClr val="E33B4C"/>
+                </a:solidFill>
+                <a:latin typeface="IBM Plex Sans"/>
+              </a:rPr>
+              <a:t>CPO</a:t>
+            </a:r>
+          </a:p>
+          <a:p>
+            <a:pPr algn="l">
+              <a:lnSpc>
+                <a:spcPct val="128000"/>
+              </a:lnSpc>
+              <a:spcBef>
+                <a:spcPts val="900"/>
+              </a:spcBef>
+              <a:spcAft>
+                <a:spcPts val="0"/>
+              </a:spcAft>
+            </a:pPr>
+            <a:r>
+              <a:rPr sz="1100" b="0" i="0">
+                <a:solidFill>
+                  <a:srgbClr val="9A9DA5"/>
+                </a:solidFill>
+                <a:latin typeface="IBM Plex Sans"/>
+              </a:rPr>
+              <a:t>10+ years as a licensed private investigator on federal criminal defence and financial fraud casework — and the product's direction, daily. </a:t>
+            </a:r>
+            <a:r>
+              <a:rPr sz="1100" b="1" i="0">
+                <a:solidFill>
+                  <a:srgbClr val="9A9DA5"/>
+                </a:solidFill>
+                <a:latin typeface="IBM Plex Sans"/>
+              </a:rPr>
+              <a:t>Multiple calls a week; the backlog is generated from live matters as she works them</a:t>
+            </a:r>
+            <a:r>
+              <a:rPr sz="1100" b="0" i="0">
+                <a:solidFill>
+                  <a:srgbClr val="9A9DA5"/>
+                </a:solidFill>
+                <a:latin typeface="IBM Plex Sans"/>
+              </a:rPr>
+              <a:t>, which is why development has never run on a roadmap invented in advance. A grounded visionary: every feature traces to a real case, and she has run federal cases to completion inside the platform. US-based.</a:t>
+            </a:r>
+          </a:p>
+          <a:p>
+            <a:pPr algn="l">
+              <a:lnSpc>
+                <a:spcPct val="128000"/>
+              </a:lnSpc>
+              <a:spcBef>
+                <a:spcPts val="900"/>
+              </a:spcBef>
+              <a:spcAft>
+                <a:spcPts val="0"/>
+              </a:spcAft>
+            </a:pPr>
+            <a:r>
+              <a:rPr sz="1100" b="1" i="0">
+                <a:solidFill>
+                  <a:srgbClr val="E33B4C"/>
+                </a:solidFill>
+                <a:latin typeface="IBM Plex Sans"/>
+              </a:rPr>
+              <a:t>The domain authority — and the customer the product was built for.</a:t>
+            </a:r>
+          </a:p>
+        </p:txBody>
+      </p:sp>
+      <p:sp>
+        <p:nvSpPr>
+          <p:cNvPr id="8" name="TextBox 7"/>
+          <p:cNvSpPr txBox="1"/>
+          <p:nvPr/>
+        </p:nvSpPr>
+        <p:spPr>
+          <a:xfrm>
+            <a:off x="777240" y="6144768"/>
+            <a:ext cx="10637215" cy="658368"/>
+          </a:xfrm>
+          <a:prstGeom prst="rect">
+            <a:avLst/>
+          </a:prstGeom>
+          <a:noFill/>
+        </p:spPr>
+        <p:txBody>
+          <a:bodyPr wrap="square" lIns="0" rIns="0" tIns="0" bIns="0">
+            <a:spAutoFit/>
+          </a:bodyPr>
+          <a:lstStyle/>
+          <a:p>
+            <a:pPr algn="l">
+              <a:lnSpc>
+                <a:spcPct val="128000"/>
+              </a:lnSpc>
+              <a:spcBef>
+                <a:spcPts val="0"/>
+              </a:spcBef>
+              <a:spcAft>
+                <a:spcPts val="0"/>
+              </a:spcAft>
+            </a:pPr>
+            <a:r>
+              <a:rPr sz="1350" b="0" i="0">
+                <a:solidFill>
+                  <a:srgbClr val="F7F7F8"/>
+                </a:solidFill>
+                <a:latin typeface="IBM Plex Sans"/>
+              </a:rPr>
+              <a:t>Seven years building investigative intelligence software for enterprise buyers, and a decade running federal casework as the kind of investigator who has to live with the result. </a:t>
+            </a:r>
+            <a:r>
+              <a:rPr sz="1350" b="1" i="0">
+                <a:solidFill>
+                  <a:srgbClr val="F7F7F8"/>
+                </a:solidFill>
+                <a:latin typeface="IBM Plex Sans"/>
+              </a:rPr>
+              <a:t>Our CPO has run federal cases to completion inside this platform.</a:t>
+            </a:r>
+          </a:p>
+        </p:txBody>
+      </p:sp>
+    </p:spTree>
+  </p:cSld>
+  <p:clrMapOvr>
+    <a:masterClrMapping/>
+  </p:clrMapOvr>
+</p:sld>
+</file>
+
+<file path=ppt/slides/slide11.xml><?xml version="1.0" encoding="utf-8"?>
+<p:sld xmlns:a="http://schemas.openxmlformats.org/drawingml/2006/main" xmlns:p="http://schemas.openxmlformats.org/presentationml/2006/main" xmlns:r="http://schemas.openxmlformats.org/officeDocument/2006/relationships">
+  <p:cSld>
+    <p:bg>
+      <p:bgPr>
+        <a:solidFill>
+          <a:srgbClr val="0B0C0F"/>
+        </a:solidFill>
+        <a:effectLst/>
+      </p:bgPr>
+    </p:bg>
+    <p:spTree>
+      <p:nvGrpSpPr>
+        <p:cNvPr id="1" name=""/>
+        <p:cNvGrpSpPr/>
+        <p:nvPr/>
+      </p:nvGrpSpPr>
+      <p:grpSpPr/>
+      <p:sp>
+        <p:nvSpPr>
+          <p:cNvPr id="2" name="TextBox 1"/>
+          <p:cNvSpPr txBox="1"/>
+          <p:nvPr/>
+        </p:nvSpPr>
+        <p:spPr>
+          <a:xfrm>
+            <a:off x="777240" y="502920"/>
+            <a:ext cx="10637215" cy="274320"/>
+          </a:xfrm>
+          <a:prstGeom prst="rect">
+            <a:avLst/>
+          </a:prstGeom>
+          <a:noFill/>
+        </p:spPr>
+        <p:txBody>
+          <a:bodyPr wrap="square" lIns="0" rIns="0" tIns="0" bIns="0">
+            <a:spAutoFit/>
+          </a:bodyPr>
+          <a:lstStyle/>
+          <a:p>
+            <a:pPr algn="l">
+              <a:lnSpc>
+                <a:spcPct val="128000"/>
+              </a:lnSpc>
+              <a:spcBef>
+                <a:spcPts val="0"/>
+              </a:spcBef>
+              <a:spcAft>
+                <a:spcPts val="0"/>
+              </a:spcAft>
+              <a:defRPr>
+                <a:latin typeface="IBM Plex Mono"/>
+              </a:defRPr>
+            </a:pPr>
+            <a:r>
+              <a:rPr sz="1100" b="1" i="0">
+                <a:solidFill>
+                  <a:srgbClr val="E33B4C"/>
+                </a:solidFill>
+                <a:latin typeface="IBM Plex Mono"/>
+              </a:rPr>
               <a:t>STATUS AND TRACTION</a:t>
             </a:r>
           </a:p>
@@ -6004,7 +6758,7 @@
 </p:sld>
 </file>
 
-<file path=ppt/slides/slide11.xml><?xml version="1.0" encoding="utf-8"?>
+<file path=ppt/slides/slide12.xml><?xml version="1.0" encoding="utf-8"?>
 <p:sld xmlns:a="http://schemas.openxmlformats.org/drawingml/2006/main" xmlns:p="http://schemas.openxmlformats.org/presentationml/2006/main" xmlns:r="http://schemas.openxmlformats.org/officeDocument/2006/relationships">
   <p:cSld>
     <p:bg>
@@ -9082,7 +9836,7 @@
                           </a:solidFill>
                           <a:latin typeface="IBM Plex Sans"/>
                         </a:rPr>
-                        <a:t>Traverses the model and returns the actual matching set, every claim carrying its page — then runs tools: Loupes, groupings, timelines, outputs</a:t>
+                        <a:t>Traverses a model of the whole case and returns the complete matching set — every claim cited, and the citation covers all of it because retrieval was not a sample</a:t>
                       </a:r>
                     </a:p>
                   </a:txBody>
@@ -9408,8 +10162,8 @@
         </p:nvSpPr>
         <p:spPr>
           <a:xfrm>
-            <a:off x="777240" y="5779008"/>
-            <a:ext cx="10637215" cy="1005840"/>
+            <a:off x="777240" y="5870448"/>
+            <a:ext cx="10637215" cy="914400"/>
           </a:xfrm>
           <a:prstGeom prst="rect">
             <a:avLst/>
@@ -9554,7 +10308,7 @@
                 </a:solidFill>
                 <a:latin typeface="IBM Plex Mono"/>
               </a:rPr>
-              <a:t>MARKET AND LEAD CUSTOMER</a:t>
+              <a:t>THE FIELD</a:t>
             </a:r>
           </a:p>
         </p:txBody>
@@ -9593,14 +10347,13 @@
               </a:spcAft>
             </a:pPr>
             <a:r>
-              <a:rPr sz="2900" b="1" i="0">
+              <a:rPr sz="3000" b="1" i="0">
                 <a:solidFill>
                   <a:srgbClr val="F7F7F8"/>
                 </a:solidFill>
                 <a:latin typeface="Space Grotesk"/>
               </a:rPr>
-              <a:t>Every feature was requested by a working
-investigator on a live case.</a:t>
+              <a:t>Forty-seven platforms. The intersection is empty.</a:t>
             </a:r>
           </a:p>
         </p:txBody>
@@ -9657,6 +10410,714 @@
         </p:nvSpPr>
         <p:spPr>
           <a:xfrm>
+            <a:off x="777240" y="2029968"/>
+            <a:ext cx="10637215" cy="457200"/>
+          </a:xfrm>
+          <a:prstGeom prst="rect">
+            <a:avLst/>
+          </a:prstGeom>
+          <a:noFill/>
+        </p:spPr>
+        <p:txBody>
+          <a:bodyPr wrap="square" lIns="0" rIns="0" tIns="0" bIns="0">
+            <a:spAutoFit/>
+          </a:bodyPr>
+          <a:lstStyle/>
+          <a:p>
+            <a:pPr algn="l">
+              <a:lnSpc>
+                <a:spcPct val="128000"/>
+              </a:lnSpc>
+              <a:spcBef>
+                <a:spcPts val="0"/>
+              </a:spcBef>
+              <a:spcAft>
+                <a:spcPts val="0"/>
+              </a:spcAft>
+            </a:pPr>
+            <a:r>
+              <a:rPr sz="1400" b="0" i="0">
+                <a:solidFill>
+                  <a:srgbClr val="F7F7F8"/>
+                </a:solidFill>
+                <a:latin typeface="IBM Plex Sans"/>
+              </a:rPr>
+              <a:t>We assessed the category on thirty axes before we built. It splits into two halves that never meet — and the buyer sits in the gap between them.</a:t>
+            </a:r>
+          </a:p>
+        </p:txBody>
+      </p:sp>
+      <p:sp>
+        <p:nvSpPr>
+          <p:cNvPr id="6" name="Rectangle 5"/>
+          <p:cNvSpPr/>
+          <p:nvPr/>
+        </p:nvSpPr>
+        <p:spPr>
+          <a:xfrm>
+            <a:off x="777240" y="2670048"/>
+            <a:ext cx="3520440" cy="2606040"/>
+          </a:xfrm>
+          <a:prstGeom prst="rect">
+            <a:avLst/>
+          </a:prstGeom>
+          <a:solidFill>
+            <a:srgbClr val="111216"/>
+          </a:solidFill>
+          <a:ln w="15875">
+            <a:solidFill>
+              <a:srgbClr val="3B3D44"/>
+            </a:solidFill>
+          </a:ln>
+          <a:effectLst/>
+        </p:spPr>
+        <p:style>
+          <a:lnRef idx="1">
+            <a:schemeClr val="accent1"/>
+          </a:lnRef>
+          <a:fillRef idx="3">
+            <a:schemeClr val="accent1"/>
+          </a:fillRef>
+          <a:effectRef idx="2">
+            <a:schemeClr val="accent1"/>
+          </a:effectRef>
+          <a:fontRef idx="minor">
+            <a:schemeClr val="lt1"/>
+          </a:fontRef>
+        </p:style>
+        <p:txBody>
+          <a:bodyPr rtlCol="0" anchor="ctr"/>
+          <a:lstStyle/>
+          <a:p>
+            <a:pPr algn="ctr"/>
+          </a:p>
+        </p:txBody>
+      </p:sp>
+      <p:sp>
+        <p:nvSpPr>
+          <p:cNvPr id="7" name="TextBox 6"/>
+          <p:cNvSpPr txBox="1"/>
+          <p:nvPr/>
+        </p:nvSpPr>
+        <p:spPr>
+          <a:xfrm>
+            <a:off x="941832" y="2798064"/>
+            <a:ext cx="3191256" cy="2377440"/>
+          </a:xfrm>
+          <a:prstGeom prst="rect">
+            <a:avLst/>
+          </a:prstGeom>
+          <a:noFill/>
+        </p:spPr>
+        <p:txBody>
+          <a:bodyPr wrap="square" lIns="0" rIns="0" tIns="0" bIns="0">
+            <a:spAutoFit/>
+          </a:bodyPr>
+          <a:lstStyle/>
+          <a:p>
+            <a:pPr algn="l">
+              <a:lnSpc>
+                <a:spcPct val="128000"/>
+              </a:lnSpc>
+              <a:spcBef>
+                <a:spcPts val="0"/>
+              </a:spcBef>
+              <a:spcAft>
+                <a:spcPts val="0"/>
+              </a:spcAft>
+            </a:pPr>
+            <a:r>
+              <a:rPr sz="1400" b="1" i="0">
+                <a:solidFill>
+                  <a:srgbClr val="F7F7F8"/>
+                </a:solidFill>
+                <a:latin typeface="Space Grotesk"/>
+              </a:rPr>
+              <a:t>They model the evidence — and won't sell it to you</a:t>
+            </a:r>
+          </a:p>
+          <a:p>
+            <a:pPr algn="l">
+              <a:lnSpc>
+                <a:spcPct val="128000"/>
+              </a:lnSpc>
+              <a:spcBef>
+                <a:spcPts val="700"/>
+              </a:spcBef>
+              <a:spcAft>
+                <a:spcPts val="0"/>
+              </a:spcAft>
+            </a:pPr>
+            <a:r>
+              <a:rPr sz="1050" b="0" i="0">
+                <a:solidFill>
+                  <a:srgbClr val="E33B4C"/>
+                </a:solidFill>
+                <a:latin typeface="IBM Plex Mono"/>
+              </a:rPr>
+              <a:t>Cellebrite · Magnet · Palantir · Pathfinder</a:t>
+            </a:r>
+          </a:p>
+          <a:p>
+            <a:pPr algn="l">
+              <a:lnSpc>
+                <a:spcPct val="128000"/>
+              </a:lnSpc>
+              <a:spcBef>
+                <a:spcPts val="800"/>
+              </a:spcBef>
+              <a:spcAft>
+                <a:spcPts val="0"/>
+              </a:spcAft>
+            </a:pPr>
+            <a:r>
+              <a:rPr sz="1150" b="0" i="0">
+                <a:solidFill>
+                  <a:srgbClr val="9A9DA5"/>
+                </a:solidFill>
+                <a:latin typeface="IBM Plex Sans"/>
+              </a:rPr>
+              <a:t>Real structure, real graphs, and they own the extraction. Pathfinder is marketed solely to law enforcement and intelligence; GrayKey is not sold to the private sector at all. What a defence practice can buy is examiner tooling — five kinds of device, no kinds of document.</a:t>
+            </a:r>
+          </a:p>
+        </p:txBody>
+      </p:sp>
+      <p:sp>
+        <p:nvSpPr>
+          <p:cNvPr id="8" name="Rectangle 7"/>
+          <p:cNvSpPr/>
+          <p:nvPr/>
+        </p:nvSpPr>
+        <p:spPr>
+          <a:xfrm>
+            <a:off x="4480560" y="2670048"/>
+            <a:ext cx="3520440" cy="2606040"/>
+          </a:xfrm>
+          <a:prstGeom prst="rect">
+            <a:avLst/>
+          </a:prstGeom>
+          <a:solidFill>
+            <a:srgbClr val="111216"/>
+          </a:solidFill>
+          <a:ln w="15875">
+            <a:solidFill>
+              <a:srgbClr val="3B3D44"/>
+            </a:solidFill>
+          </a:ln>
+          <a:effectLst/>
+        </p:spPr>
+        <p:style>
+          <a:lnRef idx="1">
+            <a:schemeClr val="accent1"/>
+          </a:lnRef>
+          <a:fillRef idx="3">
+            <a:schemeClr val="accent1"/>
+          </a:fillRef>
+          <a:effectRef idx="2">
+            <a:schemeClr val="accent1"/>
+          </a:effectRef>
+          <a:fontRef idx="minor">
+            <a:schemeClr val="lt1"/>
+          </a:fontRef>
+        </p:style>
+        <p:txBody>
+          <a:bodyPr rtlCol="0" anchor="ctr"/>
+          <a:lstStyle/>
+          <a:p>
+            <a:pPr algn="ctr"/>
+          </a:p>
+        </p:txBody>
+      </p:sp>
+      <p:sp>
+        <p:nvSpPr>
+          <p:cNvPr id="9" name="TextBox 8"/>
+          <p:cNvSpPr txBox="1"/>
+          <p:nvPr/>
+        </p:nvSpPr>
+        <p:spPr>
+          <a:xfrm>
+            <a:off x="4645152" y="2798064"/>
+            <a:ext cx="3191256" cy="2377440"/>
+          </a:xfrm>
+          <a:prstGeom prst="rect">
+            <a:avLst/>
+          </a:prstGeom>
+          <a:noFill/>
+        </p:spPr>
+        <p:txBody>
+          <a:bodyPr wrap="square" lIns="0" rIns="0" tIns="0" bIns="0">
+            <a:spAutoFit/>
+          </a:bodyPr>
+          <a:lstStyle/>
+          <a:p>
+            <a:pPr algn="l">
+              <a:lnSpc>
+                <a:spcPct val="128000"/>
+              </a:lnSpc>
+              <a:spcBef>
+                <a:spcPts val="0"/>
+              </a:spcBef>
+              <a:spcAft>
+                <a:spcPts val="0"/>
+              </a:spcAft>
+            </a:pPr>
+            <a:r>
+              <a:rPr sz="1400" b="1" i="0">
+                <a:solidFill>
+                  <a:srgbClr val="F7F7F8"/>
+                </a:solidFill>
+                <a:latin typeface="Space Grotesk"/>
+              </a:rPr>
+              <a:t>They'll sell to you — and treat a phone as an attachment</a:t>
+            </a:r>
+          </a:p>
+          <a:p>
+            <a:pPr algn="l">
+              <a:lnSpc>
+                <a:spcPct val="128000"/>
+              </a:lnSpc>
+              <a:spcBef>
+                <a:spcPts val="700"/>
+              </a:spcBef>
+              <a:spcAft>
+                <a:spcPts val="0"/>
+              </a:spcAft>
+            </a:pPr>
+            <a:r>
+              <a:rPr sz="1050" b="0" i="0">
+                <a:solidFill>
+                  <a:srgbClr val="E33B4C"/>
+                </a:solidFill>
+                <a:latin typeface="IBM Plex Mono"/>
+              </a:rPr>
+              <a:t>Relativity · Everlaw · DISCO · Reveal · Harvey · CoCounsel</a:t>
+            </a:r>
+          </a:p>
+          <a:p>
+            <a:pPr algn="l">
+              <a:lnSpc>
+                <a:spcPct val="128000"/>
+              </a:lnSpc>
+              <a:spcBef>
+                <a:spcPts val="800"/>
+              </a:spcBef>
+              <a:spcAft>
+                <a:spcPts val="0"/>
+              </a:spcAft>
+            </a:pPr>
+            <a:r>
+              <a:rPr sz="1150" b="0" i="0">
+                <a:solidFill>
+                  <a:srgbClr val="9A9DA5"/>
+                </a:solidFill>
+                <a:latin typeface="IBM Plex Sans"/>
+              </a:rPr>
+              <a:t>Excellent at documents, purchasable, and the phone data does not survive the door. Call logs emerge as Excel, conversations are split every thousand messages, multi-device extractions are unsupported.</a:t>
+            </a:r>
+          </a:p>
+        </p:txBody>
+      </p:sp>
+      <p:sp>
+        <p:nvSpPr>
+          <p:cNvPr id="10" name="Rectangle 9"/>
+          <p:cNvSpPr/>
+          <p:nvPr/>
+        </p:nvSpPr>
+        <p:spPr>
+          <a:xfrm>
+            <a:off x="8183880" y="2670048"/>
+            <a:ext cx="3520440" cy="2606040"/>
+          </a:xfrm>
+          <a:prstGeom prst="rect">
+            <a:avLst/>
+          </a:prstGeom>
+          <a:solidFill>
+            <a:srgbClr val="111216"/>
+          </a:solidFill>
+          <a:ln w="15875">
+            <a:solidFill>
+              <a:srgbClr val="B41624"/>
+            </a:solidFill>
+          </a:ln>
+          <a:effectLst/>
+        </p:spPr>
+        <p:style>
+          <a:lnRef idx="1">
+            <a:schemeClr val="accent1"/>
+          </a:lnRef>
+          <a:fillRef idx="3">
+            <a:schemeClr val="accent1"/>
+          </a:fillRef>
+          <a:effectRef idx="2">
+            <a:schemeClr val="accent1"/>
+          </a:effectRef>
+          <a:fontRef idx="minor">
+            <a:schemeClr val="lt1"/>
+          </a:fontRef>
+        </p:style>
+        <p:txBody>
+          <a:bodyPr rtlCol="0" anchor="ctr"/>
+          <a:lstStyle/>
+          <a:p>
+            <a:pPr algn="ctr"/>
+          </a:p>
+        </p:txBody>
+      </p:sp>
+      <p:sp>
+        <p:nvSpPr>
+          <p:cNvPr id="11" name="TextBox 10"/>
+          <p:cNvSpPr txBox="1"/>
+          <p:nvPr/>
+        </p:nvSpPr>
+        <p:spPr>
+          <a:xfrm>
+            <a:off x="8348472" y="2798064"/>
+            <a:ext cx="3191256" cy="2377440"/>
+          </a:xfrm>
+          <a:prstGeom prst="rect">
+            <a:avLst/>
+          </a:prstGeom>
+          <a:noFill/>
+        </p:spPr>
+        <p:txBody>
+          <a:bodyPr wrap="square" lIns="0" rIns="0" tIns="0" bIns="0">
+            <a:spAutoFit/>
+          </a:bodyPr>
+          <a:lstStyle/>
+          <a:p>
+            <a:pPr algn="l">
+              <a:lnSpc>
+                <a:spcPct val="128000"/>
+              </a:lnSpc>
+              <a:spcBef>
+                <a:spcPts val="0"/>
+              </a:spcBef>
+              <a:spcAft>
+                <a:spcPts val="0"/>
+              </a:spcAft>
+            </a:pPr>
+            <a:r>
+              <a:rPr sz="1400" b="1" i="0">
+                <a:solidFill>
+                  <a:srgbClr val="F7F7F8"/>
+                </a:solidFill>
+                <a:latin typeface="Space Grotesk"/>
+              </a:rPr>
+              <a:t>Same buyer as us — and no case model</a:t>
+            </a:r>
+          </a:p>
+          <a:p>
+            <a:pPr algn="l">
+              <a:lnSpc>
+                <a:spcPct val="128000"/>
+              </a:lnSpc>
+              <a:spcBef>
+                <a:spcPts val="700"/>
+              </a:spcBef>
+              <a:spcAft>
+                <a:spcPts val="0"/>
+              </a:spcAft>
+            </a:pPr>
+            <a:r>
+              <a:rPr sz="1050" b="0" i="0">
+                <a:solidFill>
+                  <a:srgbClr val="E33B4C"/>
+                </a:solidFill>
+                <a:latin typeface="IBM Plex Mono"/>
+              </a:rPr>
+              <a:t>TrialKit · Matey · JusticeText · Longeye</a:t>
+            </a:r>
+          </a:p>
+          <a:p>
+            <a:pPr algn="l">
+              <a:lnSpc>
+                <a:spcPct val="128000"/>
+              </a:lnSpc>
+              <a:spcBef>
+                <a:spcPts val="800"/>
+              </a:spcBef>
+              <a:spcAft>
+                <a:spcPts val="0"/>
+              </a:spcAft>
+            </a:pPr>
+            <a:r>
+              <a:rPr sz="1150" b="0" i="0">
+                <a:solidFill>
+                  <a:srgbClr val="9A9DA5"/>
+                </a:solidFill>
+                <a:latin typeface="IBM Plex Sans"/>
+              </a:rPr>
+              <a:t>Four funded companies selling AI to criminal defence, $2.5–7.5M seed each, with the bar associations and the certifications. </a:t>
+            </a:r>
+            <a:r>
+              <a:rPr sz="1150" b="1" i="0">
+                <a:solidFill>
+                  <a:srgbClr val="9A9DA5"/>
+                </a:solidFill>
+                <a:latin typeface="IBM Plex Sans"/>
+              </a:rPr>
+              <a:t>None of them has a graph.</a:t>
+            </a:r>
+            <a:r>
+              <a:rPr sz="1150" b="0" i="0">
+                <a:solidFill>
+                  <a:srgbClr val="9A9DA5"/>
+                </a:solidFill>
+                <a:latin typeface="IBM Plex Sans"/>
+              </a:rPr>
+              <a:t> All four answer by retrieval.</a:t>
+            </a:r>
+          </a:p>
+        </p:txBody>
+      </p:sp>
+      <p:sp>
+        <p:nvSpPr>
+          <p:cNvPr id="12" name="TextBox 11"/>
+          <p:cNvSpPr txBox="1"/>
+          <p:nvPr/>
+        </p:nvSpPr>
+        <p:spPr>
+          <a:xfrm>
+            <a:off x="777240" y="5486400"/>
+            <a:ext cx="10637215" cy="1097280"/>
+          </a:xfrm>
+          <a:prstGeom prst="rect">
+            <a:avLst/>
+          </a:prstGeom>
+          <a:noFill/>
+        </p:spPr>
+        <p:txBody>
+          <a:bodyPr wrap="square" lIns="0" rIns="0" tIns="0" bIns="0">
+            <a:spAutoFit/>
+          </a:bodyPr>
+          <a:lstStyle/>
+          <a:p>
+            <a:pPr algn="l">
+              <a:lnSpc>
+                <a:spcPct val="128000"/>
+              </a:lnSpc>
+              <a:spcBef>
+                <a:spcPts val="0"/>
+              </a:spcBef>
+              <a:spcAft>
+                <a:spcPts val="0"/>
+              </a:spcAft>
+            </a:pPr>
+            <a:r>
+              <a:rPr sz="1500" b="1" i="0">
+                <a:solidFill>
+                  <a:srgbClr val="F7F7F8"/>
+                </a:solidFill>
+                <a:latin typeface="IBM Plex Sans"/>
+              </a:rPr>
+              <a:t>Not one of the forty-seven holds device data, financial records and documents in a single model.</a:t>
+            </a:r>
+            <a:r>
+              <a:rPr sz="1500" b="0" i="0">
+                <a:solidFill>
+                  <a:srgbClr val="F7F7F8"/>
+                </a:solidFill>
+                <a:latin typeface="IBM Plex Sans"/>
+              </a:rPr>
+              <a:t> That is not an accident of scoring — modelling evidence and serving this buyer are different problems sold to different customers, and whoever solved one has no commercial reason to solve the other.</a:t>
+            </a:r>
+          </a:p>
+          <a:p>
+            <a:pPr algn="l">
+              <a:lnSpc>
+                <a:spcPct val="128000"/>
+              </a:lnSpc>
+              <a:spcBef>
+                <a:spcPts val="900"/>
+              </a:spcBef>
+              <a:spcAft>
+                <a:spcPts val="0"/>
+              </a:spcAft>
+            </a:pPr>
+            <a:r>
+              <a:rPr sz="1300" b="1" i="0">
+                <a:solidFill>
+                  <a:srgbClr val="E33B4C"/>
+                </a:solidFill>
+                <a:latin typeface="IBM Plex Sans"/>
+              </a:rPr>
+              <a:t>We know because we went looking for a platform to run live federal casework, tried several, and none could work the case.</a:t>
+            </a:r>
+          </a:p>
+        </p:txBody>
+      </p:sp>
+    </p:spTree>
+  </p:cSld>
+  <p:clrMapOvr>
+    <a:masterClrMapping/>
+  </p:clrMapOvr>
+</p:sld>
+</file>
+
+<file path=ppt/slides/slide7.xml><?xml version="1.0" encoding="utf-8"?>
+<p:sld xmlns:a="http://schemas.openxmlformats.org/drawingml/2006/main" xmlns:p="http://schemas.openxmlformats.org/presentationml/2006/main" xmlns:r="http://schemas.openxmlformats.org/officeDocument/2006/relationships">
+  <p:cSld>
+    <p:bg>
+      <p:bgPr>
+        <a:solidFill>
+          <a:srgbClr val="0B0C0F"/>
+        </a:solidFill>
+        <a:effectLst/>
+      </p:bgPr>
+    </p:bg>
+    <p:spTree>
+      <p:nvGrpSpPr>
+        <p:cNvPr id="1" name=""/>
+        <p:cNvGrpSpPr/>
+        <p:nvPr/>
+      </p:nvGrpSpPr>
+      <p:grpSpPr/>
+      <p:sp>
+        <p:nvSpPr>
+          <p:cNvPr id="2" name="TextBox 1"/>
+          <p:cNvSpPr txBox="1"/>
+          <p:nvPr/>
+        </p:nvSpPr>
+        <p:spPr>
+          <a:xfrm>
+            <a:off x="777240" y="502920"/>
+            <a:ext cx="10637215" cy="274320"/>
+          </a:xfrm>
+          <a:prstGeom prst="rect">
+            <a:avLst/>
+          </a:prstGeom>
+          <a:noFill/>
+        </p:spPr>
+        <p:txBody>
+          <a:bodyPr wrap="square" lIns="0" rIns="0" tIns="0" bIns="0">
+            <a:spAutoFit/>
+          </a:bodyPr>
+          <a:lstStyle/>
+          <a:p>
+            <a:pPr algn="l">
+              <a:lnSpc>
+                <a:spcPct val="128000"/>
+              </a:lnSpc>
+              <a:spcBef>
+                <a:spcPts val="0"/>
+              </a:spcBef>
+              <a:spcAft>
+                <a:spcPts val="0"/>
+              </a:spcAft>
+              <a:defRPr>
+                <a:latin typeface="IBM Plex Mono"/>
+              </a:defRPr>
+            </a:pPr>
+            <a:r>
+              <a:rPr sz="1100" b="1" i="0">
+                <a:solidFill>
+                  <a:srgbClr val="E33B4C"/>
+                </a:solidFill>
+                <a:latin typeface="IBM Plex Mono"/>
+              </a:rPr>
+              <a:t>MARKET AND LEAD CUSTOMER</a:t>
+            </a:r>
+          </a:p>
+        </p:txBody>
+      </p:sp>
+      <p:sp>
+        <p:nvSpPr>
+          <p:cNvPr id="3" name="TextBox 2"/>
+          <p:cNvSpPr txBox="1"/>
+          <p:nvPr/>
+        </p:nvSpPr>
+        <p:spPr>
+          <a:xfrm>
+            <a:off x="777240" y="868680"/>
+            <a:ext cx="10637215" cy="914400"/>
+          </a:xfrm>
+          <a:prstGeom prst="rect">
+            <a:avLst/>
+          </a:prstGeom>
+          <a:noFill/>
+        </p:spPr>
+        <p:txBody>
+          <a:bodyPr wrap="square" lIns="0" rIns="0" tIns="0" bIns="0">
+            <a:spAutoFit/>
+          </a:bodyPr>
+          <a:lstStyle/>
+          <a:p>
+            <a:pPr algn="l">
+              <a:lnSpc>
+                <a:spcPct val="110000"/>
+              </a:lnSpc>
+              <a:spcBef>
+                <a:spcPts val="0"/>
+              </a:spcBef>
+              <a:spcAft>
+                <a:spcPts val="0"/>
+              </a:spcAft>
+            </a:pPr>
+            <a:r>
+              <a:rPr sz="2900" b="1" i="0">
+                <a:solidFill>
+                  <a:srgbClr val="F7F7F8"/>
+                </a:solidFill>
+                <a:latin typeface="Space Grotesk"/>
+              </a:rPr>
+              <a:t>Every feature was requested by a working
+investigator on a live case.</a:t>
+            </a:r>
+          </a:p>
+        </p:txBody>
+      </p:sp>
+      <p:sp>
+        <p:nvSpPr>
+          <p:cNvPr id="4" name="Rectangle 3"/>
+          <p:cNvSpPr/>
+          <p:nvPr/>
+        </p:nvSpPr>
+        <p:spPr>
+          <a:xfrm>
+            <a:off x="777240" y="1874519"/>
+            <a:ext cx="1005840" cy="31750"/>
+          </a:xfrm>
+          <a:prstGeom prst="rect">
+            <a:avLst/>
+          </a:prstGeom>
+          <a:solidFill>
+            <a:srgbClr val="E33B4C"/>
+          </a:solidFill>
+          <a:ln>
+            <a:noFill/>
+          </a:ln>
+          <a:effectLst/>
+        </p:spPr>
+        <p:style>
+          <a:lnRef idx="1">
+            <a:schemeClr val="accent1"/>
+          </a:lnRef>
+          <a:fillRef idx="3">
+            <a:schemeClr val="accent1"/>
+          </a:fillRef>
+          <a:effectRef idx="2">
+            <a:schemeClr val="accent1"/>
+          </a:effectRef>
+          <a:fontRef idx="minor">
+            <a:schemeClr val="lt1"/>
+          </a:fontRef>
+        </p:style>
+        <p:txBody>
+          <a:bodyPr rtlCol="0" anchor="ctr"/>
+          <a:lstStyle/>
+          <a:p>
+            <a:pPr algn="ctr"/>
+          </a:p>
+        </p:txBody>
+      </p:sp>
+      <p:sp>
+        <p:nvSpPr>
+          <p:cNvPr id="5" name="TextBox 4"/>
+          <p:cNvSpPr txBox="1"/>
+          <p:nvPr/>
+        </p:nvSpPr>
+        <p:spPr>
+          <a:xfrm>
             <a:off x="777240" y="2148840"/>
             <a:ext cx="5486400" cy="3794760"/>
           </a:xfrm>
@@ -10030,7 +11491,7 @@
 </p:sld>
 </file>
 
-<file path=ppt/slides/slide7.xml><?xml version="1.0" encoding="utf-8"?>
+<file path=ppt/slides/slide8.xml><?xml version="1.0" encoding="utf-8"?>
 <p:sld xmlns:a="http://schemas.openxmlformats.org/drawingml/2006/main" xmlns:p="http://schemas.openxmlformats.org/presentationml/2006/main" xmlns:r="http://schemas.openxmlformats.org/officeDocument/2006/relationships">
   <p:cSld>
     <p:bg>
@@ -10957,7 +12418,7 @@
 </p:sld>
 </file>
 
-<file path=ppt/slides/slide8.xml><?xml version="1.0" encoding="utf-8"?>
+<file path=ppt/slides/slide9.xml><?xml version="1.0" encoding="utf-8"?>
 <p:sld xmlns:a="http://schemas.openxmlformats.org/drawingml/2006/main" xmlns:p="http://schemas.openxmlformats.org/presentationml/2006/main" xmlns:r="http://schemas.openxmlformats.org/officeDocument/2006/relationships">
   <p:cSld>
     <p:bg>
@@ -11866,620 +13327,6 @@
                 <a:latin typeface="IBM Plex Sans"/>
               </a:rPr>
               <a:t>$2.41B forensics, $6.81B legal tech. Partner-led per jurisdiction.</a:t>
-            </a:r>
-          </a:p>
-        </p:txBody>
-      </p:sp>
-    </p:spTree>
-  </p:cSld>
-  <p:clrMapOvr>
-    <a:masterClrMapping/>
-  </p:clrMapOvr>
-</p:sld>
-</file>
-
-<file path=ppt/slides/slide9.xml><?xml version="1.0" encoding="utf-8"?>
-<p:sld xmlns:a="http://schemas.openxmlformats.org/drawingml/2006/main" xmlns:p="http://schemas.openxmlformats.org/presentationml/2006/main" xmlns:r="http://schemas.openxmlformats.org/officeDocument/2006/relationships">
-  <p:cSld>
-    <p:bg>
-      <p:bgPr>
-        <a:solidFill>
-          <a:srgbClr val="0B0C0F"/>
-        </a:solidFill>
-        <a:effectLst/>
-      </p:bgPr>
-    </p:bg>
-    <p:spTree>
-      <p:nvGrpSpPr>
-        <p:cNvPr id="1" name=""/>
-        <p:cNvGrpSpPr/>
-        <p:nvPr/>
-      </p:nvGrpSpPr>
-      <p:grpSpPr/>
-      <p:sp>
-        <p:nvSpPr>
-          <p:cNvPr id="2" name="TextBox 1"/>
-          <p:cNvSpPr txBox="1"/>
-          <p:nvPr/>
-        </p:nvSpPr>
-        <p:spPr>
-          <a:xfrm>
-            <a:off x="777240" y="502920"/>
-            <a:ext cx="10637215" cy="274320"/>
-          </a:xfrm>
-          <a:prstGeom prst="rect">
-            <a:avLst/>
-          </a:prstGeom>
-          <a:noFill/>
-        </p:spPr>
-        <p:txBody>
-          <a:bodyPr wrap="square" lIns="0" rIns="0" tIns="0" bIns="0">
-            <a:spAutoFit/>
-          </a:bodyPr>
-          <a:lstStyle/>
-          <a:p>
-            <a:pPr algn="l">
-              <a:lnSpc>
-                <a:spcPct val="128000"/>
-              </a:lnSpc>
-              <a:spcBef>
-                <a:spcPts val="0"/>
-              </a:spcBef>
-              <a:spcAft>
-                <a:spcPts val="0"/>
-              </a:spcAft>
-              <a:defRPr>
-                <a:latin typeface="IBM Plex Mono"/>
-              </a:defRPr>
-            </a:pPr>
-            <a:r>
-              <a:rPr sz="1100" b="1" i="0">
-                <a:solidFill>
-                  <a:srgbClr val="E33B4C"/>
-                </a:solidFill>
-                <a:latin typeface="IBM Plex Mono"/>
-              </a:rPr>
-              <a:t>TEAM</a:t>
-            </a:r>
-          </a:p>
-        </p:txBody>
-      </p:sp>
-      <p:sp>
-        <p:nvSpPr>
-          <p:cNvPr id="3" name="TextBox 2"/>
-          <p:cNvSpPr txBox="1"/>
-          <p:nvPr/>
-        </p:nvSpPr>
-        <p:spPr>
-          <a:xfrm>
-            <a:off x="777240" y="868680"/>
-            <a:ext cx="10637215" cy="914400"/>
-          </a:xfrm>
-          <a:prstGeom prst="rect">
-            <a:avLst/>
-          </a:prstGeom>
-          <a:noFill/>
-        </p:spPr>
-        <p:txBody>
-          <a:bodyPr wrap="square" lIns="0" rIns="0" tIns="0" bIns="0">
-            <a:spAutoFit/>
-          </a:bodyPr>
-          <a:lstStyle/>
-          <a:p>
-            <a:pPr algn="l">
-              <a:lnSpc>
-                <a:spcPct val="110000"/>
-              </a:lnSpc>
-              <a:spcBef>
-                <a:spcPts val="0"/>
-              </a:spcBef>
-              <a:spcAft>
-                <a:spcPts val="0"/>
-              </a:spcAft>
-            </a:pPr>
-            <a:r>
-              <a:rPr sz="3000" b="1" i="0">
-                <a:solidFill>
-                  <a:srgbClr val="F7F7F8"/>
-                </a:solidFill>
-                <a:latin typeface="Space Grotesk"/>
-              </a:rPr>
-              <a:t>We didn't research this market.
-We worked in it — from both sides.</a:t>
-            </a:r>
-          </a:p>
-        </p:txBody>
-      </p:sp>
-      <p:sp>
-        <p:nvSpPr>
-          <p:cNvPr id="4" name="Rectangle 3"/>
-          <p:cNvSpPr/>
-          <p:nvPr/>
-        </p:nvSpPr>
-        <p:spPr>
-          <a:xfrm>
-            <a:off x="777240" y="1965960"/>
-            <a:ext cx="1005840" cy="31750"/>
-          </a:xfrm>
-          <a:prstGeom prst="rect">
-            <a:avLst/>
-          </a:prstGeom>
-          <a:solidFill>
-            <a:srgbClr val="E33B4C"/>
-          </a:solidFill>
-          <a:ln>
-            <a:noFill/>
-          </a:ln>
-          <a:effectLst/>
-        </p:spPr>
-        <p:style>
-          <a:lnRef idx="1">
-            <a:schemeClr val="accent1"/>
-          </a:lnRef>
-          <a:fillRef idx="3">
-            <a:schemeClr val="accent1"/>
-          </a:fillRef>
-          <a:effectRef idx="2">
-            <a:schemeClr val="accent1"/>
-          </a:effectRef>
-          <a:fontRef idx="minor">
-            <a:schemeClr val="lt1"/>
-          </a:fontRef>
-        </p:style>
-        <p:txBody>
-          <a:bodyPr rtlCol="0" anchor="ctr"/>
-          <a:lstStyle/>
-          <a:p>
-            <a:pPr algn="ctr"/>
-          </a:p>
-        </p:txBody>
-      </p:sp>
-      <p:sp>
-        <p:nvSpPr>
-          <p:cNvPr id="5" name="TextBox 4"/>
-          <p:cNvSpPr txBox="1"/>
-          <p:nvPr/>
-        </p:nvSpPr>
-        <p:spPr>
-          <a:xfrm>
-            <a:off x="777240" y="2212848"/>
-            <a:ext cx="3291840" cy="3931920"/>
-          </a:xfrm>
-          <a:prstGeom prst="rect">
-            <a:avLst/>
-          </a:prstGeom>
-          <a:noFill/>
-        </p:spPr>
-        <p:txBody>
-          <a:bodyPr wrap="square" lIns="0" rIns="0" tIns="0" bIns="0">
-            <a:spAutoFit/>
-          </a:bodyPr>
-          <a:lstStyle/>
-          <a:p>
-            <a:pPr algn="l">
-              <a:lnSpc>
-                <a:spcPct val="128000"/>
-              </a:lnSpc>
-              <a:spcBef>
-                <a:spcPts val="0"/>
-              </a:spcBef>
-              <a:spcAft>
-                <a:spcPts val="0"/>
-              </a:spcAft>
-            </a:pPr>
-            <a:r>
-              <a:rPr sz="1900" b="1" i="0">
-                <a:solidFill>
-                  <a:srgbClr val="F7F7F8"/>
-                </a:solidFill>
-                <a:latin typeface="Space Grotesk"/>
-              </a:rPr>
-              <a:t>Neil Byrne</a:t>
-            </a:r>
-          </a:p>
-          <a:p>
-            <a:pPr algn="l">
-              <a:lnSpc>
-                <a:spcPct val="128000"/>
-              </a:lnSpc>
-              <a:spcBef>
-                <a:spcPts val="300"/>
-              </a:spcBef>
-              <a:spcAft>
-                <a:spcPts val="0"/>
-              </a:spcAft>
-            </a:pPr>
-            <a:r>
-              <a:rPr sz="1200" b="1" i="0">
-                <a:solidFill>
-                  <a:srgbClr val="E33B4C"/>
-                </a:solidFill>
-                <a:latin typeface="IBM Plex Sans"/>
-              </a:rPr>
-              <a:t>CEO</a:t>
-            </a:r>
-          </a:p>
-          <a:p>
-            <a:pPr algn="l">
-              <a:lnSpc>
-                <a:spcPct val="128000"/>
-              </a:lnSpc>
-              <a:spcBef>
-                <a:spcPts val="900"/>
-              </a:spcBef>
-              <a:spcAft>
-                <a:spcPts val="0"/>
-              </a:spcAft>
-            </a:pPr>
-            <a:r>
-              <a:rPr sz="1100" b="0" i="0">
-                <a:solidFill>
-                  <a:srgbClr val="9A9DA5"/>
-                </a:solidFill>
-                <a:latin typeface="IBM Plex Sans"/>
-              </a:rPr>
-              <a:t>Seven years at Siren, the Irish investigative-intelligence platform — the same category, selling to law enforcement, intelligence and financial-crime teams. </a:t>
-            </a:r>
-            <a:r>
-              <a:rPr sz="1100" b="1" i="0">
-                <a:solidFill>
-                  <a:srgbClr val="9A9DA5"/>
-                </a:solidFill>
-                <a:latin typeface="IBM Plex Sans"/>
-              </a:rPr>
-              <a:t>Solutions engineer: managed customer accounts and built the customisations each client needed to make the platform fit their process.</a:t>
-            </a:r>
-            <a:r>
-              <a:rPr sz="1100" b="0" i="0">
-                <a:solidFill>
-                  <a:srgbClr val="9A9DA5"/>
-                </a:solidFill>
-                <a:latin typeface="IBM Plex Sans"/>
-              </a:rPr>
-              <a:t> Spoke with hundreds of analysts across conference talks and deployments. Now a sales solutions engineer at Udemy across large-enterprise and strategic accounts — the same discipline at enterprise scale. 10+ years in data engineering and AI systems.</a:t>
-            </a:r>
-          </a:p>
-          <a:p>
-            <a:pPr algn="l">
-              <a:lnSpc>
-                <a:spcPct val="128000"/>
-              </a:lnSpc>
-              <a:spcBef>
-                <a:spcPts val="900"/>
-              </a:spcBef>
-              <a:spcAft>
-                <a:spcPts val="0"/>
-              </a:spcAft>
-            </a:pPr>
-            <a:r>
-              <a:rPr sz="1100" b="1" i="0">
-                <a:solidFill>
-                  <a:srgbClr val="E33B4C"/>
-                </a:solidFill>
-                <a:latin typeface="IBM Plex Sans"/>
-              </a:rPr>
-              <a:t>Full-time on close.</a:t>
-            </a:r>
-          </a:p>
-        </p:txBody>
-      </p:sp>
-      <p:sp>
-        <p:nvSpPr>
-          <p:cNvPr id="6" name="TextBox 5"/>
-          <p:cNvSpPr txBox="1"/>
-          <p:nvPr/>
-        </p:nvSpPr>
-        <p:spPr>
-          <a:xfrm>
-            <a:off x="4480560" y="2212848"/>
-            <a:ext cx="3291840" cy="3931920"/>
-          </a:xfrm>
-          <a:prstGeom prst="rect">
-            <a:avLst/>
-          </a:prstGeom>
-          <a:noFill/>
-        </p:spPr>
-        <p:txBody>
-          <a:bodyPr wrap="square" lIns="0" rIns="0" tIns="0" bIns="0">
-            <a:spAutoFit/>
-          </a:bodyPr>
-          <a:lstStyle/>
-          <a:p>
-            <a:pPr algn="l">
-              <a:lnSpc>
-                <a:spcPct val="128000"/>
-              </a:lnSpc>
-              <a:spcBef>
-                <a:spcPts val="0"/>
-              </a:spcBef>
-              <a:spcAft>
-                <a:spcPts val="0"/>
-              </a:spcAft>
-            </a:pPr>
-            <a:r>
-              <a:rPr sz="1900" b="1" i="0">
-                <a:solidFill>
-                  <a:srgbClr val="F7F7F8"/>
-                </a:solidFill>
-                <a:latin typeface="Space Grotesk"/>
-              </a:rPr>
-              <a:t>Conor Bowles</a:t>
-            </a:r>
-          </a:p>
-          <a:p>
-            <a:pPr algn="l">
-              <a:lnSpc>
-                <a:spcPct val="128000"/>
-              </a:lnSpc>
-              <a:spcBef>
-                <a:spcPts val="300"/>
-              </a:spcBef>
-              <a:spcAft>
-                <a:spcPts val="0"/>
-              </a:spcAft>
-            </a:pPr>
-            <a:r>
-              <a:rPr sz="1200" b="1" i="0">
-                <a:solidFill>
-                  <a:srgbClr val="E33B4C"/>
-                </a:solidFill>
-                <a:latin typeface="IBM Plex Sans"/>
-              </a:rPr>
-              <a:t>CTO</a:t>
-            </a:r>
-          </a:p>
-          <a:p>
-            <a:pPr algn="l">
-              <a:lnSpc>
-                <a:spcPct val="128000"/>
-              </a:lnSpc>
-              <a:spcBef>
-                <a:spcPts val="900"/>
-              </a:spcBef>
-              <a:spcAft>
-                <a:spcPts val="0"/>
-              </a:spcAft>
-            </a:pPr>
-            <a:r>
-              <a:rPr sz="1100" b="1" i="0">
-                <a:solidFill>
-                  <a:srgbClr val="9A9DA5"/>
-                </a:solidFill>
-                <a:latin typeface="IBM Plex Sans"/>
-              </a:rPr>
-              <a:t>Architect of the case model.</a:t>
-            </a:r>
-            <a:r>
-              <a:rPr sz="1100" b="0" i="0">
-                <a:solidFill>
-                  <a:srgbClr val="9A9DA5"/>
-                </a:solidFill>
-                <a:latin typeface="IBM Plex Sans"/>
-              </a:rPr>
-              <a:t> The approach the platform rests on is his: extract entities and events from evidence with an LLM at ingestion, resolve them into a graph, and query that concrete structure afterwards — so an answer is a traversal over modelled evidence, not a retrieval over text. He wrote the first commit and has led engineering since. </a:t>
-            </a:r>
-            <a:r>
-              <a:rPr sz="1100" b="1" i="0">
-                <a:solidFill>
-                  <a:srgbClr val="9A9DA5"/>
-                </a:solidFill>
-                <a:latin typeface="IBM Plex Sans"/>
-              </a:rPr>
-              <a:t>Drives the enterprise platform</a:t>
-            </a:r>
-            <a:r>
-              <a:rPr sz="1100" b="0" i="0">
-                <a:solidFill>
-                  <a:srgbClr val="9A9DA5"/>
-                </a:solidFill>
-                <a:latin typeface="IBM Plex Sans"/>
-              </a:rPr>
-              <a:t>, while features are proven on live casework first and promoted once they mature — so nothing reaches the deployable product until it has survived a real matter.</a:t>
-            </a:r>
-          </a:p>
-          <a:p>
-            <a:pPr algn="l">
-              <a:lnSpc>
-                <a:spcPct val="128000"/>
-              </a:lnSpc>
-              <a:spcBef>
-                <a:spcPts val="900"/>
-              </a:spcBef>
-              <a:spcAft>
-                <a:spcPts val="0"/>
-              </a:spcAft>
-            </a:pPr>
-            <a:r>
-              <a:rPr sz="1100" b="1" i="0">
-                <a:solidFill>
-                  <a:srgbClr val="E33B4C"/>
-                </a:solidFill>
-                <a:latin typeface="IBM Plex Sans"/>
-              </a:rPr>
-              <a:t>Full-time on close.</a:t>
-            </a:r>
-          </a:p>
-        </p:txBody>
-      </p:sp>
-      <p:sp>
-        <p:nvSpPr>
-          <p:cNvPr id="7" name="TextBox 6"/>
-          <p:cNvSpPr txBox="1"/>
-          <p:nvPr/>
-        </p:nvSpPr>
-        <p:spPr>
-          <a:xfrm>
-            <a:off x="8183880" y="2212848"/>
-            <a:ext cx="3291840" cy="3931920"/>
-          </a:xfrm>
-          <a:prstGeom prst="rect">
-            <a:avLst/>
-          </a:prstGeom>
-          <a:noFill/>
-        </p:spPr>
-        <p:txBody>
-          <a:bodyPr wrap="square" lIns="0" rIns="0" tIns="0" bIns="0">
-            <a:spAutoFit/>
-          </a:bodyPr>
-          <a:lstStyle/>
-          <a:p>
-            <a:pPr algn="l">
-              <a:lnSpc>
-                <a:spcPct val="128000"/>
-              </a:lnSpc>
-              <a:spcBef>
-                <a:spcPts val="0"/>
-              </a:spcBef>
-              <a:spcAft>
-                <a:spcPts val="0"/>
-              </a:spcAft>
-            </a:pPr>
-            <a:r>
-              <a:rPr sz="1900" b="1" i="0">
-                <a:solidFill>
-                  <a:srgbClr val="F7F7F8"/>
-                </a:solidFill>
-                <a:latin typeface="Space Grotesk"/>
-              </a:rPr>
-              <a:t>Alexandra Solórzano</a:t>
-            </a:r>
-          </a:p>
-          <a:p>
-            <a:pPr algn="l">
-              <a:lnSpc>
-                <a:spcPct val="128000"/>
-              </a:lnSpc>
-              <a:spcBef>
-                <a:spcPts val="300"/>
-              </a:spcBef>
-              <a:spcAft>
-                <a:spcPts val="0"/>
-              </a:spcAft>
-            </a:pPr>
-            <a:r>
-              <a:rPr sz="1200" b="1" i="0">
-                <a:solidFill>
-                  <a:srgbClr val="E33B4C"/>
-                </a:solidFill>
-                <a:latin typeface="IBM Plex Sans"/>
-              </a:rPr>
-              <a:t>CPO</a:t>
-            </a:r>
-          </a:p>
-          <a:p>
-            <a:pPr algn="l">
-              <a:lnSpc>
-                <a:spcPct val="128000"/>
-              </a:lnSpc>
-              <a:spcBef>
-                <a:spcPts val="900"/>
-              </a:spcBef>
-              <a:spcAft>
-                <a:spcPts val="0"/>
-              </a:spcAft>
-            </a:pPr>
-            <a:r>
-              <a:rPr sz="1100" b="0" i="0">
-                <a:solidFill>
-                  <a:srgbClr val="9A9DA5"/>
-                </a:solidFill>
-                <a:latin typeface="IBM Plex Sans"/>
-              </a:rPr>
-              <a:t>10+ years as a licensed private investigator on federal criminal defence and financial fraud casework — and the product's direction, daily. </a:t>
-            </a:r>
-            <a:r>
-              <a:rPr sz="1100" b="1" i="0">
-                <a:solidFill>
-                  <a:srgbClr val="9A9DA5"/>
-                </a:solidFill>
-                <a:latin typeface="IBM Plex Sans"/>
-              </a:rPr>
-              <a:t>Multiple calls a week; the backlog is generated from live matters as she works them</a:t>
-            </a:r>
-            <a:r>
-              <a:rPr sz="1100" b="0" i="0">
-                <a:solidFill>
-                  <a:srgbClr val="9A9DA5"/>
-                </a:solidFill>
-                <a:latin typeface="IBM Plex Sans"/>
-              </a:rPr>
-              <a:t>, which is why development has never run on a roadmap invented in advance. A grounded visionary: every feature traces to a real case, and she has run federal cases to completion inside the platform. US-based.</a:t>
-            </a:r>
-          </a:p>
-          <a:p>
-            <a:pPr algn="l">
-              <a:lnSpc>
-                <a:spcPct val="128000"/>
-              </a:lnSpc>
-              <a:spcBef>
-                <a:spcPts val="900"/>
-              </a:spcBef>
-              <a:spcAft>
-                <a:spcPts val="0"/>
-              </a:spcAft>
-            </a:pPr>
-            <a:r>
-              <a:rPr sz="1100" b="1" i="0">
-                <a:solidFill>
-                  <a:srgbClr val="E33B4C"/>
-                </a:solidFill>
-                <a:latin typeface="IBM Plex Sans"/>
-              </a:rPr>
-              <a:t>The domain authority — and the customer the product was built for.</a:t>
-            </a:r>
-          </a:p>
-        </p:txBody>
-      </p:sp>
-      <p:sp>
-        <p:nvSpPr>
-          <p:cNvPr id="8" name="TextBox 7"/>
-          <p:cNvSpPr txBox="1"/>
-          <p:nvPr/>
-        </p:nvSpPr>
-        <p:spPr>
-          <a:xfrm>
-            <a:off x="777240" y="6144768"/>
-            <a:ext cx="10637215" cy="658368"/>
-          </a:xfrm>
-          <a:prstGeom prst="rect">
-            <a:avLst/>
-          </a:prstGeom>
-          <a:noFill/>
-        </p:spPr>
-        <p:txBody>
-          <a:bodyPr wrap="square" lIns="0" rIns="0" tIns="0" bIns="0">
-            <a:spAutoFit/>
-          </a:bodyPr>
-          <a:lstStyle/>
-          <a:p>
-            <a:pPr algn="l">
-              <a:lnSpc>
-                <a:spcPct val="128000"/>
-              </a:lnSpc>
-              <a:spcBef>
-                <a:spcPts val="0"/>
-              </a:spcBef>
-              <a:spcAft>
-                <a:spcPts val="0"/>
-              </a:spcAft>
-            </a:pPr>
-            <a:r>
-              <a:rPr sz="1350" b="0" i="0">
-                <a:solidFill>
-                  <a:srgbClr val="F7F7F8"/>
-                </a:solidFill>
-                <a:latin typeface="IBM Plex Sans"/>
-              </a:rPr>
-              <a:t>Seven years building investigative intelligence software for enterprise buyers, and a decade running federal casework as the kind of investigator who has to live with the result. </a:t>
-            </a:r>
-            <a:r>
-              <a:rPr sz="1350" b="1" i="0">
-                <a:solidFill>
-                  <a:srgbClr val="F7F7F8"/>
-                </a:solidFill>
-                <a:latin typeface="IBM Plex Sans"/>
-              </a:rPr>
-              <a:t>Our CPO has run federal cases to completion inside this platform.</a:t>
             </a:r>
           </a:p>
         </p:txBody>

--- a/Loupe-NDRC-deck.pptx
+++ b/Loupe-NDRC-deck.pptx
@@ -513,7 +513,50 @@
           <a:lstStyle/>
           <a:p>
             <a:r>
-              <a:t>One line only. Do not open with the product.</a:t>
+              <a:t>This deck is submitted as a PDF and read without anyone in the room —</a:t>
+            </a:r>
+          </a:p>
+          <a:p>
+            <a:r>
+              <a:t>the form has no essay questions, so the cover is the highest-attention moment in the</a:t>
+            </a:r>
+          </a:p>
+          <a:p>
+            <a:r>
+              <a:t>whole application and it has to earn the next page.</a:t>
+            </a:r>
+          </a:p>
+          <a:p/>
+          <a:p>
+            <a:r>
+              <a:t>"Find the signal in everything" is the tagline. The line under it is the argument, and</a:t>
+            </a:r>
+          </a:p>
+          <a:p>
+            <a:r>
+              <a:t>it is the one sentence that frames every slide that follows.</a:t>
+            </a:r>
+          </a:p>
+          <a:p/>
+          <a:p>
+            <a:r>
+              <a:t>"In production use on real federal matters" is on the cover deliberately. A cold reader</a:t>
+            </a:r>
+          </a:p>
+          <a:p>
+            <a:r>
+              <a:t>deciding whether to keep going is helped more by knowing this is not a concept than by</a:t>
+            </a:r>
+          </a:p>
+          <a:p>
+            <a:r>
+              <a:t>anything else we could put there.</a:t>
+            </a:r>
+          </a:p>
+          <a:p/>
+          <a:p>
+            <a:r>
+              <a:t>If you ever present this live, drop to the tagline alone and say the rest.</a:t>
             </a:r>
           </a:p>
         </p:txBody>
@@ -5408,8 +5451,8 @@
         </p:nvSpPr>
         <p:spPr>
           <a:xfrm>
-            <a:off x="777240" y="3310128"/>
-            <a:ext cx="10637215" cy="2377440"/>
+            <a:off x="777240" y="3246120"/>
+            <a:ext cx="10637215" cy="2651760"/>
           </a:xfrm>
           <a:prstGeom prst="rect">
             <a:avLst/>
@@ -5434,7 +5477,7 @@
               </a:spcAft>
             </a:pPr>
             <a:r>
-              <a:rPr sz="2700" b="0" i="0">
+              <a:rPr sz="2500" b="0" i="0">
                 <a:solidFill>
                   <a:srgbClr val="E33B4C"/>
                 </a:solidFill>
@@ -5449,20 +5492,42 @@
                 <a:spcPct val="128000"/>
               </a:lnSpc>
               <a:spcBef>
-                <a:spcPts val="2200"/>
-              </a:spcBef>
-              <a:spcAft>
-                <a:spcPts val="0"/>
-              </a:spcAft>
-            </a:pPr>
-            <a:r>
-              <a:rPr sz="1900" b="0" i="0">
+                <a:spcPts val="2000"/>
+              </a:spcBef>
+              <a:spcAft>
+                <a:spcPts val="0"/>
+              </a:spcAft>
+            </a:pPr>
+            <a:r>
+              <a:rPr sz="3000" b="1" i="0">
+                <a:solidFill>
+                  <a:srgbClr val="F7F7F8"/>
+                </a:solidFill>
+                <a:latin typeface="Space Grotesk"/>
+              </a:rPr>
+              <a:t>Everyone can cite a document. Nobody can query a case.</a:t>
+            </a:r>
+          </a:p>
+          <a:p>
+            <a:pPr algn="l">
+              <a:lnSpc>
+                <a:spcPct val="128000"/>
+              </a:lnSpc>
+              <a:spcBef>
+                <a:spcPts val="2000"/>
+              </a:spcBef>
+              <a:spcAft>
+                <a:spcPts val="0"/>
+              </a:spcAft>
+            </a:pPr>
+            <a:r>
+              <a:rPr sz="1700" b="0" i="0">
                 <a:solidFill>
                   <a:srgbClr val="9A9DA5"/>
                 </a:solidFill>
                 <a:latin typeface="IBM Plex Sans"/>
               </a:rPr>
-              <a:t>An investigation platform for fraud and criminal casework.</a:t>
+              <a:t>An investigation platform for fraud and criminal casework — in production use on real federal matters.</a:t>
             </a:r>
           </a:p>
           <a:p>
@@ -5478,7 +5543,7 @@
               </a:spcAft>
             </a:pPr>
             <a:r>
-              <a:rPr sz="1900" b="0" i="0">
+              <a:rPr sz="1700" b="0" i="0">
                 <a:solidFill>
                   <a:srgbClr val="9A9DA5"/>
                 </a:solidFill>
@@ -5497,7 +5562,7 @@
         </p:nvSpPr>
         <p:spPr>
           <a:xfrm>
-            <a:off x="777240" y="5715000"/>
+            <a:off x="777240" y="6035040"/>
             <a:ext cx="1463040" cy="31750"/>
           </a:xfrm>
           <a:prstGeom prst="rect">
@@ -6546,7 +6611,7 @@
                 </a:solidFill>
                 <a:latin typeface="IBM Plex Sans"/>
               </a:rPr>
-              <a:t>~180,000 lines across a React console, a FastAPI case API and a separate asynchronous evidence engine</a:t>
+              <a:t>Federal cases carried to completion — multi-gigabyte phone extractions, tens of thousands of curated financial transactions, full document corpora</a:t>
             </a:r>
           </a:p>
           <a:p>
@@ -6577,7 +6642,7 @@
                 </a:solidFill>
                 <a:latin typeface="IBM Plex Sans"/>
               </a:rPr>
-              <a:t>913 commits since December 2025 — two primary engineers</a:t>
+              <a:t>A React console, a FastAPI case API and a separate asynchronous evidence engine, built since December 2025 by two engineers</a:t>
             </a:r>
           </a:p>
           <a:p>

--- a/Loupe-NDRC-deck.pptx
+++ b/Loupe-NDRC-deck.pptx
@@ -6166,8 +6166,8 @@
         </p:nvSpPr>
         <p:spPr>
           <a:xfrm>
-            <a:off x="777240" y="6144768"/>
-            <a:ext cx="10637215" cy="658368"/>
+            <a:off x="777240" y="6053328"/>
+            <a:ext cx="10637215" cy="731520"/>
           </a:xfrm>
           <a:prstGeom prst="rect">
             <a:avLst/>
@@ -7242,7 +7242,7 @@
                 </a:solidFill>
                 <a:latin typeface="IBM Plex Sans"/>
               </a:rPr>
-              <a:t> across pilot matters. The per-matter cost model is what the pilot establishes.</a:t>
+              <a:t> across pilot matters — the cost model the pilot establishes.</a:t>
             </a:r>
           </a:p>
         </p:txBody>
@@ -7433,8 +7433,8 @@
         </p:nvSpPr>
         <p:spPr>
           <a:xfrm>
-            <a:off x="777240" y="6199632"/>
-            <a:ext cx="10637215" cy="566928"/>
+            <a:off x="777240" y="6144768"/>
+            <a:ext cx="10637215" cy="658368"/>
           </a:xfrm>
           <a:prstGeom prst="rect">
             <a:avLst/>
@@ -9637,7 +9637,7 @@
                       </a:r>
                     </a:p>
                   </a:txBody>
-                  <a:tcPr marL="109728" marT="41148" marB="41148">
+                  <a:tcPr marL="109728" marT="22860" marB="22860">
                     <a:solidFill>
                       <a:srgbClr val="111216"/>
                     </a:solidFill>
@@ -9670,7 +9670,7 @@
                       </a:r>
                     </a:p>
                   </a:txBody>
-                  <a:tcPr marL="109728" marT="41148" marB="41148">
+                  <a:tcPr marL="109728" marT="22860" marB="22860">
                     <a:solidFill>
                       <a:srgbClr val="111216"/>
                     </a:solidFill>
@@ -9703,7 +9703,7 @@
                       </a:r>
                     </a:p>
                   </a:txBody>
-                  <a:tcPr marL="109728" marT="41148" marB="41148">
+                  <a:tcPr marL="109728" marT="22860" marB="22860">
                     <a:solidFill>
                       <a:srgbClr val="111216"/>
                     </a:solidFill>
@@ -9738,7 +9738,7 @@
                       </a:r>
                     </a:p>
                   </a:txBody>
-                  <a:tcPr marL="109728" marT="41148" marB="41148">
+                  <a:tcPr marL="109728" marT="22860" marB="22860">
                     <a:solidFill>
                       <a:srgbClr val="0B0C0F"/>
                     </a:solidFill>
@@ -9771,7 +9771,7 @@
                       </a:r>
                     </a:p>
                   </a:txBody>
-                  <a:tcPr marL="109728" marT="41148" marB="41148">
+                  <a:tcPr marL="109728" marT="22860" marB="22860">
                     <a:solidFill>
                       <a:srgbClr val="0B0C0F"/>
                     </a:solidFill>
@@ -9804,7 +9804,7 @@
                       </a:r>
                     </a:p>
                   </a:txBody>
-                  <a:tcPr marL="109728" marT="41148" marB="41148">
+                  <a:tcPr marL="109728" marT="22860" marB="22860">
                     <a:solidFill>
                       <a:srgbClr val="0B0C0F"/>
                     </a:solidFill>
@@ -9839,7 +9839,7 @@
                       </a:r>
                     </a:p>
                   </a:txBody>
-                  <a:tcPr marL="109728" marT="41148" marB="41148">
+                  <a:tcPr marL="109728" marT="22860" marB="22860">
                     <a:solidFill>
                       <a:srgbClr val="111216"/>
                     </a:solidFill>
@@ -9872,7 +9872,7 @@
                       </a:r>
                     </a:p>
                   </a:txBody>
-                  <a:tcPr marL="109728" marT="41148" marB="41148">
+                  <a:tcPr marL="109728" marT="22860" marB="22860">
                     <a:solidFill>
                       <a:srgbClr val="111216"/>
                     </a:solidFill>
@@ -9901,11 +9901,11 @@
                           </a:solidFill>
                           <a:latin typeface="IBM Plex Sans"/>
                         </a:rPr>
-                        <a:t>Traverses a model of the whole case and returns the complete matching set — every claim cited, and the citation covers all of it because retrieval was not a sample</a:t>
+                        <a:t>Traverses a model of the whole case and returns the complete matching set — every claim cited, and the citation covers all of it, not a sample</a:t>
                       </a:r>
                     </a:p>
                   </a:txBody>
-                  <a:tcPr marL="109728" marT="41148" marB="41148">
+                  <a:tcPr marL="109728" marT="22860" marB="22860">
                     <a:solidFill>
                       <a:srgbClr val="111216"/>
                     </a:solidFill>
@@ -9940,7 +9940,7 @@
                       </a:r>
                     </a:p>
                   </a:txBody>
-                  <a:tcPr marL="109728" marT="41148" marB="41148">
+                  <a:tcPr marL="109728" marT="22860" marB="22860">
                     <a:solidFill>
                       <a:srgbClr val="0B0C0F"/>
                     </a:solidFill>
@@ -9973,7 +9973,7 @@
                       </a:r>
                     </a:p>
                   </a:txBody>
-                  <a:tcPr marL="109728" marT="41148" marB="41148">
+                  <a:tcPr marL="109728" marT="22860" marB="22860">
                     <a:solidFill>
                       <a:srgbClr val="0B0C0F"/>
                     </a:solidFill>
@@ -10006,7 +10006,7 @@
                       </a:r>
                     </a:p>
                   </a:txBody>
-                  <a:tcPr marL="109728" marT="41148" marB="41148">
+                  <a:tcPr marL="109728" marT="22860" marB="22860">
                     <a:solidFill>
                       <a:srgbClr val="0B0C0F"/>
                     </a:solidFill>
@@ -10041,7 +10041,7 @@
                       </a:r>
                     </a:p>
                   </a:txBody>
-                  <a:tcPr marL="109728" marT="41148" marB="41148">
+                  <a:tcPr marL="109728" marT="22860" marB="22860">
                     <a:solidFill>
                       <a:srgbClr val="111216"/>
                     </a:solidFill>
@@ -10074,7 +10074,7 @@
                       </a:r>
                     </a:p>
                   </a:txBody>
-                  <a:tcPr marL="109728" marT="41148" marB="41148">
+                  <a:tcPr marL="109728" marT="22860" marB="22860">
                     <a:solidFill>
                       <a:srgbClr val="111216"/>
                     </a:solidFill>
@@ -10107,7 +10107,7 @@
                       </a:r>
                     </a:p>
                   </a:txBody>
-                  <a:tcPr marL="109728" marT="41148" marB="41148">
+                  <a:tcPr marL="109728" marT="22860" marB="22860">
                     <a:solidFill>
                       <a:srgbClr val="111216"/>
                     </a:solidFill>
@@ -10142,7 +10142,7 @@
                       </a:r>
                     </a:p>
                   </a:txBody>
-                  <a:tcPr marL="109728" marT="41148" marB="41148">
+                  <a:tcPr marL="109728" marT="22860" marB="22860">
                     <a:solidFill>
                       <a:srgbClr val="0B0C0F"/>
                     </a:solidFill>
@@ -10175,7 +10175,7 @@
                       </a:r>
                     </a:p>
                   </a:txBody>
-                  <a:tcPr marL="109728" marT="41148" marB="41148">
+                  <a:tcPr marL="109728" marT="22860" marB="22860">
                     <a:solidFill>
                       <a:srgbClr val="0B0C0F"/>
                     </a:solidFill>
@@ -10208,7 +10208,7 @@
                       </a:r>
                     </a:p>
                   </a:txBody>
-                  <a:tcPr marL="109728" marT="41148" marB="41148">
+                  <a:tcPr marL="109728" marT="22860" marB="22860">
                     <a:solidFill>
                       <a:srgbClr val="0B0C0F"/>
                     </a:solidFill>
@@ -10227,8 +10227,8 @@
         </p:nvSpPr>
         <p:spPr>
           <a:xfrm>
-            <a:off x="777240" y="5870448"/>
-            <a:ext cx="10637215" cy="914400"/>
+            <a:off x="777240" y="5650992"/>
+            <a:ext cx="10637215" cy="1097280"/>
           </a:xfrm>
           <a:prstGeom prst="rect">
             <a:avLst/>
@@ -10268,7 +10268,7 @@
                 </a:solidFill>
                 <a:latin typeface="IBM Plex Sans"/>
               </a:rPr>
-              <a:t> Relativity caps at 300,000 documents per index and 5,000 per extraction job; CoCounsel manages ~200 per run; Reveal states its search is “designed for precision, not recall”.</a:t>
+              <a:t> Relativity caps at 300,000 documents per index; Reveal states its search is “designed for precision, not recall”.</a:t>
             </a:r>
           </a:p>
           <a:p>
@@ -10277,23 +10277,23 @@
                 <a:spcPct val="128000"/>
               </a:lnSpc>
               <a:spcBef>
-                <a:spcPts val="800"/>
-              </a:spcBef>
-              <a:spcAft>
-                <a:spcPts val="0"/>
-              </a:spcAft>
-            </a:pPr>
-            <a:r>
-              <a:rPr sz="1400" b="0" i="0">
+                <a:spcPts val="700"/>
+              </a:spcBef>
+              <a:spcAft>
+                <a:spcPts val="0"/>
+              </a:spcAft>
+            </a:pPr>
+            <a:r>
+              <a:rPr sz="1350" b="0" i="0">
                 <a:solidFill>
                   <a:srgbClr val="F7F7F8"/>
                 </a:solidFill>
                 <a:latin typeface="IBM Plex Sans"/>
               </a:rPr>
-              <a:t>A straight LLM gives you a well-written opinion about the fraction of the evidence that fits in its context window. Loupe gives you a complete, permanent, cross-referenced model of all of it — where </a:t>
-            </a:r>
-            <a:r>
-              <a:rPr sz="1400" b="1" i="0">
+              <a:t>A straight LLM gives you a well-written opinion about the fraction of the evidence that fits in its context window. Loupe models all of it — and </a:t>
+            </a:r>
+            <a:r>
+              <a:rPr sz="1350" b="1" i="0">
                 <a:solidFill>
                   <a:srgbClr val="F7F7F8"/>
                 </a:solidFill>
@@ -10520,8 +10520,8 @@
         </p:nvSpPr>
         <p:spPr>
           <a:xfrm>
-            <a:off x="777240" y="2670048"/>
-            <a:ext cx="3520440" cy="2606040"/>
+            <a:off x="777240" y="2615184"/>
+            <a:ext cx="3520440" cy="2706624"/>
           </a:xfrm>
           <a:prstGeom prst="rect">
             <a:avLst/>
@@ -10566,8 +10566,8 @@
         </p:nvSpPr>
         <p:spPr>
           <a:xfrm>
-            <a:off x="941832" y="2798064"/>
-            <a:ext cx="3191256" cy="2377440"/>
+            <a:off x="941832" y="2734056"/>
+            <a:ext cx="3191256" cy="2514600"/>
           </a:xfrm>
           <a:prstGeom prst="rect">
             <a:avLst/>
@@ -10629,20 +10629,20 @@
                 <a:spcPct val="128000"/>
               </a:lnSpc>
               <a:spcBef>
-                <a:spcPts val="800"/>
-              </a:spcBef>
-              <a:spcAft>
-                <a:spcPts val="0"/>
-              </a:spcAft>
-            </a:pPr>
-            <a:r>
-              <a:rPr sz="1150" b="0" i="0">
+                <a:spcPts val="700"/>
+              </a:spcBef>
+              <a:spcAft>
+                <a:spcPts val="0"/>
+              </a:spcAft>
+            </a:pPr>
+            <a:r>
+              <a:rPr sz="1100" b="0" i="0">
                 <a:solidFill>
                   <a:srgbClr val="9A9DA5"/>
                 </a:solidFill>
                 <a:latin typeface="IBM Plex Sans"/>
               </a:rPr>
-              <a:t>Real structure, real graphs, and they own the extraction. Pathfinder is marketed solely to law enforcement and intelligence; GrayKey is not sold to the private sector at all. What a defence practice can buy is examiner tooling — five kinds of device, no kinds of document.</a:t>
+              <a:t>They own the extraction and build real graphs. Pathfinder is sold only to law enforcement and intelligence; GrayKey not to the private sector at all. What a practice can buy is examiner tooling — five kinds of device, no kinds of document.</a:t>
             </a:r>
           </a:p>
         </p:txBody>
@@ -10655,8 +10655,8 @@
         </p:nvSpPr>
         <p:spPr>
           <a:xfrm>
-            <a:off x="4480560" y="2670048"/>
-            <a:ext cx="3520440" cy="2606040"/>
+            <a:off x="4480560" y="2615184"/>
+            <a:ext cx="3520440" cy="2706624"/>
           </a:xfrm>
           <a:prstGeom prst="rect">
             <a:avLst/>
@@ -10701,8 +10701,8 @@
         </p:nvSpPr>
         <p:spPr>
           <a:xfrm>
-            <a:off x="4645152" y="2798064"/>
-            <a:ext cx="3191256" cy="2377440"/>
+            <a:off x="4645152" y="2734056"/>
+            <a:ext cx="3191256" cy="2514600"/>
           </a:xfrm>
           <a:prstGeom prst="rect">
             <a:avLst/>
@@ -10764,14 +10764,14 @@
                 <a:spcPct val="128000"/>
               </a:lnSpc>
               <a:spcBef>
-                <a:spcPts val="800"/>
-              </a:spcBef>
-              <a:spcAft>
-                <a:spcPts val="0"/>
-              </a:spcAft>
-            </a:pPr>
-            <a:r>
-              <a:rPr sz="1150" b="0" i="0">
+                <a:spcPts val="700"/>
+              </a:spcBef>
+              <a:spcAft>
+                <a:spcPts val="0"/>
+              </a:spcAft>
+            </a:pPr>
+            <a:r>
+              <a:rPr sz="1100" b="0" i="0">
                 <a:solidFill>
                   <a:srgbClr val="9A9DA5"/>
                 </a:solidFill>
@@ -10790,8 +10790,8 @@
         </p:nvSpPr>
         <p:spPr>
           <a:xfrm>
-            <a:off x="8183880" y="2670048"/>
-            <a:ext cx="3520440" cy="2606040"/>
+            <a:off x="8183880" y="2615184"/>
+            <a:ext cx="3520440" cy="2706624"/>
           </a:xfrm>
           <a:prstGeom prst="rect">
             <a:avLst/>
@@ -10836,8 +10836,8 @@
         </p:nvSpPr>
         <p:spPr>
           <a:xfrm>
-            <a:off x="8348472" y="2798064"/>
-            <a:ext cx="3191256" cy="2377440"/>
+            <a:off x="8348472" y="2734056"/>
+            <a:ext cx="3191256" cy="2514600"/>
           </a:xfrm>
           <a:prstGeom prst="rect">
             <a:avLst/>
@@ -10899,14 +10899,14 @@
                 <a:spcPct val="128000"/>
               </a:lnSpc>
               <a:spcBef>
-                <a:spcPts val="800"/>
-              </a:spcBef>
-              <a:spcAft>
-                <a:spcPts val="0"/>
-              </a:spcAft>
-            </a:pPr>
-            <a:r>
-              <a:rPr sz="1150" b="0" i="0">
+                <a:spcPts val="700"/>
+              </a:spcBef>
+              <a:spcAft>
+                <a:spcPts val="0"/>
+              </a:spcAft>
+            </a:pPr>
+            <a:r>
+              <a:rPr sz="1100" b="0" i="0">
                 <a:solidFill>
                   <a:srgbClr val="9A9DA5"/>
                 </a:solidFill>
@@ -10915,7 +10915,7 @@
               <a:t>Four funded companies selling AI to criminal defence, $2.5–7.5M seed each, with the bar associations and the certifications. </a:t>
             </a:r>
             <a:r>
-              <a:rPr sz="1150" b="1" i="0">
+              <a:rPr sz="1100" b="1" i="0">
                 <a:solidFill>
                   <a:srgbClr val="9A9DA5"/>
                 </a:solidFill>
@@ -10924,13 +10924,22 @@
               <a:t>None of them has a graph.</a:t>
             </a:r>
             <a:r>
-              <a:rPr sz="1150" b="0" i="0">
+              <a:rPr sz="1100" b="0" i="0">
                 <a:solidFill>
                   <a:srgbClr val="9A9DA5"/>
                 </a:solidFill>
                 <a:latin typeface="IBM Plex Sans"/>
               </a:rPr>
-              <a:t> All four answer by retrieval.</a:t>
+              <a:t> All four answer by retrieval — which returns what looked relevant and cannot tell you what it missed. </a:t>
+            </a:r>
+            <a:r>
+              <a:rPr sz="1100" b="1" i="0">
+                <a:solidFill>
+                  <a:srgbClr val="9A9DA5"/>
+                </a:solidFill>
+                <a:latin typeface="IBM Plex Sans"/>
+              </a:rPr>
+              <a:t>On a defence matter the thing you never saw is the thing that loses the case.</a:t>
             </a:r>
           </a:p>
         </p:txBody>
@@ -10943,8 +10952,8 @@
         </p:nvSpPr>
         <p:spPr>
           <a:xfrm>
-            <a:off x="777240" y="5486400"/>
-            <a:ext cx="10637215" cy="1097280"/>
+            <a:off x="777240" y="5468112"/>
+            <a:ext cx="10637215" cy="1280160"/>
           </a:xfrm>
           <a:prstGeom prst="rect">
             <a:avLst/>
@@ -10969,22 +10978,22 @@
               </a:spcAft>
             </a:pPr>
             <a:r>
-              <a:rPr sz="1500" b="1" i="0">
+              <a:rPr sz="1450" b="1" i="0">
                 <a:solidFill>
                   <a:srgbClr val="F7F7F8"/>
                 </a:solidFill>
                 <a:latin typeface="IBM Plex Sans"/>
               </a:rPr>
-              <a:t>Not one of the forty-seven holds device data, financial records and documents in a single model.</a:t>
-            </a:r>
-            <a:r>
-              <a:rPr sz="1500" b="0" i="0">
+              <a:t>Not one of the forty-seven holds device data, financial records and documents in a single model</a:t>
+            </a:r>
+            <a:r>
+              <a:rPr sz="1450" b="0" i="0">
                 <a:solidFill>
                   <a:srgbClr val="F7F7F8"/>
                 </a:solidFill>
                 <a:latin typeface="IBM Plex Sans"/>
               </a:rPr>
-              <a:t> That is not an accident of scoring — modelling evidence and serving this buyer are different problems sold to different customers, and whoever solved one has no commercial reason to solve the other.</a:t>
+              <a:t> — and that is structural, not an accident of scoring. Modelling evidence and serving this buyer are different problems sold to different customers.</a:t>
             </a:r>
           </a:p>
           <a:p>
@@ -10993,14 +11002,14 @@
                 <a:spcPct val="128000"/>
               </a:lnSpc>
               <a:spcBef>
-                <a:spcPts val="900"/>
-              </a:spcBef>
-              <a:spcAft>
-                <a:spcPts val="0"/>
-              </a:spcAft>
-            </a:pPr>
-            <a:r>
-              <a:rPr sz="1300" b="1" i="0">
+                <a:spcPts val="1000"/>
+              </a:spcBef>
+              <a:spcAft>
+                <a:spcPts val="0"/>
+              </a:spcAft>
+            </a:pPr>
+            <a:r>
+              <a:rPr sz="1350" b="1" i="0">
                 <a:solidFill>
                   <a:srgbClr val="E33B4C"/>
                 </a:solidFill>

--- a/Loupe-NDRC-deck.pptx
+++ b/Loupe-NDRC-deck.pptx
@@ -11485,7 +11485,7 @@
                 </a:solidFill>
                 <a:latin typeface="IBM Plex Sans"/>
               </a:rPr>
-              <a:t>Why we know the gap is real</a:t>
+              <a:t>How many of them</a:t>
             </a:r>
           </a:p>
           <a:p>
@@ -11503,11 +11503,20 @@
             <a:r>
               <a:rPr sz="1200" b="1" i="0">
                 <a:solidFill>
-                  <a:srgbClr val="F7F7F8"/>
-                </a:solidFill>
-                <a:latin typeface="IBM Plex Sans"/>
-              </a:rPr>
-              <a:t>We tried a number of platforms on live federal casework before we built anything. None of them could work the case.</a:t>
+                  <a:srgbClr val="9A9DA5"/>
+                </a:solidFill>
+                <a:latin typeface="IBM Plex Sans"/>
+              </a:rPr>
+              <a:t>48,000–125,000 evidence-heavy private criminal-defence matters run in the US every year</a:t>
+            </a:r>
+            <a:r>
+              <a:rPr sz="1200" b="0" i="0">
+                <a:solidFill>
+                  <a:srgbClr val="9A9DA5"/>
+                </a:solidFill>
+                <a:latin typeface="IBM Plex Sans"/>
+              </a:rPr>
+              <a:t>, across a target population of one to five thousand practices. The UK adds ~80,200 open Crown Court cases, rising.</a:t>
             </a:r>
           </a:p>
         </p:txBody>
@@ -11520,8 +11529,8 @@
         </p:nvSpPr>
         <p:spPr>
           <a:xfrm>
-            <a:off x="777240" y="6172200"/>
-            <a:ext cx="10637215" cy="548640"/>
+            <a:off x="777240" y="5623560"/>
+            <a:ext cx="5806440" cy="1051560"/>
           </a:xfrm>
           <a:prstGeom prst="rect">
             <a:avLst/>
@@ -11546,13 +11555,35 @@
               </a:spcAft>
             </a:pPr>
             <a:r>
-              <a:rPr sz="1600" b="1" i="0">
+              <a:rPr sz="1500" b="1" i="0">
                 <a:solidFill>
                   <a:srgbClr val="E33B4C"/>
                 </a:solidFill>
                 <a:latin typeface="IBM Plex Sans"/>
               </a:rPr>
-              <a:t>We did not set out to build a platform. We went looking for one, tried several, and none could work the case.</a:t>
+              <a:t>This buyer receives evidence, cannot collect it, and cannot buy the analytics the other side runs on.</a:t>
+            </a:r>
+          </a:p>
+          <a:p>
+            <a:pPr algn="l">
+              <a:lnSpc>
+                <a:spcPct val="128000"/>
+              </a:lnSpc>
+              <a:spcBef>
+                <a:spcPts val="400"/>
+              </a:spcBef>
+              <a:spcAft>
+                <a:spcPts val="0"/>
+              </a:spcAft>
+            </a:pPr>
+            <a:r>
+              <a:rPr sz="1500" b="1" i="0">
+                <a:solidFill>
+                  <a:srgbClr val="E33B4C"/>
+                </a:solidFill>
+                <a:latin typeface="IBM Plex Sans"/>
+              </a:rPr>
+              <a:t>That is the whole opportunity.</a:t>
             </a:r>
           </a:p>
         </p:txBody>
@@ -13401,6 +13432,60 @@
                 <a:latin typeface="IBM Plex Sans"/>
               </a:rPr>
               <a:t>$2.41B forensics, $6.81B legal tech. Partner-led per jurisdiction.</a:t>
+            </a:r>
+          </a:p>
+        </p:txBody>
+      </p:sp>
+      <p:sp>
+        <p:nvSpPr>
+          <p:cNvPr id="14" name="TextBox 13"/>
+          <p:cNvSpPr txBox="1"/>
+          <p:nvPr/>
+        </p:nvSpPr>
+        <p:spPr>
+          <a:xfrm>
+            <a:off x="777240" y="5961888"/>
+            <a:ext cx="10637215" cy="822960"/>
+          </a:xfrm>
+          <a:prstGeom prst="rect">
+            <a:avLst/>
+          </a:prstGeom>
+          <a:noFill/>
+        </p:spPr>
+        <p:txBody>
+          <a:bodyPr wrap="square" lIns="0" rIns="0" tIns="0" bIns="0">
+            <a:spAutoFit/>
+          </a:bodyPr>
+          <a:lstStyle/>
+          <a:p>
+            <a:pPr algn="l">
+              <a:lnSpc>
+                <a:spcPct val="128000"/>
+              </a:lnSpc>
+              <a:spcBef>
+                <a:spcPts val="0"/>
+              </a:spcBef>
+              <a:spcAft>
+                <a:spcPts val="0"/>
+              </a:spcAft>
+            </a:pPr>
+            <a:r>
+              <a:rPr sz="1250" b="1" i="0">
+                <a:solidFill>
+                  <a:srgbClr val="F7F7F8"/>
+                </a:solidFill>
+                <a:latin typeface="IBM Plex Sans"/>
+              </a:rPr>
+              <a:t>Each stage is gated on one thing, which is what makes the sequence testable.</a:t>
+            </a:r>
+            <a:r>
+              <a:rPr sz="1250" b="0" i="0">
+                <a:solidFill>
+                  <a:srgbClr val="F7F7F8"/>
+                </a:solidFill>
+                <a:latin typeface="IBM Plex Sans"/>
+              </a:rPr>
+              <a:t> Stage 1: a price validated on real matters. Stage 2: the bar-association channel converting. Stage 3: the per-matter model rebuilt on UK vendor and Legal Aid Agency rates. Stage 4: partners, because every jurisdiction carries its own procedure and disclosure regime.</a:t>
             </a:r>
           </a:p>
         </p:txBody>

--- a/Loupe-NDRC-deck.pptx
+++ b/Loupe-NDRC-deck.pptx
@@ -10507,7 +10507,7 @@
                 </a:solidFill>
                 <a:latin typeface="IBM Plex Sans"/>
               </a:rPr>
-              <a:t>We assessed the category on thirty axes before we built. It splits into two halves that never meet — and the buyer sits in the gap between them.</a:t>
+              <a:t>We assessed the category across thirty capability axes. It splits into two halves that never meet — and the buyer sits in the gap between them.</a:t>
             </a:r>
           </a:p>
         </p:txBody>

--- a/Loupe-NDRC-deck.pptx
+++ b/Loupe-NDRC-deck.pptx
@@ -10912,7 +10912,7 @@
                 </a:solidFill>
                 <a:latin typeface="IBM Plex Sans"/>
               </a:rPr>
-              <a:t>Four funded companies selling AI to criminal defence, $2.5–7.5M seed each, with the bar associations and the certifications. </a:t>
+              <a:t>Four funded companies selling AI to criminal defence, $2.5M–$7.5M seed each, with the bar associations and the certifications. </a:t>
             </a:r>
             <a:r>
               <a:rPr sz="1100" b="1" i="0">
@@ -11702,8 +11702,8 @@
                 </a:solidFill>
                 <a:latin typeface="Space Grotesk"/>
               </a:rPr>
-              <a:t>Today a serious case costs $38–139k.
-With Loupe, $16–20k.</a:t>
+              <a:t>Today a serious case costs $38k–$139k.
+With Loupe, $16k–$20k.</a:t>
             </a:r>
           </a:p>
         </p:txBody>
@@ -11978,7 +11978,7 @@
                           </a:solidFill>
                           <a:latin typeface="IBM Plex Sans"/>
                         </a:rPr>
-                        <a:t>$3,650 – 8,450</a:t>
+                        <a:t>$3,650 – $8,450</a:t>
                       </a:r>
                     </a:p>
                   </a:txBody>
@@ -12011,7 +12011,7 @@
                           </a:solidFill>
                           <a:latin typeface="IBM Plex Sans"/>
                         </a:rPr>
-                        <a:t>$3,650 – 8,450</a:t>
+                        <a:t>$3,650 – $8,450</a:t>
                       </a:r>
                     </a:p>
                   </a:txBody>
@@ -12079,7 +12079,7 @@
                           </a:solidFill>
                           <a:latin typeface="IBM Plex Sans"/>
                         </a:rPr>
-                        <a:t>$34,200 – 130,575</a:t>
+                        <a:t>$34,200 – $130,575</a:t>
                       </a:r>
                     </a:p>
                   </a:txBody>
@@ -12281,7 +12281,7 @@
                           </a:solidFill>
                           <a:latin typeface="IBM Plex Sans"/>
                         </a:rPr>
-                        <a:t>$37,850 – 139,025</a:t>
+                        <a:t>$37,850 – $139,025</a:t>
                       </a:r>
                     </a:p>
                   </a:txBody>
@@ -12314,7 +12314,7 @@
                           </a:solidFill>
                           <a:latin typeface="IBM Plex Sans"/>
                         </a:rPr>
-                        <a:t>$15,650 – 20,450</a:t>
+                        <a:t>$15,650 – $20,450</a:t>
                       </a:r>
                     </a:p>
                   </a:txBody>
@@ -12470,7 +12470,7 @@
                 </a:solidFill>
                 <a:latin typeface="IBM Plex Sans"/>
               </a:rPr>
-              <a:t>Saved: $22,000–119,000 and 29–50 hours per case.</a:t>
+              <a:t>Saved: $22,000–$119,000 and 29–50 hours per case.</a:t>
             </a:r>
             <a:r>
               <a:rPr sz="1600" b="0" i="0">
@@ -12488,7 +12488,7 @@
                 </a:solidFill>
                 <a:latin typeface="IBM Plex Sans"/>
               </a:rPr>
-              <a:t>$0.6–1.4M and 550–1,150 hours returned.</a:t>
+              <a:t>$0.6M–$1.4M and 550–1,150 hours returned.</a:t>
             </a:r>
           </a:p>
           <a:p>

--- a/Loupe-NDRC-deck.pptx
+++ b/Loupe-NDRC-deck.pptx
@@ -529,12 +529,17 @@
           <a:p/>
           <a:p>
             <a:r>
-              <a:t>"Find the signal in everything" is the tagline. The line under it is the argument, and</a:t>
-            </a:r>
-          </a:p>
-          <a:p>
-            <a:r>
-              <a:t>it is the one sentence that frames every slide that follows.</a:t>
+              <a:t>The descriptor opens: a cold reader learns what Loupe IS in the first line, before any</a:t>
+            </a:r>
+          </a:p>
+          <a:p>
+            <a:r>
+              <a:t>argument is made. "Everyone can cite a document. Nobody can query a case." is the</a:t>
+            </a:r>
+          </a:p>
+          <a:p>
+            <a:r>
+              <a:t>argument, and it frames every slide that follows — it sits underneath as the subheader.</a:t>
             </a:r>
           </a:p>
           <a:p/>
@@ -551,6 +556,12 @@
           <a:p>
             <a:r>
               <a:t>anything else we could put there.</a:t>
+            </a:r>
+          </a:p>
+          <a:p/>
+          <a:p>
+            <a:r>
+              <a:t>"Find the signal in everything" is the tagline and closes the cover.</a:t>
             </a:r>
           </a:p>
           <a:p/>
@@ -949,6 +960,43 @@
           <a:p>
             <a:r>
               <a:t>build raise — the easier of the two to underwrite, and it happens to be true.</a:t>
+            </a:r>
+          </a:p>
+          <a:p/>
+          <a:p>
+            <a:r>
+              <a:t>THE SPOKEN CLOSE — for a live presentation, not for the PDF.</a:t>
+            </a:r>
+          </a:p>
+          <a:p>
+            <a:r>
+              <a:t>The slide used to end on "we are not asking anyone to fund the invention of a</a:t>
+            </a:r>
+          </a:p>
+          <a:p>
+            <a:r>
+              <a:t>product; we are asking them to fund the distance between works and sold." It</a:t>
+            </a:r>
+          </a:p>
+          <a:p>
+            <a:r>
+              <a:t>was cut: it opens on a negative, and the metaphor needs a beat of explanation</a:t>
+            </a:r>
+          </a:p>
+          <a:p>
+            <a:r>
+              <a:t>that a cold reader will not give it. The headline already states the ask</a:t>
+            </a:r>
+          </a:p>
+          <a:p>
+            <a:r>
+              <a:t>positively. Say it aloud instead, if the room is right for it:</a:t>
+            </a:r>
+          </a:p>
+          <a:p/>
+          <a:p>
+            <a:r>
+              <a:t>  What we're asking you to fund is the distance between works and sold.</a:t>
             </a:r>
           </a:p>
           <a:p/>
@@ -5435,7 +5483,7 @@
         </p:blipFill>
         <p:spPr>
           <a:xfrm>
-            <a:off x="777240" y="2148840"/>
+            <a:off x="777240" y="1691640"/>
             <a:ext cx="3931920" cy="1425321"/>
           </a:xfrm>
           <a:prstGeom prst="rect">
@@ -5451,8 +5499,8 @@
         </p:nvSpPr>
         <p:spPr>
           <a:xfrm>
-            <a:off x="777240" y="3246120"/>
-            <a:ext cx="10637215" cy="2651760"/>
+            <a:off x="777240" y="3127248"/>
+            <a:ext cx="10637215" cy="2926080"/>
           </a:xfrm>
           <a:prstGeom prst="rect">
             <a:avLst/>
@@ -5477,13 +5525,14 @@
               </a:spcAft>
             </a:pPr>
             <a:r>
-              <a:rPr sz="2500" b="0" i="0">
-                <a:solidFill>
-                  <a:srgbClr val="E33B4C"/>
-                </a:solidFill>
-                <a:latin typeface="IBM Plex Sans"/>
-              </a:rPr>
-              <a:t>Find the signal in everything.</a:t>
+              <a:rPr sz="3000" b="1" i="0">
+                <a:solidFill>
+                  <a:srgbClr val="F7F7F8"/>
+                </a:solidFill>
+                <a:latin typeface="Space Grotesk"/>
+              </a:rPr>
+              <a:t>An investigation platform for
+fraud and criminal casework.</a:t>
             </a:r>
           </a:p>
           <a:p>
@@ -5492,6 +5541,28 @@
                 <a:spcPct val="128000"/>
               </a:lnSpc>
               <a:spcBef>
+                <a:spcPts val="1600"/>
+              </a:spcBef>
+              <a:spcAft>
+                <a:spcPts val="0"/>
+              </a:spcAft>
+            </a:pPr>
+            <a:r>
+              <a:rPr sz="2000" b="0" i="0">
+                <a:solidFill>
+                  <a:srgbClr val="BFC1C8"/>
+                </a:solidFill>
+                <a:latin typeface="IBM Plex Sans"/>
+              </a:rPr>
+              <a:t>Everyone can cite a document. Nobody can query a case.</a:t>
+            </a:r>
+          </a:p>
+          <a:p>
+            <a:pPr algn="l">
+              <a:lnSpc>
+                <a:spcPct val="128000"/>
+              </a:lnSpc>
+              <a:spcBef>
                 <a:spcPts val="2000"/>
               </a:spcBef>
               <a:spcAft>
@@ -5499,35 +5570,13 @@
               </a:spcAft>
             </a:pPr>
             <a:r>
-              <a:rPr sz="3000" b="1" i="0">
-                <a:solidFill>
-                  <a:srgbClr val="F7F7F8"/>
-                </a:solidFill>
-                <a:latin typeface="Space Grotesk"/>
-              </a:rPr>
-              <a:t>Everyone can cite a document. Nobody can query a case.</a:t>
-            </a:r>
-          </a:p>
-          <a:p>
-            <a:pPr algn="l">
-              <a:lnSpc>
-                <a:spcPct val="128000"/>
-              </a:lnSpc>
-              <a:spcBef>
-                <a:spcPts val="2000"/>
-              </a:spcBef>
-              <a:spcAft>
-                <a:spcPts val="0"/>
-              </a:spcAft>
-            </a:pPr>
-            <a:r>
               <a:rPr sz="1700" b="0" i="0">
                 <a:solidFill>
                   <a:srgbClr val="9A9DA5"/>
                 </a:solidFill>
                 <a:latin typeface="IBM Plex Sans"/>
               </a:rPr>
-              <a:t>An investigation platform for fraud and criminal casework — in production use on real federal matters.</a:t>
+              <a:t>In production use on real federal matters.</a:t>
             </a:r>
           </a:p>
           <a:p>
@@ -5598,6 +5647,51 @@
           </a:p>
         </p:txBody>
       </p:sp>
+      <p:sp>
+        <p:nvSpPr>
+          <p:cNvPr id="5" name="TextBox 4"/>
+          <p:cNvSpPr txBox="1"/>
+          <p:nvPr/>
+        </p:nvSpPr>
+        <p:spPr>
+          <a:xfrm>
+            <a:off x="777240" y="6199632"/>
+            <a:ext cx="10637215" cy="411480"/>
+          </a:xfrm>
+          <a:prstGeom prst="rect">
+            <a:avLst/>
+          </a:prstGeom>
+          <a:noFill/>
+        </p:spPr>
+        <p:txBody>
+          <a:bodyPr wrap="square" lIns="0" rIns="0" tIns="0" bIns="0">
+            <a:spAutoFit/>
+          </a:bodyPr>
+          <a:lstStyle/>
+          <a:p>
+            <a:pPr algn="l">
+              <a:lnSpc>
+                <a:spcPct val="128000"/>
+              </a:lnSpc>
+              <a:spcBef>
+                <a:spcPts val="0"/>
+              </a:spcBef>
+              <a:spcAft>
+                <a:spcPts val="0"/>
+              </a:spcAft>
+            </a:pPr>
+            <a:r>
+              <a:rPr sz="1500" b="0" i="0">
+                <a:solidFill>
+                  <a:srgbClr val="E33B4C"/>
+                </a:solidFill>
+                <a:latin typeface="IBM Plex Sans"/>
+              </a:rPr>
+              <a:t>Find the signal in everything.</a:t>
+            </a:r>
+          </a:p>
+        </p:txBody>
+      </p:sp>
     </p:spTree>
   </p:cSld>
   <p:clrMapOvr>
@@ -5712,7 +5806,7 @@
                 </a:solidFill>
                 <a:latin typeface="Space Grotesk"/>
               </a:rPr>
-              <a:t>We didn't research this market.
+              <a:t>We didn't just research this market.
 We worked in it — from both sides.</a:t>
             </a:r>
           </a:p>
@@ -7050,8 +7144,8 @@
         </p:nvSpPr>
         <p:spPr>
           <a:xfrm>
-            <a:off x="777240" y="3310128"/>
-            <a:ext cx="5806440" cy="2743200"/>
+            <a:off x="777240" y="3364992"/>
+            <a:ext cx="5806440" cy="3200400"/>
           </a:xfrm>
           <a:prstGeom prst="rect">
             <a:avLst/>
@@ -7076,7 +7170,7 @@
               </a:spcAft>
             </a:pPr>
             <a:r>
-              <a:rPr sz="1200" b="1" i="0">
+              <a:rPr sz="1300" b="1" i="0">
                 <a:solidFill>
                   <a:srgbClr val="E33B4C"/>
                 </a:solidFill>
@@ -7091,14 +7185,14 @@
                 <a:spcPct val="128000"/>
               </a:lnSpc>
               <a:spcBef>
-                <a:spcPts val="600"/>
-              </a:spcBef>
-              <a:spcAft>
-                <a:spcPts val="0"/>
-              </a:spcAft>
-            </a:pPr>
-            <a:r>
-              <a:rPr sz="1200" b="1">
+                <a:spcPts val="800"/>
+              </a:spcBef>
+              <a:spcAft>
+                <a:spcPts val="0"/>
+              </a:spcAft>
+            </a:pPr>
+            <a:r>
+              <a:rPr sz="1300" b="1">
                 <a:solidFill>
                   <a:srgbClr val="E33B4C"/>
                 </a:solidFill>
@@ -7107,7 +7201,7 @@
               <a:t>—   </a:t>
             </a:r>
             <a:r>
-              <a:rPr sz="1200" b="1" i="0">
+              <a:rPr sz="1300" b="1" i="0">
                 <a:solidFill>
                   <a:srgbClr val="F7F7F8"/>
                 </a:solidFill>
@@ -7116,7 +7210,7 @@
               <a:t>Two founders full-time</a:t>
             </a:r>
             <a:r>
-              <a:rPr sz="1200" b="0" i="0">
+              <a:rPr sz="1300" b="0" i="0">
                 <a:solidFill>
                   <a:srgbClr val="F7F7F8"/>
                 </a:solidFill>
@@ -7131,14 +7225,14 @@
                 <a:spcPct val="128000"/>
               </a:lnSpc>
               <a:spcBef>
-                <a:spcPts val="600"/>
-              </a:spcBef>
-              <a:spcAft>
-                <a:spcPts val="0"/>
-              </a:spcAft>
-            </a:pPr>
-            <a:r>
-              <a:rPr sz="1200" b="1">
+                <a:spcPts val="800"/>
+              </a:spcBef>
+              <a:spcAft>
+                <a:spcPts val="0"/>
+              </a:spcAft>
+            </a:pPr>
+            <a:r>
+              <a:rPr sz="1300" b="1">
                 <a:solidFill>
                   <a:srgbClr val="E33B4C"/>
                 </a:solidFill>
@@ -7147,7 +7241,7 @@
               <a:t>—   </a:t>
             </a:r>
             <a:r>
-              <a:rPr sz="1200" b="1" i="0">
+              <a:rPr sz="1300" b="1" i="0">
                 <a:solidFill>
                   <a:srgbClr val="F7F7F8"/>
                 </a:solidFill>
@@ -7156,7 +7250,7 @@
               <a:t>The security evidence a firm's counsel asks for</a:t>
             </a:r>
             <a:r>
-              <a:rPr sz="1200" b="0" i="0">
+              <a:rPr sz="1300" b="0" i="0">
                 <a:solidFill>
                   <a:srgbClr val="F7F7F8"/>
                 </a:solidFill>
@@ -7171,14 +7265,14 @@
                 <a:spcPct val="128000"/>
               </a:lnSpc>
               <a:spcBef>
-                <a:spcPts val="600"/>
-              </a:spcBef>
-              <a:spcAft>
-                <a:spcPts val="0"/>
-              </a:spcAft>
-            </a:pPr>
-            <a:r>
-              <a:rPr sz="1200" b="1">
+                <a:spcPts val="800"/>
+              </a:spcBef>
+              <a:spcAft>
+                <a:spcPts val="0"/>
+              </a:spcAft>
+            </a:pPr>
+            <a:r>
+              <a:rPr sz="1300" b="1">
                 <a:solidFill>
                   <a:srgbClr val="E33B4C"/>
                 </a:solidFill>
@@ -7187,7 +7281,7 @@
               <a:t>—   </a:t>
             </a:r>
             <a:r>
-              <a:rPr sz="1200" b="1" i="0">
+              <a:rPr sz="1300" b="1" i="0">
                 <a:solidFill>
                   <a:srgbClr val="F7F7F8"/>
                 </a:solidFill>
@@ -7196,7 +7290,7 @@
               <a:t>Single-tenant infrastructure</a:t>
             </a:r>
             <a:r>
-              <a:rPr sz="1200" b="0" i="0">
+              <a:rPr sz="1300" b="0" i="0">
                 <a:solidFill>
                   <a:srgbClr val="F7F7F8"/>
                 </a:solidFill>
@@ -7211,14 +7305,14 @@
                 <a:spcPct val="128000"/>
               </a:lnSpc>
               <a:spcBef>
-                <a:spcPts val="600"/>
-              </a:spcBef>
-              <a:spcAft>
-                <a:spcPts val="0"/>
-              </a:spcAft>
-            </a:pPr>
-            <a:r>
-              <a:rPr sz="1200" b="1">
+                <a:spcPts val="800"/>
+              </a:spcBef>
+              <a:spcAft>
+                <a:spcPts val="0"/>
+              </a:spcAft>
+            </a:pPr>
+            <a:r>
+              <a:rPr sz="1300" b="1">
                 <a:solidFill>
                   <a:srgbClr val="E33B4C"/>
                 </a:solidFill>
@@ -7227,7 +7321,7 @@
               <a:t>—   </a:t>
             </a:r>
             <a:r>
-              <a:rPr sz="1200" b="1" i="0">
+              <a:rPr sz="1300" b="1" i="0">
                 <a:solidFill>
                   <a:srgbClr val="F7F7F8"/>
                 </a:solidFill>
@@ -7236,7 +7330,7 @@
               <a:t>Processing and inference</a:t>
             </a:r>
             <a:r>
-              <a:rPr sz="1200" b="0" i="0">
+              <a:rPr sz="1300" b="0" i="0">
                 <a:solidFill>
                   <a:srgbClr val="F7F7F8"/>
                 </a:solidFill>
@@ -7256,7 +7350,7 @@
         <p:spPr>
           <a:xfrm>
             <a:off x="6995160" y="2212848"/>
-            <a:ext cx="4434840" cy="3840480"/>
+            <a:ext cx="4434840" cy="4297680"/>
           </a:xfrm>
           <a:prstGeom prst="rect">
             <a:avLst/>
@@ -7281,7 +7375,7 @@
               </a:spcAft>
             </a:pPr>
             <a:r>
-              <a:rPr sz="1200" b="1" i="0">
+              <a:rPr sz="1300" b="1" i="0">
                 <a:solidFill>
                   <a:srgbClr val="E33B4C"/>
                 </a:solidFill>
@@ -7296,14 +7390,14 @@
                 <a:spcPct val="128000"/>
               </a:lnSpc>
               <a:spcBef>
-                <a:spcPts val="700"/>
-              </a:spcBef>
-              <a:spcAft>
-                <a:spcPts val="0"/>
-              </a:spcAft>
-            </a:pPr>
-            <a:r>
-              <a:rPr sz="1200" b="1">
+                <a:spcPts val="1200"/>
+              </a:spcBef>
+              <a:spcAft>
+                <a:spcPts val="0"/>
+              </a:spcAft>
+            </a:pPr>
+            <a:r>
+              <a:rPr sz="1300" b="1">
                 <a:solidFill>
                   <a:srgbClr val="E33B4C"/>
                 </a:solidFill>
@@ -7312,7 +7406,7 @@
               <a:t>—   </a:t>
             </a:r>
             <a:r>
-              <a:rPr sz="1200" b="1" i="0">
+              <a:rPr sz="1300" b="1" i="0">
                 <a:solidFill>
                   <a:srgbClr val="F7F7F8"/>
                 </a:solidFill>
@@ -7321,7 +7415,7 @@
               <a:t>Go-to-market guidance.</a:t>
             </a:r>
             <a:r>
-              <a:rPr sz="1200" b="0" i="0">
+              <a:rPr sz="1300" b="0" i="0">
                 <a:solidFill>
                   <a:srgbClr val="F7F7F8"/>
                 </a:solidFill>
@@ -7336,14 +7430,14 @@
                 <a:spcPct val="128000"/>
               </a:lnSpc>
               <a:spcBef>
-                <a:spcPts val="700"/>
-              </a:spcBef>
-              <a:spcAft>
-                <a:spcPts val="0"/>
-              </a:spcAft>
-            </a:pPr>
-            <a:r>
-              <a:rPr sz="1200" b="1">
+                <a:spcPts val="1200"/>
+              </a:spcBef>
+              <a:spcAft>
+                <a:spcPts val="0"/>
+              </a:spcAft>
+            </a:pPr>
+            <a:r>
+              <a:rPr sz="1300" b="1">
                 <a:solidFill>
                   <a:srgbClr val="E33B4C"/>
                 </a:solidFill>
@@ -7352,7 +7446,7 @@
               <a:t>—   </a:t>
             </a:r>
             <a:r>
-              <a:rPr sz="1200" b="0" i="0">
+              <a:rPr sz="1300" b="0" i="0">
                 <a:solidFill>
                   <a:srgbClr val="F7F7F8"/>
                 </a:solidFill>
@@ -7367,14 +7461,14 @@
                 <a:spcPct val="128000"/>
               </a:lnSpc>
               <a:spcBef>
-                <a:spcPts val="700"/>
-              </a:spcBef>
-              <a:spcAft>
-                <a:spcPts val="0"/>
-              </a:spcAft>
-            </a:pPr>
-            <a:r>
-              <a:rPr sz="1200" b="1">
+                <a:spcPts val="1200"/>
+              </a:spcBef>
+              <a:spcAft>
+                <a:spcPts val="0"/>
+              </a:spcAft>
+            </a:pPr>
+            <a:r>
+              <a:rPr sz="1300" b="1">
                 <a:solidFill>
                   <a:srgbClr val="E33B4C"/>
                 </a:solidFill>
@@ -7383,7 +7477,7 @@
               <a:t>—   </a:t>
             </a:r>
             <a:r>
-              <a:rPr sz="1200" b="0" i="0">
+              <a:rPr sz="1300" b="0" i="0">
                 <a:solidFill>
                   <a:srgbClr val="F7F7F8"/>
                 </a:solidFill>
@@ -7398,14 +7492,14 @@
                 <a:spcPct val="128000"/>
               </a:lnSpc>
               <a:spcBef>
-                <a:spcPts val="700"/>
-              </a:spcBef>
-              <a:spcAft>
-                <a:spcPts val="0"/>
-              </a:spcAft>
-            </a:pPr>
-            <a:r>
-              <a:rPr sz="1200" b="1">
+                <a:spcPts val="1200"/>
+              </a:spcBef>
+              <a:spcAft>
+                <a:spcPts val="0"/>
+              </a:spcAft>
+            </a:pPr>
+            <a:r>
+              <a:rPr sz="1300" b="1">
                 <a:solidFill>
                   <a:srgbClr val="E33B4C"/>
                 </a:solidFill>
@@ -7414,85 +7508,13 @@
               <a:t>—   </a:t>
             </a:r>
             <a:r>
-              <a:rPr sz="1200" b="0" i="0">
+              <a:rPr sz="1300" b="0" i="0">
                 <a:solidFill>
                   <a:srgbClr val="F7F7F8"/>
                 </a:solidFill>
                 <a:latin typeface="IBM Plex Sans"/>
               </a:rPr>
               <a:t>Introductions into Irish and UK professional-services buyers — ACFE Ireland, Chartered Accountants Ireland forensic group, Law Society criminal law committee</a:t>
-            </a:r>
-          </a:p>
-        </p:txBody>
-      </p:sp>
-      <p:sp>
-        <p:nvSpPr>
-          <p:cNvPr id="8" name="TextBox 7"/>
-          <p:cNvSpPr txBox="1"/>
-          <p:nvPr/>
-        </p:nvSpPr>
-        <p:spPr>
-          <a:xfrm>
-            <a:off x="777240" y="6144768"/>
-            <a:ext cx="10637215" cy="658368"/>
-          </a:xfrm>
-          <a:prstGeom prst="rect">
-            <a:avLst/>
-          </a:prstGeom>
-          <a:noFill/>
-        </p:spPr>
-        <p:txBody>
-          <a:bodyPr wrap="square" lIns="0" rIns="0" tIns="0" bIns="0">
-            <a:spAutoFit/>
-          </a:bodyPr>
-          <a:lstStyle/>
-          <a:p>
-            <a:pPr algn="l">
-              <a:lnSpc>
-                <a:spcPct val="128000"/>
-              </a:lnSpc>
-              <a:spcBef>
-                <a:spcPts val="0"/>
-              </a:spcBef>
-              <a:spcAft>
-                <a:spcPts val="0"/>
-              </a:spcAft>
-            </a:pPr>
-            <a:r>
-              <a:rPr sz="1700" b="1" i="0">
-                <a:solidFill>
-                  <a:srgbClr val="E33B4C"/>
-                </a:solidFill>
-                <a:latin typeface="IBM Plex Sans"/>
-              </a:rPr>
-              <a:t>We are not asking anyone to fund the invention of a product. We are asking them to fund the distance between </a:t>
-            </a:r>
-            <a:r>
-              <a:rPr sz="1700" b="1" i="0">
-                <a:solidFill>
-                  <a:srgbClr val="E33B4C"/>
-                </a:solidFill>
-                <a:latin typeface="IBM Plex Sans"/>
-              </a:rPr>
-              <a:t>works</a:t>
-            </a:r>
-            <a:r>
-              <a:rPr sz="1700" b="1" i="0">
-                <a:solidFill>
-                  <a:srgbClr val="E33B4C"/>
-                </a:solidFill>
-                <a:latin typeface="IBM Plex Sans"/>
-              </a:rPr>
-              <a:t> and </a:t>
-            </a:r>
-            <a:r>
-              <a:rPr sz="1700" b="1" i="0">
-                <a:solidFill>
-                  <a:srgbClr val="E33B4C"/>
-                </a:solidFill>
-                <a:latin typeface="IBM Plex Sans"/>
-              </a:rPr>
-              <a:t>sold.</a:t>
             </a:r>
           </a:p>
         </p:txBody>
@@ -11702,7 +11724,7 @@
                 </a:solidFill>
                 <a:latin typeface="Space Grotesk"/>
               </a:rPr>
-              <a:t>Today a serious case costs $38k–$139k.
+              <a:t>Today an evidence-heavy case costs $38k–$139k.
 With Loupe, $16k–$20k.</a:t>
             </a:r>
           </a:p>
@@ -11792,7 +11814,7 @@
                 </a:solidFill>
                 <a:latin typeface="IBM Plex Sans"/>
               </a:rPr>
-              <a:t>Same case, same evidence, both columns. Ranges run from a two-phone fraud matter to a ten-phone federal case.</a:t>
+              <a:t>Same case, same evidence, both columns. Ranges run from a two-phone fraud matter to a ten-device federal case with a document production.</a:t>
             </a:r>
           </a:p>
         </p:txBody>
@@ -11844,7 +11866,7 @@
                           </a:solidFill>
                           <a:latin typeface="IBM Plex Sans"/>
                         </a:rPr>
-                        <a:t>Per serious case</a:t>
+                        <a:t>Per evidence-heavy case</a:t>
                       </a:r>
                     </a:p>
                   </a:txBody>
@@ -12479,7 +12501,7 @@
                 </a:solidFill>
                 <a:latin typeface="IBM Plex Sans"/>
               </a:rPr>
-              <a:t> Across a practice running fifteen to thirty serious matters a year, that is </a:t>
+              <a:t> Across a practice running fifteen to thirty evidence-heavy matters a year, that is </a:t>
             </a:r>
             <a:r>
               <a:rPr sz="1600" b="1" i="0">

--- a/Loupe-NDRC-deck.pptx
+++ b/Loupe-NDRC-deck.pptx
@@ -529,22 +529,43 @@
           <a:p/>
           <a:p>
             <a:r>
-              <a:t>The descriptor opens: a cold reader learns what Loupe IS in the first line, before any</a:t>
-            </a:r>
-          </a:p>
-          <a:p>
-            <a:r>
-              <a:t>argument is made. "Everyone can cite a document. Nobody can query a case." is the</a:t>
-            </a:r>
-          </a:p>
-          <a:p>
-            <a:r>
-              <a:t>argument, and it frames every slide that follows — it sits underneath as the subheader.</a:t>
+              <a:t>"Find the signal in everything" is the tagline and it sits under the wordmark, where a</a:t>
+            </a:r>
+          </a:p>
+          <a:p>
+            <a:r>
+              <a:t>tagline belongs.</a:t>
             </a:r>
           </a:p>
           <a:p/>
           <a:p>
             <a:r>
+              <a:t>The two display lines are one statement in two parts, and the order matters. The first</a:t>
+            </a:r>
+          </a:p>
+          <a:p>
+            <a:r>
+              <a:t>says what Loupe IS, so a reader who knows nothing has something to hold. The second is</a:t>
+            </a:r>
+          </a:p>
+          <a:p>
+            <a:r>
+              <a:t>the argument, and it frames every slide that follows — it is also the line the whole</a:t>
+            </a:r>
+          </a:p>
+          <a:p>
+            <a:r>
+              <a:t>competitive analysis is built on. Read the other way round, the argument arrives before</a:t>
+            </a:r>
+          </a:p>
+          <a:p>
+            <a:r>
+              <a:t>the reader knows what they are looking at.</a:t>
+            </a:r>
+          </a:p>
+          <a:p/>
+          <a:p>
+            <a:r>
               <a:t>"In production use on real federal matters" is on the cover deliberately. A cold reader</a:t>
             </a:r>
           </a:p>
@@ -556,12 +577,6 @@
           <a:p>
             <a:r>
               <a:t>anything else we could put there.</a:t>
-            </a:r>
-          </a:p>
-          <a:p/>
-          <a:p>
-            <a:r>
-              <a:t>"Find the signal in everything" is the tagline and closes the cover.</a:t>
             </a:r>
           </a:p>
           <a:p/>
@@ -5499,7 +5514,7 @@
         </p:nvSpPr>
         <p:spPr>
           <a:xfrm>
-            <a:off x="777240" y="3127248"/>
+            <a:off x="777240" y="3017520"/>
             <a:ext cx="10637215" cy="2926080"/>
           </a:xfrm>
           <a:prstGeom prst="rect">
@@ -5525,14 +5540,35 @@
               </a:spcAft>
             </a:pPr>
             <a:r>
-              <a:rPr sz="3000" b="1" i="0">
+              <a:rPr sz="2500" b="0" i="0">
+                <a:solidFill>
+                  <a:srgbClr val="E33B4C"/>
+                </a:solidFill>
+                <a:latin typeface="IBM Plex Sans"/>
+              </a:rPr>
+              <a:t>Find the signal in everything.</a:t>
+            </a:r>
+          </a:p>
+          <a:p>
+            <a:pPr algn="l">
+              <a:lnSpc>
+                <a:spcPct val="128000"/>
+              </a:lnSpc>
+              <a:spcBef>
+                <a:spcPts val="1800"/>
+              </a:spcBef>
+              <a:spcAft>
+                <a:spcPts val="0"/>
+              </a:spcAft>
+            </a:pPr>
+            <a:r>
+              <a:rPr sz="2700" b="1" i="0">
                 <a:solidFill>
                   <a:srgbClr val="F7F7F8"/>
                 </a:solidFill>
                 <a:latin typeface="Space Grotesk"/>
               </a:rPr>
-              <a:t>An investigation platform for
-fraud and criminal casework.</a:t>
+              <a:t>An investigation platform for evidence-heavy casework.</a:t>
             </a:r>
           </a:p>
           <a:p>
@@ -5541,18 +5577,18 @@
                 <a:spcPct val="128000"/>
               </a:lnSpc>
               <a:spcBef>
-                <a:spcPts val="1600"/>
-              </a:spcBef>
-              <a:spcAft>
-                <a:spcPts val="0"/>
-              </a:spcAft>
-            </a:pPr>
-            <a:r>
-              <a:rPr sz="2000" b="0" i="0">
-                <a:solidFill>
-                  <a:srgbClr val="BFC1C8"/>
-                </a:solidFill>
-                <a:latin typeface="IBM Plex Sans"/>
+                <a:spcPts val="800"/>
+              </a:spcBef>
+              <a:spcAft>
+                <a:spcPts val="0"/>
+              </a:spcAft>
+            </a:pPr>
+            <a:r>
+              <a:rPr sz="2700" b="1" i="0">
+                <a:solidFill>
+                  <a:srgbClr val="F7F7F8"/>
+                </a:solidFill>
+                <a:latin typeface="Space Grotesk"/>
               </a:rPr>
               <a:t>Everyone can cite a document. Nobody can query a case.</a:t>
             </a:r>
@@ -5644,51 +5680,6 @@
           <a:lstStyle/>
           <a:p>
             <a:pPr algn="ctr"/>
-          </a:p>
-        </p:txBody>
-      </p:sp>
-      <p:sp>
-        <p:nvSpPr>
-          <p:cNvPr id="5" name="TextBox 4"/>
-          <p:cNvSpPr txBox="1"/>
-          <p:nvPr/>
-        </p:nvSpPr>
-        <p:spPr>
-          <a:xfrm>
-            <a:off x="777240" y="6199632"/>
-            <a:ext cx="10637215" cy="411480"/>
-          </a:xfrm>
-          <a:prstGeom prst="rect">
-            <a:avLst/>
-          </a:prstGeom>
-          <a:noFill/>
-        </p:spPr>
-        <p:txBody>
-          <a:bodyPr wrap="square" lIns="0" rIns="0" tIns="0" bIns="0">
-            <a:spAutoFit/>
-          </a:bodyPr>
-          <a:lstStyle/>
-          <a:p>
-            <a:pPr algn="l">
-              <a:lnSpc>
-                <a:spcPct val="128000"/>
-              </a:lnSpc>
-              <a:spcBef>
-                <a:spcPts val="0"/>
-              </a:spcBef>
-              <a:spcAft>
-                <a:spcPts val="0"/>
-              </a:spcAft>
-            </a:pPr>
-            <a:r>
-              <a:rPr sz="1500" b="0" i="0">
-                <a:solidFill>
-                  <a:srgbClr val="E33B4C"/>
-                </a:solidFill>
-                <a:latin typeface="IBM Plex Sans"/>
-              </a:rPr>
-              <a:t>Find the signal in everything.</a:t>
-            </a:r>
           </a:p>
         </p:txBody>
       </p:sp>

--- a/Loupe-NDRC-deck.pptx
+++ b/Loupe-NDRC-deck.pptx
@@ -5577,14 +5577,14 @@
                 <a:spcPct val="128000"/>
               </a:lnSpc>
               <a:spcBef>
-                <a:spcPts val="800"/>
-              </a:spcBef>
-              <a:spcAft>
-                <a:spcPts val="0"/>
-              </a:spcAft>
-            </a:pPr>
-            <a:r>
-              <a:rPr sz="2700" b="1" i="0">
+                <a:spcPts val="1000"/>
+              </a:spcBef>
+              <a:spcAft>
+                <a:spcPts val="0"/>
+              </a:spcAft>
+            </a:pPr>
+            <a:r>
+              <a:rPr sz="2700" b="0" i="0">
                 <a:solidFill>
                   <a:srgbClr val="F7F7F8"/>
                 </a:solidFill>

--- a/Loupe-NDRC-deck.pptx
+++ b/Loupe-NDRC-deck.pptx
@@ -8043,7 +8043,7 @@
                 </a:solidFill>
                 <a:latin typeface="IBM Plex Sans"/>
               </a:rPr>
-              <a:t> Relativity's own processing documentation says call logs emerge “only as call log data in Excel format, not as individual records,” and that multi-device extractions are unsupported. Everlaw splits conversations every thousand messages; Reveal slices them into 24-hour blocks.</a:t>
+              <a:t> The document-review platforms say so in their own documentation: call logs export “only as call log data in Excel format, not as individual records”; multi-device extractions unsupported; conversations cut into fixed blocks.</a:t>
             </a:r>
           </a:p>
         </p:txBody>
@@ -8388,7 +8388,7 @@
                 </a:solidFill>
                 <a:latin typeface="IBM Plex Sans"/>
               </a:rPr>
-              <a:t> Relativity folded aiR into its base rate in November 2025; Everlaw bundled three AI features into core pricing the same month; DISCO announced agentic AI at no extra cost in February 2026. Everyone can cite a document. Nobody modelled the case.</a:t>
+              <a:t> In four months the major review platforms folded AI into base pricing at no extra cost. Everyone can cite a document. Nobody modelled the case.</a:t>
             </a:r>
           </a:p>
         </p:txBody>
@@ -10281,7 +10281,7 @@
                 </a:solidFill>
                 <a:latin typeface="IBM Plex Sans"/>
               </a:rPr>
-              <a:t> Relativity caps at 300,000 documents per index; Reveal states its search is “designed for precision, not recall”.</a:t>
+              <a:t> One caps at 300,000 documents per index; another states its search is “designed for precision, not recall”.</a:t>
             </a:r>
           </a:p>
           <a:p>
@@ -10633,7 +10633,7 @@
                 </a:solidFill>
                 <a:latin typeface="IBM Plex Mono"/>
               </a:rPr>
-              <a:t>Cellebrite · Magnet · Palantir · Pathfinder</a:t>
+              <a:t>Forensic &amp; intelligence platforms</a:t>
             </a:r>
           </a:p>
           <a:p>
@@ -10655,7 +10655,7 @@
                 </a:solidFill>
                 <a:latin typeface="IBM Plex Sans"/>
               </a:rPr>
-              <a:t>They own the extraction and build real graphs. Pathfinder is sold only to law enforcement and intelligence; GrayKey not to the private sector at all. What a practice can buy is examiner tooling — five kinds of device, no kinds of document.</a:t>
+              <a:t>They own the extraction and build real graphs. The analytical tiers are sold to law enforcement and intelligence only; the leading unlocking hardware is not available to the private sector at all. What a practice can buy is examiner tooling — five kinds of device, no kinds of document.</a:t>
             </a:r>
           </a:p>
         </p:txBody>
@@ -10768,7 +10768,7 @@
                 </a:solidFill>
                 <a:latin typeface="IBM Plex Mono"/>
               </a:rPr>
-              <a:t>Relativity · Everlaw · DISCO · Reveal · Harvey · CoCounsel</a:t>
+              <a:t>Document review &amp; legal AI</a:t>
             </a:r>
           </a:p>
           <a:p>
@@ -10903,7 +10903,7 @@
                 </a:solidFill>
                 <a:latin typeface="IBM Plex Mono"/>
               </a:rPr>
-              <a:t>TrialKit · Matey · JusticeText · Longeye</a:t>
+              <a:t>Defence-native AI startups</a:t>
             </a:r>
           </a:p>
           <a:p>
@@ -10925,7 +10925,7 @@
                 </a:solidFill>
                 <a:latin typeface="IBM Plex Sans"/>
               </a:rPr>
-              <a:t>Four funded companies selling AI to criminal defence, $2.5M–$7.5M seed each, with the bar associations and the certifications. </a:t>
+              <a:t>Four funded companies sell AI to criminal defence, $2.5M–$7.5M seed each, with the bar associations and the certifications. </a:t>
             </a:r>
             <a:r>
               <a:rPr sz="1100" b="1" i="0">
@@ -11237,7 +11237,7 @@
                 </a:solidFill>
                 <a:latin typeface="IBM Plex Sans"/>
               </a:rPr>
-              <a:t>Our CPO is our design partner. Development has been customer-led from the first commit — not a roadmap we invented and then validated, but a backlog generated by real federal casework. Cases have been worked to completion in the platform, and </a:t>
+              <a:t>Our CPO is our design partner. Development has been customer-led from the first commit — a backlog generated by real federal casework. Cases have been worked to completion in the platform, and </a:t>
             </a:r>
             <a:r>
               <a:rPr sz="1300" b="1" i="0">
@@ -11290,7 +11290,7 @@
                 </a:solidFill>
                 <a:latin typeface="IBM Plex Sans"/>
               </a:rPr>
-              <a:t>Enterprise investigative-intelligence platforms are sold with configuration and support attached — the right model for agencies and large institutions, who arrive with budget, procurement and implementation resource.</a:t>
+              <a:t>Enterprise platforms are sold with configuration and support attached — the right model for agencies and large institutions, who arrive with budget and implementation resource.</a:t>
             </a:r>
           </a:p>
           <a:p>
@@ -11312,7 +11312,7 @@
                 </a:solidFill>
                 <a:latin typeface="IBM Plex Sans"/>
               </a:rPr>
-              <a:t>The tier below has the same casework complexity and the same evidence volumes — and none of that budget. </a:t>
+              <a:t>The tier below has the same casework complexity and the same evidence volumes, and none of that budget. </a:t>
             </a:r>
             <a:r>
               <a:rPr sz="1200" b="1" i="0">
@@ -11410,7 +11410,7 @@
                 </a:solidFill>
                 <a:latin typeface="IBM Plex Sans"/>
               </a:rPr>
-              <a:t>Expansion</a:t>
+              <a:t>Second market — corporate intelligence</a:t>
             </a:r>
           </a:p>
           <a:p>
@@ -11432,7 +11432,25 @@
                 </a:solidFill>
                 <a:latin typeface="IBM Plex Sans"/>
               </a:rPr>
-              <a:t>Financial-crime &amp; fraud units · law enforcement &amp; prosecutors · law firms &amp; disputes teams · corporate investigations &amp; compliance.</a:t>
+              <a:t>Investigative consultancies: fraud, corruption, asset tracing. Their process is scope, collect, corroborate, analyse, report — </a:t>
+            </a:r>
+            <a:r>
+              <a:rPr sz="1200" b="1" i="0">
+                <a:solidFill>
+                  <a:srgbClr val="9A9DA5"/>
+                </a:solidFill>
+                <a:latin typeface="IBM Plex Sans"/>
+              </a:rPr>
+              <a:t>and the last three stages are junior-analyst hours in Excel.</a:t>
+            </a:r>
+            <a:r>
+              <a:rPr sz="1200" b="0" i="0">
+                <a:solidFill>
+                  <a:srgbClr val="9A9DA5"/>
+                </a:solidFill>
+                <a:latin typeface="IBM Plex Sans"/>
+              </a:rPr>
+              <a:t> Second-best fit of the seventeen buyers we scored.</a:t>
             </a:r>
           </a:p>
           <a:p>
@@ -11454,7 +11472,7 @@
                 </a:solidFill>
                 <a:latin typeface="IBM Plex Sans"/>
               </a:rPr>
-              <a:t>Channel</a:t>
+              <a:t>The spend is already there</a:t>
             </a:r>
           </a:p>
           <a:p>
@@ -11476,7 +11494,61 @@
                 </a:solidFill>
                 <a:latin typeface="IBM Plex Sans"/>
               </a:rPr>
-              <a:t>This buyer is organised and reachable. ACFE has ~95k members and ~60k CFEs worldwide, with chapters, conferences and directories — including an Ireland chapter since 2016. The defence bar is the same shape: a competitor reached national presence through a national association and one state bar.</a:t>
+              <a:t>Junior analysts bill </a:t>
+            </a:r>
+            <a:r>
+              <a:rPr sz="1200" b="1" i="0">
+                <a:solidFill>
+                  <a:srgbClr val="9A9DA5"/>
+                </a:solidFill>
+                <a:latin typeface="IBM Plex Sans"/>
+              </a:rPr>
+              <a:t>$300–$500/hour</a:t>
+            </a:r>
+            <a:r>
+              <a:rPr sz="1200" b="0" i="0">
+                <a:solidFill>
+                  <a:srgbClr val="9A9DA5"/>
+                </a:solidFill>
+                <a:latin typeface="IBM Plex Sans"/>
+              </a:rPr>
+              <a:t>; a six-week team of four bills </a:t>
+            </a:r>
+            <a:r>
+              <a:rPr sz="1200" b="1" i="0">
+                <a:solidFill>
+                  <a:srgbClr val="9A9DA5"/>
+                </a:solidFill>
+                <a:latin typeface="IBM Plex Sans"/>
+              </a:rPr>
+              <a:t>$150k–$250k</a:t>
+            </a:r>
+            <a:r>
+              <a:rPr sz="1200" b="0" i="0">
+                <a:solidFill>
+                  <a:srgbClr val="9A9DA5"/>
+                </a:solidFill>
+                <a:latin typeface="IBM Plex Sans"/>
+              </a:rPr>
+              <a:t>. Corporate investigation services: </a:t>
+            </a:r>
+            <a:r>
+              <a:rPr sz="1200" b="1" i="0">
+                <a:solidFill>
+                  <a:srgbClr val="9A9DA5"/>
+                </a:solidFill>
+                <a:latin typeface="IBM Plex Sans"/>
+              </a:rPr>
+              <a:t>$4.8B today, $9.7B by 2035.</a:t>
+            </a:r>
+            <a:r>
+              <a:rPr sz="1200" b="0" i="0">
+                <a:solidFill>
+                  <a:srgbClr val="9A9DA5"/>
+                </a:solidFill>
+                <a:latin typeface="IBM Plex Sans"/>
+              </a:rPr>
+              <a:t> Not new budget — hours already billed.</a:t>
             </a:r>
           </a:p>
           <a:p>
@@ -11498,7 +11570,7 @@
                 </a:solidFill>
                 <a:latin typeface="IBM Plex Sans"/>
               </a:rPr>
-              <a:t>How many of them</a:t>
+              <a:t>How many, and how to reach them</a:t>
             </a:r>
           </a:p>
           <a:p>
@@ -11520,7 +11592,7 @@
                 </a:solidFill>
                 <a:latin typeface="IBM Plex Sans"/>
               </a:rPr>
-              <a:t>48,000–125,000 evidence-heavy private criminal-defence matters run in the US every year</a:t>
+              <a:t>48,000–125,000 evidence-heavy US criminal-defence matters a year</a:t>
             </a:r>
             <a:r>
               <a:rPr sz="1200" b="0" i="0">
@@ -11529,7 +11601,7 @@
                 </a:solidFill>
                 <a:latin typeface="IBM Plex Sans"/>
               </a:rPr>
-              <a:t>, across a target population of one to five thousand practices. The UK adds ~80,200 open Crown Court cases, rising.</a:t>
+              <a:t>, across one to five thousand practices; the UK adds ~80,200 open Crown Court cases. Both buyers are organised — ACFE alone has ~95k members.</a:t>
             </a:r>
           </a:p>
         </p:txBody>

--- a/Loupe-NDRC-deck.pptx
+++ b/Loupe-NDRC-deck.pptx
@@ -2070,6 +2070,77 @@
           <a:p>
             <a:r>
               <a:t>that. A fifteen-person practice cannot buy the engineer — that tier is what we serve.</a:t>
+            </a:r>
+          </a:p>
+          <a:p/>
+          <a:p>
+            <a:r>
+              <a:t>If asked about OSINT / link-analysis tools — Maltego is the name most likely to come</a:t>
+            </a:r>
+          </a:p>
+          <a:p>
+            <a:r>
+              <a:t>up, and the answer is complement, not competitor. Same register as Siren.</a:t>
+            </a:r>
+          </a:p>
+          <a:p>
+            <a:r>
+              <a:t>The engagement has a front (scope, source, collect) and a back (corroborate,</a:t>
+            </a:r>
+          </a:p>
+          <a:p>
+            <a:r>
+              <a:t>analyse, report). On our own scoring: they are 56/70 at the front and 29/120 at the</a:t>
+            </a:r>
+          </a:p>
+          <a:p>
+            <a:r>
+              <a:t>back. We are 20/70 and 103/120. Near-perfect mirror images of each other.</a:t>
+            </a:r>
+          </a:p>
+          <a:p>
+            <a:r>
+              <a:t>They do not ingest a discovery corpus or a phone extraction at all — "evidence" in</a:t>
+            </a:r>
+          </a:p>
+          <a:p>
+            <a:r>
+              <a:t>that product means public web material captured and preserved.</a:t>
+            </a:r>
+          </a:p>
+          <a:p>
+            <a:r>
+              <a:t>The number to have ready: the three platforms that LEAD open-source reach place</a:t>
+            </a:r>
+          </a:p>
+          <a:p>
+            <a:r>
+              <a:t>13th, 24th and 38th of 47 for this buyer. Owning that axis at maximum score does</a:t>
+            </a:r>
+          </a:p>
+          <a:p>
+            <a:r>
+              <a:t>not win the market — which is why it is a gap we fill, not a position we attack.</a:t>
+            </a:r>
+          </a:p>
+          <a:p>
+            <a:r>
+              <a:t>Then land the roadmap point: closing it is an integration, not a data business. We</a:t>
+            </a:r>
+          </a:p>
+          <a:p>
+            <a:r>
+              <a:t>do not need to replicate the corporate-registry vendors, we need to pull from them,</a:t>
+            </a:r>
+          </a:p>
+          <a:p>
+            <a:r>
+              <a:t>and the target score is 8 of 10 — past that it buys nothing.</a:t>
+            </a:r>
+          </a:p>
+          <a:p>
+            <a:r>
+              <a:t>Do NOT say we beat them as a tool. We do not, and anyone who has used both knows it.</a:t>
             </a:r>
           </a:p>
         </p:txBody>
